--- a/lezioni/L02_conosci_il_dataset/slide.pptx
+++ b/lezioni/L02_conosci_il_dataset/slide.pptx
@@ -14,14 +14,9 @@
     <p:sldId id="262" r:id="rId8"/>
     <p:sldId id="263" r:id="rId9"/>
     <p:sldId id="264" r:id="rId10"/>
-    <p:sldId id="265" r:id="rId11"/>
-    <p:sldId id="266" r:id="rId12"/>
-    <p:sldId id="267" r:id="rId13"/>
-    <p:sldId id="268" r:id="rId14"/>
-    <p:sldId id="269" r:id="rId15"/>
   </p:sldIdLst>
   <p:notesMasterIdLst>
-    <p:notesMasterId r:id="rId16"/>
+    <p:notesMasterId r:id="rId11"/>
   </p:notesMasterIdLst>
   <p:sldSz cx="12192000" cy="6858000"/>
   <p:notesSz cx="6858000" cy="12192000"/>
@@ -120,13 +115,13 @@
   <p:extLst>
     <p:ext uri="{521415D9-36F7-43E2-AB2F-B90AF26B5E84}">
       <p14:sectionLst xmlns:p14="http://schemas.microsoft.com/office/powerpoint/2010/main">
-        <p14:section name="Apertura" id="{b5508afa-f2ac-3017-975f-2666b4835290}">
+        <p14:section name="Apertura" id="{e481c710-09b6-6f4a-64ed-48213ce8b089}">
           <p14:sldIdLst>
             <p14:sldId id="256"/>
             <p14:sldId id="257"/>
           </p14:sldIdLst>
         </p14:section>
-        <p14:section name="Spiegazione" id="{4e6350d6-efc8-cd7f-ebc4-5b00c8d00f92}">
+        <p14:section name="Spiegazione" id="{2ce6630a-8d19-12a8-ef99-912cfcced91e}">
           <p14:sldIdLst>
             <p14:sldId id="258"/>
             <p14:sldId id="259"/>
@@ -135,23 +130,14 @@
             <p14:sldId id="262"/>
           </p14:sldIdLst>
         </p14:section>
-        <p14:section name="Task" id="{3404b5d1-4130-877d-3f23-6fb3358bc484}">
+        <p14:section name="Task" id="{8669d9c9-5b31-4286-24f2-4c78f113f568}">
           <p14:sldIdLst>
             <p14:sldId id="263"/>
           </p14:sldIdLst>
         </p14:section>
-        <p14:section name="Debrief" id="{17dfb8e3-993a-1850-ed5a-2b8178c0f9e6}">
+        <p14:section name="Chiusura" id="{16b2a64c-6d51-be50-450d-9509c9cef3d1}">
           <p14:sldIdLst>
             <p14:sldId id="264"/>
-            <p14:sldId id="265"/>
-            <p14:sldId id="266"/>
-            <p14:sldId id="267"/>
-            <p14:sldId id="268"/>
-          </p14:sldIdLst>
-        </p14:section>
-        <p14:section name="Chiusura" id="{441a25d8-3da6-7045-5679-0cd8573b56d5}">
-          <p14:sldIdLst>
-            <p14:sldId id="269"/>
           </p14:sldIdLst>
         </p14:section>
       </p14:sectionLst>
@@ -600,446 +586,6 @@
 </p:notes>
 </file>
 
-<file path=ppt/notesSlides/notesSlide10.xml><?xml version="1.0" encoding="utf-8"?>
-<p:notes xmlns:a="http://schemas.openxmlformats.org/drawingml/2006/main" xmlns:r="http://schemas.openxmlformats.org/officeDocument/2006/relationships" xmlns:p="http://schemas.openxmlformats.org/presentationml/2006/main">
-  <p:cSld>
-    <p:spTree>
-      <p:nvGrpSpPr>
-        <p:cNvPr id="1" name=""/>
-        <p:cNvGrpSpPr/>
-        <p:nvPr/>
-      </p:nvGrpSpPr>
-      <p:grpSpPr>
-        <a:xfrm>
-          <a:off x="0" y="0"/>
-          <a:ext cx="0" cy="0"/>
-          <a:chOff x="0" y="0"/>
-          <a:chExt cx="0" cy="0"/>
-        </a:xfrm>
-      </p:grpSpPr>
-      <p:sp>
-        <p:nvSpPr>
-          <p:cNvPr id="2" name="Slide Image Placeholder 1"/>
-          <p:cNvSpPr>
-            <a:spLocks noGrp="1" noRot="1" noChangeAspect="1"/>
-          </p:cNvSpPr>
-          <p:nvPr>
-            <p:ph type="sldImg"/>
-          </p:nvPr>
-        </p:nvSpPr>
-        <p:spPr/>
-      </p:sp>
-      <p:sp>
-        <p:nvSpPr>
-          <p:cNvPr id="3" name="Notes Placeholder 2"/>
-          <p:cNvSpPr>
-            <a:spLocks noGrp="1"/>
-          </p:cNvSpPr>
-          <p:nvPr>
-            <p:ph type="body" idx="1"/>
-          </p:nvPr>
-        </p:nvSpPr>
-        <p:spPr/>
-        <p:txBody>
-          <a:bodyPr/>
-          <a:lstStyle/>
-          <a:p>
-            <a:r>
-              <a:rPr lang="en-US" dirty="0"/>
-              <a:t>Il messaggio: il primo strumento di verifica è il buon senso. Sapere quanti dati ti aspetti.</a:t>
-            </a:r>
-            <a:endParaRPr lang="en-US" dirty="0"/>
-          </a:p>
-        </p:txBody>
-      </p:sp>
-      <p:sp>
-        <p:nvSpPr>
-          <p:cNvPr id="4" name="Slide Number Placeholder 3"/>
-          <p:cNvSpPr>
-            <a:spLocks noGrp="1"/>
-          </p:cNvSpPr>
-          <p:nvPr>
-            <p:ph type="sldNum" sz="quarter" idx="10"/>
-          </p:nvPr>
-        </p:nvSpPr>
-        <p:spPr/>
-        <p:txBody>
-          <a:bodyPr/>
-          <a:lstStyle/>
-          <a:p>
-            <a:fld id="{F7021451-1387-4CA6-816F-3879F97B5CBC}" type="slidenum">
-              <a:rPr lang="en-US"/>
-              <a:t>10</a:t>
-            </a:fld>
-            <a:endParaRPr lang="en-US"/>
-          </a:p>
-        </p:txBody>
-      </p:sp>
-    </p:spTree>
-    <p:extLst>
-      <p:ext uri="{BB962C8B-B14F-4D97-AF65-F5344CB8AC3E}">
-        <p14:creationId xmlns:p14="http://schemas.microsoft.com/office/powerpoint/2010/main" val="1024086991"/>
-      </p:ext>
-    </p:extLst>
-  </p:cSld>
-  <p:clrMapOvr>
-    <a:masterClrMapping/>
-  </p:clrMapOvr>
-</p:notes>
-</file>
-
-<file path=ppt/notesSlides/notesSlide11.xml><?xml version="1.0" encoding="utf-8"?>
-<p:notes xmlns:a="http://schemas.openxmlformats.org/drawingml/2006/main" xmlns:r="http://schemas.openxmlformats.org/officeDocument/2006/relationships" xmlns:p="http://schemas.openxmlformats.org/presentationml/2006/main">
-  <p:cSld>
-    <p:spTree>
-      <p:nvGrpSpPr>
-        <p:cNvPr id="1" name=""/>
-        <p:cNvGrpSpPr/>
-        <p:nvPr/>
-      </p:nvGrpSpPr>
-      <p:grpSpPr>
-        <a:xfrm>
-          <a:off x="0" y="0"/>
-          <a:ext cx="0" cy="0"/>
-          <a:chOff x="0" y="0"/>
-          <a:chExt cx="0" cy="0"/>
-        </a:xfrm>
-      </p:grpSpPr>
-      <p:sp>
-        <p:nvSpPr>
-          <p:cNvPr id="2" name="Slide Image Placeholder 1"/>
-          <p:cNvSpPr>
-            <a:spLocks noGrp="1" noRot="1" noChangeAspect="1"/>
-          </p:cNvSpPr>
-          <p:nvPr>
-            <p:ph type="sldImg"/>
-          </p:nvPr>
-        </p:nvSpPr>
-        <p:spPr/>
-      </p:sp>
-      <p:sp>
-        <p:nvSpPr>
-          <p:cNvPr id="3" name="Notes Placeholder 2"/>
-          <p:cNvSpPr>
-            <a:spLocks noGrp="1"/>
-          </p:cNvSpPr>
-          <p:nvPr>
-            <p:ph type="body" idx="1"/>
-          </p:nvPr>
-        </p:nvSpPr>
-        <p:spPr/>
-        <p:txBody>
-          <a:bodyPr/>
-          <a:lstStyle/>
-          <a:p>
-            <a:r>
-              <a:rPr lang="en-US" dirty="0"/>
-              <a:t>Il messaggio di errore esatto cambia con la versione di pandas: in Colab può dire 'Could not convert ... to numeric'. Mostrare quello che hanno ottenuto loro.</a:t>
-            </a:r>
-            <a:endParaRPr lang="en-US" dirty="0"/>
-          </a:p>
-        </p:txBody>
-      </p:sp>
-      <p:sp>
-        <p:nvSpPr>
-          <p:cNvPr id="4" name="Slide Number Placeholder 3"/>
-          <p:cNvSpPr>
-            <a:spLocks noGrp="1"/>
-          </p:cNvSpPr>
-          <p:nvPr>
-            <p:ph type="sldNum" sz="quarter" idx="10"/>
-          </p:nvPr>
-        </p:nvSpPr>
-        <p:spPr/>
-        <p:txBody>
-          <a:bodyPr/>
-          <a:lstStyle/>
-          <a:p>
-            <a:fld id="{F7021451-1387-4CA6-816F-3879F97B5CBC}" type="slidenum">
-              <a:rPr lang="en-US"/>
-              <a:t>11</a:t>
-            </a:fld>
-            <a:endParaRPr lang="en-US"/>
-          </a:p>
-        </p:txBody>
-      </p:sp>
-    </p:spTree>
-    <p:extLst>
-      <p:ext uri="{BB962C8B-B14F-4D97-AF65-F5344CB8AC3E}">
-        <p14:creationId xmlns:p14="http://schemas.microsoft.com/office/powerpoint/2010/main" val="1024086991"/>
-      </p:ext>
-    </p:extLst>
-  </p:cSld>
-  <p:clrMapOvr>
-    <a:masterClrMapping/>
-  </p:clrMapOvr>
-</p:notes>
-</file>
-
-<file path=ppt/notesSlides/notesSlide12.xml><?xml version="1.0" encoding="utf-8"?>
-<p:notes xmlns:a="http://schemas.openxmlformats.org/drawingml/2006/main" xmlns:r="http://schemas.openxmlformats.org/officeDocument/2006/relationships" xmlns:p="http://schemas.openxmlformats.org/presentationml/2006/main">
-  <p:cSld>
-    <p:spTree>
-      <p:nvGrpSpPr>
-        <p:cNvPr id="1" name=""/>
-        <p:cNvGrpSpPr/>
-        <p:nvPr/>
-      </p:nvGrpSpPr>
-      <p:grpSpPr>
-        <a:xfrm>
-          <a:off x="0" y="0"/>
-          <a:ext cx="0" cy="0"/>
-          <a:chOff x="0" y="0"/>
-          <a:chExt cx="0" cy="0"/>
-        </a:xfrm>
-      </p:grpSpPr>
-      <p:sp>
-        <p:nvSpPr>
-          <p:cNvPr id="2" name="Slide Image Placeholder 1"/>
-          <p:cNvSpPr>
-            <a:spLocks noGrp="1" noRot="1" noChangeAspect="1"/>
-          </p:cNvSpPr>
-          <p:nvPr>
-            <p:ph type="sldImg"/>
-          </p:nvPr>
-        </p:nvSpPr>
-        <p:spPr/>
-      </p:sp>
-      <p:sp>
-        <p:nvSpPr>
-          <p:cNvPr id="3" name="Notes Placeholder 2"/>
-          <p:cNvSpPr>
-            <a:spLocks noGrp="1"/>
-          </p:cNvSpPr>
-          <p:nvPr>
-            <p:ph type="body" idx="1"/>
-          </p:nvPr>
-        </p:nvSpPr>
-        <p:spPr/>
-        <p:txBody>
-          <a:bodyPr/>
-          <a:lstStyle/>
-          <a:p>
-            <a:r>
-              <a:rPr lang="en-US" dirty="0"/>
-              <a:t>Chiedere: quante imprese lombarde ci sono davvero? Non lo sappiamo finché non puliamo. Anticipa L3 e L5 (merge).</a:t>
-            </a:r>
-            <a:endParaRPr lang="en-US" dirty="0"/>
-          </a:p>
-        </p:txBody>
-      </p:sp>
-      <p:sp>
-        <p:nvSpPr>
-          <p:cNvPr id="4" name="Slide Number Placeholder 3"/>
-          <p:cNvSpPr>
-            <a:spLocks noGrp="1"/>
-          </p:cNvSpPr>
-          <p:nvPr>
-            <p:ph type="sldNum" sz="quarter" idx="10"/>
-          </p:nvPr>
-        </p:nvSpPr>
-        <p:spPr/>
-        <p:txBody>
-          <a:bodyPr/>
-          <a:lstStyle/>
-          <a:p>
-            <a:fld id="{F7021451-1387-4CA6-816F-3879F97B5CBC}" type="slidenum">
-              <a:rPr lang="en-US"/>
-              <a:t>12</a:t>
-            </a:fld>
-            <a:endParaRPr lang="en-US"/>
-          </a:p>
-        </p:txBody>
-      </p:sp>
-    </p:spTree>
-    <p:extLst>
-      <p:ext uri="{BB962C8B-B14F-4D97-AF65-F5344CB8AC3E}">
-        <p14:creationId xmlns:p14="http://schemas.microsoft.com/office/powerpoint/2010/main" val="1024086991"/>
-      </p:ext>
-    </p:extLst>
-  </p:cSld>
-  <p:clrMapOvr>
-    <a:masterClrMapping/>
-  </p:clrMapOvr>
-</p:notes>
-</file>
-
-<file path=ppt/notesSlides/notesSlide13.xml><?xml version="1.0" encoding="utf-8"?>
-<p:notes xmlns:a="http://schemas.openxmlformats.org/drawingml/2006/main" xmlns:r="http://schemas.openxmlformats.org/officeDocument/2006/relationships" xmlns:p="http://schemas.openxmlformats.org/presentationml/2006/main">
-  <p:cSld>
-    <p:spTree>
-      <p:nvGrpSpPr>
-        <p:cNvPr id="1" name=""/>
-        <p:cNvGrpSpPr/>
-        <p:nvPr/>
-      </p:nvGrpSpPr>
-      <p:grpSpPr>
-        <a:xfrm>
-          <a:off x="0" y="0"/>
-          <a:ext cx="0" cy="0"/>
-          <a:chOff x="0" y="0"/>
-          <a:chExt cx="0" cy="0"/>
-        </a:xfrm>
-      </p:grpSpPr>
-      <p:sp>
-        <p:nvSpPr>
-          <p:cNvPr id="2" name="Slide Image Placeholder 1"/>
-          <p:cNvSpPr>
-            <a:spLocks noGrp="1" noRot="1" noChangeAspect="1"/>
-          </p:cNvSpPr>
-          <p:nvPr>
-            <p:ph type="sldImg"/>
-          </p:nvPr>
-        </p:nvSpPr>
-        <p:spPr/>
-      </p:sp>
-      <p:sp>
-        <p:nvSpPr>
-          <p:cNvPr id="3" name="Notes Placeholder 2"/>
-          <p:cNvSpPr>
-            <a:spLocks noGrp="1"/>
-          </p:cNvSpPr>
-          <p:nvPr>
-            <p:ph type="body" idx="1"/>
-          </p:nvPr>
-        </p:nvSpPr>
-        <p:spPr/>
-        <p:txBody>
-          <a:bodyPr/>
-          <a:lstStyle/>
-          <a:p>
-            <a:r>
-              <a:rPr lang="en-US" dirty="0"/>
-              <a:t>Ci sono anche valori mancanti e date in due formati: se qualcuno li ha notati, bene; altrimenti li scopriamo nella L3.</a:t>
-            </a:r>
-            <a:endParaRPr lang="en-US" dirty="0"/>
-          </a:p>
-        </p:txBody>
-      </p:sp>
-      <p:sp>
-        <p:nvSpPr>
-          <p:cNvPr id="4" name="Slide Number Placeholder 3"/>
-          <p:cNvSpPr>
-            <a:spLocks noGrp="1"/>
-          </p:cNvSpPr>
-          <p:nvPr>
-            <p:ph type="sldNum" sz="quarter" idx="10"/>
-          </p:nvPr>
-        </p:nvSpPr>
-        <p:spPr/>
-        <p:txBody>
-          <a:bodyPr/>
-          <a:lstStyle/>
-          <a:p>
-            <a:fld id="{F7021451-1387-4CA6-816F-3879F97B5CBC}" type="slidenum">
-              <a:rPr lang="en-US"/>
-              <a:t>13</a:t>
-            </a:fld>
-            <a:endParaRPr lang="en-US"/>
-          </a:p>
-        </p:txBody>
-      </p:sp>
-    </p:spTree>
-    <p:extLst>
-      <p:ext uri="{BB962C8B-B14F-4D97-AF65-F5344CB8AC3E}">
-        <p14:creationId xmlns:p14="http://schemas.microsoft.com/office/powerpoint/2010/main" val="1024086991"/>
-      </p:ext>
-    </p:extLst>
-  </p:cSld>
-  <p:clrMapOvr>
-    <a:masterClrMapping/>
-  </p:clrMapOvr>
-</p:notes>
-</file>
-
-<file path=ppt/notesSlides/notesSlide14.xml><?xml version="1.0" encoding="utf-8"?>
-<p:notes xmlns:a="http://schemas.openxmlformats.org/drawingml/2006/main" xmlns:r="http://schemas.openxmlformats.org/officeDocument/2006/relationships" xmlns:p="http://schemas.openxmlformats.org/presentationml/2006/main">
-  <p:cSld>
-    <p:spTree>
-      <p:nvGrpSpPr>
-        <p:cNvPr id="1" name=""/>
-        <p:cNvGrpSpPr/>
-        <p:nvPr/>
-      </p:nvGrpSpPr>
-      <p:grpSpPr>
-        <a:xfrm>
-          <a:off x="0" y="0"/>
-          <a:ext cx="0" cy="0"/>
-          <a:chOff x="0" y="0"/>
-          <a:chExt cx="0" cy="0"/>
-        </a:xfrm>
-      </p:grpSpPr>
-      <p:sp>
-        <p:nvSpPr>
-          <p:cNvPr id="2" name="Slide Image Placeholder 1"/>
-          <p:cNvSpPr>
-            <a:spLocks noGrp="1" noRot="1" noChangeAspect="1"/>
-          </p:cNvSpPr>
-          <p:nvPr>
-            <p:ph type="sldImg"/>
-          </p:nvPr>
-        </p:nvSpPr>
-        <p:spPr/>
-      </p:sp>
-      <p:sp>
-        <p:nvSpPr>
-          <p:cNvPr id="3" name="Notes Placeholder 2"/>
-          <p:cNvSpPr>
-            <a:spLocks noGrp="1"/>
-          </p:cNvSpPr>
-          <p:nvPr>
-            <p:ph type="body" idx="1"/>
-          </p:nvPr>
-        </p:nvSpPr>
-        <p:spPr/>
-        <p:txBody>
-          <a:bodyPr/>
-          <a:lstStyle/>
-          <a:p>
-            <a:r>
-              <a:rPr lang="en-US" dirty="0"/>
-              <a:t>Le lezioni Kaggle: Creating, Reading and Writing; Indexing, Selecting &amp; Assigning.</a:t>
-            </a:r>
-            <a:endParaRPr lang="en-US" dirty="0"/>
-          </a:p>
-        </p:txBody>
-      </p:sp>
-      <p:sp>
-        <p:nvSpPr>
-          <p:cNvPr id="4" name="Slide Number Placeholder 3"/>
-          <p:cNvSpPr>
-            <a:spLocks noGrp="1"/>
-          </p:cNvSpPr>
-          <p:nvPr>
-            <p:ph type="sldNum" sz="quarter" idx="10"/>
-          </p:nvPr>
-        </p:nvSpPr>
-        <p:spPr/>
-        <p:txBody>
-          <a:bodyPr/>
-          <a:lstStyle/>
-          <a:p>
-            <a:fld id="{F7021451-1387-4CA6-816F-3879F97B5CBC}" type="slidenum">
-              <a:rPr lang="en-US"/>
-              <a:t>14</a:t>
-            </a:fld>
-            <a:endParaRPr lang="en-US"/>
-          </a:p>
-        </p:txBody>
-      </p:sp>
-    </p:spTree>
-    <p:extLst>
-      <p:ext uri="{BB962C8B-B14F-4D97-AF65-F5344CB8AC3E}">
-        <p14:creationId xmlns:p14="http://schemas.microsoft.com/office/powerpoint/2010/main" val="1024086991"/>
-      </p:ext>
-    </p:extLst>
-  </p:cSld>
-  <p:clrMapOvr>
-    <a:masterClrMapping/>
-  </p:clrMapOvr>
-</p:notes>
-</file>
-
 <file path=ppt/notesSlides/notesSlide2.xml><?xml version="1.0" encoding="utf-8"?>
 <p:notes xmlns:a="http://schemas.openxmlformats.org/drawingml/2006/main" xmlns:r="http://schemas.openxmlformats.org/officeDocument/2006/relationships" xmlns:p="http://schemas.openxmlformats.org/presentationml/2006/main">
   <p:cSld>
@@ -1702,7 +1248,7 @@
           <a:p>
             <a:r>
               <a:rPr lang="en-US" dirty="0"/>
-              <a:t>Partire dalla domanda finale: far dire alla classe le tre cose che non convincono.</a:t>
+              <a:t>Le lezioni Kaggle: Creating, Reading and Writing; Indexing, Selecting &amp; Assigning.</a:t>
             </a:r>
             <a:endParaRPr lang="en-US" dirty="0"/>
           </a:p>
@@ -2572,2235 +2118,6 @@
 </p:sld>
 </file>
 
-<file path=ppt/slides/slide10.xml><?xml version="1.0" encoding="utf-8"?>
-<p:sld xmlns:a="http://schemas.openxmlformats.org/drawingml/2006/main" xmlns:r="http://schemas.openxmlformats.org/officeDocument/2006/relationships" xmlns:p="http://schemas.openxmlformats.org/presentationml/2006/main">
-  <p:cSld name="Slide 10">
-    <p:spTree>
-      <p:nvGrpSpPr>
-        <p:cNvPr id="1" name=""/>
-        <p:cNvGrpSpPr/>
-        <p:nvPr/>
-      </p:nvGrpSpPr>
-      <p:grpSpPr>
-        <a:xfrm>
-          <a:off x="0" y="0"/>
-          <a:ext cx="0" cy="0"/>
-          <a:chOff x="0" y="0"/>
-          <a:chExt cx="0" cy="0"/>
-        </a:xfrm>
-      </p:grpSpPr>
-      <p:sp>
-        <p:nvSpPr>
-          <p:cNvPr id="2" name="Text 0"/>
-          <p:cNvSpPr/>
-          <p:nvPr>
-            <p:ph idx="100" type="title" hasCustomPrompt="1"/>
-          </p:nvPr>
-        </p:nvSpPr>
-        <p:spPr>
-          <a:xfrm>
-            <a:off x="548640" y="365760"/>
-            <a:ext cx="11064240" cy="822960"/>
-          </a:xfrm>
-          <a:prstGeom prst="rect">
-            <a:avLst/>
-          </a:prstGeom>
-          <a:noFill/>
-          <a:ln/>
-        </p:spPr>
-        <p:txBody>
-          <a:bodyPr wrap="square" lIns="0" tIns="0" rIns="0" bIns="0" rtlCol="0" anchor="ctr"/>
-          <a:lstStyle/>
-          <a:p>
-            <a:pPr algn="l" indent="0" marL="0">
-              <a:buNone/>
-            </a:pPr>
-            <a:r>
-              <a:rPr lang="en-US" sz="3600" b="1" dirty="0">
-                <a:solidFill>
-                  <a:srgbClr val="0F4C5C"/>
-                </a:solidFill>
-              </a:rPr>
-              <a:t>I conti non tornano</a:t>
-            </a:r>
-            <a:endParaRPr lang="en-US" sz="3600" dirty="0"/>
-          </a:p>
-        </p:txBody>
-      </p:sp>
-      <p:sp>
-        <p:nvSpPr>
-          <p:cNvPr id="3" name="Shape 1"/>
-          <p:cNvSpPr/>
-          <p:nvPr/>
-        </p:nvSpPr>
-        <p:spPr>
-          <a:xfrm>
-            <a:off x="548640" y="1737360"/>
-            <a:ext cx="3657600" cy="3108960"/>
-          </a:xfrm>
-          <a:prstGeom prst="roundRect">
-            <a:avLst>
-              <a:gd name="adj" fmla="val 3529"/>
-            </a:avLst>
-          </a:prstGeom>
-          <a:solidFill>
-            <a:srgbClr val="EEF3F4"/>
-          </a:solidFill>
-          <a:ln/>
-        </p:spPr>
-      </p:sp>
-      <p:sp>
-        <p:nvSpPr>
-          <p:cNvPr id="4" name="Text 2"/>
-          <p:cNvSpPr txBox="1"/>
-          <p:nvPr/>
-        </p:nvSpPr>
-        <p:spPr>
-          <a:xfrm>
-            <a:off x="914400" y="2011680"/>
-            <a:ext cx="2926080" cy="1188720"/>
-          </a:xfrm>
-          <a:prstGeom prst="rect">
-            <a:avLst/>
-          </a:prstGeom>
-          <a:noFill/>
-          <a:ln/>
-        </p:spPr>
-        <p:txBody>
-          <a:bodyPr wrap="square" lIns="0" tIns="0" rIns="0" bIns="0" rtlCol="0" anchor="ctr"/>
-          <a:lstStyle/>
-          <a:p>
-            <a:pPr indent="0" marL="0">
-              <a:buNone/>
-            </a:pPr>
-            <a:r>
-              <a:rPr lang="en-US" sz="6400" b="1" dirty="0">
-                <a:solidFill>
-                  <a:srgbClr val="0F4C5C"/>
-                </a:solidFill>
-              </a:rPr>
-              <a:t>2.500</a:t>
-            </a:r>
-            <a:endParaRPr lang="en-US" sz="6400" dirty="0"/>
-          </a:p>
-        </p:txBody>
-      </p:sp>
-      <p:sp>
-        <p:nvSpPr>
-          <p:cNvPr id="5" name="Text 3"/>
-          <p:cNvSpPr txBox="1"/>
-          <p:nvPr/>
-        </p:nvSpPr>
-        <p:spPr>
-          <a:xfrm>
-            <a:off x="914400" y="3291840"/>
-            <a:ext cx="2926080" cy="457200"/>
-          </a:xfrm>
-          <a:prstGeom prst="rect">
-            <a:avLst/>
-          </a:prstGeom>
-          <a:noFill/>
-          <a:ln/>
-        </p:spPr>
-        <p:txBody>
-          <a:bodyPr wrap="square" lIns="0" tIns="0" rIns="0" bIns="0" rtlCol="0" anchor="ctr"/>
-          <a:lstStyle/>
-          <a:p>
-            <a:pPr indent="0" marL="0">
-              <a:buNone/>
-            </a:pPr>
-            <a:r>
-              <a:rPr lang="en-US" sz="2200" b="1" dirty="0">
-                <a:solidFill>
-                  <a:srgbClr val="0F4C5C"/>
-                </a:solidFill>
-              </a:rPr>
-              <a:t>righe attese</a:t>
-            </a:r>
-            <a:endParaRPr lang="en-US" sz="2200" dirty="0"/>
-          </a:p>
-        </p:txBody>
-      </p:sp>
-      <p:sp>
-        <p:nvSpPr>
-          <p:cNvPr id="6" name="Text 4"/>
-          <p:cNvSpPr txBox="1"/>
-          <p:nvPr/>
-        </p:nvSpPr>
-        <p:spPr>
-          <a:xfrm>
-            <a:off x="914400" y="3794760"/>
-            <a:ext cx="2926080" cy="457200"/>
-          </a:xfrm>
-          <a:prstGeom prst="rect">
-            <a:avLst/>
-          </a:prstGeom>
-          <a:noFill/>
-          <a:ln/>
-        </p:spPr>
-        <p:txBody>
-          <a:bodyPr wrap="square" lIns="0" tIns="0" rIns="0" bIns="0" rtlCol="0" anchor="ctr"/>
-          <a:lstStyle/>
-          <a:p>
-            <a:pPr indent="0" marL="0">
-              <a:buNone/>
-            </a:pPr>
-            <a:r>
-              <a:rPr lang="en-US" sz="1600" dirty="0">
-                <a:solidFill>
-                  <a:srgbClr val="5C6F7B"/>
-                </a:solidFill>
-                <a:latin typeface="Courier New" pitchFamily="34" charset="0"/>
-                <a:ea typeface="Courier New" pitchFamily="34" charset="-122"/>
-                <a:cs typeface="Courier New" pitchFamily="34" charset="-120"/>
-              </a:rPr>
-              <a:t>500 imprese × 5 anni</a:t>
-            </a:r>
-            <a:endParaRPr lang="en-US" sz="1600" dirty="0"/>
-          </a:p>
-        </p:txBody>
-      </p:sp>
-      <p:sp>
-        <p:nvSpPr>
-          <p:cNvPr id="7" name="Shape 5"/>
-          <p:cNvSpPr/>
-          <p:nvPr/>
-        </p:nvSpPr>
-        <p:spPr>
-          <a:xfrm>
-            <a:off x="4480560" y="1737360"/>
-            <a:ext cx="3657600" cy="3108960"/>
-          </a:xfrm>
-          <a:prstGeom prst="roundRect">
-            <a:avLst>
-              <a:gd name="adj" fmla="val 3529"/>
-            </a:avLst>
-          </a:prstGeom>
-          <a:solidFill>
-            <a:srgbClr val="0F4C5C"/>
-          </a:solidFill>
-          <a:ln/>
-        </p:spPr>
-      </p:sp>
-      <p:sp>
-        <p:nvSpPr>
-          <p:cNvPr id="8" name="Text 6"/>
-          <p:cNvSpPr txBox="1"/>
-          <p:nvPr/>
-        </p:nvSpPr>
-        <p:spPr>
-          <a:xfrm>
-            <a:off x="4846320" y="2011680"/>
-            <a:ext cx="2926080" cy="1188720"/>
-          </a:xfrm>
-          <a:prstGeom prst="rect">
-            <a:avLst/>
-          </a:prstGeom>
-          <a:noFill/>
-          <a:ln/>
-        </p:spPr>
-        <p:txBody>
-          <a:bodyPr wrap="square" lIns="0" tIns="0" rIns="0" bIns="0" rtlCol="0" anchor="ctr"/>
-          <a:lstStyle/>
-          <a:p>
-            <a:pPr indent="0" marL="0">
-              <a:buNone/>
-            </a:pPr>
-            <a:r>
-              <a:rPr lang="en-US" sz="6400" b="1" dirty="0">
-                <a:solidFill>
-                  <a:srgbClr val="FFFFFF"/>
-                </a:solidFill>
-              </a:rPr>
-              <a:t>2.515</a:t>
-            </a:r>
-            <a:endParaRPr lang="en-US" sz="6400" dirty="0"/>
-          </a:p>
-        </p:txBody>
-      </p:sp>
-      <p:sp>
-        <p:nvSpPr>
-          <p:cNvPr id="9" name="Text 7"/>
-          <p:cNvSpPr txBox="1"/>
-          <p:nvPr/>
-        </p:nvSpPr>
-        <p:spPr>
-          <a:xfrm>
-            <a:off x="4846320" y="3291840"/>
-            <a:ext cx="2926080" cy="457200"/>
-          </a:xfrm>
-          <a:prstGeom prst="rect">
-            <a:avLst/>
-          </a:prstGeom>
-          <a:noFill/>
-          <a:ln/>
-        </p:spPr>
-        <p:txBody>
-          <a:bodyPr wrap="square" lIns="0" tIns="0" rIns="0" bIns="0" rtlCol="0" anchor="ctr"/>
-          <a:lstStyle/>
-          <a:p>
-            <a:pPr indent="0" marL="0">
-              <a:buNone/>
-            </a:pPr>
-            <a:r>
-              <a:rPr lang="en-US" sz="2200" b="1" dirty="0">
-                <a:solidFill>
-                  <a:srgbClr val="FFFFFF"/>
-                </a:solidFill>
-              </a:rPr>
-              <a:t>righe nel file</a:t>
-            </a:r>
-            <a:endParaRPr lang="en-US" sz="2200" dirty="0"/>
-          </a:p>
-        </p:txBody>
-      </p:sp>
-      <p:sp>
-        <p:nvSpPr>
-          <p:cNvPr id="10" name="Text 8"/>
-          <p:cNvSpPr txBox="1"/>
-          <p:nvPr/>
-        </p:nvSpPr>
-        <p:spPr>
-          <a:xfrm>
-            <a:off x="4846320" y="3794760"/>
-            <a:ext cx="2926080" cy="457200"/>
-          </a:xfrm>
-          <a:prstGeom prst="rect">
-            <a:avLst/>
-          </a:prstGeom>
-          <a:noFill/>
-          <a:ln/>
-        </p:spPr>
-        <p:txBody>
-          <a:bodyPr wrap="square" lIns="0" tIns="0" rIns="0" bIns="0" rtlCol="0" anchor="ctr"/>
-          <a:lstStyle/>
-          <a:p>
-            <a:pPr indent="0" marL="0">
-              <a:buNone/>
-            </a:pPr>
-            <a:r>
-              <a:rPr lang="en-US" sz="1600" dirty="0">
-                <a:solidFill>
-                  <a:srgbClr val="B8C4CB"/>
-                </a:solidFill>
-                <a:latin typeface="Courier New" pitchFamily="34" charset="0"/>
-                <a:ea typeface="Courier New" pitchFamily="34" charset="-122"/>
-                <a:cs typeface="Courier New" pitchFamily="34" charset="-120"/>
-              </a:rPr>
-              <a:t>df.shape</a:t>
-            </a:r>
-            <a:endParaRPr lang="en-US" sz="1600" dirty="0"/>
-          </a:p>
-        </p:txBody>
-      </p:sp>
-      <p:sp>
-        <p:nvSpPr>
-          <p:cNvPr id="11" name="Text 9"/>
-          <p:cNvSpPr txBox="1"/>
-          <p:nvPr/>
-        </p:nvSpPr>
-        <p:spPr>
-          <a:xfrm>
-            <a:off x="8503920" y="1828800"/>
-            <a:ext cx="3108960" cy="3657600"/>
-          </a:xfrm>
-          <a:prstGeom prst="rect">
-            <a:avLst/>
-          </a:prstGeom>
-          <a:noFill/>
-          <a:ln/>
-        </p:spPr>
-        <p:txBody>
-          <a:bodyPr wrap="square" lIns="0" tIns="0" rIns="0" bIns="0" rtlCol="0" anchor="t"/>
-          <a:lstStyle/>
-          <a:p>
-            <a:pPr indent="0" marL="0">
-              <a:spcAft>
-                <a:spcPts val="1000"/>
-              </a:spcAft>
-              <a:buNone/>
-            </a:pPr>
-            <a:r>
-              <a:rPr lang="en-US" sz="1800" b="1" dirty="0">
-                <a:solidFill>
-                  <a:srgbClr val="9E2A2B"/>
-                </a:solidFill>
-              </a:rPr>
-              <a:t>15 righe in più.</a:t>
-            </a:r>
-            <a:endParaRPr lang="en-US" sz="1800" dirty="0"/>
-          </a:p>
-          <a:p>
-            <a:pPr indent="0" marL="0">
-              <a:spcAft>
-                <a:spcPts val="1000"/>
-              </a:spcAft>
-              <a:buNone/>
-            </a:pPr>
-            <a:r>
-              <a:rPr lang="en-US" sz="1800" dirty="0">
-                <a:solidFill>
-                  <a:srgbClr val="1F2A30"/>
-                </a:solidFill>
-              </a:rPr>
-              <a:t>Probabilmente duplicati: la stessa impresa, lo stesso anno, due volte.</a:t>
-            </a:r>
-            <a:endParaRPr lang="en-US" sz="1800" dirty="0"/>
-          </a:p>
-          <a:p>
-            <a:pPr indent="0" marL="0">
-              <a:spcAft>
-                <a:spcPts val="1000"/>
-              </a:spcAft>
-              <a:buNone/>
-            </a:pPr>
-            <a:r>
-              <a:rPr lang="en-US" sz="1800" dirty="0">
-                <a:solidFill>
-                  <a:srgbClr val="1F2A30"/>
-                </a:solidFill>
-              </a:rPr>
-              <a:t>Un controllo da fare a mente, in 10 secondi. Nessun codice lo fa per te.</a:t>
-            </a:r>
-            <a:endParaRPr lang="en-US" sz="1800" dirty="0"/>
-          </a:p>
-        </p:txBody>
-      </p:sp>
-      <p:sp>
-        <p:nvSpPr>
-          <p:cNvPr id="25" name="Slide Number Placeholder 0"/>
-          <p:cNvSpPr>
-            <a:spLocks noGrp="1"/>
-          </p:cNvSpPr>
-          <p:nvPr>
-            <p:ph type="sldNum" sz="quarter" idx="4294967295"/>
-          </p:nvPr>
-        </p:nvSpPr>
-        <p:spPr>
-          <a:xfrm>
-            <a:off x="11155680" y="6400800"/>
-            <a:ext cx="457200" cy="274320"/>
-          </a:xfrm>
-          <a:prstGeom prst="rect">
-            <a:avLst/>
-          </a:prstGeom>
-          <a:extLst>
-            <a:ext uri="{C572A759-6A51-4108-AA02-DFA0A04FC94B}">
-              <ma14:wrappingTextBoxFlag xmlns:ma14="http://schemas.microsoft.com/office/mac/drawingml/2011/main" val="0"/>
-            </a:ext>
-          </a:extLst>
-        </p:spPr>
-        <p:txBody>
-          <a:bodyPr/>
-          <a:lstStyle>
-            <a:lvl1pPr>
-              <a:defRPr sz="1000">
-                <a:solidFill>
-                  <a:srgbClr val="5C6F7B"/>
-                </a:solidFill>
-              </a:defRPr>
-            </a:lvl1pPr>
-          </a:lstStyle>
-          <a:p>
-            <a:pPr algn="r"/>
-            <a:fld id="{F7021451-1387-4CA6-816F-3879F97B5CBC}" type="slidenum">
-              <a:rPr b="0" lang="en-US"/>
-              <a:t>10</a:t>
-            </a:fld>
-            <a:endParaRPr lang="en-US"/>
-          </a:p>
-        </p:txBody>
-      </p:sp>
-    </p:spTree>
-  </p:cSld>
-  <p:clrMapOvr>
-    <a:masterClrMapping/>
-  </p:clrMapOvr>
-</p:sld>
-</file>
-
-<file path=ppt/slides/slide11.xml><?xml version="1.0" encoding="utf-8"?>
-<p:sld xmlns:a="http://schemas.openxmlformats.org/drawingml/2006/main" xmlns:r="http://schemas.openxmlformats.org/officeDocument/2006/relationships" xmlns:p="http://schemas.openxmlformats.org/presentationml/2006/main">
-  <p:cSld name="Slide 11">
-    <p:spTree>
-      <p:nvGrpSpPr>
-        <p:cNvPr id="1" name=""/>
-        <p:cNvGrpSpPr/>
-        <p:nvPr/>
-      </p:nvGrpSpPr>
-      <p:grpSpPr>
-        <a:xfrm>
-          <a:off x="0" y="0"/>
-          <a:ext cx="0" cy="0"/>
-          <a:chOff x="0" y="0"/>
-          <a:chExt cx="0" cy="0"/>
-        </a:xfrm>
-      </p:grpSpPr>
-      <p:sp>
-        <p:nvSpPr>
-          <p:cNvPr id="2" name="Text 0"/>
-          <p:cNvSpPr/>
-          <p:nvPr>
-            <p:ph idx="100" type="title" hasCustomPrompt="1"/>
-          </p:nvPr>
-        </p:nvSpPr>
-        <p:spPr>
-          <a:xfrm>
-            <a:off x="548640" y="365760"/>
-            <a:ext cx="11064240" cy="822960"/>
-          </a:xfrm>
-          <a:prstGeom prst="rect">
-            <a:avLst/>
-          </a:prstGeom>
-          <a:noFill/>
-          <a:ln/>
-        </p:spPr>
-        <p:txBody>
-          <a:bodyPr wrap="square" lIns="0" tIns="0" rIns="0" bIns="0" rtlCol="0" anchor="ctr"/>
-          <a:lstStyle/>
-          <a:p>
-            <a:pPr algn="l" indent="0" marL="0">
-              <a:buNone/>
-            </a:pPr>
-            <a:r>
-              <a:rPr lang="en-US" sz="3600" b="1" dirty="0">
-                <a:solidFill>
-                  <a:srgbClr val="0F4C5C"/>
-                </a:solidFill>
-              </a:rPr>
-              <a:t>Il fatturato è testo</a:t>
-            </a:r>
-            <a:endParaRPr lang="en-US" sz="3600" dirty="0"/>
-          </a:p>
-        </p:txBody>
-      </p:sp>
-      <p:sp>
-        <p:nvSpPr>
-          <p:cNvPr id="3" name="card-code"/>
-          <p:cNvSpPr/>
-          <p:nvPr/>
-        </p:nvSpPr>
-        <p:spPr>
-          <a:xfrm>
-            <a:off x="548640" y="1737360"/>
-            <a:ext cx="5577840" cy="1005840"/>
-          </a:xfrm>
-          <a:prstGeom prst="roundRect">
-            <a:avLst>
-              <a:gd name="adj" fmla="val 10909"/>
-            </a:avLst>
-          </a:prstGeom>
-          <a:solidFill>
-            <a:srgbClr val="1F2A30"/>
-          </a:solidFill>
-          <a:ln/>
-        </p:spPr>
-      </p:sp>
-      <p:sp>
-        <p:nvSpPr>
-          <p:cNvPr id="4" name="Text 2"/>
-          <p:cNvSpPr txBox="1"/>
-          <p:nvPr/>
-        </p:nvSpPr>
-        <p:spPr>
-          <a:xfrm>
-            <a:off x="777240" y="1874520"/>
-            <a:ext cx="1828800" cy="274320"/>
-          </a:xfrm>
-          <a:prstGeom prst="rect">
-            <a:avLst/>
-          </a:prstGeom>
-          <a:noFill/>
-          <a:ln/>
-        </p:spPr>
-        <p:txBody>
-          <a:bodyPr wrap="square" lIns="0" tIns="0" rIns="0" bIns="0" rtlCol="0" anchor="ctr"/>
-          <a:lstStyle/>
-          <a:p>
-            <a:pPr indent="0" marL="0">
-              <a:buNone/>
-            </a:pPr>
-            <a:r>
-              <a:rPr lang="en-US" sz="1100" b="1" spc="200" kern="0" dirty="0">
-                <a:solidFill>
-                  <a:srgbClr val="E09F3E"/>
-                </a:solidFill>
-              </a:rPr>
-              <a:t>PYTHON</a:t>
-            </a:r>
-            <a:endParaRPr lang="en-US" sz="1100" dirty="0"/>
-          </a:p>
-        </p:txBody>
-      </p:sp>
-      <p:sp>
-        <p:nvSpPr>
-          <p:cNvPr id="5" name="Text 3"/>
-          <p:cNvSpPr txBox="1"/>
-          <p:nvPr/>
-        </p:nvSpPr>
-        <p:spPr>
-          <a:xfrm>
-            <a:off x="777240" y="2194560"/>
-            <a:ext cx="5120640" cy="411480"/>
-          </a:xfrm>
-          <a:prstGeom prst="rect">
-            <a:avLst/>
-          </a:prstGeom>
-          <a:noFill/>
-          <a:ln/>
-        </p:spPr>
-        <p:txBody>
-          <a:bodyPr wrap="square" lIns="0" tIns="0" rIns="0" bIns="0" rtlCol="0" anchor="t"/>
-          <a:lstStyle/>
-          <a:p>
-            <a:pPr indent="0" marL="0">
-              <a:buNone/>
-            </a:pPr>
-            <a:r>
-              <a:rPr lang="en-US" sz="1800" dirty="0">
-                <a:solidFill>
-                  <a:srgbClr val="FFFFFF"/>
-                </a:solidFill>
-                <a:latin typeface="Courier New" pitchFamily="34" charset="0"/>
-                <a:ea typeface="Courier New" pitchFamily="34" charset="-122"/>
-                <a:cs typeface="Courier New" pitchFamily="34" charset="-120"/>
-              </a:rPr>
-              <a:t>df["fatturato"].mean()</a:t>
-            </a:r>
-            <a:endParaRPr lang="en-US" sz="1800" dirty="0"/>
-          </a:p>
-        </p:txBody>
-      </p:sp>
-      <p:sp>
-        <p:nvSpPr>
-          <p:cNvPr id="6" name="card-err"/>
-          <p:cNvSpPr/>
-          <p:nvPr/>
-        </p:nvSpPr>
-        <p:spPr>
-          <a:xfrm>
-            <a:off x="548640" y="2880360"/>
-            <a:ext cx="5577840" cy="1097280"/>
-          </a:xfrm>
-          <a:prstGeom prst="roundRect">
-            <a:avLst>
-              <a:gd name="adj" fmla="val 10000"/>
-            </a:avLst>
-          </a:prstGeom>
-          <a:solidFill>
-            <a:srgbClr val="FBEAEA"/>
-          </a:solidFill>
-          <a:ln/>
-        </p:spPr>
-      </p:sp>
-      <p:sp>
-        <p:nvSpPr>
-          <p:cNvPr id="7" name="Text 5"/>
-          <p:cNvSpPr txBox="1"/>
-          <p:nvPr/>
-        </p:nvSpPr>
-        <p:spPr>
-          <a:xfrm>
-            <a:off x="777240" y="3017520"/>
-            <a:ext cx="1828800" cy="274320"/>
-          </a:xfrm>
-          <a:prstGeom prst="rect">
-            <a:avLst/>
-          </a:prstGeom>
-          <a:noFill/>
-          <a:ln/>
-        </p:spPr>
-        <p:txBody>
-          <a:bodyPr wrap="square" lIns="0" tIns="0" rIns="0" bIns="0" rtlCol="0" anchor="ctr"/>
-          <a:lstStyle/>
-          <a:p>
-            <a:pPr indent="0" marL="0">
-              <a:buNone/>
-            </a:pPr>
-            <a:r>
-              <a:rPr lang="en-US" sz="1100" b="1" spc="200" kern="0" dirty="0">
-                <a:solidFill>
-                  <a:srgbClr val="9E2A2B"/>
-                </a:solidFill>
-              </a:rPr>
-              <a:t>ERRORE</a:t>
-            </a:r>
-            <a:endParaRPr lang="en-US" sz="1100" dirty="0"/>
-          </a:p>
-        </p:txBody>
-      </p:sp>
-      <p:sp>
-        <p:nvSpPr>
-          <p:cNvPr id="8" name="Text 6"/>
-          <p:cNvSpPr txBox="1"/>
-          <p:nvPr/>
-        </p:nvSpPr>
-        <p:spPr>
-          <a:xfrm>
-            <a:off x="777240" y="3337560"/>
-            <a:ext cx="5120640" cy="502920"/>
-          </a:xfrm>
-          <a:prstGeom prst="rect">
-            <a:avLst/>
-          </a:prstGeom>
-          <a:noFill/>
-          <a:ln/>
-        </p:spPr>
-        <p:txBody>
-          <a:bodyPr wrap="square" lIns="0" tIns="0" rIns="0" bIns="0" rtlCol="0" anchor="t"/>
-          <a:lstStyle/>
-          <a:p>
-            <a:pPr indent="0" marL="0">
-              <a:buNone/>
-            </a:pPr>
-            <a:r>
-              <a:rPr lang="en-US" sz="1800" dirty="0">
-                <a:solidFill>
-                  <a:srgbClr val="9E2A2B"/>
-                </a:solidFill>
-                <a:latin typeface="Courier New" pitchFamily="34" charset="0"/>
-                <a:ea typeface="Courier New" pitchFamily="34" charset="-122"/>
-                <a:cs typeface="Courier New" pitchFamily="34" charset="-120"/>
-              </a:rPr>
-              <a:t>TypeError: ... string ...</a:t>
-            </a:r>
-            <a:endParaRPr lang="en-US" sz="1800" dirty="0"/>
-          </a:p>
-        </p:txBody>
-      </p:sp>
-      <p:sp>
-        <p:nvSpPr>
-          <p:cNvPr id="9" name="card-code"/>
-          <p:cNvSpPr/>
-          <p:nvPr/>
-        </p:nvSpPr>
-        <p:spPr>
-          <a:xfrm>
-            <a:off x="548640" y="4160520"/>
-            <a:ext cx="5577840" cy="1005840"/>
-          </a:xfrm>
-          <a:prstGeom prst="roundRect">
-            <a:avLst>
-              <a:gd name="adj" fmla="val 10909"/>
-            </a:avLst>
-          </a:prstGeom>
-          <a:solidFill>
-            <a:srgbClr val="1F2A30"/>
-          </a:solidFill>
-          <a:ln/>
-        </p:spPr>
-      </p:sp>
-      <p:sp>
-        <p:nvSpPr>
-          <p:cNvPr id="10" name="Text 8"/>
-          <p:cNvSpPr txBox="1"/>
-          <p:nvPr/>
-        </p:nvSpPr>
-        <p:spPr>
-          <a:xfrm>
-            <a:off x="777240" y="4297680"/>
-            <a:ext cx="1828800" cy="274320"/>
-          </a:xfrm>
-          <a:prstGeom prst="rect">
-            <a:avLst/>
-          </a:prstGeom>
-          <a:noFill/>
-          <a:ln/>
-        </p:spPr>
-        <p:txBody>
-          <a:bodyPr wrap="square" lIns="0" tIns="0" rIns="0" bIns="0" rtlCol="0" anchor="ctr"/>
-          <a:lstStyle/>
-          <a:p>
-            <a:pPr indent="0" marL="0">
-              <a:buNone/>
-            </a:pPr>
-            <a:r>
-              <a:rPr lang="en-US" sz="1100" b="1" spc="200" kern="0" dirty="0">
-                <a:solidFill>
-                  <a:srgbClr val="E09F3E"/>
-                </a:solidFill>
-              </a:rPr>
-              <a:t>PYTHON</a:t>
-            </a:r>
-            <a:endParaRPr lang="en-US" sz="1100" dirty="0"/>
-          </a:p>
-        </p:txBody>
-      </p:sp>
-      <p:sp>
-        <p:nvSpPr>
-          <p:cNvPr id="11" name="Text 9"/>
-          <p:cNvSpPr txBox="1"/>
-          <p:nvPr/>
-        </p:nvSpPr>
-        <p:spPr>
-          <a:xfrm>
-            <a:off x="777240" y="4617720"/>
-            <a:ext cx="5120640" cy="411480"/>
-          </a:xfrm>
-          <a:prstGeom prst="rect">
-            <a:avLst/>
-          </a:prstGeom>
-          <a:noFill/>
-          <a:ln/>
-        </p:spPr>
-        <p:txBody>
-          <a:bodyPr wrap="square" lIns="0" tIns="0" rIns="0" bIns="0" rtlCol="0" anchor="t"/>
-          <a:lstStyle/>
-          <a:p>
-            <a:pPr indent="0" marL="0">
-              <a:buNone/>
-            </a:pPr>
-            <a:r>
-              <a:rPr lang="en-US" sz="1800" dirty="0">
-                <a:solidFill>
-                  <a:srgbClr val="FFFFFF"/>
-                </a:solidFill>
-                <a:latin typeface="Courier New" pitchFamily="34" charset="0"/>
-                <a:ea typeface="Courier New" pitchFamily="34" charset="-122"/>
-                <a:cs typeface="Courier New" pitchFamily="34" charset="-120"/>
-              </a:rPr>
-              <a:t>df["fatturato"].max()</a:t>
-            </a:r>
-            <a:endParaRPr lang="en-US" sz="1800" dirty="0"/>
-          </a:p>
-        </p:txBody>
-      </p:sp>
-      <p:sp>
-        <p:nvSpPr>
-          <p:cNvPr id="12" name="card-out"/>
-          <p:cNvSpPr/>
-          <p:nvPr/>
-        </p:nvSpPr>
-        <p:spPr>
-          <a:xfrm>
-            <a:off x="548640" y="5303520"/>
-            <a:ext cx="5577840" cy="914400"/>
-          </a:xfrm>
-          <a:prstGeom prst="roundRect">
-            <a:avLst>
-              <a:gd name="adj" fmla="val 12000"/>
-            </a:avLst>
-          </a:prstGeom>
-          <a:solidFill>
-            <a:srgbClr val="EEF3F4"/>
-          </a:solidFill>
-          <a:ln/>
-        </p:spPr>
-      </p:sp>
-      <p:sp>
-        <p:nvSpPr>
-          <p:cNvPr id="13" name="Text 11"/>
-          <p:cNvSpPr txBox="1"/>
-          <p:nvPr/>
-        </p:nvSpPr>
-        <p:spPr>
-          <a:xfrm>
-            <a:off x="777240" y="5440680"/>
-            <a:ext cx="1828800" cy="274320"/>
-          </a:xfrm>
-          <a:prstGeom prst="rect">
-            <a:avLst/>
-          </a:prstGeom>
-          <a:noFill/>
-          <a:ln/>
-        </p:spPr>
-        <p:txBody>
-          <a:bodyPr wrap="square" lIns="0" tIns="0" rIns="0" bIns="0" rtlCol="0" anchor="ctr"/>
-          <a:lstStyle/>
-          <a:p>
-            <a:pPr indent="0" marL="0">
-              <a:buNone/>
-            </a:pPr>
-            <a:r>
-              <a:rPr lang="en-US" sz="1100" b="1" spc="200" kern="0" dirty="0">
-                <a:solidFill>
-                  <a:srgbClr val="5C6F7B"/>
-                </a:solidFill>
-              </a:rPr>
-              <a:t>OUTPUT</a:t>
-            </a:r>
-            <a:endParaRPr lang="en-US" sz="1100" dirty="0"/>
-          </a:p>
-        </p:txBody>
-      </p:sp>
-      <p:sp>
-        <p:nvSpPr>
-          <p:cNvPr id="14" name="Text 12"/>
-          <p:cNvSpPr txBox="1"/>
-          <p:nvPr/>
-        </p:nvSpPr>
-        <p:spPr>
-          <a:xfrm>
-            <a:off x="777240" y="5760720"/>
-            <a:ext cx="5120640" cy="320040"/>
-          </a:xfrm>
-          <a:prstGeom prst="rect">
-            <a:avLst/>
-          </a:prstGeom>
-          <a:noFill/>
-          <a:ln/>
-        </p:spPr>
-        <p:txBody>
-          <a:bodyPr wrap="square" lIns="0" tIns="0" rIns="0" bIns="0" rtlCol="0" anchor="t"/>
-          <a:lstStyle/>
-          <a:p>
-            <a:pPr indent="0" marL="0">
-              <a:buNone/>
-            </a:pPr>
-            <a:r>
-              <a:rPr lang="en-US" sz="1800" dirty="0">
-                <a:solidFill>
-                  <a:srgbClr val="1F2A30"/>
-                </a:solidFill>
-                <a:latin typeface="Courier New" pitchFamily="34" charset="0"/>
-                <a:ea typeface="Courier New" pitchFamily="34" charset="-122"/>
-                <a:cs typeface="Courier New" pitchFamily="34" charset="-120"/>
-              </a:rPr>
-              <a:t>'n.d.'</a:t>
-            </a:r>
-            <a:endParaRPr lang="en-US" sz="1800" dirty="0"/>
-          </a:p>
-        </p:txBody>
-      </p:sp>
-      <p:sp>
-        <p:nvSpPr>
-          <p:cNvPr id="15" name="Text 13"/>
-          <p:cNvSpPr txBox="1"/>
-          <p:nvPr/>
-        </p:nvSpPr>
-        <p:spPr>
-          <a:xfrm>
-            <a:off x="6675120" y="1737360"/>
-            <a:ext cx="4937760" cy="1280160"/>
-          </a:xfrm>
-          <a:prstGeom prst="rect">
-            <a:avLst/>
-          </a:prstGeom>
-          <a:noFill/>
-          <a:ln/>
-        </p:spPr>
-        <p:txBody>
-          <a:bodyPr wrap="square" lIns="0" tIns="0" rIns="0" bIns="0" rtlCol="0" anchor="t"/>
-          <a:lstStyle/>
-          <a:p>
-            <a:pPr indent="0" marL="0">
-              <a:buNone/>
-            </a:pPr>
-            <a:r>
-              <a:rPr lang="en-US" sz="2800" b="1" dirty="0">
-                <a:solidFill>
-                  <a:srgbClr val="9E2A2B"/>
-                </a:solidFill>
-              </a:rPr>
-              <a:t>La media si ferma con un errore. Il massimo no.</a:t>
-            </a:r>
-            <a:endParaRPr lang="en-US" sz="2800" dirty="0"/>
-          </a:p>
-        </p:txBody>
-      </p:sp>
-      <p:sp>
-        <p:nvSpPr>
-          <p:cNvPr id="16" name="Text 14"/>
-          <p:cNvSpPr txBox="1"/>
-          <p:nvPr/>
-        </p:nvSpPr>
-        <p:spPr>
-          <a:xfrm>
-            <a:off x="6675120" y="3200400"/>
-            <a:ext cx="4937760" cy="2926080"/>
-          </a:xfrm>
-          <a:prstGeom prst="rect">
-            <a:avLst/>
-          </a:prstGeom>
-          <a:noFill/>
-          <a:ln/>
-        </p:spPr>
-        <p:txBody>
-          <a:bodyPr wrap="square" lIns="0" tIns="0" rIns="0" bIns="0" rtlCol="0" anchor="t"/>
-          <a:lstStyle/>
-          <a:p>
-            <a:pPr indent="0" marL="0">
-              <a:spcAft>
-                <a:spcPts val="1000"/>
-              </a:spcAft>
-              <a:buNone/>
-            </a:pPr>
-            <a:r>
-              <a:rPr lang="en-US" sz="1800" dirty="0">
-                <a:solidFill>
-                  <a:srgbClr val="1F2A30"/>
-                </a:solidFill>
-              </a:rPr>
-              <a:t>Il massimo di un testo è in ordine alfabetico: «n» viene dopo le cifre.</a:t>
-            </a:r>
-            <a:endParaRPr lang="en-US" sz="1800" dirty="0"/>
-          </a:p>
-          <a:p>
-            <a:pPr indent="0" marL="0">
-              <a:spcAft>
-                <a:spcPts val="1000"/>
-              </a:spcAft>
-              <a:buNone/>
-            </a:pPr>
-            <a:r>
-              <a:rPr lang="en-US" sz="1800" dirty="0">
-                <a:solidFill>
-                  <a:srgbClr val="1F2A30"/>
-                </a:solidFill>
-              </a:rPr>
-              <a:t>Perché è testo? Il file usa la virgola decimale italiana (1.032,9) e contiene "n.d.".</a:t>
-            </a:r>
-            <a:endParaRPr lang="en-US" sz="1800" dirty="0"/>
-          </a:p>
-          <a:p>
-            <a:pPr indent="0" marL="0">
-              <a:spcAft>
-                <a:spcPts val="1000"/>
-              </a:spcAft>
-              <a:buNone/>
-            </a:pPr>
-            <a:r>
-              <a:rPr lang="en-US" sz="1800" b="1" dirty="0">
-                <a:solidFill>
-                  <a:srgbClr val="0F4C5C"/>
-                </a:solidFill>
-              </a:rPr>
-              <a:t>È la trappola "5000" * 2 della L1, su un file vero.</a:t>
-            </a:r>
-            <a:endParaRPr lang="en-US" sz="1800" dirty="0"/>
-          </a:p>
-        </p:txBody>
-      </p:sp>
-      <p:sp>
-        <p:nvSpPr>
-          <p:cNvPr id="25" name="Slide Number Placeholder 0"/>
-          <p:cNvSpPr>
-            <a:spLocks noGrp="1"/>
-          </p:cNvSpPr>
-          <p:nvPr>
-            <p:ph type="sldNum" sz="quarter" idx="4294967295"/>
-          </p:nvPr>
-        </p:nvSpPr>
-        <p:spPr>
-          <a:xfrm>
-            <a:off x="11155680" y="6400800"/>
-            <a:ext cx="457200" cy="274320"/>
-          </a:xfrm>
-          <a:prstGeom prst="rect">
-            <a:avLst/>
-          </a:prstGeom>
-          <a:extLst>
-            <a:ext uri="{C572A759-6A51-4108-AA02-DFA0A04FC94B}">
-              <ma14:wrappingTextBoxFlag xmlns:ma14="http://schemas.microsoft.com/office/mac/drawingml/2011/main" val="0"/>
-            </a:ext>
-          </a:extLst>
-        </p:spPr>
-        <p:txBody>
-          <a:bodyPr/>
-          <a:lstStyle>
-            <a:lvl1pPr>
-              <a:defRPr sz="1000">
-                <a:solidFill>
-                  <a:srgbClr val="5C6F7B"/>
-                </a:solidFill>
-              </a:defRPr>
-            </a:lvl1pPr>
-          </a:lstStyle>
-          <a:p>
-            <a:pPr algn="r"/>
-            <a:fld id="{F7021451-1387-4CA6-816F-3879F97B5CBC}" type="slidenum">
-              <a:rPr b="0" lang="en-US"/>
-              <a:t>11</a:t>
-            </a:fld>
-            <a:endParaRPr lang="en-US"/>
-          </a:p>
-        </p:txBody>
-      </p:sp>
-    </p:spTree>
-  </p:cSld>
-  <p:clrMapOvr>
-    <a:masterClrMapping/>
-  </p:clrMapOvr>
-</p:sld>
-</file>
-
-<file path=ppt/slides/slide12.xml><?xml version="1.0" encoding="utf-8"?>
-<p:sld xmlns:a="http://schemas.openxmlformats.org/drawingml/2006/main" xmlns:r="http://schemas.openxmlformats.org/officeDocument/2006/relationships" xmlns:p="http://schemas.openxmlformats.org/presentationml/2006/main">
-  <p:cSld name="Slide 12">
-    <p:spTree>
-      <p:nvGrpSpPr>
-        <p:cNvPr id="1" name=""/>
-        <p:cNvGrpSpPr/>
-        <p:nvPr/>
-      </p:nvGrpSpPr>
-      <p:grpSpPr>
-        <a:xfrm>
-          <a:off x="0" y="0"/>
-          <a:ext cx="0" cy="0"/>
-          <a:chOff x="0" y="0"/>
-          <a:chExt cx="0" cy="0"/>
-        </a:xfrm>
-      </p:grpSpPr>
-      <p:sp>
-        <p:nvSpPr>
-          <p:cNvPr id="2" name="Text 0"/>
-          <p:cNvSpPr/>
-          <p:nvPr>
-            <p:ph idx="100" type="title" hasCustomPrompt="1"/>
-          </p:nvPr>
-        </p:nvSpPr>
-        <p:spPr>
-          <a:xfrm>
-            <a:off x="548640" y="365760"/>
-            <a:ext cx="11064240" cy="822960"/>
-          </a:xfrm>
-          <a:prstGeom prst="rect">
-            <a:avLst/>
-          </a:prstGeom>
-          <a:noFill/>
-          <a:ln/>
-        </p:spPr>
-        <p:txBody>
-          <a:bodyPr wrap="square" lIns="0" tIns="0" rIns="0" bIns="0" rtlCol="0" anchor="ctr"/>
-          <a:lstStyle/>
-          <a:p>
-            <a:pPr algn="l" indent="0" marL="0">
-              <a:buNone/>
-            </a:pPr>
-            <a:r>
-              <a:rPr lang="en-US" sz="3600" b="1" dirty="0">
-                <a:solidFill>
-                  <a:srgbClr val="0F4C5C"/>
-                </a:solidFill>
-              </a:rPr>
-              <a:t>Lombardia non è lombardia</a:t>
-            </a:r>
-            <a:endParaRPr lang="en-US" sz="3600" dirty="0"/>
-          </a:p>
-        </p:txBody>
-      </p:sp>
-      <p:sp>
-        <p:nvSpPr>
-          <p:cNvPr id="3" name="card-out"/>
-          <p:cNvSpPr/>
-          <p:nvPr/>
-        </p:nvSpPr>
-        <p:spPr>
-          <a:xfrm>
-            <a:off x="548640" y="1737360"/>
-            <a:ext cx="5577840" cy="3657600"/>
-          </a:xfrm>
-          <a:prstGeom prst="roundRect">
-            <a:avLst>
-              <a:gd name="adj" fmla="val 3000"/>
-            </a:avLst>
-          </a:prstGeom>
-          <a:solidFill>
-            <a:srgbClr val="EEF3F4"/>
-          </a:solidFill>
-          <a:ln/>
-        </p:spPr>
-      </p:sp>
-      <p:sp>
-        <p:nvSpPr>
-          <p:cNvPr id="4" name="Text 2"/>
-          <p:cNvSpPr txBox="1"/>
-          <p:nvPr/>
-        </p:nvSpPr>
-        <p:spPr>
-          <a:xfrm>
-            <a:off x="777240" y="1874520"/>
-            <a:ext cx="1828800" cy="274320"/>
-          </a:xfrm>
-          <a:prstGeom prst="rect">
-            <a:avLst/>
-          </a:prstGeom>
-          <a:noFill/>
-          <a:ln/>
-        </p:spPr>
-        <p:txBody>
-          <a:bodyPr wrap="square" lIns="0" tIns="0" rIns="0" bIns="0" rtlCol="0" anchor="ctr"/>
-          <a:lstStyle/>
-          <a:p>
-            <a:pPr indent="0" marL="0">
-              <a:buNone/>
-            </a:pPr>
-            <a:r>
-              <a:rPr lang="en-US" sz="1100" b="1" spc="200" kern="0" dirty="0">
-                <a:solidFill>
-                  <a:srgbClr val="5C6F7B"/>
-                </a:solidFill>
-              </a:rPr>
-              <a:t>OUTPUT</a:t>
-            </a:r>
-            <a:endParaRPr lang="en-US" sz="1100" dirty="0"/>
-          </a:p>
-        </p:txBody>
-      </p:sp>
-      <p:sp>
-        <p:nvSpPr>
-          <p:cNvPr id="5" name="Text 3"/>
-          <p:cNvSpPr txBox="1"/>
-          <p:nvPr/>
-        </p:nvSpPr>
-        <p:spPr>
-          <a:xfrm>
-            <a:off x="777240" y="2194560"/>
-            <a:ext cx="5120640" cy="3063240"/>
-          </a:xfrm>
-          <a:prstGeom prst="rect">
-            <a:avLst/>
-          </a:prstGeom>
-          <a:noFill/>
-          <a:ln/>
-        </p:spPr>
-        <p:txBody>
-          <a:bodyPr wrap="square" lIns="0" tIns="0" rIns="0" bIns="0" rtlCol="0" anchor="t"/>
-          <a:lstStyle/>
-          <a:p>
-            <a:pPr indent="0" marL="0">
-              <a:buNone/>
-            </a:pPr>
-            <a:r>
-              <a:rPr lang="en-US" sz="1800" dirty="0">
-                <a:solidFill>
-                  <a:srgbClr val="1F2A30"/>
-                </a:solidFill>
-                <a:latin typeface="Courier New" pitchFamily="34" charset="0"/>
-                <a:ea typeface="Courier New" pitchFamily="34" charset="-122"/>
-                <a:cs typeface="Courier New" pitchFamily="34" charset="-120"/>
-              </a:rPr>
-              <a:t>Lombardia      302</a:t>
-            </a:r>
-            <a:endParaRPr lang="en-US" sz="1800" dirty="0"/>
-          </a:p>
-          <a:p>
-            <a:pPr indent="0" marL="0">
-              <a:buNone/>
-            </a:pPr>
-            <a:r>
-              <a:rPr lang="en-US" sz="1800" dirty="0">
-                <a:solidFill>
-                  <a:srgbClr val="1F2A30"/>
-                </a:solidFill>
-                <a:latin typeface="Courier New" pitchFamily="34" charset="0"/>
-                <a:ea typeface="Courier New" pitchFamily="34" charset="-122"/>
-                <a:cs typeface="Courier New" pitchFamily="34" charset="-120"/>
-              </a:rPr>
-              <a:t>...</a:t>
-            </a:r>
-            <a:endParaRPr lang="en-US" sz="1800" dirty="0"/>
-          </a:p>
-          <a:p>
-            <a:pPr indent="0" marL="0">
-              <a:buNone/>
-            </a:pPr>
-            <a:r>
-              <a:rPr lang="en-US" sz="1800" dirty="0">
-                <a:solidFill>
-                  <a:srgbClr val="1F2A30"/>
-                </a:solidFill>
-                <a:latin typeface="Courier New" pitchFamily="34" charset="0"/>
-                <a:ea typeface="Courier New" pitchFamily="34" charset="-122"/>
-                <a:cs typeface="Courier New" pitchFamily="34" charset="-120"/>
-              </a:rPr>
-              <a:t>lombardia       35</a:t>
-            </a:r>
-            <a:endParaRPr lang="en-US" sz="1800" dirty="0"/>
-          </a:p>
-          <a:p>
-            <a:pPr indent="0" marL="0">
-              <a:buNone/>
-            </a:pPr>
-            <a:r>
-              <a:rPr lang="en-US" sz="1800" dirty="0">
-                <a:solidFill>
-                  <a:srgbClr val="1F2A30"/>
-                </a:solidFill>
-                <a:latin typeface="Courier New" pitchFamily="34" charset="0"/>
-                <a:ea typeface="Courier New" pitchFamily="34" charset="-122"/>
-                <a:cs typeface="Courier New" pitchFamily="34" charset="-120"/>
-              </a:rPr>
-              <a:t>Lombardia       30</a:t>
-            </a:r>
-            <a:endParaRPr lang="en-US" sz="1800" dirty="0"/>
-          </a:p>
-          <a:p>
-            <a:pPr indent="0" marL="0">
-              <a:buNone/>
-            </a:pPr>
-            <a:r>
-              <a:rPr lang="en-US" sz="1800" dirty="0">
-                <a:solidFill>
-                  <a:srgbClr val="1F2A30"/>
-                </a:solidFill>
-                <a:latin typeface="Courier New" pitchFamily="34" charset="0"/>
-                <a:ea typeface="Courier New" pitchFamily="34" charset="-122"/>
-                <a:cs typeface="Courier New" pitchFamily="34" charset="-120"/>
-              </a:rPr>
-              <a:t>LOMBARDIA       30</a:t>
-            </a:r>
-            <a:endParaRPr lang="en-US" sz="1800" dirty="0"/>
-          </a:p>
-          <a:p>
-            <a:pPr indent="0" marL="0">
-              <a:buNone/>
-            </a:pPr>
-            <a:r>
-              <a:rPr lang="en-US" sz="1800" dirty="0">
-                <a:solidFill>
-                  <a:srgbClr val="1F2A30"/>
-                </a:solidFill>
-                <a:latin typeface="Courier New" pitchFamily="34" charset="0"/>
-                <a:ea typeface="Courier New" pitchFamily="34" charset="-122"/>
-                <a:cs typeface="Courier New" pitchFamily="34" charset="-120"/>
-              </a:rPr>
-              <a:t>Emilia-Romagna 147</a:t>
-            </a:r>
-            <a:endParaRPr lang="en-US" sz="1800" dirty="0"/>
-          </a:p>
-          <a:p>
-            <a:pPr indent="0" marL="0">
-              <a:buNone/>
-            </a:pPr>
-            <a:r>
-              <a:rPr lang="en-US" sz="1800" dirty="0">
-                <a:solidFill>
-                  <a:srgbClr val="1F2A30"/>
-                </a:solidFill>
-                <a:latin typeface="Courier New" pitchFamily="34" charset="0"/>
-                <a:ea typeface="Courier New" pitchFamily="34" charset="-122"/>
-                <a:cs typeface="Courier New" pitchFamily="34" charset="-120"/>
-              </a:rPr>
-              <a:t>Emilia Romagna  46</a:t>
-            </a:r>
-            <a:endParaRPr lang="en-US" sz="1800" dirty="0"/>
-          </a:p>
-        </p:txBody>
-      </p:sp>
-      <p:sp>
-        <p:nvSpPr>
-          <p:cNvPr id="6" name="Text 4"/>
-          <p:cNvSpPr txBox="1"/>
-          <p:nvPr/>
-        </p:nvSpPr>
-        <p:spPr>
-          <a:xfrm>
-            <a:off x="6675120" y="1828800"/>
-            <a:ext cx="4937760" cy="3657600"/>
-          </a:xfrm>
-          <a:prstGeom prst="rect">
-            <a:avLst/>
-          </a:prstGeom>
-          <a:noFill/>
-          <a:ln/>
-        </p:spPr>
-        <p:txBody>
-          <a:bodyPr wrap="square" lIns="0" tIns="0" rIns="0" bIns="0" rtlCol="0" anchor="t"/>
-          <a:lstStyle/>
-          <a:p>
-            <a:pPr indent="0" marL="0">
-              <a:spcAft>
-                <a:spcPts val="1000"/>
-              </a:spcAft>
-              <a:buNone/>
-            </a:pPr>
-            <a:r>
-              <a:rPr lang="en-US" sz="1900" dirty="0">
-                <a:solidFill>
-                  <a:srgbClr val="1F2A30"/>
-                </a:solidFill>
-              </a:rPr>
-              <a:t>Per Python sono valori diversi: maiuscole, spazi finali, trattini.</a:t>
-            </a:r>
-            <a:endParaRPr lang="en-US" sz="1900" dirty="0"/>
-          </a:p>
-          <a:p>
-            <a:pPr indent="0" marL="0">
-              <a:spcAft>
-                <a:spcPts val="1000"/>
-              </a:spcAft>
-              <a:buNone/>
-            </a:pPr>
-            <a:r>
-              <a:rPr lang="en-US" sz="1900" dirty="0">
-                <a:solidFill>
-                  <a:srgbClr val="1F2A30"/>
-                </a:solidFill>
-              </a:rPr>
-              <a:t>Le due «Lombardia» uguali? Una ha uno spazio alla fine: non si vede, ma c'è.</a:t>
-            </a:r>
-            <a:endParaRPr lang="en-US" sz="1900" dirty="0"/>
-          </a:p>
-          <a:p>
-            <a:pPr indent="0" marL="0">
-              <a:spcAft>
-                <a:spcPts val="1000"/>
-              </a:spcAft>
-              <a:buNone/>
-            </a:pPr>
-            <a:r>
-              <a:rPr lang="en-US" sz="1900" b="1" dirty="0">
-                <a:solidFill>
-                  <a:srgbClr val="9E2A2B"/>
-                </a:solidFill>
-              </a:rPr>
-              <a:t>Se raggruppi per regione così com'è, la Lombardia viene spezzata in quattro.</a:t>
-            </a:r>
-            <a:endParaRPr lang="en-US" sz="1900" dirty="0"/>
-          </a:p>
-        </p:txBody>
-      </p:sp>
-      <p:sp>
-        <p:nvSpPr>
-          <p:cNvPr id="25" name="Slide Number Placeholder 0"/>
-          <p:cNvSpPr>
-            <a:spLocks noGrp="1"/>
-          </p:cNvSpPr>
-          <p:nvPr>
-            <p:ph type="sldNum" sz="quarter" idx="4294967295"/>
-          </p:nvPr>
-        </p:nvSpPr>
-        <p:spPr>
-          <a:xfrm>
-            <a:off x="11155680" y="6400800"/>
-            <a:ext cx="457200" cy="274320"/>
-          </a:xfrm>
-          <a:prstGeom prst="rect">
-            <a:avLst/>
-          </a:prstGeom>
-          <a:extLst>
-            <a:ext uri="{C572A759-6A51-4108-AA02-DFA0A04FC94B}">
-              <ma14:wrappingTextBoxFlag xmlns:ma14="http://schemas.microsoft.com/office/mac/drawingml/2011/main" val="0"/>
-            </a:ext>
-          </a:extLst>
-        </p:spPr>
-        <p:txBody>
-          <a:bodyPr/>
-          <a:lstStyle>
-            <a:lvl1pPr>
-              <a:defRPr sz="1000">
-                <a:solidFill>
-                  <a:srgbClr val="5C6F7B"/>
-                </a:solidFill>
-              </a:defRPr>
-            </a:lvl1pPr>
-          </a:lstStyle>
-          <a:p>
-            <a:pPr algn="r"/>
-            <a:fld id="{F7021451-1387-4CA6-816F-3879F97B5CBC}" type="slidenum">
-              <a:rPr b="0" lang="en-US"/>
-              <a:t>12</a:t>
-            </a:fld>
-            <a:endParaRPr lang="en-US"/>
-          </a:p>
-        </p:txBody>
-      </p:sp>
-    </p:spTree>
-  </p:cSld>
-  <p:clrMapOvr>
-    <a:masterClrMapping/>
-  </p:clrMapOvr>
-</p:sld>
-</file>
-
-<file path=ppt/slides/slide13.xml><?xml version="1.0" encoding="utf-8"?>
-<p:sld xmlns:a="http://schemas.openxmlformats.org/drawingml/2006/main" xmlns:r="http://schemas.openxmlformats.org/officeDocument/2006/relationships" xmlns:p="http://schemas.openxmlformats.org/presentationml/2006/main">
-  <p:cSld name="Slide 13">
-    <p:spTree>
-      <p:nvGrpSpPr>
-        <p:cNvPr id="1" name=""/>
-        <p:cNvGrpSpPr/>
-        <p:nvPr/>
-      </p:nvGrpSpPr>
-      <p:grpSpPr>
-        <a:xfrm>
-          <a:off x="0" y="0"/>
-          <a:ext cx="0" cy="0"/>
-          <a:chOff x="0" y="0"/>
-          <a:chExt cx="0" cy="0"/>
-        </a:xfrm>
-      </p:grpSpPr>
-      <p:sp>
-        <p:nvSpPr>
-          <p:cNvPr id="2" name="Text 0"/>
-          <p:cNvSpPr/>
-          <p:nvPr>
-            <p:ph idx="100" type="title" hasCustomPrompt="1"/>
-          </p:nvPr>
-        </p:nvSpPr>
-        <p:spPr>
-          <a:xfrm>
-            <a:off x="548640" y="365760"/>
-            <a:ext cx="11064240" cy="822960"/>
-          </a:xfrm>
-          <a:prstGeom prst="rect">
-            <a:avLst/>
-          </a:prstGeom>
-          <a:noFill/>
-          <a:ln/>
-        </p:spPr>
-        <p:txBody>
-          <a:bodyPr wrap="square" lIns="0" tIns="0" rIns="0" bIns="0" rtlCol="0" anchor="ctr"/>
-          <a:lstStyle/>
-          <a:p>
-            <a:pPr algn="l" indent="0" marL="0">
-              <a:buNone/>
-            </a:pPr>
-            <a:r>
-              <a:rPr lang="en-US" sz="3600" b="1" dirty="0">
-                <a:solidFill>
-                  <a:srgbClr val="0F4C5C"/>
-                </a:solidFill>
-              </a:rPr>
-              <a:t>Cosa abbiamo trovato</a:t>
-            </a:r>
-            <a:endParaRPr lang="en-US" sz="3600" dirty="0"/>
-          </a:p>
-        </p:txBody>
-      </p:sp>
-      <p:sp>
-        <p:nvSpPr>
-          <p:cNvPr id="3" name="Shape 1"/>
-          <p:cNvSpPr/>
-          <p:nvPr/>
-        </p:nvSpPr>
-        <p:spPr>
-          <a:xfrm>
-            <a:off x="548640" y="1737360"/>
-            <a:ext cx="5440680" cy="1645920"/>
-          </a:xfrm>
-          <a:prstGeom prst="roundRect">
-            <a:avLst>
-              <a:gd name="adj" fmla="val 6667"/>
-            </a:avLst>
-          </a:prstGeom>
-          <a:solidFill>
-            <a:srgbClr val="EEF3F4"/>
-          </a:solidFill>
-          <a:ln/>
-        </p:spPr>
-      </p:sp>
-      <p:sp>
-        <p:nvSpPr>
-          <p:cNvPr id="4" name="Shape 2"/>
-          <p:cNvSpPr/>
-          <p:nvPr/>
-        </p:nvSpPr>
-        <p:spPr>
-          <a:xfrm>
-            <a:off x="822960" y="2103120"/>
-            <a:ext cx="914400" cy="914400"/>
-          </a:xfrm>
-          <a:prstGeom prst="ellipse">
-            <a:avLst/>
-          </a:prstGeom>
-          <a:solidFill>
-            <a:srgbClr val="FFFFFF"/>
-          </a:solidFill>
-          <a:ln/>
-        </p:spPr>
-      </p:sp>
-      <p:pic>
-        <p:nvPicPr>
-          <p:cNvPr id="5" name="Image 0" descr="preencoded.png">    </p:cNvPr>
-          <p:cNvPicPr>
-            <a:picLocks noChangeAspect="1"/>
-          </p:cNvPicPr>
-          <p:nvPr/>
-        </p:nvPicPr>
-        <p:blipFill>
-          <a:blip r:embed="rId1"/>
-          <a:stretch>
-            <a:fillRect/>
-          </a:stretch>
-        </p:blipFill>
-        <p:spPr>
-          <a:xfrm>
-            <a:off x="1069848" y="2350008"/>
-            <a:ext cx="420624" cy="420624"/>
-          </a:xfrm>
-          <a:prstGeom prst="rect">
-            <a:avLst/>
-          </a:prstGeom>
-        </p:spPr>
-      </p:pic>
-      <p:sp>
-        <p:nvSpPr>
-          <p:cNvPr id="6" name="Text 3"/>
-          <p:cNvSpPr txBox="1"/>
-          <p:nvPr/>
-        </p:nvSpPr>
-        <p:spPr>
-          <a:xfrm>
-            <a:off x="2011680" y="2103120"/>
-            <a:ext cx="3749040" cy="457200"/>
-          </a:xfrm>
-          <a:prstGeom prst="rect">
-            <a:avLst/>
-          </a:prstGeom>
-          <a:noFill/>
-          <a:ln/>
-        </p:spPr>
-        <p:txBody>
-          <a:bodyPr wrap="square" lIns="0" tIns="0" rIns="0" bIns="0" rtlCol="0" anchor="ctr"/>
-          <a:lstStyle/>
-          <a:p>
-            <a:pPr indent="0" marL="0">
-              <a:buNone/>
-            </a:pPr>
-            <a:r>
-              <a:rPr lang="en-US" sz="2200" b="1" dirty="0">
-                <a:solidFill>
-                  <a:srgbClr val="1F2A30"/>
-                </a:solidFill>
-              </a:rPr>
-              <a:t>Fatturato come testo</a:t>
-            </a:r>
-            <a:endParaRPr lang="en-US" sz="2200" dirty="0"/>
-          </a:p>
-        </p:txBody>
-      </p:sp>
-      <p:sp>
-        <p:nvSpPr>
-          <p:cNvPr id="7" name="Text 4"/>
-          <p:cNvSpPr txBox="1"/>
-          <p:nvPr/>
-        </p:nvSpPr>
-        <p:spPr>
-          <a:xfrm>
-            <a:off x="2011680" y="2560320"/>
-            <a:ext cx="3749040" cy="548640"/>
-          </a:xfrm>
-          <a:prstGeom prst="rect">
-            <a:avLst/>
-          </a:prstGeom>
-          <a:noFill/>
-          <a:ln/>
-        </p:spPr>
-        <p:txBody>
-          <a:bodyPr wrap="square" lIns="0" tIns="0" rIns="0" bIns="0" rtlCol="0" anchor="t"/>
-          <a:lstStyle/>
-          <a:p>
-            <a:pPr indent="0" marL="0">
-              <a:buNone/>
-            </a:pPr>
-            <a:r>
-              <a:rPr lang="en-US" sz="1600" dirty="0">
-                <a:solidFill>
-                  <a:srgbClr val="5C6F7B"/>
-                </a:solidFill>
-              </a:rPr>
-              <a:t>virgola decimale e "n.d."</a:t>
-            </a:r>
-            <a:endParaRPr lang="en-US" sz="1600" dirty="0"/>
-          </a:p>
-        </p:txBody>
-      </p:sp>
-      <p:sp>
-        <p:nvSpPr>
-          <p:cNvPr id="8" name="Shape 5"/>
-          <p:cNvSpPr/>
-          <p:nvPr/>
-        </p:nvSpPr>
-        <p:spPr>
-          <a:xfrm>
-            <a:off x="6172200" y="1737360"/>
-            <a:ext cx="5440680" cy="1645920"/>
-          </a:xfrm>
-          <a:prstGeom prst="roundRect">
-            <a:avLst>
-              <a:gd name="adj" fmla="val 6667"/>
-            </a:avLst>
-          </a:prstGeom>
-          <a:solidFill>
-            <a:srgbClr val="EEF3F4"/>
-          </a:solidFill>
-          <a:ln/>
-        </p:spPr>
-      </p:sp>
-      <p:sp>
-        <p:nvSpPr>
-          <p:cNvPr id="9" name="Shape 6"/>
-          <p:cNvSpPr/>
-          <p:nvPr/>
-        </p:nvSpPr>
-        <p:spPr>
-          <a:xfrm>
-            <a:off x="6446520" y="2103120"/>
-            <a:ext cx="914400" cy="914400"/>
-          </a:xfrm>
-          <a:prstGeom prst="ellipse">
-            <a:avLst/>
-          </a:prstGeom>
-          <a:solidFill>
-            <a:srgbClr val="FFFFFF"/>
-          </a:solidFill>
-          <a:ln/>
-        </p:spPr>
-      </p:sp>
-      <p:pic>
-        <p:nvPicPr>
-          <p:cNvPr id="10" name="Image 1" descr="preencoded.png">    </p:cNvPr>
-          <p:cNvPicPr>
-            <a:picLocks noChangeAspect="1"/>
-          </p:cNvPicPr>
-          <p:nvPr/>
-        </p:nvPicPr>
-        <p:blipFill>
-          <a:blip r:embed="rId2"/>
-          <a:stretch>
-            <a:fillRect/>
-          </a:stretch>
-        </p:blipFill>
-        <p:spPr>
-          <a:xfrm>
-            <a:off x="6693408" y="2350008"/>
-            <a:ext cx="420624" cy="420624"/>
-          </a:xfrm>
-          <a:prstGeom prst="rect">
-            <a:avLst/>
-          </a:prstGeom>
-        </p:spPr>
-      </p:pic>
-      <p:sp>
-        <p:nvSpPr>
-          <p:cNvPr id="11" name="Text 7"/>
-          <p:cNvSpPr txBox="1"/>
-          <p:nvPr/>
-        </p:nvSpPr>
-        <p:spPr>
-          <a:xfrm>
-            <a:off x="7635240" y="2103120"/>
-            <a:ext cx="3749040" cy="457200"/>
-          </a:xfrm>
-          <a:prstGeom prst="rect">
-            <a:avLst/>
-          </a:prstGeom>
-          <a:noFill/>
-          <a:ln/>
-        </p:spPr>
-        <p:txBody>
-          <a:bodyPr wrap="square" lIns="0" tIns="0" rIns="0" bIns="0" rtlCol="0" anchor="ctr"/>
-          <a:lstStyle/>
-          <a:p>
-            <a:pPr indent="0" marL="0">
-              <a:buNone/>
-            </a:pPr>
-            <a:r>
-              <a:rPr lang="en-US" sz="2200" b="1" dirty="0">
-                <a:solidFill>
-                  <a:srgbClr val="1F2A30"/>
-                </a:solidFill>
-              </a:rPr>
-              <a:t>15 righe in più</a:t>
-            </a:r>
-            <a:endParaRPr lang="en-US" sz="2200" dirty="0"/>
-          </a:p>
-        </p:txBody>
-      </p:sp>
-      <p:sp>
-        <p:nvSpPr>
-          <p:cNvPr id="12" name="Text 8"/>
-          <p:cNvSpPr txBox="1"/>
-          <p:nvPr/>
-        </p:nvSpPr>
-        <p:spPr>
-          <a:xfrm>
-            <a:off x="7635240" y="2560320"/>
-            <a:ext cx="3749040" cy="548640"/>
-          </a:xfrm>
-          <a:prstGeom prst="rect">
-            <a:avLst/>
-          </a:prstGeom>
-          <a:noFill/>
-          <a:ln/>
-        </p:spPr>
-        <p:txBody>
-          <a:bodyPr wrap="square" lIns="0" tIns="0" rIns="0" bIns="0" rtlCol="0" anchor="t"/>
-          <a:lstStyle/>
-          <a:p>
-            <a:pPr indent="0" marL="0">
-              <a:buNone/>
-            </a:pPr>
-            <a:r>
-              <a:rPr lang="en-US" sz="1600" dirty="0">
-                <a:solidFill>
-                  <a:srgbClr val="5C6F7B"/>
-                </a:solidFill>
-              </a:rPr>
-              <a:t>probabili duplicati</a:t>
-            </a:r>
-            <a:endParaRPr lang="en-US" sz="1600" dirty="0"/>
-          </a:p>
-        </p:txBody>
-      </p:sp>
-      <p:sp>
-        <p:nvSpPr>
-          <p:cNvPr id="13" name="Shape 9"/>
-          <p:cNvSpPr/>
-          <p:nvPr/>
-        </p:nvSpPr>
-        <p:spPr>
-          <a:xfrm>
-            <a:off x="548640" y="3657600"/>
-            <a:ext cx="5440680" cy="1645920"/>
-          </a:xfrm>
-          <a:prstGeom prst="roundRect">
-            <a:avLst>
-              <a:gd name="adj" fmla="val 6667"/>
-            </a:avLst>
-          </a:prstGeom>
-          <a:solidFill>
-            <a:srgbClr val="EEF3F4"/>
-          </a:solidFill>
-          <a:ln/>
-        </p:spPr>
-      </p:sp>
-      <p:sp>
-        <p:nvSpPr>
-          <p:cNvPr id="14" name="Shape 10"/>
-          <p:cNvSpPr/>
-          <p:nvPr/>
-        </p:nvSpPr>
-        <p:spPr>
-          <a:xfrm>
-            <a:off x="822960" y="4023360"/>
-            <a:ext cx="914400" cy="914400"/>
-          </a:xfrm>
-          <a:prstGeom prst="ellipse">
-            <a:avLst/>
-          </a:prstGeom>
-          <a:solidFill>
-            <a:srgbClr val="FFFFFF"/>
-          </a:solidFill>
-          <a:ln/>
-        </p:spPr>
-      </p:sp>
-      <p:pic>
-        <p:nvPicPr>
-          <p:cNvPr id="15" name="Image 2" descr="preencoded.png">    </p:cNvPr>
-          <p:cNvPicPr>
-            <a:picLocks noChangeAspect="1"/>
-          </p:cNvPicPr>
-          <p:nvPr/>
-        </p:nvPicPr>
-        <p:blipFill>
-          <a:blip r:embed="rId3"/>
-          <a:stretch>
-            <a:fillRect/>
-          </a:stretch>
-        </p:blipFill>
-        <p:spPr>
-          <a:xfrm>
-            <a:off x="1069848" y="4270248"/>
-            <a:ext cx="420624" cy="420624"/>
-          </a:xfrm>
-          <a:prstGeom prst="rect">
-            <a:avLst/>
-          </a:prstGeom>
-        </p:spPr>
-      </p:pic>
-      <p:sp>
-        <p:nvSpPr>
-          <p:cNvPr id="16" name="Text 11"/>
-          <p:cNvSpPr txBox="1"/>
-          <p:nvPr/>
-        </p:nvSpPr>
-        <p:spPr>
-          <a:xfrm>
-            <a:off x="2011680" y="4023360"/>
-            <a:ext cx="3749040" cy="457200"/>
-          </a:xfrm>
-          <a:prstGeom prst="rect">
-            <a:avLst/>
-          </a:prstGeom>
-          <a:noFill/>
-          <a:ln/>
-        </p:spPr>
-        <p:txBody>
-          <a:bodyPr wrap="square" lIns="0" tIns="0" rIns="0" bIns="0" rtlCol="0" anchor="ctr"/>
-          <a:lstStyle/>
-          <a:p>
-            <a:pPr indent="0" marL="0">
-              <a:buNone/>
-            </a:pPr>
-            <a:r>
-              <a:rPr lang="en-US" sz="2200" b="1" dirty="0">
-                <a:solidFill>
-                  <a:srgbClr val="1F2A30"/>
-                </a:solidFill>
-              </a:rPr>
-              <a:t>Regioni scritte male</a:t>
-            </a:r>
-            <a:endParaRPr lang="en-US" sz="2200" dirty="0"/>
-          </a:p>
-        </p:txBody>
-      </p:sp>
-      <p:sp>
-        <p:nvSpPr>
-          <p:cNvPr id="17" name="Text 12"/>
-          <p:cNvSpPr txBox="1"/>
-          <p:nvPr/>
-        </p:nvSpPr>
-        <p:spPr>
-          <a:xfrm>
-            <a:off x="2011680" y="4480560"/>
-            <a:ext cx="3749040" cy="548640"/>
-          </a:xfrm>
-          <a:prstGeom prst="rect">
-            <a:avLst/>
-          </a:prstGeom>
-          <a:noFill/>
-          <a:ln/>
-        </p:spPr>
-        <p:txBody>
-          <a:bodyPr wrap="square" lIns="0" tIns="0" rIns="0" bIns="0" rtlCol="0" anchor="t"/>
-          <a:lstStyle/>
-          <a:p>
-            <a:pPr indent="0" marL="0">
-              <a:buNone/>
-            </a:pPr>
-            <a:r>
-              <a:rPr lang="en-US" sz="1600" dirty="0">
-                <a:solidFill>
-                  <a:srgbClr val="5C6F7B"/>
-                </a:solidFill>
-              </a:rPr>
-              <a:t>maiuscole, spazi, trattini</a:t>
-            </a:r>
-            <a:endParaRPr lang="en-US" sz="1600" dirty="0"/>
-          </a:p>
-        </p:txBody>
-      </p:sp>
-      <p:sp>
-        <p:nvSpPr>
-          <p:cNvPr id="18" name="Shape 13"/>
-          <p:cNvSpPr/>
-          <p:nvPr/>
-        </p:nvSpPr>
-        <p:spPr>
-          <a:xfrm>
-            <a:off x="6172200" y="3657600"/>
-            <a:ext cx="5440680" cy="1645920"/>
-          </a:xfrm>
-          <a:prstGeom prst="roundRect">
-            <a:avLst>
-              <a:gd name="adj" fmla="val 6667"/>
-            </a:avLst>
-          </a:prstGeom>
-          <a:solidFill>
-            <a:srgbClr val="EEF3F4"/>
-          </a:solidFill>
-          <a:ln/>
-        </p:spPr>
-      </p:sp>
-      <p:sp>
-        <p:nvSpPr>
-          <p:cNvPr id="19" name="Shape 14"/>
-          <p:cNvSpPr/>
-          <p:nvPr/>
-        </p:nvSpPr>
-        <p:spPr>
-          <a:xfrm>
-            <a:off x="6446520" y="4023360"/>
-            <a:ext cx="914400" cy="914400"/>
-          </a:xfrm>
-          <a:prstGeom prst="ellipse">
-            <a:avLst/>
-          </a:prstGeom>
-          <a:solidFill>
-            <a:srgbClr val="FFFFFF"/>
-          </a:solidFill>
-          <a:ln/>
-        </p:spPr>
-      </p:sp>
-      <p:pic>
-        <p:nvPicPr>
-          <p:cNvPr id="20" name="Image 3" descr="preencoded.png">    </p:cNvPr>
-          <p:cNvPicPr>
-            <a:picLocks noChangeAspect="1"/>
-          </p:cNvPicPr>
-          <p:nvPr/>
-        </p:nvPicPr>
-        <p:blipFill>
-          <a:blip r:embed="rId4"/>
-          <a:stretch>
-            <a:fillRect/>
-          </a:stretch>
-        </p:blipFill>
-        <p:spPr>
-          <a:xfrm>
-            <a:off x="6693408" y="4270248"/>
-            <a:ext cx="420624" cy="420624"/>
-          </a:xfrm>
-          <a:prstGeom prst="rect">
-            <a:avLst/>
-          </a:prstGeom>
-        </p:spPr>
-      </p:pic>
-      <p:sp>
-        <p:nvSpPr>
-          <p:cNvPr id="21" name="Text 15"/>
-          <p:cNvSpPr txBox="1"/>
-          <p:nvPr/>
-        </p:nvSpPr>
-        <p:spPr>
-          <a:xfrm>
-            <a:off x="7635240" y="4023360"/>
-            <a:ext cx="3749040" cy="457200"/>
-          </a:xfrm>
-          <a:prstGeom prst="rect">
-            <a:avLst/>
-          </a:prstGeom>
-          <a:noFill/>
-          <a:ln/>
-        </p:spPr>
-        <p:txBody>
-          <a:bodyPr wrap="square" lIns="0" tIns="0" rIns="0" bIns="0" rtlCol="0" anchor="ctr"/>
-          <a:lstStyle/>
-          <a:p>
-            <a:pPr indent="0" marL="0">
-              <a:buNone/>
-            </a:pPr>
-            <a:r>
-              <a:rPr lang="en-US" sz="2200" b="1" dirty="0">
-                <a:solidFill>
-                  <a:srgbClr val="1F2A30"/>
-                </a:solidFill>
-              </a:rPr>
-              <a:t>Addetti negativi</a:t>
-            </a:r>
-            <a:endParaRPr lang="en-US" sz="2200" dirty="0"/>
-          </a:p>
-        </p:txBody>
-      </p:sp>
-      <p:sp>
-        <p:nvSpPr>
-          <p:cNvPr id="22" name="Text 16"/>
-          <p:cNvSpPr txBox="1"/>
-          <p:nvPr/>
-        </p:nvSpPr>
-        <p:spPr>
-          <a:xfrm>
-            <a:off x="7635240" y="4480560"/>
-            <a:ext cx="3749040" cy="548640"/>
-          </a:xfrm>
-          <a:prstGeom prst="rect">
-            <a:avLst/>
-          </a:prstGeom>
-          <a:noFill/>
-          <a:ln/>
-        </p:spPr>
-        <p:txBody>
-          <a:bodyPr wrap="square" lIns="0" tIns="0" rIns="0" bIns="0" rtlCol="0" anchor="t"/>
-          <a:lstStyle/>
-          <a:p>
-            <a:pPr indent="0" marL="0">
-              <a:buNone/>
-            </a:pPr>
-            <a:r>
-              <a:rPr lang="en-US" sz="1600" dirty="0">
-                <a:solidFill>
-                  <a:srgbClr val="5C6F7B"/>
-                </a:solidFill>
-              </a:rPr>
-              <a:t>-12: impossibile (bonus)</a:t>
-            </a:r>
-            <a:endParaRPr lang="en-US" sz="1600" dirty="0"/>
-          </a:p>
-        </p:txBody>
-      </p:sp>
-      <p:sp>
-        <p:nvSpPr>
-          <p:cNvPr id="23" name="Text 17"/>
-          <p:cNvSpPr txBox="1"/>
-          <p:nvPr/>
-        </p:nvSpPr>
-        <p:spPr>
-          <a:xfrm>
-            <a:off x="548640" y="5623560"/>
-            <a:ext cx="11064240" cy="457200"/>
-          </a:xfrm>
-          <a:prstGeom prst="rect">
-            <a:avLst/>
-          </a:prstGeom>
-          <a:noFill/>
-          <a:ln/>
-        </p:spPr>
-        <p:txBody>
-          <a:bodyPr wrap="square" lIns="0" tIns="0" rIns="0" bIns="0" rtlCol="0" anchor="ctr"/>
-          <a:lstStyle/>
-          <a:p>
-            <a:pPr indent="0" marL="0">
-              <a:buNone/>
-            </a:pPr>
-            <a:r>
-              <a:rPr lang="en-US" sz="1800" i="1" dirty="0">
-                <a:solidFill>
-                  <a:srgbClr val="0F4C5C"/>
-                </a:solidFill>
-              </a:rPr>
-              <a:t>Solo uno di questi problemi ha prodotto un errore. Gli altri erano silenziosi.</a:t>
-            </a:r>
-            <a:endParaRPr lang="en-US" sz="1800" dirty="0"/>
-          </a:p>
-        </p:txBody>
-      </p:sp>
-      <p:sp>
-        <p:nvSpPr>
-          <p:cNvPr id="25" name="Slide Number Placeholder 0"/>
-          <p:cNvSpPr>
-            <a:spLocks noGrp="1"/>
-          </p:cNvSpPr>
-          <p:nvPr>
-            <p:ph type="sldNum" sz="quarter" idx="4294967295"/>
-          </p:nvPr>
-        </p:nvSpPr>
-        <p:spPr>
-          <a:xfrm>
-            <a:off x="11155680" y="6400800"/>
-            <a:ext cx="457200" cy="274320"/>
-          </a:xfrm>
-          <a:prstGeom prst="rect">
-            <a:avLst/>
-          </a:prstGeom>
-          <a:extLst>
-            <a:ext uri="{C572A759-6A51-4108-AA02-DFA0A04FC94B}">
-              <ma14:wrappingTextBoxFlag xmlns:ma14="http://schemas.microsoft.com/office/mac/drawingml/2011/main" val="0"/>
-            </a:ext>
-          </a:extLst>
-        </p:spPr>
-        <p:txBody>
-          <a:bodyPr/>
-          <a:lstStyle>
-            <a:lvl1pPr>
-              <a:defRPr sz="1000">
-                <a:solidFill>
-                  <a:srgbClr val="5C6F7B"/>
-                </a:solidFill>
-              </a:defRPr>
-            </a:lvl1pPr>
-          </a:lstStyle>
-          <a:p>
-            <a:pPr algn="r"/>
-            <a:fld id="{F7021451-1387-4CA6-816F-3879F97B5CBC}" type="slidenum">
-              <a:rPr b="0" lang="en-US"/>
-              <a:t>13</a:t>
-            </a:fld>
-            <a:endParaRPr lang="en-US"/>
-          </a:p>
-        </p:txBody>
-      </p:sp>
-    </p:spTree>
-  </p:cSld>
-  <p:clrMapOvr>
-    <a:masterClrMapping/>
-  </p:clrMapOvr>
-</p:sld>
-</file>
-
-<file path=ppt/slides/slide14.xml><?xml version="1.0" encoding="utf-8"?>
-<p:sld xmlns:a="http://schemas.openxmlformats.org/drawingml/2006/main" xmlns:r="http://schemas.openxmlformats.org/officeDocument/2006/relationships" xmlns:p="http://schemas.openxmlformats.org/presentationml/2006/main">
-  <p:cSld name="Slide 14">
-    <p:spTree>
-      <p:nvGrpSpPr>
-        <p:cNvPr id="1" name=""/>
-        <p:cNvGrpSpPr/>
-        <p:nvPr/>
-      </p:nvGrpSpPr>
-      <p:grpSpPr>
-        <a:xfrm>
-          <a:off x="0" y="0"/>
-          <a:ext cx="0" cy="0"/>
-          <a:chOff x="0" y="0"/>
-          <a:chExt cx="0" cy="0"/>
-        </a:xfrm>
-      </p:grpSpPr>
-      <p:sp>
-        <p:nvSpPr>
-          <p:cNvPr id="2" name="Text 0"/>
-          <p:cNvSpPr/>
-          <p:nvPr>
-            <p:ph idx="100" type="title" hasCustomPrompt="1"/>
-          </p:nvPr>
-        </p:nvSpPr>
-        <p:spPr>
-          <a:xfrm>
-            <a:off x="731520" y="2103120"/>
-            <a:ext cx="10698480" cy="1463040"/>
-          </a:xfrm>
-          <a:prstGeom prst="rect">
-            <a:avLst/>
-          </a:prstGeom>
-          <a:noFill/>
-          <a:ln/>
-        </p:spPr>
-        <p:txBody>
-          <a:bodyPr wrap="square" lIns="0" tIns="0" rIns="0" bIns="0" rtlCol="0" anchor="b"/>
-          <a:lstStyle/>
-          <a:p>
-            <a:pPr algn="l" indent="0" marL="0">
-              <a:buNone/>
-            </a:pPr>
-            <a:r>
-              <a:rPr lang="en-US" sz="4800" b="1" dirty="0">
-                <a:solidFill>
-                  <a:srgbClr val="FFFFFF"/>
-                </a:solidFill>
-              </a:rPr>
-              <a:t>Prossima volta: pulire i dati</a:t>
-            </a:r>
-            <a:endParaRPr lang="en-US" sz="4800" dirty="0"/>
-          </a:p>
-        </p:txBody>
-      </p:sp>
-      <p:sp>
-        <p:nvSpPr>
-          <p:cNvPr id="3" name="Text 0"/>
-          <p:cNvSpPr/>
-          <p:nvPr>
-            <p:ph idx="101" type="body" hasCustomPrompt="1"/>
-          </p:nvPr>
-        </p:nvSpPr>
-        <p:spPr>
-          <a:xfrm>
-            <a:off x="731520" y="3749040"/>
-            <a:ext cx="10698480" cy="914400"/>
-          </a:xfrm>
-          <a:prstGeom prst="rect">
-            <a:avLst/>
-          </a:prstGeom>
-          <a:noFill/>
-          <a:ln/>
-        </p:spPr>
-        <p:txBody>
-          <a:bodyPr wrap="square" lIns="0" tIns="0" rIns="0" bIns="0" rtlCol="0" anchor="t"/>
-          <a:lstStyle/>
-          <a:p>
-            <a:pPr indent="0" marL="0">
-              <a:buNone/>
-            </a:pPr>
-            <a:r>
-              <a:rPr lang="en-US" sz="2200" dirty="0">
-                <a:solidFill>
-                  <a:srgbClr val="F4C06E"/>
-                </a:solidFill>
-              </a:rPr>
-              <a:t>Compito: Kaggle Learn – Pandas, prime due lezioni (~40 min)</a:t>
-            </a:r>
-            <a:endParaRPr lang="en-US" sz="2200" dirty="0"/>
-          </a:p>
-        </p:txBody>
-      </p:sp>
-    </p:spTree>
-  </p:cSld>
-  <p:clrMapOvr>
-    <a:masterClrMapping/>
-  </p:clrMapOvr>
-</p:sld>
-</file>
-
 <file path=ppt/slides/slide2.xml><?xml version="1.0" encoding="utf-8"?>
 <p:sld xmlns:a="http://schemas.openxmlformats.org/drawingml/2006/main" xmlns:r="http://schemas.openxmlformats.org/officeDocument/2006/relationships" xmlns:p="http://schemas.openxmlformats.org/presentationml/2006/main">
   <p:cSld name="Slide 2">
@@ -9524,8 +6841,8 @@
         </p:nvSpPr>
         <p:spPr>
           <a:xfrm>
-            <a:off x="731520" y="2194560"/>
-            <a:ext cx="10698480" cy="1280160"/>
+            <a:off x="731520" y="2103120"/>
+            <a:ext cx="10698480" cy="1463040"/>
           </a:xfrm>
           <a:prstGeom prst="rect">
             <a:avLst/>
@@ -9541,14 +6858,14 @@
               <a:buNone/>
             </a:pPr>
             <a:r>
-              <a:rPr lang="en-US" sz="5400" b="1" dirty="0">
+              <a:rPr lang="en-US" sz="4800" b="1" dirty="0">
                 <a:solidFill>
                   <a:srgbClr val="FFFFFF"/>
                 </a:solidFill>
               </a:rPr>
-              <a:t>Debrief</a:t>
-            </a:r>
-            <a:endParaRPr lang="en-US" sz="5400" dirty="0"/>
+              <a:t>Prossima volta: pulire i dati</a:t>
+            </a:r>
+            <a:endParaRPr lang="en-US" sz="4800" dirty="0"/>
           </a:p>
         </p:txBody>
       </p:sp>
@@ -9562,8 +6879,8 @@
         </p:nvSpPr>
         <p:spPr>
           <a:xfrm>
-            <a:off x="731520" y="3657600"/>
-            <a:ext cx="10698480" cy="1463040"/>
+            <a:off x="731520" y="3749040"/>
+            <a:ext cx="10698480" cy="914400"/>
           </a:xfrm>
           <a:prstGeom prst="rect">
             <a:avLst/>
@@ -9581,10 +6898,10 @@
             <a:r>
               <a:rPr lang="en-US" sz="2200" dirty="0">
                 <a:solidFill>
-                  <a:srgbClr val="B8C4CB"/>
-                </a:solidFill>
-              </a:rPr>
-              <a:t>Cosa non torna nel dataset</a:t>
+                  <a:srgbClr val="F4C06E"/>
+                </a:solidFill>
+              </a:rPr>
+              <a:t>Compito: Kaggle Learn – Pandas, prime due lezioni (~40 min)</a:t>
             </a:r>
             <a:endParaRPr lang="en-US" sz="2200" dirty="0"/>
           </a:p>

--- a/lezioni/L02_conosci_il_dataset/slide.pptx
+++ b/lezioni/L02_conosci_il_dataset/slide.pptx
@@ -14,9 +14,13 @@
     <p:sldId id="262" r:id="rId8"/>
     <p:sldId id="263" r:id="rId9"/>
     <p:sldId id="264" r:id="rId10"/>
+    <p:sldId id="265" r:id="rId11"/>
+    <p:sldId id="266" r:id="rId12"/>
+    <p:sldId id="267" r:id="rId13"/>
+    <p:sldId id="268" r:id="rId14"/>
   </p:sldIdLst>
   <p:notesMasterIdLst>
-    <p:notesMasterId r:id="rId11"/>
+    <p:notesMasterId r:id="rId15"/>
   </p:notesMasterIdLst>
   <p:sldSz cx="12192000" cy="6858000"/>
   <p:notesSz cx="6858000" cy="12192000"/>
@@ -115,29 +119,33 @@
   <p:extLst>
     <p:ext uri="{521415D9-36F7-43E2-AB2F-B90AF26B5E84}">
       <p14:sectionLst xmlns:p14="http://schemas.microsoft.com/office/powerpoint/2010/main">
-        <p14:section name="Apertura" id="{e481c710-09b6-6f4a-64ed-48213ce8b089}">
+        <p14:section name="Apertura" id="{60ed819d-5cf3-f0d9-7389-49f22bd2869e}">
           <p14:sldIdLst>
             <p14:sldId id="256"/>
             <p14:sldId id="257"/>
           </p14:sldIdLst>
         </p14:section>
-        <p14:section name="Spiegazione" id="{2ce6630a-8d19-12a8-ef99-912cfcced91e}">
+        <p14:section name="Spiegazione" id="{1225102d-2042-a945-dae1-9da7f6fc8097}">
           <p14:sldIdLst>
             <p14:sldId id="258"/>
             <p14:sldId id="259"/>
             <p14:sldId id="260"/>
             <p14:sldId id="261"/>
             <p14:sldId id="262"/>
+            <p14:sldId id="263"/>
+            <p14:sldId id="264"/>
+            <p14:sldId id="265"/>
+            <p14:sldId id="266"/>
           </p14:sldIdLst>
         </p14:section>
-        <p14:section name="Task" id="{8669d9c9-5b31-4286-24f2-4c78f113f568}">
+        <p14:section name="Task" id="{8a6eb5d2-4bdf-c282-8f07-de1057aceae3}">
           <p14:sldIdLst>
-            <p14:sldId id="263"/>
+            <p14:sldId id="267"/>
           </p14:sldIdLst>
         </p14:section>
-        <p14:section name="Chiusura" id="{16b2a64c-6d51-be50-450d-9509c9cef3d1}">
+        <p14:section name="Chiusura" id="{d1ad9fb2-fd71-6fd7-777f-da0b673fe5a5}">
           <p14:sldIdLst>
-            <p14:sldId id="264"/>
+            <p14:sldId id="268"/>
           </p14:sldIdLst>
         </p14:section>
       </p14:sectionLst>
@@ -586,6 +594,358 @@
 </p:notes>
 </file>
 
+<file path=ppt/notesSlides/notesSlide10.xml><?xml version="1.0" encoding="utf-8"?>
+<p:notes xmlns:a="http://schemas.openxmlformats.org/drawingml/2006/main" xmlns:r="http://schemas.openxmlformats.org/officeDocument/2006/relationships" xmlns:p="http://schemas.openxmlformats.org/presentationml/2006/main">
+  <p:cSld>
+    <p:spTree>
+      <p:nvGrpSpPr>
+        <p:cNvPr id="1" name=""/>
+        <p:cNvGrpSpPr/>
+        <p:nvPr/>
+      </p:nvGrpSpPr>
+      <p:grpSpPr>
+        <a:xfrm>
+          <a:off x="0" y="0"/>
+          <a:ext cx="0" cy="0"/>
+          <a:chOff x="0" y="0"/>
+          <a:chExt cx="0" cy="0"/>
+        </a:xfrm>
+      </p:grpSpPr>
+      <p:sp>
+        <p:nvSpPr>
+          <p:cNvPr id="2" name="Slide Image Placeholder 1"/>
+          <p:cNvSpPr>
+            <a:spLocks noGrp="1" noRot="1" noChangeAspect="1"/>
+          </p:cNvSpPr>
+          <p:nvPr>
+            <p:ph type="sldImg"/>
+          </p:nvPr>
+        </p:nvSpPr>
+        <p:spPr/>
+      </p:sp>
+      <p:sp>
+        <p:nvSpPr>
+          <p:cNvPr id="3" name="Notes Placeholder 2"/>
+          <p:cNvSpPr>
+            <a:spLocks noGrp="1"/>
+          </p:cNvSpPr>
+          <p:nvPr>
+            <p:ph type="body" idx="1"/>
+          </p:nvPr>
+        </p:nvSpPr>
+        <p:spPr/>
+        <p:txBody>
+          <a:bodyPr/>
+          <a:lstStyle/>
+          <a:p>
+            <a:r>
+              <a:rPr lang="en-US" dirty="0"/>
+              <a:t>DEMO: aprire la pagina della documentazione dei DataFrame, mostrare l'elenco dei metodi, cliccarne uno (head) e far vedere la struttura: parametri, cosa restituisce, esempi in fondo. Gli esempi in fondo sono la parte più utile.</a:t>
+            </a:r>
+            <a:endParaRPr lang="en-US" dirty="0"/>
+          </a:p>
+        </p:txBody>
+      </p:sp>
+      <p:sp>
+        <p:nvSpPr>
+          <p:cNvPr id="4" name="Slide Number Placeholder 3"/>
+          <p:cNvSpPr>
+            <a:spLocks noGrp="1"/>
+          </p:cNvSpPr>
+          <p:nvPr>
+            <p:ph type="sldNum" sz="quarter" idx="10"/>
+          </p:nvPr>
+        </p:nvSpPr>
+        <p:spPr/>
+        <p:txBody>
+          <a:bodyPr/>
+          <a:lstStyle/>
+          <a:p>
+            <a:fld id="{F7021451-1387-4CA6-816F-3879F97B5CBC}" type="slidenum">
+              <a:rPr lang="en-US"/>
+              <a:t>10</a:t>
+            </a:fld>
+            <a:endParaRPr lang="en-US"/>
+          </a:p>
+        </p:txBody>
+      </p:sp>
+    </p:spTree>
+    <p:extLst>
+      <p:ext uri="{BB962C8B-B14F-4D97-AF65-F5344CB8AC3E}">
+        <p14:creationId xmlns:p14="http://schemas.microsoft.com/office/powerpoint/2010/main" val="1024086991"/>
+      </p:ext>
+    </p:extLst>
+  </p:cSld>
+  <p:clrMapOvr>
+    <a:masterClrMapping/>
+  </p:clrMapOvr>
+</p:notes>
+</file>
+
+<file path=ppt/notesSlides/notesSlide11.xml><?xml version="1.0" encoding="utf-8"?>
+<p:notes xmlns:a="http://schemas.openxmlformats.org/drawingml/2006/main" xmlns:r="http://schemas.openxmlformats.org/officeDocument/2006/relationships" xmlns:p="http://schemas.openxmlformats.org/presentationml/2006/main">
+  <p:cSld>
+    <p:spTree>
+      <p:nvGrpSpPr>
+        <p:cNvPr id="1" name=""/>
+        <p:cNvGrpSpPr/>
+        <p:nvPr/>
+      </p:nvGrpSpPr>
+      <p:grpSpPr>
+        <a:xfrm>
+          <a:off x="0" y="0"/>
+          <a:ext cx="0" cy="0"/>
+          <a:chOff x="0" y="0"/>
+          <a:chExt cx="0" cy="0"/>
+        </a:xfrm>
+      </p:grpSpPr>
+      <p:sp>
+        <p:nvSpPr>
+          <p:cNvPr id="2" name="Slide Image Placeholder 1"/>
+          <p:cNvSpPr>
+            <a:spLocks noGrp="1" noRot="1" noChangeAspect="1"/>
+          </p:cNvSpPr>
+          <p:nvPr>
+            <p:ph type="sldImg"/>
+          </p:nvPr>
+        </p:nvSpPr>
+        <p:spPr/>
+      </p:sp>
+      <p:sp>
+        <p:nvSpPr>
+          <p:cNvPr id="3" name="Notes Placeholder 2"/>
+          <p:cNvSpPr>
+            <a:spLocks noGrp="1"/>
+          </p:cNvSpPr>
+          <p:nvPr>
+            <p:ph type="body" idx="1"/>
+          </p:nvPr>
+        </p:nvSpPr>
+        <p:spPr/>
+        <p:txBody>
+          <a:bodyPr/>
+          <a:lstStyle/>
+          <a:p>
+            <a:r>
+              <a:rPr lang="en-US" dirty="0"/>
+              <a:t>Non serve memorizzare i comandi: serve ricordarsi le domande. I comandi si cercano.</a:t>
+            </a:r>
+            <a:endParaRPr lang="en-US" dirty="0"/>
+          </a:p>
+        </p:txBody>
+      </p:sp>
+      <p:sp>
+        <p:nvSpPr>
+          <p:cNvPr id="4" name="Slide Number Placeholder 3"/>
+          <p:cNvSpPr>
+            <a:spLocks noGrp="1"/>
+          </p:cNvSpPr>
+          <p:nvPr>
+            <p:ph type="sldNum" sz="quarter" idx="10"/>
+          </p:nvPr>
+        </p:nvSpPr>
+        <p:spPr/>
+        <p:txBody>
+          <a:bodyPr/>
+          <a:lstStyle/>
+          <a:p>
+            <a:fld id="{F7021451-1387-4CA6-816F-3879F97B5CBC}" type="slidenum">
+              <a:rPr lang="en-US"/>
+              <a:t>11</a:t>
+            </a:fld>
+            <a:endParaRPr lang="en-US"/>
+          </a:p>
+        </p:txBody>
+      </p:sp>
+    </p:spTree>
+    <p:extLst>
+      <p:ext uri="{BB962C8B-B14F-4D97-AF65-F5344CB8AC3E}">
+        <p14:creationId xmlns:p14="http://schemas.microsoft.com/office/powerpoint/2010/main" val="1024086991"/>
+      </p:ext>
+    </p:extLst>
+  </p:cSld>
+  <p:clrMapOvr>
+    <a:masterClrMapping/>
+  </p:clrMapOvr>
+</p:notes>
+</file>
+
+<file path=ppt/notesSlides/notesSlide12.xml><?xml version="1.0" encoding="utf-8"?>
+<p:notes xmlns:a="http://schemas.openxmlformats.org/drawingml/2006/main" xmlns:r="http://schemas.openxmlformats.org/officeDocument/2006/relationships" xmlns:p="http://schemas.openxmlformats.org/presentationml/2006/main">
+  <p:cSld>
+    <p:spTree>
+      <p:nvGrpSpPr>
+        <p:cNvPr id="1" name=""/>
+        <p:cNvGrpSpPr/>
+        <p:nvPr/>
+      </p:nvGrpSpPr>
+      <p:grpSpPr>
+        <a:xfrm>
+          <a:off x="0" y="0"/>
+          <a:ext cx="0" cy="0"/>
+          <a:chOff x="0" y="0"/>
+          <a:chExt cx="0" cy="0"/>
+        </a:xfrm>
+      </p:grpSpPr>
+      <p:sp>
+        <p:nvSpPr>
+          <p:cNvPr id="2" name="Slide Image Placeholder 1"/>
+          <p:cNvSpPr>
+            <a:spLocks noGrp="1" noRot="1" noChangeAspect="1"/>
+          </p:cNvSpPr>
+          <p:nvPr>
+            <p:ph type="sldImg"/>
+          </p:nvPr>
+        </p:nvSpPr>
+        <p:spPr/>
+      </p:sp>
+      <p:sp>
+        <p:nvSpPr>
+          <p:cNvPr id="3" name="Notes Placeholder 2"/>
+          <p:cNvSpPr>
+            <a:spLocks noGrp="1"/>
+          </p:cNvSpPr>
+          <p:nvPr>
+            <p:ph type="body" idx="1"/>
+          </p:nvPr>
+        </p:nvSpPr>
+        <p:spPr/>
+        <p:txBody>
+          <a:bodyPr/>
+          <a:lstStyle/>
+          <a:p>
+            <a:r>
+              <a:rPr lang="en-US" dirty="0"/>
+              <a:t>Durante il task: segnarsi chi trova i problemi e come. Molti al passo 7 vedranno 'n.d.' come massimo e non si faranno domande: è il punto del debrief.</a:t>
+            </a:r>
+            <a:endParaRPr lang="en-US" dirty="0"/>
+          </a:p>
+        </p:txBody>
+      </p:sp>
+      <p:sp>
+        <p:nvSpPr>
+          <p:cNvPr id="4" name="Slide Number Placeholder 3"/>
+          <p:cNvSpPr>
+            <a:spLocks noGrp="1"/>
+          </p:cNvSpPr>
+          <p:nvPr>
+            <p:ph type="sldNum" sz="quarter" idx="10"/>
+          </p:nvPr>
+        </p:nvSpPr>
+        <p:spPr/>
+        <p:txBody>
+          <a:bodyPr/>
+          <a:lstStyle/>
+          <a:p>
+            <a:fld id="{F7021451-1387-4CA6-816F-3879F97B5CBC}" type="slidenum">
+              <a:rPr lang="en-US"/>
+              <a:t>12</a:t>
+            </a:fld>
+            <a:endParaRPr lang="en-US"/>
+          </a:p>
+        </p:txBody>
+      </p:sp>
+    </p:spTree>
+    <p:extLst>
+      <p:ext uri="{BB962C8B-B14F-4D97-AF65-F5344CB8AC3E}">
+        <p14:creationId xmlns:p14="http://schemas.microsoft.com/office/powerpoint/2010/main" val="1024086991"/>
+      </p:ext>
+    </p:extLst>
+  </p:cSld>
+  <p:clrMapOvr>
+    <a:masterClrMapping/>
+  </p:clrMapOvr>
+</p:notes>
+</file>
+
+<file path=ppt/notesSlides/notesSlide13.xml><?xml version="1.0" encoding="utf-8"?>
+<p:notes xmlns:a="http://schemas.openxmlformats.org/drawingml/2006/main" xmlns:r="http://schemas.openxmlformats.org/officeDocument/2006/relationships" xmlns:p="http://schemas.openxmlformats.org/presentationml/2006/main">
+  <p:cSld>
+    <p:spTree>
+      <p:nvGrpSpPr>
+        <p:cNvPr id="1" name=""/>
+        <p:cNvGrpSpPr/>
+        <p:nvPr/>
+      </p:nvGrpSpPr>
+      <p:grpSpPr>
+        <a:xfrm>
+          <a:off x="0" y="0"/>
+          <a:ext cx="0" cy="0"/>
+          <a:chOff x="0" y="0"/>
+          <a:chExt cx="0" cy="0"/>
+        </a:xfrm>
+      </p:grpSpPr>
+      <p:sp>
+        <p:nvSpPr>
+          <p:cNvPr id="2" name="Slide Image Placeholder 1"/>
+          <p:cNvSpPr>
+            <a:spLocks noGrp="1" noRot="1" noChangeAspect="1"/>
+          </p:cNvSpPr>
+          <p:nvPr>
+            <p:ph type="sldImg"/>
+          </p:nvPr>
+        </p:nvSpPr>
+        <p:spPr/>
+      </p:sp>
+      <p:sp>
+        <p:nvSpPr>
+          <p:cNvPr id="3" name="Notes Placeholder 2"/>
+          <p:cNvSpPr>
+            <a:spLocks noGrp="1"/>
+          </p:cNvSpPr>
+          <p:nvPr>
+            <p:ph type="body" idx="1"/>
+          </p:nvPr>
+        </p:nvSpPr>
+        <p:spPr/>
+        <p:txBody>
+          <a:bodyPr/>
+          <a:lstStyle/>
+          <a:p>
+            <a:r>
+              <a:rPr lang="en-US" dirty="0"/>
+              <a:t>Le lezioni Kaggle: Creating, Reading and Writing; Indexing, Selecting &amp; Assigning.</a:t>
+            </a:r>
+            <a:endParaRPr lang="en-US" dirty="0"/>
+          </a:p>
+        </p:txBody>
+      </p:sp>
+      <p:sp>
+        <p:nvSpPr>
+          <p:cNvPr id="4" name="Slide Number Placeholder 3"/>
+          <p:cNvSpPr>
+            <a:spLocks noGrp="1"/>
+          </p:cNvSpPr>
+          <p:nvPr>
+            <p:ph type="sldNum" sz="quarter" idx="10"/>
+          </p:nvPr>
+        </p:nvSpPr>
+        <p:spPr/>
+        <p:txBody>
+          <a:bodyPr/>
+          <a:lstStyle/>
+          <a:p>
+            <a:fld id="{F7021451-1387-4CA6-816F-3879F97B5CBC}" type="slidenum">
+              <a:rPr lang="en-US"/>
+              <a:t>13</a:t>
+            </a:fld>
+            <a:endParaRPr lang="en-US"/>
+          </a:p>
+        </p:txBody>
+      </p:sp>
+    </p:spTree>
+    <p:extLst>
+      <p:ext uri="{BB962C8B-B14F-4D97-AF65-F5344CB8AC3E}">
+        <p14:creationId xmlns:p14="http://schemas.microsoft.com/office/powerpoint/2010/main" val="1024086991"/>
+      </p:ext>
+    </p:extLst>
+  </p:cSld>
+  <p:clrMapOvr>
+    <a:masterClrMapping/>
+  </p:clrMapOvr>
+</p:notes>
+</file>
+
 <file path=ppt/notesSlides/notesSlide2.xml><?xml version="1.0" encoding="utf-8"?>
 <p:notes xmlns:a="http://schemas.openxmlformats.org/drawingml/2006/main" xmlns:r="http://schemas.openxmlformats.org/officeDocument/2006/relationships" xmlns:p="http://schemas.openxmlformats.org/presentationml/2006/main">
   <p:cSld>
@@ -984,7 +1344,7 @@
           <a:p>
             <a:r>
               <a:rPr lang="en-US" dirty="0"/>
-              <a:t>Concetto astratto, tenerlo leggero. In Colab: scrivere df. e premere Tab per vedere tutto quello che si può chiedere.</a:t>
+              <a:t>Lo slicing funziona così ovunque in Python: liste, testi, DataFrame. Domanda alla classe: come prendo le righe dalla 10 alla 19 comprese? (iloc[10:20]). Non entrare in loc vs iloc: basta iloc.</a:t>
             </a:r>
             <a:endParaRPr lang="en-US" dirty="0"/>
           </a:p>
@@ -1072,7 +1432,7 @@
           <a:p>
             <a:r>
               <a:rPr lang="en-US" dirty="0"/>
-              <a:t>Non serve memorizzare i comandi: serve ricordarsi le domande. I comandi si cercano.</a:t>
+              <a:t>Disegnare alla lavagna la riga di caselle con i tagli. Funziona uguale per liste, testi ("Milano"[0:3] = "Mil") e righe di un DataFrame con iloc. Il numero tra parentesi quadre senza i due punti è invece una casella: x[2] è la terza.</a:t>
             </a:r>
             <a:endParaRPr lang="en-US" dirty="0"/>
           </a:p>
@@ -1160,7 +1520,7 @@
           <a:p>
             <a:r>
               <a:rPr lang="en-US" dirty="0"/>
-              <a:t>Durante il task: segnarsi chi trova i problemi e come. Molti al passo 7 vedranno 'n.d.' come massimo e non si faranno domande: è il punto del debrief.</a:t>
+              <a:t>La tabella nella slide è semplificata (colonne scelte per chiarezza). Dal vivo: aprire imprese.xlsx in Excel o Google Sheets accanto a Colab, selezionare A2:C6, poi eseguire df.iloc[0:5, 0:3]: sono le stesse celle. Con i tagli della slide precedente: il taglio 0 sta sotto l'intestazione, il taglio 5 dopo la quinta riga di dati.</a:t>
             </a:r>
             <a:endParaRPr lang="en-US" dirty="0"/>
           </a:p>
@@ -1248,7 +1608,7 @@
           <a:p>
             <a:r>
               <a:rPr lang="en-US" dirty="0"/>
-              <a:t>Le lezioni Kaggle: Creating, Reading and Writing; Indexing, Selecting &amp; Assigning.</a:t>
+              <a:t>Concetto astratto, tenerlo leggero. In Colab: scrivere df. e premere Tab per vedere tutto quello che si può chiedere.</a:t>
             </a:r>
             <a:endParaRPr lang="en-US" dirty="0"/>
           </a:p>
@@ -2118,6 +2478,1542 @@
 </p:sld>
 </file>
 
+<file path=ppt/slides/slide10.xml><?xml version="1.0" encoding="utf-8"?>
+<p:sld xmlns:a="http://schemas.openxmlformats.org/drawingml/2006/main" xmlns:r="http://schemas.openxmlformats.org/officeDocument/2006/relationships" xmlns:p="http://schemas.openxmlformats.org/presentationml/2006/main">
+  <p:cSld name="Slide 10">
+    <p:spTree>
+      <p:nvGrpSpPr>
+        <p:cNvPr id="1" name=""/>
+        <p:cNvGrpSpPr/>
+        <p:nvPr/>
+      </p:nvGrpSpPr>
+      <p:grpSpPr>
+        <a:xfrm>
+          <a:off x="0" y="0"/>
+          <a:ext cx="0" cy="0"/>
+          <a:chOff x="0" y="0"/>
+          <a:chExt cx="0" cy="0"/>
+        </a:xfrm>
+      </p:grpSpPr>
+      <p:sp>
+        <p:nvSpPr>
+          <p:cNvPr id="2" name="Text 0"/>
+          <p:cNvSpPr/>
+          <p:nvPr>
+            <p:ph idx="100" type="title" hasCustomPrompt="1"/>
+          </p:nvPr>
+        </p:nvSpPr>
+        <p:spPr>
+          <a:xfrm>
+            <a:off x="548640" y="365760"/>
+            <a:ext cx="11064240" cy="822960"/>
+          </a:xfrm>
+          <a:prstGeom prst="rect">
+            <a:avLst/>
+          </a:prstGeom>
+          <a:noFill/>
+          <a:ln/>
+        </p:spPr>
+        <p:txBody>
+          <a:bodyPr wrap="square" lIns="0" tIns="0" rIns="0" bIns="0" rtlCol="0" anchor="ctr"/>
+          <a:lstStyle/>
+          <a:p>
+            <a:pPr algn="l" indent="0" marL="0">
+              <a:buNone/>
+            </a:pPr>
+            <a:r>
+              <a:rPr lang="en-US" sz="3600" b="1" dirty="0">
+                <a:solidFill>
+                  <a:srgbClr val="0F4C5C"/>
+                </a:solidFill>
+              </a:rPr>
+              <a:t>Come scoprire cosa sa fare un oggetto</a:t>
+            </a:r>
+            <a:endParaRPr lang="en-US" sz="3600" dirty="0"/>
+          </a:p>
+        </p:txBody>
+      </p:sp>
+      <p:sp>
+        <p:nvSpPr>
+          <p:cNvPr id="3" name="Shape 1"/>
+          <p:cNvSpPr/>
+          <p:nvPr/>
+        </p:nvSpPr>
+        <p:spPr>
+          <a:xfrm>
+            <a:off x="548640" y="1737360"/>
+            <a:ext cx="3474720" cy="3108960"/>
+          </a:xfrm>
+          <a:prstGeom prst="roundRect">
+            <a:avLst>
+              <a:gd name="adj" fmla="val 3529"/>
+            </a:avLst>
+          </a:prstGeom>
+          <a:solidFill>
+            <a:srgbClr val="EEF3F4"/>
+          </a:solidFill>
+          <a:ln/>
+        </p:spPr>
+      </p:sp>
+      <p:sp>
+        <p:nvSpPr>
+          <p:cNvPr id="4" name="Shape 2"/>
+          <p:cNvSpPr/>
+          <p:nvPr/>
+        </p:nvSpPr>
+        <p:spPr>
+          <a:xfrm>
+            <a:off x="868680" y="2057400"/>
+            <a:ext cx="914400" cy="914400"/>
+          </a:xfrm>
+          <a:prstGeom prst="ellipse">
+            <a:avLst/>
+          </a:prstGeom>
+          <a:solidFill>
+            <a:srgbClr val="FFFFFF"/>
+          </a:solidFill>
+          <a:ln/>
+        </p:spPr>
+      </p:sp>
+      <p:pic>
+        <p:nvPicPr>
+          <p:cNvPr id="5" name="Image 0" descr="preencoded.png">    </p:cNvPr>
+          <p:cNvPicPr>
+            <a:picLocks noChangeAspect="1"/>
+          </p:cNvPicPr>
+          <p:nvPr/>
+        </p:nvPicPr>
+        <p:blipFill>
+          <a:blip r:embed="rId1"/>
+          <a:stretch>
+            <a:fillRect/>
+          </a:stretch>
+        </p:blipFill>
+        <p:spPr>
+          <a:xfrm>
+            <a:off x="1115568" y="2304288"/>
+            <a:ext cx="420624" cy="420624"/>
+          </a:xfrm>
+          <a:prstGeom prst="rect">
+            <a:avLst/>
+          </a:prstGeom>
+        </p:spPr>
+      </p:pic>
+      <p:sp>
+        <p:nvSpPr>
+          <p:cNvPr id="6" name="Text 3"/>
+          <p:cNvSpPr txBox="1"/>
+          <p:nvPr/>
+        </p:nvSpPr>
+        <p:spPr>
+          <a:xfrm>
+            <a:off x="868680" y="3200400"/>
+            <a:ext cx="2834640" cy="502920"/>
+          </a:xfrm>
+          <a:prstGeom prst="rect">
+            <a:avLst/>
+          </a:prstGeom>
+          <a:noFill/>
+          <a:ln/>
+        </p:spPr>
+        <p:txBody>
+          <a:bodyPr wrap="square" lIns="0" tIns="0" rIns="0" bIns="0" rtlCol="0" anchor="ctr"/>
+          <a:lstStyle/>
+          <a:p>
+            <a:pPr indent="0" marL="0">
+              <a:buNone/>
+            </a:pPr>
+            <a:r>
+              <a:rPr lang="en-US" sz="2200" b="1" dirty="0">
+                <a:solidFill>
+                  <a:srgbClr val="1F2A30"/>
+                </a:solidFill>
+                <a:latin typeface="Courier New" pitchFamily="34" charset="0"/>
+                <a:ea typeface="Courier New" pitchFamily="34" charset="-122"/>
+                <a:cs typeface="Courier New" pitchFamily="34" charset="-120"/>
+              </a:rPr>
+              <a:t>df. + Tab</a:t>
+            </a:r>
+            <a:endParaRPr lang="en-US" sz="2200" dirty="0"/>
+          </a:p>
+        </p:txBody>
+      </p:sp>
+      <p:sp>
+        <p:nvSpPr>
+          <p:cNvPr id="7" name="Text 4"/>
+          <p:cNvSpPr txBox="1"/>
+          <p:nvPr/>
+        </p:nvSpPr>
+        <p:spPr>
+          <a:xfrm>
+            <a:off x="868680" y="3749040"/>
+            <a:ext cx="2834640" cy="914400"/>
+          </a:xfrm>
+          <a:prstGeom prst="rect">
+            <a:avLst/>
+          </a:prstGeom>
+          <a:noFill/>
+          <a:ln/>
+        </p:spPr>
+        <p:txBody>
+          <a:bodyPr wrap="square" lIns="0" tIns="0" rIns="0" bIns="0" rtlCol="0" anchor="t"/>
+          <a:lstStyle/>
+          <a:p>
+            <a:pPr indent="0" marL="0">
+              <a:buNone/>
+            </a:pPr>
+            <a:r>
+              <a:rPr lang="en-US" sz="1600" dirty="0">
+                <a:solidFill>
+                  <a:srgbClr val="5C6F7B"/>
+                </a:solidFill>
+              </a:rPr>
+              <a:t>In Colab: l'elenco di tutto quello che puoi chiedere</a:t>
+            </a:r>
+            <a:endParaRPr lang="en-US" sz="1600" dirty="0"/>
+          </a:p>
+        </p:txBody>
+      </p:sp>
+      <p:sp>
+        <p:nvSpPr>
+          <p:cNvPr id="8" name="Shape 5"/>
+          <p:cNvSpPr/>
+          <p:nvPr/>
+        </p:nvSpPr>
+        <p:spPr>
+          <a:xfrm>
+            <a:off x="4343400" y="1737360"/>
+            <a:ext cx="3474720" cy="3108960"/>
+          </a:xfrm>
+          <a:prstGeom prst="roundRect">
+            <a:avLst>
+              <a:gd name="adj" fmla="val 3529"/>
+            </a:avLst>
+          </a:prstGeom>
+          <a:solidFill>
+            <a:srgbClr val="EEF3F4"/>
+          </a:solidFill>
+          <a:ln/>
+        </p:spPr>
+      </p:sp>
+      <p:sp>
+        <p:nvSpPr>
+          <p:cNvPr id="9" name="Shape 6"/>
+          <p:cNvSpPr/>
+          <p:nvPr/>
+        </p:nvSpPr>
+        <p:spPr>
+          <a:xfrm>
+            <a:off x="4663440" y="2057400"/>
+            <a:ext cx="914400" cy="914400"/>
+          </a:xfrm>
+          <a:prstGeom prst="ellipse">
+            <a:avLst/>
+          </a:prstGeom>
+          <a:solidFill>
+            <a:srgbClr val="FFFFFF"/>
+          </a:solidFill>
+          <a:ln/>
+        </p:spPr>
+      </p:sp>
+      <p:pic>
+        <p:nvPicPr>
+          <p:cNvPr id="10" name="Image 1" descr="preencoded.png">    </p:cNvPr>
+          <p:cNvPicPr>
+            <a:picLocks noChangeAspect="1"/>
+          </p:cNvPicPr>
+          <p:nvPr/>
+        </p:nvPicPr>
+        <p:blipFill>
+          <a:blip r:embed="rId2"/>
+          <a:stretch>
+            <a:fillRect/>
+          </a:stretch>
+        </p:blipFill>
+        <p:spPr>
+          <a:xfrm>
+            <a:off x="4910328" y="2304288"/>
+            <a:ext cx="420624" cy="420624"/>
+          </a:xfrm>
+          <a:prstGeom prst="rect">
+            <a:avLst/>
+          </a:prstGeom>
+        </p:spPr>
+      </p:pic>
+      <p:sp>
+        <p:nvSpPr>
+          <p:cNvPr id="11" name="Text 7"/>
+          <p:cNvSpPr txBox="1"/>
+          <p:nvPr/>
+        </p:nvSpPr>
+        <p:spPr>
+          <a:xfrm>
+            <a:off x="4663440" y="3200400"/>
+            <a:ext cx="2834640" cy="502920"/>
+          </a:xfrm>
+          <a:prstGeom prst="rect">
+            <a:avLst/>
+          </a:prstGeom>
+          <a:noFill/>
+          <a:ln/>
+        </p:spPr>
+        <p:txBody>
+          <a:bodyPr wrap="square" lIns="0" tIns="0" rIns="0" bIns="0" rtlCol="0" anchor="ctr"/>
+          <a:lstStyle/>
+          <a:p>
+            <a:pPr indent="0" marL="0">
+              <a:buNone/>
+            </a:pPr>
+            <a:r>
+              <a:rPr lang="en-US" sz="2200" b="1" dirty="0">
+                <a:solidFill>
+                  <a:srgbClr val="1F2A30"/>
+                </a:solidFill>
+                <a:latin typeface="Courier New" pitchFamily="34" charset="0"/>
+                <a:ea typeface="Courier New" pitchFamily="34" charset="-122"/>
+                <a:cs typeface="Courier New" pitchFamily="34" charset="-120"/>
+              </a:rPr>
+              <a:t>help(df.head)</a:t>
+            </a:r>
+            <a:endParaRPr lang="en-US" sz="2200" dirty="0"/>
+          </a:p>
+        </p:txBody>
+      </p:sp>
+      <p:sp>
+        <p:nvSpPr>
+          <p:cNvPr id="12" name="Text 8"/>
+          <p:cNvSpPr txBox="1"/>
+          <p:nvPr/>
+        </p:nvSpPr>
+        <p:spPr>
+          <a:xfrm>
+            <a:off x="4663440" y="3749040"/>
+            <a:ext cx="2834640" cy="914400"/>
+          </a:xfrm>
+          <a:prstGeom prst="rect">
+            <a:avLst/>
+          </a:prstGeom>
+          <a:noFill/>
+          <a:ln/>
+        </p:spPr>
+        <p:txBody>
+          <a:bodyPr wrap="square" lIns="0" tIns="0" rIns="0" bIns="0" rtlCol="0" anchor="t"/>
+          <a:lstStyle/>
+          <a:p>
+            <a:pPr indent="0" marL="0">
+              <a:buNone/>
+            </a:pPr>
+            <a:r>
+              <a:rPr lang="en-US" sz="1600" dirty="0">
+                <a:solidFill>
+                  <a:srgbClr val="5C6F7B"/>
+                </a:solidFill>
+              </a:rPr>
+              <a:t>La spiegazione di un metodo, con esempi</a:t>
+            </a:r>
+            <a:endParaRPr lang="en-US" sz="1600" dirty="0"/>
+          </a:p>
+        </p:txBody>
+      </p:sp>
+      <p:sp>
+        <p:nvSpPr>
+          <p:cNvPr id="13" name="Shape 9"/>
+          <p:cNvSpPr/>
+          <p:nvPr/>
+        </p:nvSpPr>
+        <p:spPr>
+          <a:xfrm>
+            <a:off x="8138160" y="1737360"/>
+            <a:ext cx="3474720" cy="3108960"/>
+          </a:xfrm>
+          <a:prstGeom prst="roundRect">
+            <a:avLst>
+              <a:gd name="adj" fmla="val 3529"/>
+            </a:avLst>
+          </a:prstGeom>
+          <a:solidFill>
+            <a:srgbClr val="EEF3F4"/>
+          </a:solidFill>
+          <a:ln/>
+        </p:spPr>
+      </p:sp>
+      <p:sp>
+        <p:nvSpPr>
+          <p:cNvPr id="14" name="Shape 10"/>
+          <p:cNvSpPr/>
+          <p:nvPr/>
+        </p:nvSpPr>
+        <p:spPr>
+          <a:xfrm>
+            <a:off x="8458200" y="2057400"/>
+            <a:ext cx="914400" cy="914400"/>
+          </a:xfrm>
+          <a:prstGeom prst="ellipse">
+            <a:avLst/>
+          </a:prstGeom>
+          <a:solidFill>
+            <a:srgbClr val="FFFFFF"/>
+          </a:solidFill>
+          <a:ln/>
+        </p:spPr>
+      </p:sp>
+      <p:pic>
+        <p:nvPicPr>
+          <p:cNvPr id="15" name="Image 2" descr="preencoded.png">    </p:cNvPr>
+          <p:cNvPicPr>
+            <a:picLocks noChangeAspect="1"/>
+          </p:cNvPicPr>
+          <p:nvPr/>
+        </p:nvPicPr>
+        <p:blipFill>
+          <a:blip r:embed="rId3"/>
+          <a:stretch>
+            <a:fillRect/>
+          </a:stretch>
+        </p:blipFill>
+        <p:spPr>
+          <a:xfrm>
+            <a:off x="8705088" y="2304288"/>
+            <a:ext cx="420624" cy="420624"/>
+          </a:xfrm>
+          <a:prstGeom prst="rect">
+            <a:avLst/>
+          </a:prstGeom>
+        </p:spPr>
+      </p:pic>
+      <p:sp>
+        <p:nvSpPr>
+          <p:cNvPr id="16" name="Text 11"/>
+          <p:cNvSpPr txBox="1"/>
+          <p:nvPr/>
+        </p:nvSpPr>
+        <p:spPr>
+          <a:xfrm>
+            <a:off x="8458200" y="3200400"/>
+            <a:ext cx="2834640" cy="502920"/>
+          </a:xfrm>
+          <a:prstGeom prst="rect">
+            <a:avLst/>
+          </a:prstGeom>
+          <a:noFill/>
+          <a:ln/>
+        </p:spPr>
+        <p:txBody>
+          <a:bodyPr wrap="square" lIns="0" tIns="0" rIns="0" bIns="0" rtlCol="0" anchor="ctr"/>
+          <a:lstStyle/>
+          <a:p>
+            <a:pPr indent="0" marL="0">
+              <a:buNone/>
+            </a:pPr>
+            <a:r>
+              <a:rPr lang="en-US" sz="2200" b="1" dirty="0">
+                <a:solidFill>
+                  <a:srgbClr val="1F2A30"/>
+                </a:solidFill>
+              </a:rPr>
+              <a:t>La documentazione</a:t>
+            </a:r>
+            <a:endParaRPr lang="en-US" sz="2200" dirty="0"/>
+          </a:p>
+        </p:txBody>
+      </p:sp>
+      <p:sp>
+        <p:nvSpPr>
+          <p:cNvPr id="17" name="Text 12"/>
+          <p:cNvSpPr txBox="1"/>
+          <p:nvPr/>
+        </p:nvSpPr>
+        <p:spPr>
+          <a:xfrm>
+            <a:off x="8458200" y="3749040"/>
+            <a:ext cx="2834640" cy="914400"/>
+          </a:xfrm>
+          <a:prstGeom prst="rect">
+            <a:avLst/>
+          </a:prstGeom>
+          <a:noFill/>
+          <a:ln/>
+        </p:spPr>
+        <p:txBody>
+          <a:bodyPr wrap="square" lIns="0" tIns="0" rIns="0" bIns="0" rtlCol="0" anchor="t"/>
+          <a:lstStyle/>
+          <a:p>
+            <a:pPr indent="0" marL="0">
+              <a:buNone/>
+            </a:pPr>
+            <a:r>
+              <a:rPr lang="en-US" sz="1600" dirty="0">
+                <a:solidFill>
+                  <a:srgbClr val="5C6F7B"/>
+                </a:solidFill>
+              </a:rPr>
+              <a:t>pandas.pydata.org → API reference → DataFrame</a:t>
+            </a:r>
+            <a:endParaRPr lang="en-US" sz="1600" dirty="0"/>
+          </a:p>
+        </p:txBody>
+      </p:sp>
+      <p:sp>
+        <p:nvSpPr>
+          <p:cNvPr id="18" name="Text 13"/>
+          <p:cNvSpPr txBox="1"/>
+          <p:nvPr/>
+        </p:nvSpPr>
+        <p:spPr>
+          <a:xfrm>
+            <a:off x="548640" y="5257800"/>
+            <a:ext cx="11064240" cy="457200"/>
+          </a:xfrm>
+          <a:prstGeom prst="rect">
+            <a:avLst/>
+          </a:prstGeom>
+          <a:noFill/>
+          <a:ln/>
+        </p:spPr>
+        <p:txBody>
+          <a:bodyPr wrap="square" lIns="0" tIns="0" rIns="0" bIns="0" rtlCol="0" anchor="ctr"/>
+          <a:lstStyle/>
+          <a:p>
+            <a:pPr indent="0" marL="0">
+              <a:buNone/>
+            </a:pPr>
+            <a:r>
+              <a:rPr lang="en-US" sz="1800" i="1" dirty="0">
+                <a:solidFill>
+                  <a:srgbClr val="0F4C5C"/>
+                </a:solidFill>
+              </a:rPr>
+              <a:t>Nessuno conosce tutti i metodi. Si cercano, ogni giorno, anche dopo anni.</a:t>
+            </a:r>
+            <a:endParaRPr lang="en-US" sz="1800" dirty="0"/>
+          </a:p>
+        </p:txBody>
+      </p:sp>
+      <p:sp>
+        <p:nvSpPr>
+          <p:cNvPr id="25" name="Slide Number Placeholder 0"/>
+          <p:cNvSpPr>
+            <a:spLocks noGrp="1"/>
+          </p:cNvSpPr>
+          <p:nvPr>
+            <p:ph type="sldNum" sz="quarter" idx="4294967295"/>
+          </p:nvPr>
+        </p:nvSpPr>
+        <p:spPr>
+          <a:xfrm>
+            <a:off x="11155680" y="6400800"/>
+            <a:ext cx="457200" cy="274320"/>
+          </a:xfrm>
+          <a:prstGeom prst="rect">
+            <a:avLst/>
+          </a:prstGeom>
+          <a:extLst>
+            <a:ext uri="{C572A759-6A51-4108-AA02-DFA0A04FC94B}">
+              <ma14:wrappingTextBoxFlag xmlns:ma14="http://schemas.microsoft.com/office/mac/drawingml/2011/main" val="0"/>
+            </a:ext>
+          </a:extLst>
+        </p:spPr>
+        <p:txBody>
+          <a:bodyPr/>
+          <a:lstStyle>
+            <a:lvl1pPr>
+              <a:defRPr sz="1000">
+                <a:solidFill>
+                  <a:srgbClr val="5C6F7B"/>
+                </a:solidFill>
+              </a:defRPr>
+            </a:lvl1pPr>
+          </a:lstStyle>
+          <a:p>
+            <a:pPr algn="r"/>
+            <a:fld id="{F7021451-1387-4CA6-816F-3879F97B5CBC}" type="slidenum">
+              <a:rPr b="0" lang="en-US"/>
+              <a:t>10</a:t>
+            </a:fld>
+            <a:endParaRPr lang="en-US"/>
+          </a:p>
+        </p:txBody>
+      </p:sp>
+    </p:spTree>
+  </p:cSld>
+  <p:clrMapOvr>
+    <a:masterClrMapping/>
+  </p:clrMapOvr>
+</p:sld>
+</file>
+
+<file path=ppt/slides/slide11.xml><?xml version="1.0" encoding="utf-8"?>
+<p:sld xmlns:a="http://schemas.openxmlformats.org/drawingml/2006/main" xmlns:r="http://schemas.openxmlformats.org/officeDocument/2006/relationships" xmlns:p="http://schemas.openxmlformats.org/presentationml/2006/main">
+  <p:cSld name="Slide 11">
+    <p:spTree>
+      <p:nvGrpSpPr>
+        <p:cNvPr id="1" name=""/>
+        <p:cNvGrpSpPr/>
+        <p:nvPr/>
+      </p:nvGrpSpPr>
+      <p:grpSpPr>
+        <a:xfrm>
+          <a:off x="0" y="0"/>
+          <a:ext cx="0" cy="0"/>
+          <a:chOff x="0" y="0"/>
+          <a:chExt cx="0" cy="0"/>
+        </a:xfrm>
+      </p:grpSpPr>
+      <p:sp>
+        <p:nvSpPr>
+          <p:cNvPr id="2" name="Text 0"/>
+          <p:cNvSpPr/>
+          <p:nvPr>
+            <p:ph idx="100" type="title" hasCustomPrompt="1"/>
+          </p:nvPr>
+        </p:nvSpPr>
+        <p:spPr>
+          <a:xfrm>
+            <a:off x="548640" y="365760"/>
+            <a:ext cx="11064240" cy="822960"/>
+          </a:xfrm>
+          <a:prstGeom prst="rect">
+            <a:avLst/>
+          </a:prstGeom>
+          <a:noFill/>
+          <a:ln/>
+        </p:spPr>
+        <p:txBody>
+          <a:bodyPr wrap="square" lIns="0" tIns="0" rIns="0" bIns="0" rtlCol="0" anchor="ctr"/>
+          <a:lstStyle/>
+          <a:p>
+            <a:pPr algn="l" indent="0" marL="0">
+              <a:buNone/>
+            </a:pPr>
+            <a:r>
+              <a:rPr lang="en-US" sz="3600" b="1" dirty="0">
+                <a:solidFill>
+                  <a:srgbClr val="0F4C5C"/>
+                </a:solidFill>
+              </a:rPr>
+              <a:t>Le domande da fare sempre a un dataset</a:t>
+            </a:r>
+            <a:endParaRPr lang="en-US" sz="3600" dirty="0"/>
+          </a:p>
+        </p:txBody>
+      </p:sp>
+      <p:sp>
+        <p:nvSpPr>
+          <p:cNvPr id="3" name="Shape 1"/>
+          <p:cNvSpPr/>
+          <p:nvPr/>
+        </p:nvSpPr>
+        <p:spPr>
+          <a:xfrm>
+            <a:off x="548640" y="1737360"/>
+            <a:ext cx="5440680" cy="1645920"/>
+          </a:xfrm>
+          <a:prstGeom prst="roundRect">
+            <a:avLst>
+              <a:gd name="adj" fmla="val 6667"/>
+            </a:avLst>
+          </a:prstGeom>
+          <a:solidFill>
+            <a:srgbClr val="EEF3F4"/>
+          </a:solidFill>
+          <a:ln/>
+        </p:spPr>
+      </p:sp>
+      <p:sp>
+        <p:nvSpPr>
+          <p:cNvPr id="4" name="Shape 2"/>
+          <p:cNvSpPr/>
+          <p:nvPr/>
+        </p:nvSpPr>
+        <p:spPr>
+          <a:xfrm>
+            <a:off x="822960" y="2194560"/>
+            <a:ext cx="731520" cy="731520"/>
+          </a:xfrm>
+          <a:prstGeom prst="ellipse">
+            <a:avLst/>
+          </a:prstGeom>
+          <a:solidFill>
+            <a:srgbClr val="FFFFFF"/>
+          </a:solidFill>
+          <a:ln/>
+        </p:spPr>
+      </p:sp>
+      <p:sp>
+        <p:nvSpPr>
+          <p:cNvPr id="5" name="Text 3"/>
+          <p:cNvSpPr txBox="1"/>
+          <p:nvPr/>
+        </p:nvSpPr>
+        <p:spPr>
+          <a:xfrm>
+            <a:off x="822960" y="2194560"/>
+            <a:ext cx="731520" cy="731520"/>
+          </a:xfrm>
+          <a:prstGeom prst="rect">
+            <a:avLst/>
+          </a:prstGeom>
+          <a:noFill/>
+          <a:ln/>
+        </p:spPr>
+        <p:txBody>
+          <a:bodyPr wrap="square" lIns="0" tIns="0" rIns="0" bIns="0" rtlCol="0" anchor="ctr"/>
+          <a:lstStyle/>
+          <a:p>
+            <a:pPr algn="ctr" indent="0" marL="0">
+              <a:buNone/>
+            </a:pPr>
+            <a:r>
+              <a:rPr lang="en-US" sz="2080" b="1" dirty="0">
+                <a:solidFill>
+                  <a:srgbClr val="0F4C5C"/>
+                </a:solidFill>
+              </a:rPr>
+              <a:t>1</a:t>
+            </a:r>
+            <a:endParaRPr lang="en-US" sz="2080" dirty="0"/>
+          </a:p>
+        </p:txBody>
+      </p:sp>
+      <p:sp>
+        <p:nvSpPr>
+          <p:cNvPr id="6" name="Text 4"/>
+          <p:cNvSpPr txBox="1"/>
+          <p:nvPr/>
+        </p:nvSpPr>
+        <p:spPr>
+          <a:xfrm>
+            <a:off x="1828800" y="2057400"/>
+            <a:ext cx="3931920" cy="502920"/>
+          </a:xfrm>
+          <a:prstGeom prst="rect">
+            <a:avLst/>
+          </a:prstGeom>
+          <a:noFill/>
+          <a:ln/>
+        </p:spPr>
+        <p:txBody>
+          <a:bodyPr wrap="square" lIns="0" tIns="0" rIns="0" bIns="0" rtlCol="0" anchor="ctr"/>
+          <a:lstStyle/>
+          <a:p>
+            <a:pPr indent="0" marL="0">
+              <a:buNone/>
+            </a:pPr>
+            <a:r>
+              <a:rPr lang="en-US" sz="2100" b="1" dirty="0">
+                <a:solidFill>
+                  <a:srgbClr val="1F2A30"/>
+                </a:solidFill>
+              </a:rPr>
+              <a:t>Quanto è grande?</a:t>
+            </a:r>
+            <a:endParaRPr lang="en-US" sz="2100" dirty="0"/>
+          </a:p>
+        </p:txBody>
+      </p:sp>
+      <p:sp>
+        <p:nvSpPr>
+          <p:cNvPr id="7" name="Text 5"/>
+          <p:cNvSpPr txBox="1"/>
+          <p:nvPr/>
+        </p:nvSpPr>
+        <p:spPr>
+          <a:xfrm>
+            <a:off x="1828800" y="2606040"/>
+            <a:ext cx="3931920" cy="457200"/>
+          </a:xfrm>
+          <a:prstGeom prst="rect">
+            <a:avLst/>
+          </a:prstGeom>
+          <a:noFill/>
+          <a:ln/>
+        </p:spPr>
+        <p:txBody>
+          <a:bodyPr wrap="square" lIns="0" tIns="0" rIns="0" bIns="0" rtlCol="0" anchor="ctr"/>
+          <a:lstStyle/>
+          <a:p>
+            <a:pPr indent="0" marL="0">
+              <a:buNone/>
+            </a:pPr>
+            <a:r>
+              <a:rPr lang="en-US" sz="1700" dirty="0">
+                <a:solidFill>
+                  <a:srgbClr val="0F4C5C"/>
+                </a:solidFill>
+                <a:latin typeface="Courier New" pitchFamily="34" charset="0"/>
+                <a:ea typeface="Courier New" pitchFamily="34" charset="-122"/>
+                <a:cs typeface="Courier New" pitchFamily="34" charset="-120"/>
+              </a:rPr>
+              <a:t>df.shape</a:t>
+            </a:r>
+            <a:endParaRPr lang="en-US" sz="1700" dirty="0"/>
+          </a:p>
+        </p:txBody>
+      </p:sp>
+      <p:sp>
+        <p:nvSpPr>
+          <p:cNvPr id="8" name="Shape 6"/>
+          <p:cNvSpPr/>
+          <p:nvPr/>
+        </p:nvSpPr>
+        <p:spPr>
+          <a:xfrm>
+            <a:off x="6172200" y="1737360"/>
+            <a:ext cx="5440680" cy="1645920"/>
+          </a:xfrm>
+          <a:prstGeom prst="roundRect">
+            <a:avLst>
+              <a:gd name="adj" fmla="val 6667"/>
+            </a:avLst>
+          </a:prstGeom>
+          <a:solidFill>
+            <a:srgbClr val="EEF3F4"/>
+          </a:solidFill>
+          <a:ln/>
+        </p:spPr>
+      </p:sp>
+      <p:sp>
+        <p:nvSpPr>
+          <p:cNvPr id="9" name="Shape 7"/>
+          <p:cNvSpPr/>
+          <p:nvPr/>
+        </p:nvSpPr>
+        <p:spPr>
+          <a:xfrm>
+            <a:off x="6446520" y="2194560"/>
+            <a:ext cx="731520" cy="731520"/>
+          </a:xfrm>
+          <a:prstGeom prst="ellipse">
+            <a:avLst/>
+          </a:prstGeom>
+          <a:solidFill>
+            <a:srgbClr val="FFFFFF"/>
+          </a:solidFill>
+          <a:ln/>
+        </p:spPr>
+      </p:sp>
+      <p:sp>
+        <p:nvSpPr>
+          <p:cNvPr id="10" name="Text 8"/>
+          <p:cNvSpPr txBox="1"/>
+          <p:nvPr/>
+        </p:nvSpPr>
+        <p:spPr>
+          <a:xfrm>
+            <a:off x="6446520" y="2194560"/>
+            <a:ext cx="731520" cy="731520"/>
+          </a:xfrm>
+          <a:prstGeom prst="rect">
+            <a:avLst/>
+          </a:prstGeom>
+          <a:noFill/>
+          <a:ln/>
+        </p:spPr>
+        <p:txBody>
+          <a:bodyPr wrap="square" lIns="0" tIns="0" rIns="0" bIns="0" rtlCol="0" anchor="ctr"/>
+          <a:lstStyle/>
+          <a:p>
+            <a:pPr algn="ctr" indent="0" marL="0">
+              <a:buNone/>
+            </a:pPr>
+            <a:r>
+              <a:rPr lang="en-US" sz="2080" b="1" dirty="0">
+                <a:solidFill>
+                  <a:srgbClr val="0F4C5C"/>
+                </a:solidFill>
+              </a:rPr>
+              <a:t>2</a:t>
+            </a:r>
+            <a:endParaRPr lang="en-US" sz="2080" dirty="0"/>
+          </a:p>
+        </p:txBody>
+      </p:sp>
+      <p:sp>
+        <p:nvSpPr>
+          <p:cNvPr id="11" name="Text 9"/>
+          <p:cNvSpPr txBox="1"/>
+          <p:nvPr/>
+        </p:nvSpPr>
+        <p:spPr>
+          <a:xfrm>
+            <a:off x="7452360" y="2057400"/>
+            <a:ext cx="3931920" cy="502920"/>
+          </a:xfrm>
+          <a:prstGeom prst="rect">
+            <a:avLst/>
+          </a:prstGeom>
+          <a:noFill/>
+          <a:ln/>
+        </p:spPr>
+        <p:txBody>
+          <a:bodyPr wrap="square" lIns="0" tIns="0" rIns="0" bIns="0" rtlCol="0" anchor="ctr"/>
+          <a:lstStyle/>
+          <a:p>
+            <a:pPr indent="0" marL="0">
+              <a:buNone/>
+            </a:pPr>
+            <a:r>
+              <a:rPr lang="en-US" sz="2100" b="1" dirty="0">
+                <a:solidFill>
+                  <a:srgbClr val="1F2A30"/>
+                </a:solidFill>
+              </a:rPr>
+              <a:t>Di che tipo sono le colonne?</a:t>
+            </a:r>
+            <a:endParaRPr lang="en-US" sz="2100" dirty="0"/>
+          </a:p>
+        </p:txBody>
+      </p:sp>
+      <p:sp>
+        <p:nvSpPr>
+          <p:cNvPr id="12" name="Text 10"/>
+          <p:cNvSpPr txBox="1"/>
+          <p:nvPr/>
+        </p:nvSpPr>
+        <p:spPr>
+          <a:xfrm>
+            <a:off x="7452360" y="2606040"/>
+            <a:ext cx="3931920" cy="457200"/>
+          </a:xfrm>
+          <a:prstGeom prst="rect">
+            <a:avLst/>
+          </a:prstGeom>
+          <a:noFill/>
+          <a:ln/>
+        </p:spPr>
+        <p:txBody>
+          <a:bodyPr wrap="square" lIns="0" tIns="0" rIns="0" bIns="0" rtlCol="0" anchor="ctr"/>
+          <a:lstStyle/>
+          <a:p>
+            <a:pPr indent="0" marL="0">
+              <a:buNone/>
+            </a:pPr>
+            <a:r>
+              <a:rPr lang="en-US" sz="1700" dirty="0">
+                <a:solidFill>
+                  <a:srgbClr val="0F4C5C"/>
+                </a:solidFill>
+                <a:latin typeface="Courier New" pitchFamily="34" charset="0"/>
+                <a:ea typeface="Courier New" pitchFamily="34" charset="-122"/>
+                <a:cs typeface="Courier New" pitchFamily="34" charset="-120"/>
+              </a:rPr>
+              <a:t>df.dtypes</a:t>
+            </a:r>
+            <a:endParaRPr lang="en-US" sz="1700" dirty="0"/>
+          </a:p>
+        </p:txBody>
+      </p:sp>
+      <p:sp>
+        <p:nvSpPr>
+          <p:cNvPr id="13" name="Shape 11"/>
+          <p:cNvSpPr/>
+          <p:nvPr/>
+        </p:nvSpPr>
+        <p:spPr>
+          <a:xfrm>
+            <a:off x="548640" y="3657600"/>
+            <a:ext cx="5440680" cy="1645920"/>
+          </a:xfrm>
+          <a:prstGeom prst="roundRect">
+            <a:avLst>
+              <a:gd name="adj" fmla="val 6667"/>
+            </a:avLst>
+          </a:prstGeom>
+          <a:solidFill>
+            <a:srgbClr val="EEF3F4"/>
+          </a:solidFill>
+          <a:ln/>
+        </p:spPr>
+      </p:sp>
+      <p:sp>
+        <p:nvSpPr>
+          <p:cNvPr id="14" name="Shape 12"/>
+          <p:cNvSpPr/>
+          <p:nvPr/>
+        </p:nvSpPr>
+        <p:spPr>
+          <a:xfrm>
+            <a:off x="822960" y="4114800"/>
+            <a:ext cx="731520" cy="731520"/>
+          </a:xfrm>
+          <a:prstGeom prst="ellipse">
+            <a:avLst/>
+          </a:prstGeom>
+          <a:solidFill>
+            <a:srgbClr val="FFFFFF"/>
+          </a:solidFill>
+          <a:ln/>
+        </p:spPr>
+      </p:sp>
+      <p:sp>
+        <p:nvSpPr>
+          <p:cNvPr id="15" name="Text 13"/>
+          <p:cNvSpPr txBox="1"/>
+          <p:nvPr/>
+        </p:nvSpPr>
+        <p:spPr>
+          <a:xfrm>
+            <a:off x="822960" y="4114800"/>
+            <a:ext cx="731520" cy="731520"/>
+          </a:xfrm>
+          <a:prstGeom prst="rect">
+            <a:avLst/>
+          </a:prstGeom>
+          <a:noFill/>
+          <a:ln/>
+        </p:spPr>
+        <p:txBody>
+          <a:bodyPr wrap="square" lIns="0" tIns="0" rIns="0" bIns="0" rtlCol="0" anchor="ctr"/>
+          <a:lstStyle/>
+          <a:p>
+            <a:pPr algn="ctr" indent="0" marL="0">
+              <a:buNone/>
+            </a:pPr>
+            <a:r>
+              <a:rPr lang="en-US" sz="2080" b="1" dirty="0">
+                <a:solidFill>
+                  <a:srgbClr val="0F4C5C"/>
+                </a:solidFill>
+              </a:rPr>
+              <a:t>3</a:t>
+            </a:r>
+            <a:endParaRPr lang="en-US" sz="2080" dirty="0"/>
+          </a:p>
+        </p:txBody>
+      </p:sp>
+      <p:sp>
+        <p:nvSpPr>
+          <p:cNvPr id="16" name="Text 14"/>
+          <p:cNvSpPr txBox="1"/>
+          <p:nvPr/>
+        </p:nvSpPr>
+        <p:spPr>
+          <a:xfrm>
+            <a:off x="1828800" y="3977640"/>
+            <a:ext cx="3931920" cy="502920"/>
+          </a:xfrm>
+          <a:prstGeom prst="rect">
+            <a:avLst/>
+          </a:prstGeom>
+          <a:noFill/>
+          <a:ln/>
+        </p:spPr>
+        <p:txBody>
+          <a:bodyPr wrap="square" lIns="0" tIns="0" rIns="0" bIns="0" rtlCol="0" anchor="ctr"/>
+          <a:lstStyle/>
+          <a:p>
+            <a:pPr indent="0" marL="0">
+              <a:buNone/>
+            </a:pPr>
+            <a:r>
+              <a:rPr lang="en-US" sz="2100" b="1" dirty="0">
+                <a:solidFill>
+                  <a:srgbClr val="1F2A30"/>
+                </a:solidFill>
+              </a:rPr>
+              <a:t>Quanti valori diversi?</a:t>
+            </a:r>
+            <a:endParaRPr lang="en-US" sz="2100" dirty="0"/>
+          </a:p>
+        </p:txBody>
+      </p:sp>
+      <p:sp>
+        <p:nvSpPr>
+          <p:cNvPr id="17" name="Text 15"/>
+          <p:cNvSpPr txBox="1"/>
+          <p:nvPr/>
+        </p:nvSpPr>
+        <p:spPr>
+          <a:xfrm>
+            <a:off x="1828800" y="4526280"/>
+            <a:ext cx="3931920" cy="457200"/>
+          </a:xfrm>
+          <a:prstGeom prst="rect">
+            <a:avLst/>
+          </a:prstGeom>
+          <a:noFill/>
+          <a:ln/>
+        </p:spPr>
+        <p:txBody>
+          <a:bodyPr wrap="square" lIns="0" tIns="0" rIns="0" bIns="0" rtlCol="0" anchor="ctr"/>
+          <a:lstStyle/>
+          <a:p>
+            <a:pPr indent="0" marL="0">
+              <a:buNone/>
+            </a:pPr>
+            <a:r>
+              <a:rPr lang="en-US" sz="1700" dirty="0">
+                <a:solidFill>
+                  <a:srgbClr val="0F4C5C"/>
+                </a:solidFill>
+                <a:latin typeface="Courier New" pitchFamily="34" charset="0"/>
+                <a:ea typeface="Courier New" pitchFamily="34" charset="-122"/>
+                <a:cs typeface="Courier New" pitchFamily="34" charset="-120"/>
+              </a:rPr>
+              <a:t>df["col"].nunique()</a:t>
+            </a:r>
+            <a:endParaRPr lang="en-US" sz="1700" dirty="0"/>
+          </a:p>
+        </p:txBody>
+      </p:sp>
+      <p:sp>
+        <p:nvSpPr>
+          <p:cNvPr id="18" name="Shape 16"/>
+          <p:cNvSpPr/>
+          <p:nvPr/>
+        </p:nvSpPr>
+        <p:spPr>
+          <a:xfrm>
+            <a:off x="6172200" y="3657600"/>
+            <a:ext cx="5440680" cy="1645920"/>
+          </a:xfrm>
+          <a:prstGeom prst="roundRect">
+            <a:avLst>
+              <a:gd name="adj" fmla="val 6667"/>
+            </a:avLst>
+          </a:prstGeom>
+          <a:solidFill>
+            <a:srgbClr val="EEF3F4"/>
+          </a:solidFill>
+          <a:ln/>
+        </p:spPr>
+      </p:sp>
+      <p:sp>
+        <p:nvSpPr>
+          <p:cNvPr id="19" name="Shape 17"/>
+          <p:cNvSpPr/>
+          <p:nvPr/>
+        </p:nvSpPr>
+        <p:spPr>
+          <a:xfrm>
+            <a:off x="6446520" y="4114800"/>
+            <a:ext cx="731520" cy="731520"/>
+          </a:xfrm>
+          <a:prstGeom prst="ellipse">
+            <a:avLst/>
+          </a:prstGeom>
+          <a:solidFill>
+            <a:srgbClr val="FFFFFF"/>
+          </a:solidFill>
+          <a:ln/>
+        </p:spPr>
+      </p:sp>
+      <p:sp>
+        <p:nvSpPr>
+          <p:cNvPr id="20" name="Text 18"/>
+          <p:cNvSpPr txBox="1"/>
+          <p:nvPr/>
+        </p:nvSpPr>
+        <p:spPr>
+          <a:xfrm>
+            <a:off x="6446520" y="4114800"/>
+            <a:ext cx="731520" cy="731520"/>
+          </a:xfrm>
+          <a:prstGeom prst="rect">
+            <a:avLst/>
+          </a:prstGeom>
+          <a:noFill/>
+          <a:ln/>
+        </p:spPr>
+        <p:txBody>
+          <a:bodyPr wrap="square" lIns="0" tIns="0" rIns="0" bIns="0" rtlCol="0" anchor="ctr"/>
+          <a:lstStyle/>
+          <a:p>
+            <a:pPr algn="ctr" indent="0" marL="0">
+              <a:buNone/>
+            </a:pPr>
+            <a:r>
+              <a:rPr lang="en-US" sz="2080" b="1" dirty="0">
+                <a:solidFill>
+                  <a:srgbClr val="0F4C5C"/>
+                </a:solidFill>
+              </a:rPr>
+              <a:t>4</a:t>
+            </a:r>
+            <a:endParaRPr lang="en-US" sz="2080" dirty="0"/>
+          </a:p>
+        </p:txBody>
+      </p:sp>
+      <p:sp>
+        <p:nvSpPr>
+          <p:cNvPr id="21" name="Text 19"/>
+          <p:cNvSpPr txBox="1"/>
+          <p:nvPr/>
+        </p:nvSpPr>
+        <p:spPr>
+          <a:xfrm>
+            <a:off x="7452360" y="3977640"/>
+            <a:ext cx="3931920" cy="502920"/>
+          </a:xfrm>
+          <a:prstGeom prst="rect">
+            <a:avLst/>
+          </a:prstGeom>
+          <a:noFill/>
+          <a:ln/>
+        </p:spPr>
+        <p:txBody>
+          <a:bodyPr wrap="square" lIns="0" tIns="0" rIns="0" bIns="0" rtlCol="0" anchor="ctr"/>
+          <a:lstStyle/>
+          <a:p>
+            <a:pPr indent="0" marL="0">
+              <a:buNone/>
+            </a:pPr>
+            <a:r>
+              <a:rPr lang="en-US" sz="2100" b="1" dirty="0">
+                <a:solidFill>
+                  <a:srgbClr val="1F2A30"/>
+                </a:solidFill>
+              </a:rPr>
+              <a:t>Quali valori, e quante volte?</a:t>
+            </a:r>
+            <a:endParaRPr lang="en-US" sz="2100" dirty="0"/>
+          </a:p>
+        </p:txBody>
+      </p:sp>
+      <p:sp>
+        <p:nvSpPr>
+          <p:cNvPr id="22" name="Text 20"/>
+          <p:cNvSpPr txBox="1"/>
+          <p:nvPr/>
+        </p:nvSpPr>
+        <p:spPr>
+          <a:xfrm>
+            <a:off x="7452360" y="4526280"/>
+            <a:ext cx="3931920" cy="457200"/>
+          </a:xfrm>
+          <a:prstGeom prst="rect">
+            <a:avLst/>
+          </a:prstGeom>
+          <a:noFill/>
+          <a:ln/>
+        </p:spPr>
+        <p:txBody>
+          <a:bodyPr wrap="square" lIns="0" tIns="0" rIns="0" bIns="0" rtlCol="0" anchor="ctr"/>
+          <a:lstStyle/>
+          <a:p>
+            <a:pPr indent="0" marL="0">
+              <a:buNone/>
+            </a:pPr>
+            <a:r>
+              <a:rPr lang="en-US" sz="1700" dirty="0">
+                <a:solidFill>
+                  <a:srgbClr val="0F4C5C"/>
+                </a:solidFill>
+                <a:latin typeface="Courier New" pitchFamily="34" charset="0"/>
+                <a:ea typeface="Courier New" pitchFamily="34" charset="-122"/>
+                <a:cs typeface="Courier New" pitchFamily="34" charset="-120"/>
+              </a:rPr>
+              <a:t>df["col"].value_counts()</a:t>
+            </a:r>
+            <a:endParaRPr lang="en-US" sz="1700" dirty="0"/>
+          </a:p>
+        </p:txBody>
+      </p:sp>
+      <p:sp>
+        <p:nvSpPr>
+          <p:cNvPr id="23" name="Text 21"/>
+          <p:cNvSpPr txBox="1"/>
+          <p:nvPr/>
+        </p:nvSpPr>
+        <p:spPr>
+          <a:xfrm>
+            <a:off x="548640" y="5623560"/>
+            <a:ext cx="11064240" cy="457200"/>
+          </a:xfrm>
+          <a:prstGeom prst="rect">
+            <a:avLst/>
+          </a:prstGeom>
+          <a:noFill/>
+          <a:ln/>
+        </p:spPr>
+        <p:txBody>
+          <a:bodyPr wrap="square" lIns="0" tIns="0" rIns="0" bIns="0" rtlCol="0" anchor="ctr"/>
+          <a:lstStyle/>
+          <a:p>
+            <a:pPr indent="0" marL="0">
+              <a:buNone/>
+            </a:pPr>
+            <a:r>
+              <a:rPr lang="en-US" sz="1800" i="1" dirty="0">
+                <a:solidFill>
+                  <a:srgbClr val="0F4C5C"/>
+                </a:solidFill>
+              </a:rPr>
+              <a:t>Prima di qualunque analisi. Sempre.</a:t>
+            </a:r>
+            <a:endParaRPr lang="en-US" sz="1800" dirty="0"/>
+          </a:p>
+        </p:txBody>
+      </p:sp>
+      <p:sp>
+        <p:nvSpPr>
+          <p:cNvPr id="25" name="Slide Number Placeholder 0"/>
+          <p:cNvSpPr>
+            <a:spLocks noGrp="1"/>
+          </p:cNvSpPr>
+          <p:nvPr>
+            <p:ph type="sldNum" sz="quarter" idx="4294967295"/>
+          </p:nvPr>
+        </p:nvSpPr>
+        <p:spPr>
+          <a:xfrm>
+            <a:off x="11155680" y="6400800"/>
+            <a:ext cx="457200" cy="274320"/>
+          </a:xfrm>
+          <a:prstGeom prst="rect">
+            <a:avLst/>
+          </a:prstGeom>
+          <a:extLst>
+            <a:ext uri="{C572A759-6A51-4108-AA02-DFA0A04FC94B}">
+              <ma14:wrappingTextBoxFlag xmlns:ma14="http://schemas.microsoft.com/office/mac/drawingml/2011/main" val="0"/>
+            </a:ext>
+          </a:extLst>
+        </p:spPr>
+        <p:txBody>
+          <a:bodyPr/>
+          <a:lstStyle>
+            <a:lvl1pPr>
+              <a:defRPr sz="1000">
+                <a:solidFill>
+                  <a:srgbClr val="5C6F7B"/>
+                </a:solidFill>
+              </a:defRPr>
+            </a:lvl1pPr>
+          </a:lstStyle>
+          <a:p>
+            <a:pPr algn="r"/>
+            <a:fld id="{F7021451-1387-4CA6-816F-3879F97B5CBC}" type="slidenum">
+              <a:rPr b="0" lang="en-US"/>
+              <a:t>11</a:t>
+            </a:fld>
+            <a:endParaRPr lang="en-US"/>
+          </a:p>
+        </p:txBody>
+      </p:sp>
+    </p:spTree>
+  </p:cSld>
+  <p:clrMapOvr>
+    <a:masterClrMapping/>
+  </p:clrMapOvr>
+</p:sld>
+</file>
+
+<file path=ppt/slides/slide12.xml><?xml version="1.0" encoding="utf-8"?>
+<p:sld xmlns:a="http://schemas.openxmlformats.org/drawingml/2006/main" xmlns:r="http://schemas.openxmlformats.org/officeDocument/2006/relationships" xmlns:p="http://schemas.openxmlformats.org/presentationml/2006/main">
+  <p:cSld name="Slide 12">
+    <p:spTree>
+      <p:nvGrpSpPr>
+        <p:cNvPr id="1" name=""/>
+        <p:cNvGrpSpPr/>
+        <p:nvPr/>
+      </p:nvGrpSpPr>
+      <p:grpSpPr>
+        <a:xfrm>
+          <a:off x="0" y="0"/>
+          <a:ext cx="0" cy="0"/>
+          <a:chOff x="0" y="0"/>
+          <a:chExt cx="0" cy="0"/>
+        </a:xfrm>
+      </p:grpSpPr>
+      <p:sp>
+        <p:nvSpPr>
+          <p:cNvPr id="2" name="Text 0"/>
+          <p:cNvSpPr/>
+          <p:nvPr>
+            <p:ph idx="100" type="title" hasCustomPrompt="1"/>
+          </p:nvPr>
+        </p:nvSpPr>
+        <p:spPr>
+          <a:xfrm>
+            <a:off x="731520" y="2194560"/>
+            <a:ext cx="10698480" cy="1280160"/>
+          </a:xfrm>
+          <a:prstGeom prst="rect">
+            <a:avLst/>
+          </a:prstGeom>
+          <a:noFill/>
+          <a:ln/>
+        </p:spPr>
+        <p:txBody>
+          <a:bodyPr wrap="square" lIns="0" tIns="0" rIns="0" bIns="0" rtlCol="0" anchor="b"/>
+          <a:lstStyle/>
+          <a:p>
+            <a:pPr algn="l" indent="0" marL="0">
+              <a:buNone/>
+            </a:pPr>
+            <a:r>
+              <a:rPr lang="en-US" sz="5400" b="1" dirty="0">
+                <a:solidFill>
+                  <a:srgbClr val="FFFFFF"/>
+                </a:solidFill>
+              </a:rPr>
+              <a:t>Task: conosci il tuo dataset</a:t>
+            </a:r>
+            <a:endParaRPr lang="en-US" sz="5400" dirty="0"/>
+          </a:p>
+        </p:txBody>
+      </p:sp>
+      <p:sp>
+        <p:nvSpPr>
+          <p:cNvPr id="3" name="Text 0"/>
+          <p:cNvSpPr/>
+          <p:nvPr>
+            <p:ph idx="101" type="body" hasCustomPrompt="1"/>
+          </p:nvPr>
+        </p:nvSpPr>
+        <p:spPr>
+          <a:xfrm>
+            <a:off x="731520" y="3657600"/>
+            <a:ext cx="10698480" cy="1463040"/>
+          </a:xfrm>
+          <a:prstGeom prst="rect">
+            <a:avLst/>
+          </a:prstGeom>
+          <a:noFill/>
+          <a:ln/>
+        </p:spPr>
+        <p:txBody>
+          <a:bodyPr wrap="square" lIns="0" tIns="0" rIns="0" bIns="0" rtlCol="0" anchor="t"/>
+          <a:lstStyle/>
+          <a:p>
+            <a:pPr indent="0" marL="0">
+              <a:buNone/>
+            </a:pPr>
+            <a:r>
+              <a:rPr lang="en-US" sz="2200" dirty="0">
+                <a:solidFill>
+                  <a:srgbClr val="B8C4CB"/>
+                </a:solidFill>
+              </a:rPr>
+              <a:t>Un collega ti manda imprese.xlsx. Ti puoi fidare?</a:t>
+            </a:r>
+            <a:endParaRPr lang="en-US" sz="2200" dirty="0"/>
+          </a:p>
+          <a:p>
+            <a:pPr indent="0" marL="0">
+              <a:buNone/>
+            </a:pPr>
+            <a:r>
+              <a:rPr lang="en-US" sz="2200" dirty="0">
+                <a:solidFill>
+                  <a:srgbClr val="B8C4CB"/>
+                </a:solidFill>
+              </a:rPr>
+              <a:t>60 minuti · apri il notebook dal README</a:t>
+            </a:r>
+            <a:endParaRPr lang="en-US" sz="2200" dirty="0"/>
+          </a:p>
+        </p:txBody>
+      </p:sp>
+    </p:spTree>
+  </p:cSld>
+  <p:clrMapOvr>
+    <a:masterClrMapping/>
+  </p:clrMapOvr>
+</p:sld>
+</file>
+
+<file path=ppt/slides/slide13.xml><?xml version="1.0" encoding="utf-8"?>
+<p:sld xmlns:a="http://schemas.openxmlformats.org/drawingml/2006/main" xmlns:r="http://schemas.openxmlformats.org/officeDocument/2006/relationships" xmlns:p="http://schemas.openxmlformats.org/presentationml/2006/main">
+  <p:cSld name="Slide 13">
+    <p:spTree>
+      <p:nvGrpSpPr>
+        <p:cNvPr id="1" name=""/>
+        <p:cNvGrpSpPr/>
+        <p:nvPr/>
+      </p:nvGrpSpPr>
+      <p:grpSpPr>
+        <a:xfrm>
+          <a:off x="0" y="0"/>
+          <a:ext cx="0" cy="0"/>
+          <a:chOff x="0" y="0"/>
+          <a:chExt cx="0" cy="0"/>
+        </a:xfrm>
+      </p:grpSpPr>
+      <p:sp>
+        <p:nvSpPr>
+          <p:cNvPr id="2" name="Text 0"/>
+          <p:cNvSpPr/>
+          <p:nvPr>
+            <p:ph idx="100" type="title" hasCustomPrompt="1"/>
+          </p:nvPr>
+        </p:nvSpPr>
+        <p:spPr>
+          <a:xfrm>
+            <a:off x="731520" y="2103120"/>
+            <a:ext cx="10698480" cy="1463040"/>
+          </a:xfrm>
+          <a:prstGeom prst="rect">
+            <a:avLst/>
+          </a:prstGeom>
+          <a:noFill/>
+          <a:ln/>
+        </p:spPr>
+        <p:txBody>
+          <a:bodyPr wrap="square" lIns="0" tIns="0" rIns="0" bIns="0" rtlCol="0" anchor="b"/>
+          <a:lstStyle/>
+          <a:p>
+            <a:pPr algn="l" indent="0" marL="0">
+              <a:buNone/>
+            </a:pPr>
+            <a:r>
+              <a:rPr lang="en-US" sz="4800" b="1" dirty="0">
+                <a:solidFill>
+                  <a:srgbClr val="FFFFFF"/>
+                </a:solidFill>
+              </a:rPr>
+              <a:t>Prossima volta: pulire i dati</a:t>
+            </a:r>
+            <a:endParaRPr lang="en-US" sz="4800" dirty="0"/>
+          </a:p>
+        </p:txBody>
+      </p:sp>
+      <p:sp>
+        <p:nvSpPr>
+          <p:cNvPr id="3" name="Text 0"/>
+          <p:cNvSpPr/>
+          <p:nvPr>
+            <p:ph idx="101" type="body" hasCustomPrompt="1"/>
+          </p:nvPr>
+        </p:nvSpPr>
+        <p:spPr>
+          <a:xfrm>
+            <a:off x="731520" y="3749040"/>
+            <a:ext cx="10698480" cy="914400"/>
+          </a:xfrm>
+          <a:prstGeom prst="rect">
+            <a:avLst/>
+          </a:prstGeom>
+          <a:noFill/>
+          <a:ln/>
+        </p:spPr>
+        <p:txBody>
+          <a:bodyPr wrap="square" lIns="0" tIns="0" rIns="0" bIns="0" rtlCol="0" anchor="t"/>
+          <a:lstStyle/>
+          <a:p>
+            <a:pPr indent="0" marL="0">
+              <a:buNone/>
+            </a:pPr>
+            <a:r>
+              <a:rPr lang="en-US" sz="2200" dirty="0">
+                <a:solidFill>
+                  <a:srgbClr val="F4C06E"/>
+                </a:solidFill>
+              </a:rPr>
+              <a:t>Compito: Kaggle Learn – Pandas, prime due lezioni (~40 min)</a:t>
+            </a:r>
+            <a:endParaRPr lang="en-US" sz="2200" dirty="0"/>
+          </a:p>
+        </p:txBody>
+      </p:sp>
+    </p:spTree>
+  </p:cSld>
+  <p:clrMapOvr>
+    <a:masterClrMapping/>
+  </p:clrMapOvr>
+</p:sld>
+</file>
+
 <file path=ppt/slides/slide2.xml><?xml version="1.0" encoding="utf-8"?>
 <p:sld xmlns:a="http://schemas.openxmlformats.org/drawingml/2006/main" xmlns:r="http://schemas.openxmlformats.org/officeDocument/2006/relationships" xmlns:p="http://schemas.openxmlformats.org/presentationml/2006/main">
   <p:cSld name="Slide 2">
@@ -5316,7 +7212,7 @@
                   <a:srgbClr val="0F4C5C"/>
                 </a:solidFill>
               </a:rPr>
-              <a:t>Fare domande a un oggetto</a:t>
+              <a:t>Selezionare righe e colonne</a:t>
             </a:r>
             <a:endParaRPr lang="en-US" sz="3600" dirty="0"/>
           </a:p>
@@ -5324,90 +7220,18 @@
       </p:sp>
       <p:sp>
         <p:nvSpPr>
-          <p:cNvPr id="3" name="Text 1"/>
-          <p:cNvSpPr txBox="1"/>
+          <p:cNvPr id="3" name="Shape 1"/>
+          <p:cNvSpPr/>
           <p:nvPr/>
         </p:nvSpPr>
         <p:spPr>
           <a:xfrm>
             <a:off x="548640" y="1645920"/>
-            <a:ext cx="5349240" cy="457200"/>
-          </a:xfrm>
-          <a:prstGeom prst="rect">
-            <a:avLst/>
-          </a:prstGeom>
-          <a:noFill/>
-          <a:ln/>
-        </p:spPr>
-        <p:txBody>
-          <a:bodyPr wrap="square" lIns="0" tIns="0" rIns="0" bIns="0" rtlCol="0" anchor="ctr"/>
-          <a:lstStyle/>
-          <a:p>
-            <a:pPr indent="0" marL="0">
-              <a:buNone/>
-            </a:pPr>
-            <a:r>
-              <a:rPr lang="en-US" sz="2600" b="1" dirty="0">
-                <a:solidFill>
-                  <a:srgbClr val="0F4C5C"/>
-                </a:solidFill>
-              </a:rPr>
-              <a:t>Metodo</a:t>
-            </a:r>
-            <a:endParaRPr lang="en-US" sz="2600" dirty="0"/>
-          </a:p>
-        </p:txBody>
-      </p:sp>
-      <p:sp>
-        <p:nvSpPr>
-          <p:cNvPr id="4" name="Text 2"/>
-          <p:cNvSpPr txBox="1"/>
-          <p:nvPr/>
-        </p:nvSpPr>
-        <p:spPr>
-          <a:xfrm>
-            <a:off x="548640" y="2103120"/>
-            <a:ext cx="5349240" cy="411480"/>
-          </a:xfrm>
-          <a:prstGeom prst="rect">
-            <a:avLst/>
-          </a:prstGeom>
-          <a:noFill/>
-          <a:ln/>
-        </p:spPr>
-        <p:txBody>
-          <a:bodyPr wrap="square" lIns="0" tIns="0" rIns="0" bIns="0" rtlCol="0" anchor="ctr"/>
-          <a:lstStyle/>
-          <a:p>
-            <a:pPr indent="0" marL="0">
-              <a:buNone/>
-            </a:pPr>
-            <a:r>
-              <a:rPr lang="en-US" sz="1800" dirty="0">
-                <a:solidFill>
-                  <a:srgbClr val="5C6F7B"/>
-                </a:solidFill>
-              </a:rPr>
-              <a:t>un'azione: ha le parentesi</a:t>
-            </a:r>
-            <a:endParaRPr lang="en-US" sz="1800" dirty="0"/>
-          </a:p>
-        </p:txBody>
-      </p:sp>
-      <p:sp>
-        <p:nvSpPr>
-          <p:cNvPr id="5" name="card-code"/>
-          <p:cNvSpPr/>
-          <p:nvPr/>
-        </p:nvSpPr>
-        <p:spPr>
-          <a:xfrm>
-            <a:off x="548640" y="2697480"/>
-            <a:ext cx="5349240" cy="1188720"/>
+            <a:ext cx="5852160" cy="777240"/>
           </a:xfrm>
           <a:prstGeom prst="roundRect">
             <a:avLst>
-              <a:gd name="adj" fmla="val 9231"/>
+              <a:gd name="adj" fmla="val 11765"/>
             </a:avLst>
           </a:prstGeom>
           <a:solidFill>
@@ -5418,14 +7242,14 @@
       </p:sp>
       <p:sp>
         <p:nvSpPr>
-          <p:cNvPr id="6" name="Text 4"/>
-          <p:cNvSpPr txBox="1"/>
-          <p:nvPr/>
-        </p:nvSpPr>
-        <p:spPr>
-          <a:xfrm>
-            <a:off x="777240" y="2834640"/>
-            <a:ext cx="1828800" cy="274320"/>
+          <p:cNvPr id="4" name="Text 2"/>
+          <p:cNvSpPr txBox="1"/>
+          <p:nvPr/>
+        </p:nvSpPr>
+        <p:spPr>
+          <a:xfrm>
+            <a:off x="777240" y="1645920"/>
+            <a:ext cx="5486400" cy="777240"/>
           </a:xfrm>
           <a:prstGeom prst="rect">
             <a:avLst/>
@@ -5441,43 +7265,7 @@
               <a:buNone/>
             </a:pPr>
             <a:r>
-              <a:rPr lang="en-US" sz="1100" b="1" spc="200" kern="0" dirty="0">
-                <a:solidFill>
-                  <a:srgbClr val="E09F3E"/>
-                </a:solidFill>
-              </a:rPr>
-              <a:t>PYTHON</a:t>
-            </a:r>
-            <a:endParaRPr lang="en-US" sz="1100" dirty="0"/>
-          </a:p>
-        </p:txBody>
-      </p:sp>
-      <p:sp>
-        <p:nvSpPr>
-          <p:cNvPr id="7" name="Text 5"/>
-          <p:cNvSpPr txBox="1"/>
-          <p:nvPr/>
-        </p:nvSpPr>
-        <p:spPr>
-          <a:xfrm>
-            <a:off x="777240" y="3154680"/>
-            <a:ext cx="4892040" cy="594360"/>
-          </a:xfrm>
-          <a:prstGeom prst="rect">
-            <a:avLst/>
-          </a:prstGeom>
-          <a:noFill/>
-          <a:ln/>
-        </p:spPr>
-        <p:txBody>
-          <a:bodyPr wrap="square" lIns="0" tIns="0" rIns="0" bIns="0" rtlCol="0" anchor="t"/>
-          <a:lstStyle/>
-          <a:p>
-            <a:pPr indent="0" marL="0">
-              <a:buNone/>
-            </a:pPr>
-            <a:r>
-              <a:rPr lang="en-US" sz="2200" dirty="0">
+              <a:rPr lang="en-US" sz="1900" dirty="0">
                 <a:solidFill>
                   <a:srgbClr val="FFFFFF"/>
                 </a:solidFill>
@@ -5485,26 +7273,353 @@
                 <a:ea typeface="Courier New" pitchFamily="34" charset="-122"/>
                 <a:cs typeface="Courier New" pitchFamily="34" charset="-120"/>
               </a:rPr>
-              <a:t>df.head(3)</a:t>
-            </a:r>
-            <a:endParaRPr lang="en-US" sz="2200" dirty="0"/>
-          </a:p>
-        </p:txBody>
-      </p:sp>
-      <p:sp>
-        <p:nvSpPr>
-          <p:cNvPr id="8" name="card-out"/>
+              <a:t>df["regione"]</a:t>
+            </a:r>
+            <a:endParaRPr lang="en-US" sz="1900" dirty="0"/>
+          </a:p>
+        </p:txBody>
+      </p:sp>
+      <p:sp>
+        <p:nvSpPr>
+          <p:cNvPr id="5" name="Text 3"/>
+          <p:cNvSpPr txBox="1"/>
+          <p:nvPr/>
+        </p:nvSpPr>
+        <p:spPr>
+          <a:xfrm>
+            <a:off x="6675120" y="1645920"/>
+            <a:ext cx="4937760" cy="777240"/>
+          </a:xfrm>
+          <a:prstGeom prst="rect">
+            <a:avLst/>
+          </a:prstGeom>
+          <a:noFill/>
+          <a:ln/>
+        </p:spPr>
+        <p:txBody>
+          <a:bodyPr wrap="square" lIns="0" tIns="0" rIns="0" bIns="0" rtlCol="0" anchor="ctr"/>
+          <a:lstStyle/>
+          <a:p>
+            <a:pPr indent="0" marL="0">
+              <a:buNone/>
+            </a:pPr>
+            <a:r>
+              <a:rPr lang="en-US" sz="1900" dirty="0">
+                <a:solidFill>
+                  <a:srgbClr val="1F2A30"/>
+                </a:solidFill>
+              </a:rPr>
+              <a:t>una colonna</a:t>
+            </a:r>
+            <a:endParaRPr lang="en-US" sz="1900" dirty="0"/>
+          </a:p>
+        </p:txBody>
+      </p:sp>
+      <p:sp>
+        <p:nvSpPr>
+          <p:cNvPr id="6" name="Shape 4"/>
           <p:cNvSpPr/>
           <p:nvPr/>
         </p:nvSpPr>
         <p:spPr>
           <a:xfrm>
-            <a:off x="548640" y="4069080"/>
-            <a:ext cx="5349240" cy="1188720"/>
+            <a:off x="548640" y="2606040"/>
+            <a:ext cx="5852160" cy="777240"/>
           </a:xfrm>
           <a:prstGeom prst="roundRect">
             <a:avLst>
-              <a:gd name="adj" fmla="val 9231"/>
+              <a:gd name="adj" fmla="val 11765"/>
+            </a:avLst>
+          </a:prstGeom>
+          <a:solidFill>
+            <a:srgbClr val="1F2A30"/>
+          </a:solidFill>
+          <a:ln/>
+        </p:spPr>
+      </p:sp>
+      <p:sp>
+        <p:nvSpPr>
+          <p:cNvPr id="7" name="Text 5"/>
+          <p:cNvSpPr txBox="1"/>
+          <p:nvPr/>
+        </p:nvSpPr>
+        <p:spPr>
+          <a:xfrm>
+            <a:off x="777240" y="2606040"/>
+            <a:ext cx="5486400" cy="777240"/>
+          </a:xfrm>
+          <a:prstGeom prst="rect">
+            <a:avLst/>
+          </a:prstGeom>
+          <a:noFill/>
+          <a:ln/>
+        </p:spPr>
+        <p:txBody>
+          <a:bodyPr wrap="square" lIns="0" tIns="0" rIns="0" bIns="0" rtlCol="0" anchor="ctr"/>
+          <a:lstStyle/>
+          <a:p>
+            <a:pPr indent="0" marL="0">
+              <a:buNone/>
+            </a:pPr>
+            <a:r>
+              <a:rPr lang="en-US" sz="1900" dirty="0">
+                <a:solidFill>
+                  <a:srgbClr val="FFFFFF"/>
+                </a:solidFill>
+                <a:latin typeface="Courier New" pitchFamily="34" charset="0"/>
+                <a:ea typeface="Courier New" pitchFamily="34" charset="-122"/>
+                <a:cs typeface="Courier New" pitchFamily="34" charset="-120"/>
+              </a:rPr>
+              <a:t>df[["regione", "anno"]]</a:t>
+            </a:r>
+            <a:endParaRPr lang="en-US" sz="1900" dirty="0"/>
+          </a:p>
+        </p:txBody>
+      </p:sp>
+      <p:sp>
+        <p:nvSpPr>
+          <p:cNvPr id="8" name="Text 6"/>
+          <p:cNvSpPr txBox="1"/>
+          <p:nvPr/>
+        </p:nvSpPr>
+        <p:spPr>
+          <a:xfrm>
+            <a:off x="6675120" y="2606040"/>
+            <a:ext cx="4937760" cy="777240"/>
+          </a:xfrm>
+          <a:prstGeom prst="rect">
+            <a:avLst/>
+          </a:prstGeom>
+          <a:noFill/>
+          <a:ln/>
+        </p:spPr>
+        <p:txBody>
+          <a:bodyPr wrap="square" lIns="0" tIns="0" rIns="0" bIns="0" rtlCol="0" anchor="ctr"/>
+          <a:lstStyle/>
+          <a:p>
+            <a:pPr indent="0" marL="0">
+              <a:buNone/>
+            </a:pPr>
+            <a:r>
+              <a:rPr lang="en-US" sz="1900" dirty="0">
+                <a:solidFill>
+                  <a:srgbClr val="1F2A30"/>
+                </a:solidFill>
+              </a:rPr>
+              <a:t>più colonne: una lista, doppie parentesi</a:t>
+            </a:r>
+            <a:endParaRPr lang="en-US" sz="1900" dirty="0"/>
+          </a:p>
+        </p:txBody>
+      </p:sp>
+      <p:sp>
+        <p:nvSpPr>
+          <p:cNvPr id="9" name="Shape 7"/>
+          <p:cNvSpPr/>
+          <p:nvPr/>
+        </p:nvSpPr>
+        <p:spPr>
+          <a:xfrm>
+            <a:off x="548640" y="3566160"/>
+            <a:ext cx="5852160" cy="777240"/>
+          </a:xfrm>
+          <a:prstGeom prst="roundRect">
+            <a:avLst>
+              <a:gd name="adj" fmla="val 11765"/>
+            </a:avLst>
+          </a:prstGeom>
+          <a:solidFill>
+            <a:srgbClr val="1F2A30"/>
+          </a:solidFill>
+          <a:ln/>
+        </p:spPr>
+      </p:sp>
+      <p:sp>
+        <p:nvSpPr>
+          <p:cNvPr id="10" name="Text 8"/>
+          <p:cNvSpPr txBox="1"/>
+          <p:nvPr/>
+        </p:nvSpPr>
+        <p:spPr>
+          <a:xfrm>
+            <a:off x="777240" y="3566160"/>
+            <a:ext cx="5486400" cy="777240"/>
+          </a:xfrm>
+          <a:prstGeom prst="rect">
+            <a:avLst/>
+          </a:prstGeom>
+          <a:noFill/>
+          <a:ln/>
+        </p:spPr>
+        <p:txBody>
+          <a:bodyPr wrap="square" lIns="0" tIns="0" rIns="0" bIns="0" rtlCol="0" anchor="ctr"/>
+          <a:lstStyle/>
+          <a:p>
+            <a:pPr indent="0" marL="0">
+              <a:buNone/>
+            </a:pPr>
+            <a:r>
+              <a:rPr lang="en-US" sz="1900" dirty="0">
+                <a:solidFill>
+                  <a:srgbClr val="FFFFFF"/>
+                </a:solidFill>
+                <a:latin typeface="Courier New" pitchFamily="34" charset="0"/>
+                <a:ea typeface="Courier New" pitchFamily="34" charset="-122"/>
+                <a:cs typeface="Courier New" pitchFamily="34" charset="-120"/>
+              </a:rPr>
+              <a:t>df.iloc[0:5]</a:t>
+            </a:r>
+            <a:endParaRPr lang="en-US" sz="1900" dirty="0"/>
+          </a:p>
+        </p:txBody>
+      </p:sp>
+      <p:sp>
+        <p:nvSpPr>
+          <p:cNvPr id="11" name="Text 9"/>
+          <p:cNvSpPr txBox="1"/>
+          <p:nvPr/>
+        </p:nvSpPr>
+        <p:spPr>
+          <a:xfrm>
+            <a:off x="6675120" y="3566160"/>
+            <a:ext cx="4937760" cy="777240"/>
+          </a:xfrm>
+          <a:prstGeom prst="rect">
+            <a:avLst/>
+          </a:prstGeom>
+          <a:noFill/>
+          <a:ln/>
+        </p:spPr>
+        <p:txBody>
+          <a:bodyPr wrap="square" lIns="0" tIns="0" rIns="0" bIns="0" rtlCol="0" anchor="ctr"/>
+          <a:lstStyle/>
+          <a:p>
+            <a:pPr indent="0" marL="0">
+              <a:buNone/>
+            </a:pPr>
+            <a:r>
+              <a:rPr lang="en-US" sz="1900" dirty="0">
+                <a:solidFill>
+                  <a:srgbClr val="1F2A30"/>
+                </a:solidFill>
+              </a:rPr>
+              <a:t>righe per posizione: 0, 1, 2, 3, 4</a:t>
+            </a:r>
+            <a:endParaRPr lang="en-US" sz="1900" dirty="0"/>
+          </a:p>
+        </p:txBody>
+      </p:sp>
+      <p:sp>
+        <p:nvSpPr>
+          <p:cNvPr id="12" name="Shape 10"/>
+          <p:cNvSpPr/>
+          <p:nvPr/>
+        </p:nvSpPr>
+        <p:spPr>
+          <a:xfrm>
+            <a:off x="548640" y="4526280"/>
+            <a:ext cx="5852160" cy="777240"/>
+          </a:xfrm>
+          <a:prstGeom prst="roundRect">
+            <a:avLst>
+              <a:gd name="adj" fmla="val 11765"/>
+            </a:avLst>
+          </a:prstGeom>
+          <a:solidFill>
+            <a:srgbClr val="1F2A30"/>
+          </a:solidFill>
+          <a:ln/>
+        </p:spPr>
+      </p:sp>
+      <p:sp>
+        <p:nvSpPr>
+          <p:cNvPr id="13" name="Text 11"/>
+          <p:cNvSpPr txBox="1"/>
+          <p:nvPr/>
+        </p:nvSpPr>
+        <p:spPr>
+          <a:xfrm>
+            <a:off x="777240" y="4526280"/>
+            <a:ext cx="5486400" cy="777240"/>
+          </a:xfrm>
+          <a:prstGeom prst="rect">
+            <a:avLst/>
+          </a:prstGeom>
+          <a:noFill/>
+          <a:ln/>
+        </p:spPr>
+        <p:txBody>
+          <a:bodyPr wrap="square" lIns="0" tIns="0" rIns="0" bIns="0" rtlCol="0" anchor="ctr"/>
+          <a:lstStyle/>
+          <a:p>
+            <a:pPr indent="0" marL="0">
+              <a:buNone/>
+            </a:pPr>
+            <a:r>
+              <a:rPr lang="en-US" sz="1900" dirty="0">
+                <a:solidFill>
+                  <a:srgbClr val="FFFFFF"/>
+                </a:solidFill>
+                <a:latin typeface="Courier New" pitchFamily="34" charset="0"/>
+                <a:ea typeface="Courier New" pitchFamily="34" charset="-122"/>
+                <a:cs typeface="Courier New" pitchFamily="34" charset="-120"/>
+              </a:rPr>
+              <a:t>df[df["anno"] == 2020]</a:t>
+            </a:r>
+            <a:endParaRPr lang="en-US" sz="1900" dirty="0"/>
+          </a:p>
+        </p:txBody>
+      </p:sp>
+      <p:sp>
+        <p:nvSpPr>
+          <p:cNvPr id="14" name="Text 12"/>
+          <p:cNvSpPr txBox="1"/>
+          <p:nvPr/>
+        </p:nvSpPr>
+        <p:spPr>
+          <a:xfrm>
+            <a:off x="6675120" y="4526280"/>
+            <a:ext cx="4937760" cy="777240"/>
+          </a:xfrm>
+          <a:prstGeom prst="rect">
+            <a:avLst/>
+          </a:prstGeom>
+          <a:noFill/>
+          <a:ln/>
+        </p:spPr>
+        <p:txBody>
+          <a:bodyPr wrap="square" lIns="0" tIns="0" rIns="0" bIns="0" rtlCol="0" anchor="ctr"/>
+          <a:lstStyle/>
+          <a:p>
+            <a:pPr indent="0" marL="0">
+              <a:buNone/>
+            </a:pPr>
+            <a:r>
+              <a:rPr lang="en-US" sz="1900" dirty="0">
+                <a:solidFill>
+                  <a:srgbClr val="1F2A30"/>
+                </a:solidFill>
+              </a:rPr>
+              <a:t>righe che rispettano una condizione</a:t>
+            </a:r>
+            <a:endParaRPr lang="en-US" sz="1900" dirty="0"/>
+          </a:p>
+        </p:txBody>
+      </p:sp>
+      <p:sp>
+        <p:nvSpPr>
+          <p:cNvPr id="15" name="Shape 13"/>
+          <p:cNvSpPr/>
+          <p:nvPr/>
+        </p:nvSpPr>
+        <p:spPr>
+          <a:xfrm>
+            <a:off x="548640" y="5532120"/>
+            <a:ext cx="11064240" cy="640080"/>
+          </a:xfrm>
+          <a:prstGeom prst="roundRect">
+            <a:avLst>
+              <a:gd name="adj" fmla="val 14286"/>
             </a:avLst>
           </a:prstGeom>
           <a:solidFill>
@@ -5515,14 +7630,14 @@
       </p:sp>
       <p:sp>
         <p:nvSpPr>
-          <p:cNvPr id="9" name="Text 7"/>
-          <p:cNvSpPr txBox="1"/>
-          <p:nvPr/>
-        </p:nvSpPr>
-        <p:spPr>
-          <a:xfrm>
-            <a:off x="777240" y="4206240"/>
-            <a:ext cx="1828800" cy="274320"/>
+          <p:cNvPr id="16" name="Text 14"/>
+          <p:cNvSpPr txBox="1"/>
+          <p:nvPr/>
+        </p:nvSpPr>
+        <p:spPr>
+          <a:xfrm>
+            <a:off x="822960" y="5532120"/>
+            <a:ext cx="10607040" cy="640080"/>
           </a:xfrm>
           <a:prstGeom prst="rect">
             <a:avLst/>
@@ -5538,43 +7653,29 @@
               <a:buNone/>
             </a:pPr>
             <a:r>
-              <a:rPr lang="en-US" sz="1100" b="1" spc="200" kern="0" dirty="0">
-                <a:solidFill>
-                  <a:srgbClr val="5C6F7B"/>
-                </a:solidFill>
-              </a:rPr>
-              <a:t>OUTPUT</a:t>
-            </a:r>
-            <a:endParaRPr lang="en-US" sz="1100" dirty="0"/>
-          </a:p>
-        </p:txBody>
-      </p:sp>
-      <p:sp>
-        <p:nvSpPr>
-          <p:cNvPr id="10" name="Text 8"/>
-          <p:cNvSpPr txBox="1"/>
-          <p:nvPr/>
-        </p:nvSpPr>
-        <p:spPr>
-          <a:xfrm>
-            <a:off x="777240" y="4526280"/>
-            <a:ext cx="4892040" cy="594360"/>
-          </a:xfrm>
-          <a:prstGeom prst="rect">
-            <a:avLst/>
-          </a:prstGeom>
-          <a:noFill/>
-          <a:ln/>
-        </p:spPr>
-        <p:txBody>
-          <a:bodyPr wrap="square" lIns="0" tIns="0" rIns="0" bIns="0" rtlCol="0" anchor="t"/>
-          <a:lstStyle/>
-          <a:p>
+              <a:rPr lang="en-US" sz="1800" b="1" dirty="0">
+                <a:solidFill>
+                  <a:srgbClr val="8F5308"/>
+                </a:solidFill>
+              </a:rPr>
+              <a:t>Attenzione  </a:t>
+            </a:r>
             <a:pPr indent="0" marL="0">
               <a:buNone/>
             </a:pPr>
             <a:r>
-              <a:rPr lang="en-US" sz="2000" dirty="0">
+              <a:rPr lang="en-US" sz="1800" dirty="0">
+                <a:solidFill>
+                  <a:srgbClr val="1F2A30"/>
+                </a:solidFill>
+              </a:rPr>
+              <a:t>in </a:t>
+            </a:r>
+            <a:pPr indent="0" marL="0">
+              <a:buNone/>
+            </a:pPr>
+            <a:r>
+              <a:rPr lang="en-US" sz="1800" b="1" dirty="0">
                 <a:solidFill>
                   <a:srgbClr val="1F2A30"/>
                 </a:solidFill>
@@ -5582,309 +7683,18 @@
                 <a:ea typeface="Courier New" pitchFamily="34" charset="-122"/>
                 <a:cs typeface="Courier New" pitchFamily="34" charset="-120"/>
               </a:rPr>
-              <a:t>le prime 3 righe</a:t>
-            </a:r>
-            <a:endParaRPr lang="en-US" sz="2000" dirty="0"/>
-          </a:p>
-        </p:txBody>
-      </p:sp>
-      <p:sp>
-        <p:nvSpPr>
-          <p:cNvPr id="11" name="Text 9"/>
-          <p:cNvSpPr txBox="1"/>
-          <p:nvPr/>
-        </p:nvSpPr>
-        <p:spPr>
-          <a:xfrm>
-            <a:off x="6263640" y="1645920"/>
-            <a:ext cx="5349240" cy="457200"/>
-          </a:xfrm>
-          <a:prstGeom prst="rect">
-            <a:avLst/>
-          </a:prstGeom>
-          <a:noFill/>
-          <a:ln/>
-        </p:spPr>
-        <p:txBody>
-          <a:bodyPr wrap="square" lIns="0" tIns="0" rIns="0" bIns="0" rtlCol="0" anchor="ctr"/>
-          <a:lstStyle/>
-          <a:p>
+              <a:t>0:5</a:t>
+            </a:r>
             <a:pPr indent="0" marL="0">
               <a:buNone/>
             </a:pPr>
             <a:r>
-              <a:rPr lang="en-US" sz="2600" b="1" dirty="0">
-                <a:solidFill>
-                  <a:srgbClr val="0F4C5C"/>
-                </a:solidFill>
-              </a:rPr>
-              <a:t>Attributo</a:t>
-            </a:r>
-            <a:endParaRPr lang="en-US" sz="2600" dirty="0"/>
-          </a:p>
-        </p:txBody>
-      </p:sp>
-      <p:sp>
-        <p:nvSpPr>
-          <p:cNvPr id="12" name="Text 10"/>
-          <p:cNvSpPr txBox="1"/>
-          <p:nvPr/>
-        </p:nvSpPr>
-        <p:spPr>
-          <a:xfrm>
-            <a:off x="6263640" y="2103120"/>
-            <a:ext cx="5349240" cy="411480"/>
-          </a:xfrm>
-          <a:prstGeom prst="rect">
-            <a:avLst/>
-          </a:prstGeom>
-          <a:noFill/>
-          <a:ln/>
-        </p:spPr>
-        <p:txBody>
-          <a:bodyPr wrap="square" lIns="0" tIns="0" rIns="0" bIns="0" rtlCol="0" anchor="ctr"/>
-          <a:lstStyle/>
-          <a:p>
-            <a:pPr indent="0" marL="0">
-              <a:buNone/>
-            </a:pPr>
-            <a:r>
               <a:rPr lang="en-US" sz="1800" dirty="0">
                 <a:solidFill>
-                  <a:srgbClr val="5C6F7B"/>
-                </a:solidFill>
-              </a:rPr>
-              <a:t>un'informazione: niente parentesi</a:t>
-            </a:r>
-            <a:endParaRPr lang="en-US" sz="1800" dirty="0"/>
-          </a:p>
-        </p:txBody>
-      </p:sp>
-      <p:sp>
-        <p:nvSpPr>
-          <p:cNvPr id="13" name="card-code"/>
-          <p:cNvSpPr/>
-          <p:nvPr/>
-        </p:nvSpPr>
-        <p:spPr>
-          <a:xfrm>
-            <a:off x="6263640" y="2697480"/>
-            <a:ext cx="5349240" cy="1188720"/>
-          </a:xfrm>
-          <a:prstGeom prst="roundRect">
-            <a:avLst>
-              <a:gd name="adj" fmla="val 9231"/>
-            </a:avLst>
-          </a:prstGeom>
-          <a:solidFill>
-            <a:srgbClr val="1F2A30"/>
-          </a:solidFill>
-          <a:ln/>
-        </p:spPr>
-      </p:sp>
-      <p:sp>
-        <p:nvSpPr>
-          <p:cNvPr id="14" name="Text 12"/>
-          <p:cNvSpPr txBox="1"/>
-          <p:nvPr/>
-        </p:nvSpPr>
-        <p:spPr>
-          <a:xfrm>
-            <a:off x="6492240" y="2834640"/>
-            <a:ext cx="1828800" cy="274320"/>
-          </a:xfrm>
-          <a:prstGeom prst="rect">
-            <a:avLst/>
-          </a:prstGeom>
-          <a:noFill/>
-          <a:ln/>
-        </p:spPr>
-        <p:txBody>
-          <a:bodyPr wrap="square" lIns="0" tIns="0" rIns="0" bIns="0" rtlCol="0" anchor="ctr"/>
-          <a:lstStyle/>
-          <a:p>
-            <a:pPr indent="0" marL="0">
-              <a:buNone/>
-            </a:pPr>
-            <a:r>
-              <a:rPr lang="en-US" sz="1100" b="1" spc="200" kern="0" dirty="0">
-                <a:solidFill>
-                  <a:srgbClr val="E09F3E"/>
-                </a:solidFill>
-              </a:rPr>
-              <a:t>PYTHON</a:t>
-            </a:r>
-            <a:endParaRPr lang="en-US" sz="1100" dirty="0"/>
-          </a:p>
-        </p:txBody>
-      </p:sp>
-      <p:sp>
-        <p:nvSpPr>
-          <p:cNvPr id="15" name="Text 13"/>
-          <p:cNvSpPr txBox="1"/>
-          <p:nvPr/>
-        </p:nvSpPr>
-        <p:spPr>
-          <a:xfrm>
-            <a:off x="6492240" y="3154680"/>
-            <a:ext cx="4892040" cy="594360"/>
-          </a:xfrm>
-          <a:prstGeom prst="rect">
-            <a:avLst/>
-          </a:prstGeom>
-          <a:noFill/>
-          <a:ln/>
-        </p:spPr>
-        <p:txBody>
-          <a:bodyPr wrap="square" lIns="0" tIns="0" rIns="0" bIns="0" rtlCol="0" anchor="t"/>
-          <a:lstStyle/>
-          <a:p>
-            <a:pPr indent="0" marL="0">
-              <a:buNone/>
-            </a:pPr>
-            <a:r>
-              <a:rPr lang="en-US" sz="2200" dirty="0">
-                <a:solidFill>
-                  <a:srgbClr val="FFFFFF"/>
-                </a:solidFill>
-                <a:latin typeface="Courier New" pitchFamily="34" charset="0"/>
-                <a:ea typeface="Courier New" pitchFamily="34" charset="-122"/>
-                <a:cs typeface="Courier New" pitchFamily="34" charset="-120"/>
-              </a:rPr>
-              <a:t>df.shape</a:t>
-            </a:r>
-            <a:endParaRPr lang="en-US" sz="2200" dirty="0"/>
-          </a:p>
-        </p:txBody>
-      </p:sp>
-      <p:sp>
-        <p:nvSpPr>
-          <p:cNvPr id="16" name="card-out"/>
-          <p:cNvSpPr/>
-          <p:nvPr/>
-        </p:nvSpPr>
-        <p:spPr>
-          <a:xfrm>
-            <a:off x="6263640" y="4069080"/>
-            <a:ext cx="5349240" cy="1188720"/>
-          </a:xfrm>
-          <a:prstGeom prst="roundRect">
-            <a:avLst>
-              <a:gd name="adj" fmla="val 9231"/>
-            </a:avLst>
-          </a:prstGeom>
-          <a:solidFill>
-            <a:srgbClr val="EEF3F4"/>
-          </a:solidFill>
-          <a:ln/>
-        </p:spPr>
-      </p:sp>
-      <p:sp>
-        <p:nvSpPr>
-          <p:cNvPr id="17" name="Text 15"/>
-          <p:cNvSpPr txBox="1"/>
-          <p:nvPr/>
-        </p:nvSpPr>
-        <p:spPr>
-          <a:xfrm>
-            <a:off x="6492240" y="4206240"/>
-            <a:ext cx="1828800" cy="274320"/>
-          </a:xfrm>
-          <a:prstGeom prst="rect">
-            <a:avLst/>
-          </a:prstGeom>
-          <a:noFill/>
-          <a:ln/>
-        </p:spPr>
-        <p:txBody>
-          <a:bodyPr wrap="square" lIns="0" tIns="0" rIns="0" bIns="0" rtlCol="0" anchor="ctr"/>
-          <a:lstStyle/>
-          <a:p>
-            <a:pPr indent="0" marL="0">
-              <a:buNone/>
-            </a:pPr>
-            <a:r>
-              <a:rPr lang="en-US" sz="1100" b="1" spc="200" kern="0" dirty="0">
-                <a:solidFill>
-                  <a:srgbClr val="5C6F7B"/>
-                </a:solidFill>
-              </a:rPr>
-              <a:t>OUTPUT</a:t>
-            </a:r>
-            <a:endParaRPr lang="en-US" sz="1100" dirty="0"/>
-          </a:p>
-        </p:txBody>
-      </p:sp>
-      <p:sp>
-        <p:nvSpPr>
-          <p:cNvPr id="18" name="Text 16"/>
-          <p:cNvSpPr txBox="1"/>
-          <p:nvPr/>
-        </p:nvSpPr>
-        <p:spPr>
-          <a:xfrm>
-            <a:off x="6492240" y="4526280"/>
-            <a:ext cx="4892040" cy="594360"/>
-          </a:xfrm>
-          <a:prstGeom prst="rect">
-            <a:avLst/>
-          </a:prstGeom>
-          <a:noFill/>
-          <a:ln/>
-        </p:spPr>
-        <p:txBody>
-          <a:bodyPr wrap="square" lIns="0" tIns="0" rIns="0" bIns="0" rtlCol="0" anchor="t"/>
-          <a:lstStyle/>
-          <a:p>
-            <a:pPr indent="0" marL="0">
-              <a:buNone/>
-            </a:pPr>
-            <a:r>
-              <a:rPr lang="en-US" sz="2000" dirty="0">
-                <a:solidFill>
                   <a:srgbClr val="1F2A30"/>
                 </a:solidFill>
-                <a:latin typeface="Courier New" pitchFamily="34" charset="0"/>
-                <a:ea typeface="Courier New" pitchFamily="34" charset="-122"/>
-                <a:cs typeface="Courier New" pitchFamily="34" charset="-120"/>
-              </a:rPr>
-              <a:t>(2515, 9)</a:t>
-            </a:r>
-            <a:endParaRPr lang="en-US" sz="2000" dirty="0"/>
-          </a:p>
-        </p:txBody>
-      </p:sp>
-      <p:sp>
-        <p:nvSpPr>
-          <p:cNvPr id="19" name="Text 17"/>
-          <p:cNvSpPr txBox="1"/>
-          <p:nvPr/>
-        </p:nvSpPr>
-        <p:spPr>
-          <a:xfrm>
-            <a:off x="548640" y="5532120"/>
-            <a:ext cx="11064240" cy="457200"/>
-          </a:xfrm>
-          <a:prstGeom prst="rect">
-            <a:avLst/>
-          </a:prstGeom>
-          <a:noFill/>
-          <a:ln/>
-        </p:spPr>
-        <p:txBody>
-          <a:bodyPr wrap="square" lIns="0" tIns="0" rIns="0" bIns="0" rtlCol="0" anchor="ctr"/>
-          <a:lstStyle/>
-          <a:p>
-            <a:pPr indent="0" marL="0">
-              <a:buNone/>
-            </a:pPr>
-            <a:r>
-              <a:rPr lang="en-US" sz="1800" i="1" dirty="0">
-                <a:solidFill>
-                  <a:srgbClr val="0F4C5C"/>
-                </a:solidFill>
-              </a:rPr>
-              <a:t>df è un oggetto: dati, più tutte le cose che puoi chiedergli. Il punto le collega.</a:t>
+              </a:rPr>
+              <a:t> il primo numero è incluso, il secondo escluso. E si parte da 0.</a:t>
             </a:r>
             <a:endParaRPr lang="en-US" sz="1800" dirty="0"/>
           </a:p>
@@ -5992,7 +7802,7 @@
                   <a:srgbClr val="0F4C5C"/>
                 </a:solidFill>
               </a:rPr>
-              <a:t>Le domande da fare sempre a un dataset</a:t>
+              <a:t>Slicing: dove cadono i tagli</a:t>
             </a:r>
             <a:endParaRPr lang="en-US" sz="3600" dirty="0"/>
           </a:p>
@@ -6006,50 +7816,33 @@
         </p:nvSpPr>
         <p:spPr>
           <a:xfrm>
-            <a:off x="548640" y="1737360"/>
-            <a:ext cx="5440680" cy="1645920"/>
-          </a:xfrm>
-          <a:prstGeom prst="roundRect">
-            <a:avLst>
-              <a:gd name="adj" fmla="val 6667"/>
-            </a:avLst>
+            <a:off x="914400" y="2331720"/>
+            <a:ext cx="914400" cy="822960"/>
+          </a:xfrm>
+          <a:prstGeom prst="rect">
+            <a:avLst/>
           </a:prstGeom>
           <a:solidFill>
             <a:srgbClr val="EEF3F4"/>
           </a:solidFill>
-          <a:ln/>
-        </p:spPr>
-      </p:sp>
-      <p:sp>
-        <p:nvSpPr>
-          <p:cNvPr id="4" name="Shape 2"/>
-          <p:cNvSpPr/>
-          <p:nvPr/>
-        </p:nvSpPr>
-        <p:spPr>
-          <a:xfrm>
-            <a:off x="822960" y="2194560"/>
-            <a:ext cx="731520" cy="731520"/>
-          </a:xfrm>
-          <a:prstGeom prst="ellipse">
-            <a:avLst/>
-          </a:prstGeom>
-          <a:solidFill>
-            <a:srgbClr val="FFFFFF"/>
-          </a:solidFill>
-          <a:ln/>
-        </p:spPr>
-      </p:sp>
-      <p:sp>
-        <p:nvSpPr>
-          <p:cNvPr id="5" name="Text 3"/>
-          <p:cNvSpPr txBox="1"/>
-          <p:nvPr/>
-        </p:nvSpPr>
-        <p:spPr>
-          <a:xfrm>
-            <a:off x="822960" y="2194560"/>
-            <a:ext cx="731520" cy="731520"/>
+          <a:ln w="25400">
+            <a:solidFill>
+              <a:srgbClr val="FFFFFF"/>
+            </a:solidFill>
+            <a:prstDash val="solid"/>
+          </a:ln>
+        </p:spPr>
+      </p:sp>
+      <p:sp>
+        <p:nvSpPr>
+          <p:cNvPr id="4" name="Text 2"/>
+          <p:cNvSpPr txBox="1"/>
+          <p:nvPr/>
+        </p:nvSpPr>
+        <p:spPr>
+          <a:xfrm>
+            <a:off x="914400" y="2331720"/>
+            <a:ext cx="914400" cy="822960"/>
           </a:xfrm>
           <a:prstGeom prst="rect">
             <a:avLst/>
@@ -6065,144 +7858,559 @@
               <a:buNone/>
             </a:pPr>
             <a:r>
-              <a:rPr lang="en-US" sz="2080" b="1" dirty="0">
-                <a:solidFill>
-                  <a:srgbClr val="0F4C5C"/>
-                </a:solidFill>
-              </a:rPr>
-              <a:t>1</a:t>
-            </a:r>
-            <a:endParaRPr lang="en-US" sz="2080" dirty="0"/>
-          </a:p>
-        </p:txBody>
-      </p:sp>
-      <p:sp>
-        <p:nvSpPr>
-          <p:cNvPr id="6" name="Text 4"/>
-          <p:cNvSpPr txBox="1"/>
-          <p:nvPr/>
-        </p:nvSpPr>
-        <p:spPr>
-          <a:xfrm>
-            <a:off x="1828800" y="2057400"/>
-            <a:ext cx="3931920" cy="502920"/>
-          </a:xfrm>
-          <a:prstGeom prst="rect">
-            <a:avLst/>
-          </a:prstGeom>
-          <a:noFill/>
-          <a:ln/>
-        </p:spPr>
-        <p:txBody>
-          <a:bodyPr wrap="square" lIns="0" tIns="0" rIns="0" bIns="0" rtlCol="0" anchor="ctr"/>
-          <a:lstStyle/>
-          <a:p>
-            <a:pPr indent="0" marL="0">
-              <a:buNone/>
-            </a:pPr>
-            <a:r>
-              <a:rPr lang="en-US" sz="2100" b="1" dirty="0">
+              <a:rPr lang="en-US" sz="2600" b="1" dirty="0">
                 <a:solidFill>
                   <a:srgbClr val="1F2A30"/>
-                </a:solidFill>
-              </a:rPr>
-              <a:t>Quanto è grande?</a:t>
-            </a:r>
-            <a:endParaRPr lang="en-US" sz="2100" dirty="0"/>
-          </a:p>
-        </p:txBody>
-      </p:sp>
-      <p:sp>
-        <p:nvSpPr>
-          <p:cNvPr id="7" name="Text 5"/>
-          <p:cNvSpPr txBox="1"/>
-          <p:nvPr/>
-        </p:nvSpPr>
-        <p:spPr>
-          <a:xfrm>
-            <a:off x="1828800" y="2606040"/>
-            <a:ext cx="3931920" cy="457200"/>
-          </a:xfrm>
-          <a:prstGeom prst="rect">
-            <a:avLst/>
-          </a:prstGeom>
-          <a:noFill/>
-          <a:ln/>
-        </p:spPr>
-        <p:txBody>
-          <a:bodyPr wrap="square" lIns="0" tIns="0" rIns="0" bIns="0" rtlCol="0" anchor="ctr"/>
-          <a:lstStyle/>
-          <a:p>
-            <a:pPr indent="0" marL="0">
-              <a:buNone/>
-            </a:pPr>
-            <a:r>
-              <a:rPr lang="en-US" sz="1700" dirty="0">
-                <a:solidFill>
-                  <a:srgbClr val="0F4C5C"/>
                 </a:solidFill>
                 <a:latin typeface="Courier New" pitchFamily="34" charset="0"/>
                 <a:ea typeface="Courier New" pitchFamily="34" charset="-122"/>
                 <a:cs typeface="Courier New" pitchFamily="34" charset="-120"/>
               </a:rPr>
-              <a:t>df.shape</a:t>
-            </a:r>
-            <a:endParaRPr lang="en-US" sz="1700" dirty="0"/>
-          </a:p>
-        </p:txBody>
-      </p:sp>
-      <p:sp>
-        <p:nvSpPr>
-          <p:cNvPr id="8" name="Shape 6"/>
+              <a:t>A</a:t>
+            </a:r>
+            <a:endParaRPr lang="en-US" sz="2600" dirty="0"/>
+          </a:p>
+        </p:txBody>
+      </p:sp>
+      <p:sp>
+        <p:nvSpPr>
+          <p:cNvPr id="5" name="Text 3"/>
+          <p:cNvSpPr txBox="1"/>
+          <p:nvPr/>
+        </p:nvSpPr>
+        <p:spPr>
+          <a:xfrm>
+            <a:off x="914400" y="3227832"/>
+            <a:ext cx="914400" cy="320040"/>
+          </a:xfrm>
+          <a:prstGeom prst="rect">
+            <a:avLst/>
+          </a:prstGeom>
+          <a:noFill/>
+          <a:ln/>
+        </p:spPr>
+        <p:txBody>
+          <a:bodyPr wrap="square" lIns="0" tIns="0" rIns="0" bIns="0" rtlCol="0" anchor="ctr"/>
+          <a:lstStyle/>
+          <a:p>
+            <a:pPr algn="ctr" indent="0" marL="0">
+              <a:buNone/>
+            </a:pPr>
+            <a:r>
+              <a:rPr lang="en-US" sz="1400" dirty="0">
+                <a:solidFill>
+                  <a:srgbClr val="5C6F7B"/>
+                </a:solidFill>
+                <a:latin typeface="Courier New" pitchFamily="34" charset="0"/>
+                <a:ea typeface="Courier New" pitchFamily="34" charset="-122"/>
+                <a:cs typeface="Courier New" pitchFamily="34" charset="-120"/>
+              </a:rPr>
+              <a:t>0</a:t>
+            </a:r>
+            <a:endParaRPr lang="en-US" sz="1400" dirty="0"/>
+          </a:p>
+        </p:txBody>
+      </p:sp>
+      <p:sp>
+        <p:nvSpPr>
+          <p:cNvPr id="6" name="Text 4"/>
+          <p:cNvSpPr txBox="1"/>
+          <p:nvPr/>
+        </p:nvSpPr>
+        <p:spPr>
+          <a:xfrm>
+            <a:off x="914400" y="3538728"/>
+            <a:ext cx="914400" cy="320040"/>
+          </a:xfrm>
+          <a:prstGeom prst="rect">
+            <a:avLst/>
+          </a:prstGeom>
+          <a:noFill/>
+          <a:ln/>
+        </p:spPr>
+        <p:txBody>
+          <a:bodyPr wrap="square" lIns="0" tIns="0" rIns="0" bIns="0" rtlCol="0" anchor="ctr"/>
+          <a:lstStyle/>
+          <a:p>
+            <a:pPr algn="ctr" indent="0" marL="0">
+              <a:buNone/>
+            </a:pPr>
+            <a:r>
+              <a:rPr lang="en-US" sz="1200" dirty="0">
+                <a:solidFill>
+                  <a:srgbClr val="5C6F7B"/>
+                </a:solidFill>
+                <a:latin typeface="Courier New" pitchFamily="34" charset="0"/>
+                <a:ea typeface="Courier New" pitchFamily="34" charset="-122"/>
+                <a:cs typeface="Courier New" pitchFamily="34" charset="-120"/>
+              </a:rPr>
+              <a:t>-6</a:t>
+            </a:r>
+            <a:endParaRPr lang="en-US" sz="1200" dirty="0"/>
+          </a:p>
+        </p:txBody>
+      </p:sp>
+      <p:sp>
+        <p:nvSpPr>
+          <p:cNvPr id="7" name="Shape 5"/>
           <p:cNvSpPr/>
           <p:nvPr/>
         </p:nvSpPr>
         <p:spPr>
           <a:xfrm>
-            <a:off x="6172200" y="1737360"/>
-            <a:ext cx="5440680" cy="1645920"/>
-          </a:xfrm>
-          <a:prstGeom prst="roundRect">
-            <a:avLst>
-              <a:gd name="adj" fmla="val 6667"/>
-            </a:avLst>
+            <a:off x="1828800" y="2331720"/>
+            <a:ext cx="914400" cy="822960"/>
+          </a:xfrm>
+          <a:prstGeom prst="rect">
+            <a:avLst/>
+          </a:prstGeom>
+          <a:solidFill>
+            <a:srgbClr val="FBE3B8"/>
+          </a:solidFill>
+          <a:ln w="25400">
+            <a:solidFill>
+              <a:srgbClr val="FFFFFF"/>
+            </a:solidFill>
+            <a:prstDash val="solid"/>
+          </a:ln>
+        </p:spPr>
+      </p:sp>
+      <p:sp>
+        <p:nvSpPr>
+          <p:cNvPr id="8" name="Text 6"/>
+          <p:cNvSpPr txBox="1"/>
+          <p:nvPr/>
+        </p:nvSpPr>
+        <p:spPr>
+          <a:xfrm>
+            <a:off x="1828800" y="2331720"/>
+            <a:ext cx="914400" cy="822960"/>
+          </a:xfrm>
+          <a:prstGeom prst="rect">
+            <a:avLst/>
+          </a:prstGeom>
+          <a:noFill/>
+          <a:ln/>
+        </p:spPr>
+        <p:txBody>
+          <a:bodyPr wrap="square" lIns="0" tIns="0" rIns="0" bIns="0" rtlCol="0" anchor="ctr"/>
+          <a:lstStyle/>
+          <a:p>
+            <a:pPr algn="ctr" indent="0" marL="0">
+              <a:buNone/>
+            </a:pPr>
+            <a:r>
+              <a:rPr lang="en-US" sz="2600" b="1" dirty="0">
+                <a:solidFill>
+                  <a:srgbClr val="1F2A30"/>
+                </a:solidFill>
+                <a:latin typeface="Courier New" pitchFamily="34" charset="0"/>
+                <a:ea typeface="Courier New" pitchFamily="34" charset="-122"/>
+                <a:cs typeface="Courier New" pitchFamily="34" charset="-120"/>
+              </a:rPr>
+              <a:t>B</a:t>
+            </a:r>
+            <a:endParaRPr lang="en-US" sz="2600" dirty="0"/>
+          </a:p>
+        </p:txBody>
+      </p:sp>
+      <p:sp>
+        <p:nvSpPr>
+          <p:cNvPr id="9" name="Text 7"/>
+          <p:cNvSpPr txBox="1"/>
+          <p:nvPr/>
+        </p:nvSpPr>
+        <p:spPr>
+          <a:xfrm>
+            <a:off x="1828800" y="3227832"/>
+            <a:ext cx="914400" cy="320040"/>
+          </a:xfrm>
+          <a:prstGeom prst="rect">
+            <a:avLst/>
+          </a:prstGeom>
+          <a:noFill/>
+          <a:ln/>
+        </p:spPr>
+        <p:txBody>
+          <a:bodyPr wrap="square" lIns="0" tIns="0" rIns="0" bIns="0" rtlCol="0" anchor="ctr"/>
+          <a:lstStyle/>
+          <a:p>
+            <a:pPr algn="ctr" indent="0" marL="0">
+              <a:buNone/>
+            </a:pPr>
+            <a:r>
+              <a:rPr lang="en-US" sz="1400" dirty="0">
+                <a:solidFill>
+                  <a:srgbClr val="5C6F7B"/>
+                </a:solidFill>
+                <a:latin typeface="Courier New" pitchFamily="34" charset="0"/>
+                <a:ea typeface="Courier New" pitchFamily="34" charset="-122"/>
+                <a:cs typeface="Courier New" pitchFamily="34" charset="-120"/>
+              </a:rPr>
+              <a:t>1</a:t>
+            </a:r>
+            <a:endParaRPr lang="en-US" sz="1400" dirty="0"/>
+          </a:p>
+        </p:txBody>
+      </p:sp>
+      <p:sp>
+        <p:nvSpPr>
+          <p:cNvPr id="10" name="Text 8"/>
+          <p:cNvSpPr txBox="1"/>
+          <p:nvPr/>
+        </p:nvSpPr>
+        <p:spPr>
+          <a:xfrm>
+            <a:off x="1828800" y="3538728"/>
+            <a:ext cx="914400" cy="320040"/>
+          </a:xfrm>
+          <a:prstGeom prst="rect">
+            <a:avLst/>
+          </a:prstGeom>
+          <a:noFill/>
+          <a:ln/>
+        </p:spPr>
+        <p:txBody>
+          <a:bodyPr wrap="square" lIns="0" tIns="0" rIns="0" bIns="0" rtlCol="0" anchor="ctr"/>
+          <a:lstStyle/>
+          <a:p>
+            <a:pPr algn="ctr" indent="0" marL="0">
+              <a:buNone/>
+            </a:pPr>
+            <a:r>
+              <a:rPr lang="en-US" sz="1200" dirty="0">
+                <a:solidFill>
+                  <a:srgbClr val="5C6F7B"/>
+                </a:solidFill>
+                <a:latin typeface="Courier New" pitchFamily="34" charset="0"/>
+                <a:ea typeface="Courier New" pitchFamily="34" charset="-122"/>
+                <a:cs typeface="Courier New" pitchFamily="34" charset="-120"/>
+              </a:rPr>
+              <a:t>-5</a:t>
+            </a:r>
+            <a:endParaRPr lang="en-US" sz="1200" dirty="0"/>
+          </a:p>
+        </p:txBody>
+      </p:sp>
+      <p:sp>
+        <p:nvSpPr>
+          <p:cNvPr id="11" name="Shape 9"/>
+          <p:cNvSpPr/>
+          <p:nvPr/>
+        </p:nvSpPr>
+        <p:spPr>
+          <a:xfrm>
+            <a:off x="2743200" y="2331720"/>
+            <a:ext cx="914400" cy="822960"/>
+          </a:xfrm>
+          <a:prstGeom prst="rect">
+            <a:avLst/>
+          </a:prstGeom>
+          <a:solidFill>
+            <a:srgbClr val="FBE3B8"/>
+          </a:solidFill>
+          <a:ln w="25400">
+            <a:solidFill>
+              <a:srgbClr val="FFFFFF"/>
+            </a:solidFill>
+            <a:prstDash val="solid"/>
+          </a:ln>
+        </p:spPr>
+      </p:sp>
+      <p:sp>
+        <p:nvSpPr>
+          <p:cNvPr id="12" name="Text 10"/>
+          <p:cNvSpPr txBox="1"/>
+          <p:nvPr/>
+        </p:nvSpPr>
+        <p:spPr>
+          <a:xfrm>
+            <a:off x="2743200" y="2331720"/>
+            <a:ext cx="914400" cy="822960"/>
+          </a:xfrm>
+          <a:prstGeom prst="rect">
+            <a:avLst/>
+          </a:prstGeom>
+          <a:noFill/>
+          <a:ln/>
+        </p:spPr>
+        <p:txBody>
+          <a:bodyPr wrap="square" lIns="0" tIns="0" rIns="0" bIns="0" rtlCol="0" anchor="ctr"/>
+          <a:lstStyle/>
+          <a:p>
+            <a:pPr algn="ctr" indent="0" marL="0">
+              <a:buNone/>
+            </a:pPr>
+            <a:r>
+              <a:rPr lang="en-US" sz="2600" b="1" dirty="0">
+                <a:solidFill>
+                  <a:srgbClr val="1F2A30"/>
+                </a:solidFill>
+                <a:latin typeface="Courier New" pitchFamily="34" charset="0"/>
+                <a:ea typeface="Courier New" pitchFamily="34" charset="-122"/>
+                <a:cs typeface="Courier New" pitchFamily="34" charset="-120"/>
+              </a:rPr>
+              <a:t>C</a:t>
+            </a:r>
+            <a:endParaRPr lang="en-US" sz="2600" dirty="0"/>
+          </a:p>
+        </p:txBody>
+      </p:sp>
+      <p:sp>
+        <p:nvSpPr>
+          <p:cNvPr id="13" name="Text 11"/>
+          <p:cNvSpPr txBox="1"/>
+          <p:nvPr/>
+        </p:nvSpPr>
+        <p:spPr>
+          <a:xfrm>
+            <a:off x="2743200" y="3227832"/>
+            <a:ext cx="914400" cy="320040"/>
+          </a:xfrm>
+          <a:prstGeom prst="rect">
+            <a:avLst/>
+          </a:prstGeom>
+          <a:noFill/>
+          <a:ln/>
+        </p:spPr>
+        <p:txBody>
+          <a:bodyPr wrap="square" lIns="0" tIns="0" rIns="0" bIns="0" rtlCol="0" anchor="ctr"/>
+          <a:lstStyle/>
+          <a:p>
+            <a:pPr algn="ctr" indent="0" marL="0">
+              <a:buNone/>
+            </a:pPr>
+            <a:r>
+              <a:rPr lang="en-US" sz="1400" dirty="0">
+                <a:solidFill>
+                  <a:srgbClr val="5C6F7B"/>
+                </a:solidFill>
+                <a:latin typeface="Courier New" pitchFamily="34" charset="0"/>
+                <a:ea typeface="Courier New" pitchFamily="34" charset="-122"/>
+                <a:cs typeface="Courier New" pitchFamily="34" charset="-120"/>
+              </a:rPr>
+              <a:t>2</a:t>
+            </a:r>
+            <a:endParaRPr lang="en-US" sz="1400" dirty="0"/>
+          </a:p>
+        </p:txBody>
+      </p:sp>
+      <p:sp>
+        <p:nvSpPr>
+          <p:cNvPr id="14" name="Text 12"/>
+          <p:cNvSpPr txBox="1"/>
+          <p:nvPr/>
+        </p:nvSpPr>
+        <p:spPr>
+          <a:xfrm>
+            <a:off x="2743200" y="3538728"/>
+            <a:ext cx="914400" cy="320040"/>
+          </a:xfrm>
+          <a:prstGeom prst="rect">
+            <a:avLst/>
+          </a:prstGeom>
+          <a:noFill/>
+          <a:ln/>
+        </p:spPr>
+        <p:txBody>
+          <a:bodyPr wrap="square" lIns="0" tIns="0" rIns="0" bIns="0" rtlCol="0" anchor="ctr"/>
+          <a:lstStyle/>
+          <a:p>
+            <a:pPr algn="ctr" indent="0" marL="0">
+              <a:buNone/>
+            </a:pPr>
+            <a:r>
+              <a:rPr lang="en-US" sz="1200" dirty="0">
+                <a:solidFill>
+                  <a:srgbClr val="5C6F7B"/>
+                </a:solidFill>
+                <a:latin typeface="Courier New" pitchFamily="34" charset="0"/>
+                <a:ea typeface="Courier New" pitchFamily="34" charset="-122"/>
+                <a:cs typeface="Courier New" pitchFamily="34" charset="-120"/>
+              </a:rPr>
+              <a:t>-4</a:t>
+            </a:r>
+            <a:endParaRPr lang="en-US" sz="1200" dirty="0"/>
+          </a:p>
+        </p:txBody>
+      </p:sp>
+      <p:sp>
+        <p:nvSpPr>
+          <p:cNvPr id="15" name="Shape 13"/>
+          <p:cNvSpPr/>
+          <p:nvPr/>
+        </p:nvSpPr>
+        <p:spPr>
+          <a:xfrm>
+            <a:off x="3657600" y="2331720"/>
+            <a:ext cx="914400" cy="822960"/>
+          </a:xfrm>
+          <a:prstGeom prst="rect">
+            <a:avLst/>
+          </a:prstGeom>
+          <a:solidFill>
+            <a:srgbClr val="FBE3B8"/>
+          </a:solidFill>
+          <a:ln w="25400">
+            <a:solidFill>
+              <a:srgbClr val="FFFFFF"/>
+            </a:solidFill>
+            <a:prstDash val="solid"/>
+          </a:ln>
+        </p:spPr>
+      </p:sp>
+      <p:sp>
+        <p:nvSpPr>
+          <p:cNvPr id="16" name="Text 14"/>
+          <p:cNvSpPr txBox="1"/>
+          <p:nvPr/>
+        </p:nvSpPr>
+        <p:spPr>
+          <a:xfrm>
+            <a:off x="3657600" y="2331720"/>
+            <a:ext cx="914400" cy="822960"/>
+          </a:xfrm>
+          <a:prstGeom prst="rect">
+            <a:avLst/>
+          </a:prstGeom>
+          <a:noFill/>
+          <a:ln/>
+        </p:spPr>
+        <p:txBody>
+          <a:bodyPr wrap="square" lIns="0" tIns="0" rIns="0" bIns="0" rtlCol="0" anchor="ctr"/>
+          <a:lstStyle/>
+          <a:p>
+            <a:pPr algn="ctr" indent="0" marL="0">
+              <a:buNone/>
+            </a:pPr>
+            <a:r>
+              <a:rPr lang="en-US" sz="2600" b="1" dirty="0">
+                <a:solidFill>
+                  <a:srgbClr val="1F2A30"/>
+                </a:solidFill>
+                <a:latin typeface="Courier New" pitchFamily="34" charset="0"/>
+                <a:ea typeface="Courier New" pitchFamily="34" charset="-122"/>
+                <a:cs typeface="Courier New" pitchFamily="34" charset="-120"/>
+              </a:rPr>
+              <a:t>D</a:t>
+            </a:r>
+            <a:endParaRPr lang="en-US" sz="2600" dirty="0"/>
+          </a:p>
+        </p:txBody>
+      </p:sp>
+      <p:sp>
+        <p:nvSpPr>
+          <p:cNvPr id="17" name="Text 15"/>
+          <p:cNvSpPr txBox="1"/>
+          <p:nvPr/>
+        </p:nvSpPr>
+        <p:spPr>
+          <a:xfrm>
+            <a:off x="3657600" y="3227832"/>
+            <a:ext cx="914400" cy="320040"/>
+          </a:xfrm>
+          <a:prstGeom prst="rect">
+            <a:avLst/>
+          </a:prstGeom>
+          <a:noFill/>
+          <a:ln/>
+        </p:spPr>
+        <p:txBody>
+          <a:bodyPr wrap="square" lIns="0" tIns="0" rIns="0" bIns="0" rtlCol="0" anchor="ctr"/>
+          <a:lstStyle/>
+          <a:p>
+            <a:pPr algn="ctr" indent="0" marL="0">
+              <a:buNone/>
+            </a:pPr>
+            <a:r>
+              <a:rPr lang="en-US" sz="1400" dirty="0">
+                <a:solidFill>
+                  <a:srgbClr val="5C6F7B"/>
+                </a:solidFill>
+                <a:latin typeface="Courier New" pitchFamily="34" charset="0"/>
+                <a:ea typeface="Courier New" pitchFamily="34" charset="-122"/>
+                <a:cs typeface="Courier New" pitchFamily="34" charset="-120"/>
+              </a:rPr>
+              <a:t>3</a:t>
+            </a:r>
+            <a:endParaRPr lang="en-US" sz="1400" dirty="0"/>
+          </a:p>
+        </p:txBody>
+      </p:sp>
+      <p:sp>
+        <p:nvSpPr>
+          <p:cNvPr id="18" name="Text 16"/>
+          <p:cNvSpPr txBox="1"/>
+          <p:nvPr/>
+        </p:nvSpPr>
+        <p:spPr>
+          <a:xfrm>
+            <a:off x="3657600" y="3538728"/>
+            <a:ext cx="914400" cy="320040"/>
+          </a:xfrm>
+          <a:prstGeom prst="rect">
+            <a:avLst/>
+          </a:prstGeom>
+          <a:noFill/>
+          <a:ln/>
+        </p:spPr>
+        <p:txBody>
+          <a:bodyPr wrap="square" lIns="0" tIns="0" rIns="0" bIns="0" rtlCol="0" anchor="ctr"/>
+          <a:lstStyle/>
+          <a:p>
+            <a:pPr algn="ctr" indent="0" marL="0">
+              <a:buNone/>
+            </a:pPr>
+            <a:r>
+              <a:rPr lang="en-US" sz="1200" dirty="0">
+                <a:solidFill>
+                  <a:srgbClr val="5C6F7B"/>
+                </a:solidFill>
+                <a:latin typeface="Courier New" pitchFamily="34" charset="0"/>
+                <a:ea typeface="Courier New" pitchFamily="34" charset="-122"/>
+                <a:cs typeface="Courier New" pitchFamily="34" charset="-120"/>
+              </a:rPr>
+              <a:t>-3</a:t>
+            </a:r>
+            <a:endParaRPr lang="en-US" sz="1200" dirty="0"/>
+          </a:p>
+        </p:txBody>
+      </p:sp>
+      <p:sp>
+        <p:nvSpPr>
+          <p:cNvPr id="19" name="Shape 17"/>
+          <p:cNvSpPr/>
+          <p:nvPr/>
+        </p:nvSpPr>
+        <p:spPr>
+          <a:xfrm>
+            <a:off x="4572000" y="2331720"/>
+            <a:ext cx="914400" cy="822960"/>
+          </a:xfrm>
+          <a:prstGeom prst="rect">
+            <a:avLst/>
           </a:prstGeom>
           <a:solidFill>
             <a:srgbClr val="EEF3F4"/>
           </a:solidFill>
-          <a:ln/>
-        </p:spPr>
-      </p:sp>
-      <p:sp>
-        <p:nvSpPr>
-          <p:cNvPr id="9" name="Shape 7"/>
-          <p:cNvSpPr/>
-          <p:nvPr/>
-        </p:nvSpPr>
-        <p:spPr>
-          <a:xfrm>
-            <a:off x="6446520" y="2194560"/>
-            <a:ext cx="731520" cy="731520"/>
-          </a:xfrm>
-          <a:prstGeom prst="ellipse">
-            <a:avLst/>
-          </a:prstGeom>
-          <a:solidFill>
-            <a:srgbClr val="FFFFFF"/>
-          </a:solidFill>
-          <a:ln/>
-        </p:spPr>
-      </p:sp>
-      <p:sp>
-        <p:nvSpPr>
-          <p:cNvPr id="10" name="Text 8"/>
-          <p:cNvSpPr txBox="1"/>
-          <p:nvPr/>
-        </p:nvSpPr>
-        <p:spPr>
-          <a:xfrm>
-            <a:off x="6446520" y="2194560"/>
-            <a:ext cx="731520" cy="731520"/>
+          <a:ln w="25400">
+            <a:solidFill>
+              <a:srgbClr val="FFFFFF"/>
+            </a:solidFill>
+            <a:prstDash val="solid"/>
+          </a:ln>
+        </p:spPr>
+      </p:sp>
+      <p:sp>
+        <p:nvSpPr>
+          <p:cNvPr id="20" name="Text 18"/>
+          <p:cNvSpPr txBox="1"/>
+          <p:nvPr/>
+        </p:nvSpPr>
+        <p:spPr>
+          <a:xfrm>
+            <a:off x="4572000" y="2331720"/>
+            <a:ext cx="914400" cy="822960"/>
           </a:xfrm>
           <a:prstGeom prst="rect">
             <a:avLst/>
@@ -6218,144 +8426,133 @@
               <a:buNone/>
             </a:pPr>
             <a:r>
-              <a:rPr lang="en-US" sz="2080" b="1" dirty="0">
-                <a:solidFill>
-                  <a:srgbClr val="0F4C5C"/>
-                </a:solidFill>
-              </a:rPr>
-              <a:t>2</a:t>
-            </a:r>
-            <a:endParaRPr lang="en-US" sz="2080" dirty="0"/>
-          </a:p>
-        </p:txBody>
-      </p:sp>
-      <p:sp>
-        <p:nvSpPr>
-          <p:cNvPr id="11" name="Text 9"/>
-          <p:cNvSpPr txBox="1"/>
-          <p:nvPr/>
-        </p:nvSpPr>
-        <p:spPr>
-          <a:xfrm>
-            <a:off x="7452360" y="2057400"/>
-            <a:ext cx="3931920" cy="502920"/>
-          </a:xfrm>
-          <a:prstGeom prst="rect">
-            <a:avLst/>
-          </a:prstGeom>
-          <a:noFill/>
-          <a:ln/>
-        </p:spPr>
-        <p:txBody>
-          <a:bodyPr wrap="square" lIns="0" tIns="0" rIns="0" bIns="0" rtlCol="0" anchor="ctr"/>
-          <a:lstStyle/>
-          <a:p>
-            <a:pPr indent="0" marL="0">
-              <a:buNone/>
-            </a:pPr>
-            <a:r>
-              <a:rPr lang="en-US" sz="2100" b="1" dirty="0">
+              <a:rPr lang="en-US" sz="2600" b="1" dirty="0">
                 <a:solidFill>
                   <a:srgbClr val="1F2A30"/>
-                </a:solidFill>
-              </a:rPr>
-              <a:t>Di che tipo sono le colonne?</a:t>
-            </a:r>
-            <a:endParaRPr lang="en-US" sz="2100" dirty="0"/>
-          </a:p>
-        </p:txBody>
-      </p:sp>
-      <p:sp>
-        <p:nvSpPr>
-          <p:cNvPr id="12" name="Text 10"/>
-          <p:cNvSpPr txBox="1"/>
-          <p:nvPr/>
-        </p:nvSpPr>
-        <p:spPr>
-          <a:xfrm>
-            <a:off x="7452360" y="2606040"/>
-            <a:ext cx="3931920" cy="457200"/>
-          </a:xfrm>
-          <a:prstGeom prst="rect">
-            <a:avLst/>
-          </a:prstGeom>
-          <a:noFill/>
-          <a:ln/>
-        </p:spPr>
-        <p:txBody>
-          <a:bodyPr wrap="square" lIns="0" tIns="0" rIns="0" bIns="0" rtlCol="0" anchor="ctr"/>
-          <a:lstStyle/>
-          <a:p>
-            <a:pPr indent="0" marL="0">
-              <a:buNone/>
-            </a:pPr>
-            <a:r>
-              <a:rPr lang="en-US" sz="1700" dirty="0">
-                <a:solidFill>
-                  <a:srgbClr val="0F4C5C"/>
                 </a:solidFill>
                 <a:latin typeface="Courier New" pitchFamily="34" charset="0"/>
                 <a:ea typeface="Courier New" pitchFamily="34" charset="-122"/>
                 <a:cs typeface="Courier New" pitchFamily="34" charset="-120"/>
               </a:rPr>
-              <a:t>df.dtypes</a:t>
-            </a:r>
-            <a:endParaRPr lang="en-US" sz="1700" dirty="0"/>
-          </a:p>
-        </p:txBody>
-      </p:sp>
-      <p:sp>
-        <p:nvSpPr>
-          <p:cNvPr id="13" name="Shape 11"/>
+              <a:t>E</a:t>
+            </a:r>
+            <a:endParaRPr lang="en-US" sz="2600" dirty="0"/>
+          </a:p>
+        </p:txBody>
+      </p:sp>
+      <p:sp>
+        <p:nvSpPr>
+          <p:cNvPr id="21" name="Text 19"/>
+          <p:cNvSpPr txBox="1"/>
+          <p:nvPr/>
+        </p:nvSpPr>
+        <p:spPr>
+          <a:xfrm>
+            <a:off x="4572000" y="3227832"/>
+            <a:ext cx="914400" cy="320040"/>
+          </a:xfrm>
+          <a:prstGeom prst="rect">
+            <a:avLst/>
+          </a:prstGeom>
+          <a:noFill/>
+          <a:ln/>
+        </p:spPr>
+        <p:txBody>
+          <a:bodyPr wrap="square" lIns="0" tIns="0" rIns="0" bIns="0" rtlCol="0" anchor="ctr"/>
+          <a:lstStyle/>
+          <a:p>
+            <a:pPr algn="ctr" indent="0" marL="0">
+              <a:buNone/>
+            </a:pPr>
+            <a:r>
+              <a:rPr lang="en-US" sz="1400" dirty="0">
+                <a:solidFill>
+                  <a:srgbClr val="5C6F7B"/>
+                </a:solidFill>
+                <a:latin typeface="Courier New" pitchFamily="34" charset="0"/>
+                <a:ea typeface="Courier New" pitchFamily="34" charset="-122"/>
+                <a:cs typeface="Courier New" pitchFamily="34" charset="-120"/>
+              </a:rPr>
+              <a:t>4</a:t>
+            </a:r>
+            <a:endParaRPr lang="en-US" sz="1400" dirty="0"/>
+          </a:p>
+        </p:txBody>
+      </p:sp>
+      <p:sp>
+        <p:nvSpPr>
+          <p:cNvPr id="22" name="Text 20"/>
+          <p:cNvSpPr txBox="1"/>
+          <p:nvPr/>
+        </p:nvSpPr>
+        <p:spPr>
+          <a:xfrm>
+            <a:off x="4572000" y="3538728"/>
+            <a:ext cx="914400" cy="320040"/>
+          </a:xfrm>
+          <a:prstGeom prst="rect">
+            <a:avLst/>
+          </a:prstGeom>
+          <a:noFill/>
+          <a:ln/>
+        </p:spPr>
+        <p:txBody>
+          <a:bodyPr wrap="square" lIns="0" tIns="0" rIns="0" bIns="0" rtlCol="0" anchor="ctr"/>
+          <a:lstStyle/>
+          <a:p>
+            <a:pPr algn="ctr" indent="0" marL="0">
+              <a:buNone/>
+            </a:pPr>
+            <a:r>
+              <a:rPr lang="en-US" sz="1200" dirty="0">
+                <a:solidFill>
+                  <a:srgbClr val="5C6F7B"/>
+                </a:solidFill>
+                <a:latin typeface="Courier New" pitchFamily="34" charset="0"/>
+                <a:ea typeface="Courier New" pitchFamily="34" charset="-122"/>
+                <a:cs typeface="Courier New" pitchFamily="34" charset="-120"/>
+              </a:rPr>
+              <a:t>-2</a:t>
+            </a:r>
+            <a:endParaRPr lang="en-US" sz="1200" dirty="0"/>
+          </a:p>
+        </p:txBody>
+      </p:sp>
+      <p:sp>
+        <p:nvSpPr>
+          <p:cNvPr id="23" name="Shape 21"/>
           <p:cNvSpPr/>
           <p:nvPr/>
         </p:nvSpPr>
         <p:spPr>
           <a:xfrm>
-            <a:off x="548640" y="3657600"/>
-            <a:ext cx="5440680" cy="1645920"/>
-          </a:xfrm>
-          <a:prstGeom prst="roundRect">
-            <a:avLst>
-              <a:gd name="adj" fmla="val 6667"/>
-            </a:avLst>
+            <a:off x="5486400" y="2331720"/>
+            <a:ext cx="914400" cy="822960"/>
+          </a:xfrm>
+          <a:prstGeom prst="rect">
+            <a:avLst/>
           </a:prstGeom>
           <a:solidFill>
             <a:srgbClr val="EEF3F4"/>
           </a:solidFill>
-          <a:ln/>
-        </p:spPr>
-      </p:sp>
-      <p:sp>
-        <p:nvSpPr>
-          <p:cNvPr id="14" name="Shape 12"/>
-          <p:cNvSpPr/>
-          <p:nvPr/>
-        </p:nvSpPr>
-        <p:spPr>
-          <a:xfrm>
-            <a:off x="822960" y="4114800"/>
-            <a:ext cx="731520" cy="731520"/>
-          </a:xfrm>
-          <a:prstGeom prst="ellipse">
-            <a:avLst/>
-          </a:prstGeom>
-          <a:solidFill>
-            <a:srgbClr val="FFFFFF"/>
-          </a:solidFill>
-          <a:ln/>
-        </p:spPr>
-      </p:sp>
-      <p:sp>
-        <p:nvSpPr>
-          <p:cNvPr id="15" name="Text 13"/>
-          <p:cNvSpPr txBox="1"/>
-          <p:nvPr/>
-        </p:nvSpPr>
-        <p:spPr>
-          <a:xfrm>
-            <a:off x="822960" y="4114800"/>
-            <a:ext cx="731520" cy="731520"/>
+          <a:ln w="25400">
+            <a:solidFill>
+              <a:srgbClr val="FFFFFF"/>
+            </a:solidFill>
+            <a:prstDash val="solid"/>
+          </a:ln>
+        </p:spPr>
+      </p:sp>
+      <p:sp>
+        <p:nvSpPr>
+          <p:cNvPr id="24" name="Text 22"/>
+          <p:cNvSpPr txBox="1"/>
+          <p:nvPr/>
+        </p:nvSpPr>
+        <p:spPr>
+          <a:xfrm>
+            <a:off x="5486400" y="2331720"/>
+            <a:ext cx="914400" cy="822960"/>
           </a:xfrm>
           <a:prstGeom prst="rect">
             <a:avLst/>
@@ -6371,106 +8568,704 @@
               <a:buNone/>
             </a:pPr>
             <a:r>
-              <a:rPr lang="en-US" sz="2080" b="1" dirty="0">
-                <a:solidFill>
-                  <a:srgbClr val="0F4C5C"/>
-                </a:solidFill>
-              </a:rPr>
-              <a:t>3</a:t>
-            </a:r>
-            <a:endParaRPr lang="en-US" sz="2080" dirty="0"/>
-          </a:p>
-        </p:txBody>
-      </p:sp>
-      <p:sp>
-        <p:nvSpPr>
-          <p:cNvPr id="16" name="Text 14"/>
-          <p:cNvSpPr txBox="1"/>
-          <p:nvPr/>
-        </p:nvSpPr>
-        <p:spPr>
-          <a:xfrm>
-            <a:off x="1828800" y="3977640"/>
-            <a:ext cx="3931920" cy="502920"/>
-          </a:xfrm>
-          <a:prstGeom prst="rect">
-            <a:avLst/>
-          </a:prstGeom>
-          <a:noFill/>
-          <a:ln/>
-        </p:spPr>
-        <p:txBody>
-          <a:bodyPr wrap="square" lIns="0" tIns="0" rIns="0" bIns="0" rtlCol="0" anchor="ctr"/>
-          <a:lstStyle/>
-          <a:p>
-            <a:pPr indent="0" marL="0">
-              <a:buNone/>
-            </a:pPr>
-            <a:r>
-              <a:rPr lang="en-US" sz="2100" b="1" dirty="0">
+              <a:rPr lang="en-US" sz="2600" b="1" dirty="0">
                 <a:solidFill>
                   <a:srgbClr val="1F2A30"/>
-                </a:solidFill>
-              </a:rPr>
-              <a:t>Quanti valori diversi?</a:t>
-            </a:r>
-            <a:endParaRPr lang="en-US" sz="2100" dirty="0"/>
-          </a:p>
-        </p:txBody>
-      </p:sp>
-      <p:sp>
-        <p:nvSpPr>
-          <p:cNvPr id="17" name="Text 15"/>
-          <p:cNvSpPr txBox="1"/>
-          <p:nvPr/>
-        </p:nvSpPr>
-        <p:spPr>
-          <a:xfrm>
-            <a:off x="1828800" y="4526280"/>
-            <a:ext cx="3931920" cy="457200"/>
-          </a:xfrm>
-          <a:prstGeom prst="rect">
-            <a:avLst/>
-          </a:prstGeom>
-          <a:noFill/>
-          <a:ln/>
-        </p:spPr>
-        <p:txBody>
-          <a:bodyPr wrap="square" lIns="0" tIns="0" rIns="0" bIns="0" rtlCol="0" anchor="ctr"/>
-          <a:lstStyle/>
-          <a:p>
-            <a:pPr indent="0" marL="0">
-              <a:buNone/>
-            </a:pPr>
-            <a:r>
-              <a:rPr lang="en-US" sz="1700" dirty="0">
-                <a:solidFill>
-                  <a:srgbClr val="0F4C5C"/>
                 </a:solidFill>
                 <a:latin typeface="Courier New" pitchFamily="34" charset="0"/>
                 <a:ea typeface="Courier New" pitchFamily="34" charset="-122"/>
                 <a:cs typeface="Courier New" pitchFamily="34" charset="-120"/>
               </a:rPr>
-              <a:t>df["col"].nunique()</a:t>
-            </a:r>
-            <a:endParaRPr lang="en-US" sz="1700" dirty="0"/>
-          </a:p>
-        </p:txBody>
-      </p:sp>
-      <p:sp>
-        <p:nvSpPr>
-          <p:cNvPr id="18" name="Shape 16"/>
+              <a:t>F</a:t>
+            </a:r>
+            <a:endParaRPr lang="en-US" sz="2600" dirty="0"/>
+          </a:p>
+        </p:txBody>
+      </p:sp>
+      <p:sp>
+        <p:nvSpPr>
+          <p:cNvPr id="25" name="Text 23"/>
+          <p:cNvSpPr txBox="1"/>
+          <p:nvPr/>
+        </p:nvSpPr>
+        <p:spPr>
+          <a:xfrm>
+            <a:off x="5486400" y="3227832"/>
+            <a:ext cx="914400" cy="320040"/>
+          </a:xfrm>
+          <a:prstGeom prst="rect">
+            <a:avLst/>
+          </a:prstGeom>
+          <a:noFill/>
+          <a:ln/>
+        </p:spPr>
+        <p:txBody>
+          <a:bodyPr wrap="square" lIns="0" tIns="0" rIns="0" bIns="0" rtlCol="0" anchor="ctr"/>
+          <a:lstStyle/>
+          <a:p>
+            <a:pPr algn="ctr" indent="0" marL="0">
+              <a:buNone/>
+            </a:pPr>
+            <a:r>
+              <a:rPr lang="en-US" sz="1400" dirty="0">
+                <a:solidFill>
+                  <a:srgbClr val="5C6F7B"/>
+                </a:solidFill>
+                <a:latin typeface="Courier New" pitchFamily="34" charset="0"/>
+                <a:ea typeface="Courier New" pitchFamily="34" charset="-122"/>
+                <a:cs typeface="Courier New" pitchFamily="34" charset="-120"/>
+              </a:rPr>
+              <a:t>5</a:t>
+            </a:r>
+            <a:endParaRPr lang="en-US" sz="1400" dirty="0"/>
+          </a:p>
+        </p:txBody>
+      </p:sp>
+      <p:sp>
+        <p:nvSpPr>
+          <p:cNvPr id="26" name="Text 24"/>
+          <p:cNvSpPr txBox="1"/>
+          <p:nvPr/>
+        </p:nvSpPr>
+        <p:spPr>
+          <a:xfrm>
+            <a:off x="5486400" y="3538728"/>
+            <a:ext cx="914400" cy="320040"/>
+          </a:xfrm>
+          <a:prstGeom prst="rect">
+            <a:avLst/>
+          </a:prstGeom>
+          <a:noFill/>
+          <a:ln/>
+        </p:spPr>
+        <p:txBody>
+          <a:bodyPr wrap="square" lIns="0" tIns="0" rIns="0" bIns="0" rtlCol="0" anchor="ctr"/>
+          <a:lstStyle/>
+          <a:p>
+            <a:pPr algn="ctr" indent="0" marL="0">
+              <a:buNone/>
+            </a:pPr>
+            <a:r>
+              <a:rPr lang="en-US" sz="1200" dirty="0">
+                <a:solidFill>
+                  <a:srgbClr val="5C6F7B"/>
+                </a:solidFill>
+                <a:latin typeface="Courier New" pitchFamily="34" charset="0"/>
+                <a:ea typeface="Courier New" pitchFamily="34" charset="-122"/>
+                <a:cs typeface="Courier New" pitchFamily="34" charset="-120"/>
+              </a:rPr>
+              <a:t>-1</a:t>
+            </a:r>
+            <a:endParaRPr lang="en-US" sz="1200" dirty="0"/>
+          </a:p>
+        </p:txBody>
+      </p:sp>
+      <p:sp>
+        <p:nvSpPr>
+          <p:cNvPr id="27" name="Shape 25"/>
           <p:cNvSpPr/>
           <p:nvPr/>
         </p:nvSpPr>
         <p:spPr>
           <a:xfrm>
-            <a:off x="6172200" y="3657600"/>
-            <a:ext cx="5440680" cy="1645920"/>
+            <a:off x="914400" y="1920240"/>
+            <a:ext cx="0" cy="1234440"/>
+          </a:xfrm>
+          <a:prstGeom prst="line">
+            <a:avLst/>
+          </a:prstGeom>
+          <a:noFill/>
+          <a:ln w="15875">
+            <a:solidFill>
+              <a:srgbClr val="B8C4CB"/>
+            </a:solidFill>
+            <a:prstDash val="solid"/>
+          </a:ln>
+        </p:spPr>
+      </p:sp>
+      <p:sp>
+        <p:nvSpPr>
+          <p:cNvPr id="28" name="Text 26"/>
+          <p:cNvSpPr txBox="1"/>
+          <p:nvPr/>
+        </p:nvSpPr>
+        <p:spPr>
+          <a:xfrm>
+            <a:off x="640080" y="1554480"/>
+            <a:ext cx="548640" cy="347472"/>
+          </a:xfrm>
+          <a:prstGeom prst="rect">
+            <a:avLst/>
+          </a:prstGeom>
+          <a:noFill/>
+          <a:ln/>
+        </p:spPr>
+        <p:txBody>
+          <a:bodyPr wrap="square" lIns="0" tIns="0" rIns="0" bIns="0" rtlCol="0" anchor="ctr"/>
+          <a:lstStyle/>
+          <a:p>
+            <a:pPr algn="ctr" indent="0" marL="0">
+              <a:buNone/>
+            </a:pPr>
+            <a:r>
+              <a:rPr lang="en-US" sz="1600" b="1" dirty="0">
+                <a:solidFill>
+                  <a:srgbClr val="0F4C5C"/>
+                </a:solidFill>
+                <a:latin typeface="Courier New" pitchFamily="34" charset="0"/>
+                <a:ea typeface="Courier New" pitchFamily="34" charset="-122"/>
+                <a:cs typeface="Courier New" pitchFamily="34" charset="-120"/>
+              </a:rPr>
+              <a:t>0</a:t>
+            </a:r>
+            <a:endParaRPr lang="en-US" sz="1600" dirty="0"/>
+          </a:p>
+        </p:txBody>
+      </p:sp>
+      <p:sp>
+        <p:nvSpPr>
+          <p:cNvPr id="29" name="Shape 27"/>
+          <p:cNvSpPr/>
+          <p:nvPr/>
+        </p:nvSpPr>
+        <p:spPr>
+          <a:xfrm>
+            <a:off x="1828800" y="1920240"/>
+            <a:ext cx="0" cy="1234440"/>
+          </a:xfrm>
+          <a:prstGeom prst="line">
+            <a:avLst/>
+          </a:prstGeom>
+          <a:noFill/>
+          <a:ln w="38100">
+            <a:solidFill>
+              <a:srgbClr val="8F5308"/>
+            </a:solidFill>
+            <a:prstDash val="solid"/>
+          </a:ln>
+        </p:spPr>
+      </p:sp>
+      <p:sp>
+        <p:nvSpPr>
+          <p:cNvPr id="30" name="Text 28"/>
+          <p:cNvSpPr txBox="1"/>
+          <p:nvPr/>
+        </p:nvSpPr>
+        <p:spPr>
+          <a:xfrm>
+            <a:off x="1554480" y="1554480"/>
+            <a:ext cx="548640" cy="347472"/>
+          </a:xfrm>
+          <a:prstGeom prst="rect">
+            <a:avLst/>
+          </a:prstGeom>
+          <a:noFill/>
+          <a:ln/>
+        </p:spPr>
+        <p:txBody>
+          <a:bodyPr wrap="square" lIns="0" tIns="0" rIns="0" bIns="0" rtlCol="0" anchor="ctr"/>
+          <a:lstStyle/>
+          <a:p>
+            <a:pPr algn="ctr" indent="0" marL="0">
+              <a:buNone/>
+            </a:pPr>
+            <a:r>
+              <a:rPr lang="en-US" sz="1600" b="1" dirty="0">
+                <a:solidFill>
+                  <a:srgbClr val="8F5308"/>
+                </a:solidFill>
+                <a:latin typeface="Courier New" pitchFamily="34" charset="0"/>
+                <a:ea typeface="Courier New" pitchFamily="34" charset="-122"/>
+                <a:cs typeface="Courier New" pitchFamily="34" charset="-120"/>
+              </a:rPr>
+              <a:t>1</a:t>
+            </a:r>
+            <a:endParaRPr lang="en-US" sz="1600" dirty="0"/>
+          </a:p>
+        </p:txBody>
+      </p:sp>
+      <p:sp>
+        <p:nvSpPr>
+          <p:cNvPr id="31" name="Shape 29"/>
+          <p:cNvSpPr/>
+          <p:nvPr/>
+        </p:nvSpPr>
+        <p:spPr>
+          <a:xfrm>
+            <a:off x="2743200" y="1920240"/>
+            <a:ext cx="0" cy="1234440"/>
+          </a:xfrm>
+          <a:prstGeom prst="line">
+            <a:avLst/>
+          </a:prstGeom>
+          <a:noFill/>
+          <a:ln w="15875">
+            <a:solidFill>
+              <a:srgbClr val="B8C4CB"/>
+            </a:solidFill>
+            <a:prstDash val="solid"/>
+          </a:ln>
+        </p:spPr>
+      </p:sp>
+      <p:sp>
+        <p:nvSpPr>
+          <p:cNvPr id="32" name="Text 30"/>
+          <p:cNvSpPr txBox="1"/>
+          <p:nvPr/>
+        </p:nvSpPr>
+        <p:spPr>
+          <a:xfrm>
+            <a:off x="2468880" y="1554480"/>
+            <a:ext cx="548640" cy="347472"/>
+          </a:xfrm>
+          <a:prstGeom prst="rect">
+            <a:avLst/>
+          </a:prstGeom>
+          <a:noFill/>
+          <a:ln/>
+        </p:spPr>
+        <p:txBody>
+          <a:bodyPr wrap="square" lIns="0" tIns="0" rIns="0" bIns="0" rtlCol="0" anchor="ctr"/>
+          <a:lstStyle/>
+          <a:p>
+            <a:pPr algn="ctr" indent="0" marL="0">
+              <a:buNone/>
+            </a:pPr>
+            <a:r>
+              <a:rPr lang="en-US" sz="1600" b="1" dirty="0">
+                <a:solidFill>
+                  <a:srgbClr val="0F4C5C"/>
+                </a:solidFill>
+                <a:latin typeface="Courier New" pitchFamily="34" charset="0"/>
+                <a:ea typeface="Courier New" pitchFamily="34" charset="-122"/>
+                <a:cs typeface="Courier New" pitchFamily="34" charset="-120"/>
+              </a:rPr>
+              <a:t>2</a:t>
+            </a:r>
+            <a:endParaRPr lang="en-US" sz="1600" dirty="0"/>
+          </a:p>
+        </p:txBody>
+      </p:sp>
+      <p:sp>
+        <p:nvSpPr>
+          <p:cNvPr id="33" name="Shape 31"/>
+          <p:cNvSpPr/>
+          <p:nvPr/>
+        </p:nvSpPr>
+        <p:spPr>
+          <a:xfrm>
+            <a:off x="3657600" y="1920240"/>
+            <a:ext cx="0" cy="1234440"/>
+          </a:xfrm>
+          <a:prstGeom prst="line">
+            <a:avLst/>
+          </a:prstGeom>
+          <a:noFill/>
+          <a:ln w="15875">
+            <a:solidFill>
+              <a:srgbClr val="B8C4CB"/>
+            </a:solidFill>
+            <a:prstDash val="solid"/>
+          </a:ln>
+        </p:spPr>
+      </p:sp>
+      <p:sp>
+        <p:nvSpPr>
+          <p:cNvPr id="34" name="Text 32"/>
+          <p:cNvSpPr txBox="1"/>
+          <p:nvPr/>
+        </p:nvSpPr>
+        <p:spPr>
+          <a:xfrm>
+            <a:off x="3383280" y="1554480"/>
+            <a:ext cx="548640" cy="347472"/>
+          </a:xfrm>
+          <a:prstGeom prst="rect">
+            <a:avLst/>
+          </a:prstGeom>
+          <a:noFill/>
+          <a:ln/>
+        </p:spPr>
+        <p:txBody>
+          <a:bodyPr wrap="square" lIns="0" tIns="0" rIns="0" bIns="0" rtlCol="0" anchor="ctr"/>
+          <a:lstStyle/>
+          <a:p>
+            <a:pPr algn="ctr" indent="0" marL="0">
+              <a:buNone/>
+            </a:pPr>
+            <a:r>
+              <a:rPr lang="en-US" sz="1600" b="1" dirty="0">
+                <a:solidFill>
+                  <a:srgbClr val="0F4C5C"/>
+                </a:solidFill>
+                <a:latin typeface="Courier New" pitchFamily="34" charset="0"/>
+                <a:ea typeface="Courier New" pitchFamily="34" charset="-122"/>
+                <a:cs typeface="Courier New" pitchFamily="34" charset="-120"/>
+              </a:rPr>
+              <a:t>3</a:t>
+            </a:r>
+            <a:endParaRPr lang="en-US" sz="1600" dirty="0"/>
+          </a:p>
+        </p:txBody>
+      </p:sp>
+      <p:sp>
+        <p:nvSpPr>
+          <p:cNvPr id="35" name="Shape 33"/>
+          <p:cNvSpPr/>
+          <p:nvPr/>
+        </p:nvSpPr>
+        <p:spPr>
+          <a:xfrm>
+            <a:off x="4572000" y="1920240"/>
+            <a:ext cx="0" cy="1234440"/>
+          </a:xfrm>
+          <a:prstGeom prst="line">
+            <a:avLst/>
+          </a:prstGeom>
+          <a:noFill/>
+          <a:ln w="38100">
+            <a:solidFill>
+              <a:srgbClr val="8F5308"/>
+            </a:solidFill>
+            <a:prstDash val="solid"/>
+          </a:ln>
+        </p:spPr>
+      </p:sp>
+      <p:sp>
+        <p:nvSpPr>
+          <p:cNvPr id="36" name="Text 34"/>
+          <p:cNvSpPr txBox="1"/>
+          <p:nvPr/>
+        </p:nvSpPr>
+        <p:spPr>
+          <a:xfrm>
+            <a:off x="4297680" y="1554480"/>
+            <a:ext cx="548640" cy="347472"/>
+          </a:xfrm>
+          <a:prstGeom prst="rect">
+            <a:avLst/>
+          </a:prstGeom>
+          <a:noFill/>
+          <a:ln/>
+        </p:spPr>
+        <p:txBody>
+          <a:bodyPr wrap="square" lIns="0" tIns="0" rIns="0" bIns="0" rtlCol="0" anchor="ctr"/>
+          <a:lstStyle/>
+          <a:p>
+            <a:pPr algn="ctr" indent="0" marL="0">
+              <a:buNone/>
+            </a:pPr>
+            <a:r>
+              <a:rPr lang="en-US" sz="1600" b="1" dirty="0">
+                <a:solidFill>
+                  <a:srgbClr val="8F5308"/>
+                </a:solidFill>
+                <a:latin typeface="Courier New" pitchFamily="34" charset="0"/>
+                <a:ea typeface="Courier New" pitchFamily="34" charset="-122"/>
+                <a:cs typeface="Courier New" pitchFamily="34" charset="-120"/>
+              </a:rPr>
+              <a:t>4</a:t>
+            </a:r>
+            <a:endParaRPr lang="en-US" sz="1600" dirty="0"/>
+          </a:p>
+        </p:txBody>
+      </p:sp>
+      <p:sp>
+        <p:nvSpPr>
+          <p:cNvPr id="37" name="Shape 35"/>
+          <p:cNvSpPr/>
+          <p:nvPr/>
+        </p:nvSpPr>
+        <p:spPr>
+          <a:xfrm>
+            <a:off x="5486400" y="1920240"/>
+            <a:ext cx="0" cy="1234440"/>
+          </a:xfrm>
+          <a:prstGeom prst="line">
+            <a:avLst/>
+          </a:prstGeom>
+          <a:noFill/>
+          <a:ln w="15875">
+            <a:solidFill>
+              <a:srgbClr val="B8C4CB"/>
+            </a:solidFill>
+            <a:prstDash val="solid"/>
+          </a:ln>
+        </p:spPr>
+      </p:sp>
+      <p:sp>
+        <p:nvSpPr>
+          <p:cNvPr id="38" name="Text 36"/>
+          <p:cNvSpPr txBox="1"/>
+          <p:nvPr/>
+        </p:nvSpPr>
+        <p:spPr>
+          <a:xfrm>
+            <a:off x="5212080" y="1554480"/>
+            <a:ext cx="548640" cy="347472"/>
+          </a:xfrm>
+          <a:prstGeom prst="rect">
+            <a:avLst/>
+          </a:prstGeom>
+          <a:noFill/>
+          <a:ln/>
+        </p:spPr>
+        <p:txBody>
+          <a:bodyPr wrap="square" lIns="0" tIns="0" rIns="0" bIns="0" rtlCol="0" anchor="ctr"/>
+          <a:lstStyle/>
+          <a:p>
+            <a:pPr algn="ctr" indent="0" marL="0">
+              <a:buNone/>
+            </a:pPr>
+            <a:r>
+              <a:rPr lang="en-US" sz="1600" b="1" dirty="0">
+                <a:solidFill>
+                  <a:srgbClr val="0F4C5C"/>
+                </a:solidFill>
+                <a:latin typeface="Courier New" pitchFamily="34" charset="0"/>
+                <a:ea typeface="Courier New" pitchFamily="34" charset="-122"/>
+                <a:cs typeface="Courier New" pitchFamily="34" charset="-120"/>
+              </a:rPr>
+              <a:t>5</a:t>
+            </a:r>
+            <a:endParaRPr lang="en-US" sz="1600" dirty="0"/>
+          </a:p>
+        </p:txBody>
+      </p:sp>
+      <p:sp>
+        <p:nvSpPr>
+          <p:cNvPr id="39" name="Shape 37"/>
+          <p:cNvSpPr/>
+          <p:nvPr/>
+        </p:nvSpPr>
+        <p:spPr>
+          <a:xfrm>
+            <a:off x="6400800" y="1920240"/>
+            <a:ext cx="0" cy="1234440"/>
+          </a:xfrm>
+          <a:prstGeom prst="line">
+            <a:avLst/>
+          </a:prstGeom>
+          <a:noFill/>
+          <a:ln w="15875">
+            <a:solidFill>
+              <a:srgbClr val="B8C4CB"/>
+            </a:solidFill>
+            <a:prstDash val="solid"/>
+          </a:ln>
+        </p:spPr>
+      </p:sp>
+      <p:sp>
+        <p:nvSpPr>
+          <p:cNvPr id="40" name="Text 38"/>
+          <p:cNvSpPr txBox="1"/>
+          <p:nvPr/>
+        </p:nvSpPr>
+        <p:spPr>
+          <a:xfrm>
+            <a:off x="6126480" y="1554480"/>
+            <a:ext cx="548640" cy="347472"/>
+          </a:xfrm>
+          <a:prstGeom prst="rect">
+            <a:avLst/>
+          </a:prstGeom>
+          <a:noFill/>
+          <a:ln/>
+        </p:spPr>
+        <p:txBody>
+          <a:bodyPr wrap="square" lIns="0" tIns="0" rIns="0" bIns="0" rtlCol="0" anchor="ctr"/>
+          <a:lstStyle/>
+          <a:p>
+            <a:pPr algn="ctr" indent="0" marL="0">
+              <a:buNone/>
+            </a:pPr>
+            <a:r>
+              <a:rPr lang="en-US" sz="1600" b="1" dirty="0">
+                <a:solidFill>
+                  <a:srgbClr val="0F4C5C"/>
+                </a:solidFill>
+                <a:latin typeface="Courier New" pitchFamily="34" charset="0"/>
+                <a:ea typeface="Courier New" pitchFamily="34" charset="-122"/>
+                <a:cs typeface="Courier New" pitchFamily="34" charset="-120"/>
+              </a:rPr>
+              <a:t>6</a:t>
+            </a:r>
+            <a:endParaRPr lang="en-US" sz="1600" dirty="0"/>
+          </a:p>
+        </p:txBody>
+      </p:sp>
+      <p:sp>
+        <p:nvSpPr>
+          <p:cNvPr id="41" name="Text 39"/>
+          <p:cNvSpPr txBox="1"/>
+          <p:nvPr/>
+        </p:nvSpPr>
+        <p:spPr>
+          <a:xfrm>
+            <a:off x="6537960" y="1554480"/>
+            <a:ext cx="1097280" cy="347472"/>
+          </a:xfrm>
+          <a:prstGeom prst="rect">
+            <a:avLst/>
+          </a:prstGeom>
+          <a:noFill/>
+          <a:ln/>
+        </p:spPr>
+        <p:txBody>
+          <a:bodyPr wrap="square" lIns="0" tIns="0" rIns="0" bIns="0" rtlCol="0" anchor="ctr"/>
+          <a:lstStyle/>
+          <a:p>
+            <a:pPr indent="0" marL="0">
+              <a:buNone/>
+            </a:pPr>
+            <a:r>
+              <a:rPr lang="en-US" sz="1300" dirty="0">
+                <a:solidFill>
+                  <a:srgbClr val="5C6F7B"/>
+                </a:solidFill>
+              </a:rPr>
+              <a:t>tagli</a:t>
+            </a:r>
+            <a:endParaRPr lang="en-US" sz="1300" dirty="0"/>
+          </a:p>
+        </p:txBody>
+      </p:sp>
+      <p:sp>
+        <p:nvSpPr>
+          <p:cNvPr id="42" name="Text 40"/>
+          <p:cNvSpPr txBox="1"/>
+          <p:nvPr/>
+        </p:nvSpPr>
+        <p:spPr>
+          <a:xfrm>
+            <a:off x="6537960" y="3227832"/>
+            <a:ext cx="1280160" cy="320040"/>
+          </a:xfrm>
+          <a:prstGeom prst="rect">
+            <a:avLst/>
+          </a:prstGeom>
+          <a:noFill/>
+          <a:ln/>
+        </p:spPr>
+        <p:txBody>
+          <a:bodyPr wrap="square" lIns="0" tIns="0" rIns="0" bIns="0" rtlCol="0" anchor="ctr"/>
+          <a:lstStyle/>
+          <a:p>
+            <a:pPr indent="0" marL="0">
+              <a:buNone/>
+            </a:pPr>
+            <a:r>
+              <a:rPr lang="en-US" sz="1300" dirty="0">
+                <a:solidFill>
+                  <a:srgbClr val="5C6F7B"/>
+                </a:solidFill>
+              </a:rPr>
+              <a:t>posizione</a:t>
+            </a:r>
+            <a:endParaRPr lang="en-US" sz="1300" dirty="0"/>
+          </a:p>
+        </p:txBody>
+      </p:sp>
+      <p:sp>
+        <p:nvSpPr>
+          <p:cNvPr id="43" name="Text 41"/>
+          <p:cNvSpPr txBox="1"/>
+          <p:nvPr/>
+        </p:nvSpPr>
+        <p:spPr>
+          <a:xfrm>
+            <a:off x="6537960" y="3538728"/>
+            <a:ext cx="1280160" cy="320040"/>
+          </a:xfrm>
+          <a:prstGeom prst="rect">
+            <a:avLst/>
+          </a:prstGeom>
+          <a:noFill/>
+          <a:ln/>
+        </p:spPr>
+        <p:txBody>
+          <a:bodyPr wrap="square" lIns="0" tIns="0" rIns="0" bIns="0" rtlCol="0" anchor="ctr"/>
+          <a:lstStyle/>
+          <a:p>
+            <a:pPr indent="0" marL="0">
+              <a:buNone/>
+            </a:pPr>
+            <a:r>
+              <a:rPr lang="en-US" sz="1300" dirty="0">
+                <a:solidFill>
+                  <a:srgbClr val="5C6F7B"/>
+                </a:solidFill>
+              </a:rPr>
+              <a:t>dalla fine</a:t>
+            </a:r>
+            <a:endParaRPr lang="en-US" sz="1300" dirty="0"/>
+          </a:p>
+        </p:txBody>
+      </p:sp>
+      <p:sp>
+        <p:nvSpPr>
+          <p:cNvPr id="44" name="Text 42"/>
+          <p:cNvSpPr txBox="1"/>
+          <p:nvPr/>
+        </p:nvSpPr>
+        <p:spPr>
+          <a:xfrm>
+            <a:off x="914400" y="4434840"/>
+            <a:ext cx="5943600" cy="457200"/>
+          </a:xfrm>
+          <a:prstGeom prst="rect">
+            <a:avLst/>
+          </a:prstGeom>
+          <a:noFill/>
+          <a:ln/>
+        </p:spPr>
+        <p:txBody>
+          <a:bodyPr wrap="square" lIns="0" tIns="0" rIns="0" bIns="0" rtlCol="0" anchor="ctr"/>
+          <a:lstStyle/>
+          <a:p>
+            <a:pPr indent="0" marL="0">
+              <a:buNone/>
+            </a:pPr>
+            <a:r>
+              <a:rPr lang="en-US" sz="1800" b="1" dirty="0">
+                <a:solidFill>
+                  <a:srgbClr val="8F5308"/>
+                </a:solidFill>
+                <a:latin typeface="Courier New" pitchFamily="34" charset="0"/>
+                <a:ea typeface="Courier New" pitchFamily="34" charset="-122"/>
+                <a:cs typeface="Courier New" pitchFamily="34" charset="-120"/>
+              </a:rPr>
+              <a:t>x[1:4]</a:t>
+            </a:r>
+            <a:pPr indent="0" marL="0">
+              <a:buNone/>
+            </a:pPr>
+            <a:r>
+              <a:rPr lang="en-US" sz="1800" dirty="0">
+                <a:solidFill>
+                  <a:srgbClr val="1F2A30"/>
+                </a:solidFill>
+              </a:rPr>
+              <a:t>  →  B C D: si taglia al 1 e al 4</a:t>
+            </a:r>
+            <a:endParaRPr lang="en-US" sz="1800" dirty="0"/>
+          </a:p>
+        </p:txBody>
+      </p:sp>
+      <p:sp>
+        <p:nvSpPr>
+          <p:cNvPr id="45" name="Shape 43"/>
+          <p:cNvSpPr/>
+          <p:nvPr/>
+        </p:nvSpPr>
+        <p:spPr>
+          <a:xfrm>
+            <a:off x="7863840" y="1691640"/>
+            <a:ext cx="3749040" cy="868680"/>
           </a:xfrm>
           <a:prstGeom prst="roundRect">
             <a:avLst>
-              <a:gd name="adj" fmla="val 6667"/>
+              <a:gd name="adj" fmla="val 10526"/>
             </a:avLst>
           </a:prstGeom>
           <a:solidFill>
@@ -6481,70 +9276,14 @@
       </p:sp>
       <p:sp>
         <p:nvSpPr>
-          <p:cNvPr id="19" name="Shape 17"/>
-          <p:cNvSpPr/>
-          <p:nvPr/>
-        </p:nvSpPr>
-        <p:spPr>
-          <a:xfrm>
-            <a:off x="6446520" y="4114800"/>
-            <a:ext cx="731520" cy="731520"/>
-          </a:xfrm>
-          <a:prstGeom prst="ellipse">
-            <a:avLst/>
-          </a:prstGeom>
-          <a:solidFill>
-            <a:srgbClr val="FFFFFF"/>
-          </a:solidFill>
-          <a:ln/>
-        </p:spPr>
-      </p:sp>
-      <p:sp>
-        <p:nvSpPr>
-          <p:cNvPr id="20" name="Text 18"/>
-          <p:cNvSpPr txBox="1"/>
-          <p:nvPr/>
-        </p:nvSpPr>
-        <p:spPr>
-          <a:xfrm>
-            <a:off x="6446520" y="4114800"/>
-            <a:ext cx="731520" cy="731520"/>
-          </a:xfrm>
-          <a:prstGeom prst="rect">
-            <a:avLst/>
-          </a:prstGeom>
-          <a:noFill/>
-          <a:ln/>
-        </p:spPr>
-        <p:txBody>
-          <a:bodyPr wrap="square" lIns="0" tIns="0" rIns="0" bIns="0" rtlCol="0" anchor="ctr"/>
-          <a:lstStyle/>
-          <a:p>
-            <a:pPr algn="ctr" indent="0" marL="0">
-              <a:buNone/>
-            </a:pPr>
-            <a:r>
-              <a:rPr lang="en-US" sz="2080" b="1" dirty="0">
-                <a:solidFill>
-                  <a:srgbClr val="0F4C5C"/>
-                </a:solidFill>
-              </a:rPr>
-              <a:t>4</a:t>
-            </a:r>
-            <a:endParaRPr lang="en-US" sz="2080" dirty="0"/>
-          </a:p>
-        </p:txBody>
-      </p:sp>
-      <p:sp>
-        <p:nvSpPr>
-          <p:cNvPr id="21" name="Text 19"/>
-          <p:cNvSpPr txBox="1"/>
-          <p:nvPr/>
-        </p:nvSpPr>
-        <p:spPr>
-          <a:xfrm>
-            <a:off x="7452360" y="3977640"/>
-            <a:ext cx="3931920" cy="502920"/>
+          <p:cNvPr id="46" name="Text 44"/>
+          <p:cNvSpPr txBox="1"/>
+          <p:nvPr/>
+        </p:nvSpPr>
+        <p:spPr>
+          <a:xfrm>
+            <a:off x="8092440" y="1764792"/>
+            <a:ext cx="3383280" cy="411480"/>
           </a:xfrm>
           <a:prstGeom prst="rect">
             <a:avLst/>
@@ -6560,43 +9299,7 @@
               <a:buNone/>
             </a:pPr>
             <a:r>
-              <a:rPr lang="en-US" sz="2100" b="1" dirty="0">
-                <a:solidFill>
-                  <a:srgbClr val="1F2A30"/>
-                </a:solidFill>
-              </a:rPr>
-              <a:t>Quali valori, e quante volte?</a:t>
-            </a:r>
-            <a:endParaRPr lang="en-US" sz="2100" dirty="0"/>
-          </a:p>
-        </p:txBody>
-      </p:sp>
-      <p:sp>
-        <p:nvSpPr>
-          <p:cNvPr id="22" name="Text 20"/>
-          <p:cNvSpPr txBox="1"/>
-          <p:nvPr/>
-        </p:nvSpPr>
-        <p:spPr>
-          <a:xfrm>
-            <a:off x="7452360" y="4526280"/>
-            <a:ext cx="3931920" cy="457200"/>
-          </a:xfrm>
-          <a:prstGeom prst="rect">
-            <a:avLst/>
-          </a:prstGeom>
-          <a:noFill/>
-          <a:ln/>
-        </p:spPr>
-        <p:txBody>
-          <a:bodyPr wrap="square" lIns="0" tIns="0" rIns="0" bIns="0" rtlCol="0" anchor="ctr"/>
-          <a:lstStyle/>
-          <a:p>
-            <a:pPr indent="0" marL="0">
-              <a:buNone/>
-            </a:pPr>
-            <a:r>
-              <a:rPr lang="en-US" sz="1700" dirty="0">
+              <a:rPr lang="en-US" sz="1700" b="1" dirty="0">
                 <a:solidFill>
                   <a:srgbClr val="0F4C5C"/>
                 </a:solidFill>
@@ -6604,7 +9307,21 @@
                 <a:ea typeface="Courier New" pitchFamily="34" charset="-122"/>
                 <a:cs typeface="Courier New" pitchFamily="34" charset="-120"/>
               </a:rPr>
-              <a:t>df["col"].value_counts()</a:t>
+              <a:t>x[:3]</a:t>
+            </a:r>
+            <a:pPr indent="0" marL="0">
+              <a:buNone/>
+            </a:pPr>
+            <a:r>
+              <a:rPr lang="en-US" sz="1700" dirty="0">
+                <a:solidFill>
+                  <a:srgbClr val="1F2A30"/>
+                </a:solidFill>
+                <a:latin typeface="Courier New" pitchFamily="34" charset="0"/>
+                <a:ea typeface="Courier New" pitchFamily="34" charset="-122"/>
+                <a:cs typeface="Courier New" pitchFamily="34" charset="-120"/>
+              </a:rPr>
+              <a:t>   A B C</a:t>
             </a:r>
             <a:endParaRPr lang="en-US" sz="1700" dirty="0"/>
           </a:p>
@@ -6612,14 +9329,14 @@
       </p:sp>
       <p:sp>
         <p:nvSpPr>
-          <p:cNvPr id="23" name="Text 21"/>
-          <p:cNvSpPr txBox="1"/>
-          <p:nvPr/>
-        </p:nvSpPr>
-        <p:spPr>
-          <a:xfrm>
-            <a:off x="548640" y="5623560"/>
-            <a:ext cx="11064240" cy="457200"/>
+          <p:cNvPr id="47" name="Text 45"/>
+          <p:cNvSpPr txBox="1"/>
+          <p:nvPr/>
+        </p:nvSpPr>
+        <p:spPr>
+          <a:xfrm>
+            <a:off x="8092440" y="2148840"/>
+            <a:ext cx="3383280" cy="347472"/>
           </a:xfrm>
           <a:prstGeom prst="rect">
             <a:avLst/>
@@ -6635,14 +9352,383 @@
               <a:buNone/>
             </a:pPr>
             <a:r>
-              <a:rPr lang="en-US" sz="1800" i="1" dirty="0">
+              <a:rPr lang="en-US" sz="1400" dirty="0">
+                <a:solidFill>
+                  <a:srgbClr val="5C6F7B"/>
+                </a:solidFill>
+              </a:rPr>
+              <a:t>dall'inizio al taglio 3</a:t>
+            </a:r>
+            <a:endParaRPr lang="en-US" sz="1400" dirty="0"/>
+          </a:p>
+        </p:txBody>
+      </p:sp>
+      <p:sp>
+        <p:nvSpPr>
+          <p:cNvPr id="48" name="Shape 46"/>
+          <p:cNvSpPr/>
+          <p:nvPr/>
+        </p:nvSpPr>
+        <p:spPr>
+          <a:xfrm>
+            <a:off x="7863840" y="2715768"/>
+            <a:ext cx="3749040" cy="868680"/>
+          </a:xfrm>
+          <a:prstGeom prst="roundRect">
+            <a:avLst>
+              <a:gd name="adj" fmla="val 10526"/>
+            </a:avLst>
+          </a:prstGeom>
+          <a:solidFill>
+            <a:srgbClr val="EEF3F4"/>
+          </a:solidFill>
+          <a:ln/>
+        </p:spPr>
+      </p:sp>
+      <p:sp>
+        <p:nvSpPr>
+          <p:cNvPr id="49" name="Text 47"/>
+          <p:cNvSpPr txBox="1"/>
+          <p:nvPr/>
+        </p:nvSpPr>
+        <p:spPr>
+          <a:xfrm>
+            <a:off x="8092440" y="2788920"/>
+            <a:ext cx="3383280" cy="411480"/>
+          </a:xfrm>
+          <a:prstGeom prst="rect">
+            <a:avLst/>
+          </a:prstGeom>
+          <a:noFill/>
+          <a:ln/>
+        </p:spPr>
+        <p:txBody>
+          <a:bodyPr wrap="square" lIns="0" tIns="0" rIns="0" bIns="0" rtlCol="0" anchor="ctr"/>
+          <a:lstStyle/>
+          <a:p>
+            <a:pPr indent="0" marL="0">
+              <a:buNone/>
+            </a:pPr>
+            <a:r>
+              <a:rPr lang="en-US" sz="1700" b="1" dirty="0">
                 <a:solidFill>
                   <a:srgbClr val="0F4C5C"/>
                 </a:solidFill>
-              </a:rPr>
-              <a:t>Prima di qualunque analisi. Sempre.</a:t>
-            </a:r>
-            <a:endParaRPr lang="en-US" sz="1800" dirty="0"/>
+                <a:latin typeface="Courier New" pitchFamily="34" charset="0"/>
+                <a:ea typeface="Courier New" pitchFamily="34" charset="-122"/>
+                <a:cs typeface="Courier New" pitchFamily="34" charset="-120"/>
+              </a:rPr>
+              <a:t>x[3:]</a:t>
+            </a:r>
+            <a:pPr indent="0" marL="0">
+              <a:buNone/>
+            </a:pPr>
+            <a:r>
+              <a:rPr lang="en-US" sz="1700" dirty="0">
+                <a:solidFill>
+                  <a:srgbClr val="1F2A30"/>
+                </a:solidFill>
+                <a:latin typeface="Courier New" pitchFamily="34" charset="0"/>
+                <a:ea typeface="Courier New" pitchFamily="34" charset="-122"/>
+                <a:cs typeface="Courier New" pitchFamily="34" charset="-120"/>
+              </a:rPr>
+              <a:t>   D E F</a:t>
+            </a:r>
+            <a:endParaRPr lang="en-US" sz="1700" dirty="0"/>
+          </a:p>
+        </p:txBody>
+      </p:sp>
+      <p:sp>
+        <p:nvSpPr>
+          <p:cNvPr id="50" name="Text 48"/>
+          <p:cNvSpPr txBox="1"/>
+          <p:nvPr/>
+        </p:nvSpPr>
+        <p:spPr>
+          <a:xfrm>
+            <a:off x="8092440" y="3172968"/>
+            <a:ext cx="3383280" cy="347472"/>
+          </a:xfrm>
+          <a:prstGeom prst="rect">
+            <a:avLst/>
+          </a:prstGeom>
+          <a:noFill/>
+          <a:ln/>
+        </p:spPr>
+        <p:txBody>
+          <a:bodyPr wrap="square" lIns="0" tIns="0" rIns="0" bIns="0" rtlCol="0" anchor="ctr"/>
+          <a:lstStyle/>
+          <a:p>
+            <a:pPr indent="0" marL="0">
+              <a:buNone/>
+            </a:pPr>
+            <a:r>
+              <a:rPr lang="en-US" sz="1400" dirty="0">
+                <a:solidFill>
+                  <a:srgbClr val="5C6F7B"/>
+                </a:solidFill>
+              </a:rPr>
+              <a:t>dal taglio 3 alla fine</a:t>
+            </a:r>
+            <a:endParaRPr lang="en-US" sz="1400" dirty="0"/>
+          </a:p>
+        </p:txBody>
+      </p:sp>
+      <p:sp>
+        <p:nvSpPr>
+          <p:cNvPr id="51" name="Shape 49"/>
+          <p:cNvSpPr/>
+          <p:nvPr/>
+        </p:nvSpPr>
+        <p:spPr>
+          <a:xfrm>
+            <a:off x="7863840" y="3739896"/>
+            <a:ext cx="3749040" cy="868680"/>
+          </a:xfrm>
+          <a:prstGeom prst="roundRect">
+            <a:avLst>
+              <a:gd name="adj" fmla="val 10526"/>
+            </a:avLst>
+          </a:prstGeom>
+          <a:solidFill>
+            <a:srgbClr val="EEF3F4"/>
+          </a:solidFill>
+          <a:ln/>
+        </p:spPr>
+      </p:sp>
+      <p:sp>
+        <p:nvSpPr>
+          <p:cNvPr id="52" name="Text 50"/>
+          <p:cNvSpPr txBox="1"/>
+          <p:nvPr/>
+        </p:nvSpPr>
+        <p:spPr>
+          <a:xfrm>
+            <a:off x="8092440" y="3813048"/>
+            <a:ext cx="3383280" cy="411480"/>
+          </a:xfrm>
+          <a:prstGeom prst="rect">
+            <a:avLst/>
+          </a:prstGeom>
+          <a:noFill/>
+          <a:ln/>
+        </p:spPr>
+        <p:txBody>
+          <a:bodyPr wrap="square" lIns="0" tIns="0" rIns="0" bIns="0" rtlCol="0" anchor="ctr"/>
+          <a:lstStyle/>
+          <a:p>
+            <a:pPr indent="0" marL="0">
+              <a:buNone/>
+            </a:pPr>
+            <a:r>
+              <a:rPr lang="en-US" sz="1700" b="1" dirty="0">
+                <a:solidFill>
+                  <a:srgbClr val="0F4C5C"/>
+                </a:solidFill>
+                <a:latin typeface="Courier New" pitchFamily="34" charset="0"/>
+                <a:ea typeface="Courier New" pitchFamily="34" charset="-122"/>
+                <a:cs typeface="Courier New" pitchFamily="34" charset="-120"/>
+              </a:rPr>
+              <a:t>x[-2:]</a:t>
+            </a:r>
+            <a:pPr indent="0" marL="0">
+              <a:buNone/>
+            </a:pPr>
+            <a:r>
+              <a:rPr lang="en-US" sz="1700" dirty="0">
+                <a:solidFill>
+                  <a:srgbClr val="1F2A30"/>
+                </a:solidFill>
+                <a:latin typeface="Courier New" pitchFamily="34" charset="0"/>
+                <a:ea typeface="Courier New" pitchFamily="34" charset="-122"/>
+                <a:cs typeface="Courier New" pitchFamily="34" charset="-120"/>
+              </a:rPr>
+              <a:t>   E F</a:t>
+            </a:r>
+            <a:endParaRPr lang="en-US" sz="1700" dirty="0"/>
+          </a:p>
+        </p:txBody>
+      </p:sp>
+      <p:sp>
+        <p:nvSpPr>
+          <p:cNvPr id="53" name="Text 51"/>
+          <p:cNvSpPr txBox="1"/>
+          <p:nvPr/>
+        </p:nvSpPr>
+        <p:spPr>
+          <a:xfrm>
+            <a:off x="8092440" y="4197096"/>
+            <a:ext cx="3383280" cy="347472"/>
+          </a:xfrm>
+          <a:prstGeom prst="rect">
+            <a:avLst/>
+          </a:prstGeom>
+          <a:noFill/>
+          <a:ln/>
+        </p:spPr>
+        <p:txBody>
+          <a:bodyPr wrap="square" lIns="0" tIns="0" rIns="0" bIns="0" rtlCol="0" anchor="ctr"/>
+          <a:lstStyle/>
+          <a:p>
+            <a:pPr indent="0" marL="0">
+              <a:buNone/>
+            </a:pPr>
+            <a:r>
+              <a:rPr lang="en-US" sz="1400" dirty="0">
+                <a:solidFill>
+                  <a:srgbClr val="5C6F7B"/>
+                </a:solidFill>
+              </a:rPr>
+              <a:t>gli ultimi 2</a:t>
+            </a:r>
+            <a:endParaRPr lang="en-US" sz="1400" dirty="0"/>
+          </a:p>
+        </p:txBody>
+      </p:sp>
+      <p:sp>
+        <p:nvSpPr>
+          <p:cNvPr id="54" name="Shape 52"/>
+          <p:cNvSpPr/>
+          <p:nvPr/>
+        </p:nvSpPr>
+        <p:spPr>
+          <a:xfrm>
+            <a:off x="7863840" y="4764024"/>
+            <a:ext cx="3749040" cy="868680"/>
+          </a:xfrm>
+          <a:prstGeom prst="roundRect">
+            <a:avLst>
+              <a:gd name="adj" fmla="val 10526"/>
+            </a:avLst>
+          </a:prstGeom>
+          <a:solidFill>
+            <a:srgbClr val="EEF3F4"/>
+          </a:solidFill>
+          <a:ln/>
+        </p:spPr>
+      </p:sp>
+      <p:sp>
+        <p:nvSpPr>
+          <p:cNvPr id="55" name="Text 53"/>
+          <p:cNvSpPr txBox="1"/>
+          <p:nvPr/>
+        </p:nvSpPr>
+        <p:spPr>
+          <a:xfrm>
+            <a:off x="8092440" y="4837176"/>
+            <a:ext cx="3383280" cy="411480"/>
+          </a:xfrm>
+          <a:prstGeom prst="rect">
+            <a:avLst/>
+          </a:prstGeom>
+          <a:noFill/>
+          <a:ln/>
+        </p:spPr>
+        <p:txBody>
+          <a:bodyPr wrap="square" lIns="0" tIns="0" rIns="0" bIns="0" rtlCol="0" anchor="ctr"/>
+          <a:lstStyle/>
+          <a:p>
+            <a:pPr indent="0" marL="0">
+              <a:buNone/>
+            </a:pPr>
+            <a:r>
+              <a:rPr lang="en-US" sz="1700" b="1" dirty="0">
+                <a:solidFill>
+                  <a:srgbClr val="0F4C5C"/>
+                </a:solidFill>
+                <a:latin typeface="Courier New" pitchFamily="34" charset="0"/>
+                <a:ea typeface="Courier New" pitchFamily="34" charset="-122"/>
+                <a:cs typeface="Courier New" pitchFamily="34" charset="-120"/>
+              </a:rPr>
+              <a:t>x[2]</a:t>
+            </a:r>
+            <a:pPr indent="0" marL="0">
+              <a:buNone/>
+            </a:pPr>
+            <a:r>
+              <a:rPr lang="en-US" sz="1700" dirty="0">
+                <a:solidFill>
+                  <a:srgbClr val="1F2A30"/>
+                </a:solidFill>
+                <a:latin typeface="Courier New" pitchFamily="34" charset="0"/>
+                <a:ea typeface="Courier New" pitchFamily="34" charset="-122"/>
+                <a:cs typeface="Courier New" pitchFamily="34" charset="-120"/>
+              </a:rPr>
+              <a:t>   C</a:t>
+            </a:r>
+            <a:endParaRPr lang="en-US" sz="1700" dirty="0"/>
+          </a:p>
+        </p:txBody>
+      </p:sp>
+      <p:sp>
+        <p:nvSpPr>
+          <p:cNvPr id="56" name="Text 54"/>
+          <p:cNvSpPr txBox="1"/>
+          <p:nvPr/>
+        </p:nvSpPr>
+        <p:spPr>
+          <a:xfrm>
+            <a:off x="8092440" y="5221224"/>
+            <a:ext cx="3383280" cy="347472"/>
+          </a:xfrm>
+          <a:prstGeom prst="rect">
+            <a:avLst/>
+          </a:prstGeom>
+          <a:noFill/>
+          <a:ln/>
+        </p:spPr>
+        <p:txBody>
+          <a:bodyPr wrap="square" lIns="0" tIns="0" rIns="0" bIns="0" rtlCol="0" anchor="ctr"/>
+          <a:lstStyle/>
+          <a:p>
+            <a:pPr indent="0" marL="0">
+              <a:buNone/>
+            </a:pPr>
+            <a:r>
+              <a:rPr lang="en-US" sz="1400" dirty="0">
+                <a:solidFill>
+                  <a:srgbClr val="5C6F7B"/>
+                </a:solidFill>
+              </a:rPr>
+              <a:t>un elemento solo</a:t>
+            </a:r>
+            <a:endParaRPr lang="en-US" sz="1400" dirty="0"/>
+          </a:p>
+        </p:txBody>
+      </p:sp>
+      <p:sp>
+        <p:nvSpPr>
+          <p:cNvPr id="57" name="Text 55"/>
+          <p:cNvSpPr txBox="1"/>
+          <p:nvPr/>
+        </p:nvSpPr>
+        <p:spPr>
+          <a:xfrm>
+            <a:off x="548640" y="5577840"/>
+            <a:ext cx="11064240" cy="548640"/>
+          </a:xfrm>
+          <a:prstGeom prst="rect">
+            <a:avLst/>
+          </a:prstGeom>
+          <a:noFill/>
+          <a:ln/>
+        </p:spPr>
+        <p:txBody>
+          <a:bodyPr wrap="square" lIns="0" tIns="0" rIns="0" bIns="0" rtlCol="0" anchor="ctr"/>
+          <a:lstStyle/>
+          <a:p>
+            <a:pPr indent="0" marL="0">
+              <a:buNone/>
+            </a:pPr>
+            <a:r>
+              <a:rPr lang="en-US" sz="1700" i="1" dirty="0">
+                <a:solidFill>
+                  <a:srgbClr val="0F4C5C"/>
+                </a:solidFill>
+              </a:rPr>
+              <a:t>I numeri dello slicing non indicano le caselle, ma i tagli tra una casella e l'altra. Così fine − inizio = quanti elementi ottieni.</a:t>
+            </a:r>
+            <a:endParaRPr lang="en-US" sz="1700" dirty="0"/>
           </a:p>
         </p:txBody>
       </p:sp>
@@ -6726,83 +9812,3351 @@
         </p:nvSpPr>
         <p:spPr>
           <a:xfrm>
-            <a:off x="731520" y="2194560"/>
-            <a:ext cx="10698480" cy="1280160"/>
-          </a:xfrm>
-          <a:prstGeom prst="rect">
-            <a:avLst/>
-          </a:prstGeom>
-          <a:noFill/>
-          <a:ln/>
-        </p:spPr>
-        <p:txBody>
-          <a:bodyPr wrap="square" lIns="0" tIns="0" rIns="0" bIns="0" rtlCol="0" anchor="b"/>
+            <a:off x="548640" y="365760"/>
+            <a:ext cx="11064240" cy="822960"/>
+          </a:xfrm>
+          <a:prstGeom prst="rect">
+            <a:avLst/>
+          </a:prstGeom>
+          <a:noFill/>
+          <a:ln/>
+        </p:spPr>
+        <p:txBody>
+          <a:bodyPr wrap="square" lIns="0" tIns="0" rIns="0" bIns="0" rtlCol="0" anchor="ctr"/>
           <a:lstStyle/>
           <a:p>
             <a:pPr algn="l" indent="0" marL="0">
               <a:buNone/>
             </a:pPr>
             <a:r>
-              <a:rPr lang="en-US" sz="5400" b="1" dirty="0">
+              <a:rPr lang="en-US" sz="3600" b="1" dirty="0">
+                <a:solidFill>
+                  <a:srgbClr val="0F4C5C"/>
+                </a:solidFill>
+              </a:rPr>
+              <a:t>iloc è come un intervallo di Excel</a:t>
+            </a:r>
+            <a:endParaRPr lang="en-US" sz="3600" dirty="0"/>
+          </a:p>
+        </p:txBody>
+      </p:sp>
+      <p:sp>
+        <p:nvSpPr>
+          <p:cNvPr id="3" name="Shape 1"/>
+          <p:cNvSpPr/>
+          <p:nvPr/>
+        </p:nvSpPr>
+        <p:spPr>
+          <a:xfrm>
+            <a:off x="548640" y="1691640"/>
+            <a:ext cx="411480" cy="420624"/>
+          </a:xfrm>
+          <a:prstGeom prst="rect">
+            <a:avLst/>
+          </a:prstGeom>
+          <a:solidFill>
+            <a:srgbClr val="DDE3E6"/>
+          </a:solidFill>
+          <a:ln w="9525">
+            <a:solidFill>
+              <a:srgbClr val="C9D2D6"/>
+            </a:solidFill>
+            <a:prstDash val="solid"/>
+          </a:ln>
+        </p:spPr>
+      </p:sp>
+      <p:sp>
+        <p:nvSpPr>
+          <p:cNvPr id="4" name="Text 2"/>
+          <p:cNvSpPr txBox="1"/>
+          <p:nvPr/>
+        </p:nvSpPr>
+        <p:spPr>
+          <a:xfrm>
+            <a:off x="548640" y="1691640"/>
+            <a:ext cx="411480" cy="420624"/>
+          </a:xfrm>
+          <a:prstGeom prst="rect">
+            <a:avLst/>
+          </a:prstGeom>
+          <a:noFill/>
+          <a:ln/>
+        </p:spPr>
+        <p:txBody>
+          <a:bodyPr wrap="square" lIns="0" tIns="0" rIns="0" bIns="0" rtlCol="0" anchor="ctr"/>
+          <a:lstStyle/>
+          <a:p>
+            <a:pPr algn="ctr" indent="0" marL="0">
+              <a:buNone/>
+            </a:pPr>
+            <a:endParaRPr lang="en-US" sz="1200" dirty="0"/>
+          </a:p>
+        </p:txBody>
+      </p:sp>
+      <p:sp>
+        <p:nvSpPr>
+          <p:cNvPr id="5" name="Shape 3"/>
+          <p:cNvSpPr/>
+          <p:nvPr/>
+        </p:nvSpPr>
+        <p:spPr>
+          <a:xfrm>
+            <a:off x="960120" y="1691640"/>
+            <a:ext cx="960120" cy="420624"/>
+          </a:xfrm>
+          <a:prstGeom prst="rect">
+            <a:avLst/>
+          </a:prstGeom>
+          <a:solidFill>
+            <a:srgbClr val="DDE3E6"/>
+          </a:solidFill>
+          <a:ln w="9525">
+            <a:solidFill>
+              <a:srgbClr val="C9D2D6"/>
+            </a:solidFill>
+            <a:prstDash val="solid"/>
+          </a:ln>
+        </p:spPr>
+      </p:sp>
+      <p:sp>
+        <p:nvSpPr>
+          <p:cNvPr id="6" name="Text 4"/>
+          <p:cNvSpPr txBox="1"/>
+          <p:nvPr/>
+        </p:nvSpPr>
+        <p:spPr>
+          <a:xfrm>
+            <a:off x="960120" y="1691640"/>
+            <a:ext cx="960120" cy="420624"/>
+          </a:xfrm>
+          <a:prstGeom prst="rect">
+            <a:avLst/>
+          </a:prstGeom>
+          <a:noFill/>
+          <a:ln/>
+        </p:spPr>
+        <p:txBody>
+          <a:bodyPr wrap="square" lIns="0" tIns="0" rIns="0" bIns="0" rtlCol="0" anchor="ctr"/>
+          <a:lstStyle/>
+          <a:p>
+            <a:pPr algn="ctr" indent="0" marL="0">
+              <a:buNone/>
+            </a:pPr>
+            <a:r>
+              <a:rPr lang="en-US" sz="1200" b="1" dirty="0">
+                <a:solidFill>
+                  <a:srgbClr val="1F2A30"/>
+                </a:solidFill>
+              </a:rPr>
+              <a:t>A</a:t>
+            </a:r>
+            <a:endParaRPr lang="en-US" sz="1200" dirty="0"/>
+          </a:p>
+        </p:txBody>
+      </p:sp>
+      <p:sp>
+        <p:nvSpPr>
+          <p:cNvPr id="7" name="Shape 5"/>
+          <p:cNvSpPr/>
+          <p:nvPr/>
+        </p:nvSpPr>
+        <p:spPr>
+          <a:xfrm>
+            <a:off x="1920240" y="1691640"/>
+            <a:ext cx="960120" cy="420624"/>
+          </a:xfrm>
+          <a:prstGeom prst="rect">
+            <a:avLst/>
+          </a:prstGeom>
+          <a:solidFill>
+            <a:srgbClr val="DDE3E6"/>
+          </a:solidFill>
+          <a:ln w="9525">
+            <a:solidFill>
+              <a:srgbClr val="C9D2D6"/>
+            </a:solidFill>
+            <a:prstDash val="solid"/>
+          </a:ln>
+        </p:spPr>
+      </p:sp>
+      <p:sp>
+        <p:nvSpPr>
+          <p:cNvPr id="8" name="Text 6"/>
+          <p:cNvSpPr txBox="1"/>
+          <p:nvPr/>
+        </p:nvSpPr>
+        <p:spPr>
+          <a:xfrm>
+            <a:off x="1920240" y="1691640"/>
+            <a:ext cx="960120" cy="420624"/>
+          </a:xfrm>
+          <a:prstGeom prst="rect">
+            <a:avLst/>
+          </a:prstGeom>
+          <a:noFill/>
+          <a:ln/>
+        </p:spPr>
+        <p:txBody>
+          <a:bodyPr wrap="square" lIns="0" tIns="0" rIns="0" bIns="0" rtlCol="0" anchor="ctr"/>
+          <a:lstStyle/>
+          <a:p>
+            <a:pPr algn="ctr" indent="0" marL="0">
+              <a:buNone/>
+            </a:pPr>
+            <a:r>
+              <a:rPr lang="en-US" sz="1200" b="1" dirty="0">
+                <a:solidFill>
+                  <a:srgbClr val="1F2A30"/>
+                </a:solidFill>
+              </a:rPr>
+              <a:t>B</a:t>
+            </a:r>
+            <a:endParaRPr lang="en-US" sz="1200" dirty="0"/>
+          </a:p>
+        </p:txBody>
+      </p:sp>
+      <p:sp>
+        <p:nvSpPr>
+          <p:cNvPr id="9" name="Shape 7"/>
+          <p:cNvSpPr/>
+          <p:nvPr/>
+        </p:nvSpPr>
+        <p:spPr>
+          <a:xfrm>
+            <a:off x="2880360" y="1691640"/>
+            <a:ext cx="960120" cy="420624"/>
+          </a:xfrm>
+          <a:prstGeom prst="rect">
+            <a:avLst/>
+          </a:prstGeom>
+          <a:solidFill>
+            <a:srgbClr val="DDE3E6"/>
+          </a:solidFill>
+          <a:ln w="9525">
+            <a:solidFill>
+              <a:srgbClr val="C9D2D6"/>
+            </a:solidFill>
+            <a:prstDash val="solid"/>
+          </a:ln>
+        </p:spPr>
+      </p:sp>
+      <p:sp>
+        <p:nvSpPr>
+          <p:cNvPr id="10" name="Text 8"/>
+          <p:cNvSpPr txBox="1"/>
+          <p:nvPr/>
+        </p:nvSpPr>
+        <p:spPr>
+          <a:xfrm>
+            <a:off x="2880360" y="1691640"/>
+            <a:ext cx="960120" cy="420624"/>
+          </a:xfrm>
+          <a:prstGeom prst="rect">
+            <a:avLst/>
+          </a:prstGeom>
+          <a:noFill/>
+          <a:ln/>
+        </p:spPr>
+        <p:txBody>
+          <a:bodyPr wrap="square" lIns="0" tIns="0" rIns="0" bIns="0" rtlCol="0" anchor="ctr"/>
+          <a:lstStyle/>
+          <a:p>
+            <a:pPr algn="ctr" indent="0" marL="0">
+              <a:buNone/>
+            </a:pPr>
+            <a:r>
+              <a:rPr lang="en-US" sz="1200" b="1" dirty="0">
+                <a:solidFill>
+                  <a:srgbClr val="1F2A30"/>
+                </a:solidFill>
+              </a:rPr>
+              <a:t>C</a:t>
+            </a:r>
+            <a:endParaRPr lang="en-US" sz="1200" dirty="0"/>
+          </a:p>
+        </p:txBody>
+      </p:sp>
+      <p:sp>
+        <p:nvSpPr>
+          <p:cNvPr id="11" name="Shape 9"/>
+          <p:cNvSpPr/>
+          <p:nvPr/>
+        </p:nvSpPr>
+        <p:spPr>
+          <a:xfrm>
+            <a:off x="3840480" y="1691640"/>
+            <a:ext cx="960120" cy="420624"/>
+          </a:xfrm>
+          <a:prstGeom prst="rect">
+            <a:avLst/>
+          </a:prstGeom>
+          <a:solidFill>
+            <a:srgbClr val="DDE3E6"/>
+          </a:solidFill>
+          <a:ln w="9525">
+            <a:solidFill>
+              <a:srgbClr val="C9D2D6"/>
+            </a:solidFill>
+            <a:prstDash val="solid"/>
+          </a:ln>
+        </p:spPr>
+      </p:sp>
+      <p:sp>
+        <p:nvSpPr>
+          <p:cNvPr id="12" name="Text 10"/>
+          <p:cNvSpPr txBox="1"/>
+          <p:nvPr/>
+        </p:nvSpPr>
+        <p:spPr>
+          <a:xfrm>
+            <a:off x="3840480" y="1691640"/>
+            <a:ext cx="960120" cy="420624"/>
+          </a:xfrm>
+          <a:prstGeom prst="rect">
+            <a:avLst/>
+          </a:prstGeom>
+          <a:noFill/>
+          <a:ln/>
+        </p:spPr>
+        <p:txBody>
+          <a:bodyPr wrap="square" lIns="0" tIns="0" rIns="0" bIns="0" rtlCol="0" anchor="ctr"/>
+          <a:lstStyle/>
+          <a:p>
+            <a:pPr algn="ctr" indent="0" marL="0">
+              <a:buNone/>
+            </a:pPr>
+            <a:r>
+              <a:rPr lang="en-US" sz="1200" b="1" dirty="0">
+                <a:solidFill>
+                  <a:srgbClr val="1F2A30"/>
+                </a:solidFill>
+              </a:rPr>
+              <a:t>D</a:t>
+            </a:r>
+            <a:endParaRPr lang="en-US" sz="1200" dirty="0"/>
+          </a:p>
+        </p:txBody>
+      </p:sp>
+      <p:sp>
+        <p:nvSpPr>
+          <p:cNvPr id="13" name="Shape 11"/>
+          <p:cNvSpPr/>
+          <p:nvPr/>
+        </p:nvSpPr>
+        <p:spPr>
+          <a:xfrm>
+            <a:off x="548640" y="2112264"/>
+            <a:ext cx="411480" cy="420624"/>
+          </a:xfrm>
+          <a:prstGeom prst="rect">
+            <a:avLst/>
+          </a:prstGeom>
+          <a:solidFill>
+            <a:srgbClr val="DDE3E6"/>
+          </a:solidFill>
+          <a:ln w="9525">
+            <a:solidFill>
+              <a:srgbClr val="C9D2D6"/>
+            </a:solidFill>
+            <a:prstDash val="solid"/>
+          </a:ln>
+        </p:spPr>
+      </p:sp>
+      <p:sp>
+        <p:nvSpPr>
+          <p:cNvPr id="14" name="Text 12"/>
+          <p:cNvSpPr txBox="1"/>
+          <p:nvPr/>
+        </p:nvSpPr>
+        <p:spPr>
+          <a:xfrm>
+            <a:off x="548640" y="2112264"/>
+            <a:ext cx="411480" cy="420624"/>
+          </a:xfrm>
+          <a:prstGeom prst="rect">
+            <a:avLst/>
+          </a:prstGeom>
+          <a:noFill/>
+          <a:ln/>
+        </p:spPr>
+        <p:txBody>
+          <a:bodyPr wrap="square" lIns="0" tIns="0" rIns="0" bIns="0" rtlCol="0" anchor="ctr"/>
+          <a:lstStyle/>
+          <a:p>
+            <a:pPr algn="ctr" indent="0" marL="0">
+              <a:buNone/>
+            </a:pPr>
+            <a:r>
+              <a:rPr lang="en-US" sz="1200" b="1" dirty="0">
+                <a:solidFill>
+                  <a:srgbClr val="1F2A30"/>
+                </a:solidFill>
+              </a:rPr>
+              <a:t>1</a:t>
+            </a:r>
+            <a:endParaRPr lang="en-US" sz="1200" dirty="0"/>
+          </a:p>
+        </p:txBody>
+      </p:sp>
+      <p:sp>
+        <p:nvSpPr>
+          <p:cNvPr id="15" name="Shape 13"/>
+          <p:cNvSpPr/>
+          <p:nvPr/>
+        </p:nvSpPr>
+        <p:spPr>
+          <a:xfrm>
+            <a:off x="960120" y="2112264"/>
+            <a:ext cx="960120" cy="420624"/>
+          </a:xfrm>
+          <a:prstGeom prst="rect">
+            <a:avLst/>
+          </a:prstGeom>
+          <a:solidFill>
+            <a:srgbClr val="FFFFFF"/>
+          </a:solidFill>
+          <a:ln w="9525">
+            <a:solidFill>
+              <a:srgbClr val="C9D2D6"/>
+            </a:solidFill>
+            <a:prstDash val="solid"/>
+          </a:ln>
+        </p:spPr>
+      </p:sp>
+      <p:sp>
+        <p:nvSpPr>
+          <p:cNvPr id="16" name="Text 14"/>
+          <p:cNvSpPr txBox="1"/>
+          <p:nvPr/>
+        </p:nvSpPr>
+        <p:spPr>
+          <a:xfrm>
+            <a:off x="960120" y="2112264"/>
+            <a:ext cx="960120" cy="420624"/>
+          </a:xfrm>
+          <a:prstGeom prst="rect">
+            <a:avLst/>
+          </a:prstGeom>
+          <a:noFill/>
+          <a:ln/>
+        </p:spPr>
+        <p:txBody>
+          <a:bodyPr wrap="square" lIns="0" tIns="0" rIns="0" bIns="0" rtlCol="0" anchor="ctr"/>
+          <a:lstStyle/>
+          <a:p>
+            <a:pPr algn="ctr" indent="0" marL="0">
+              <a:buNone/>
+            </a:pPr>
+            <a:r>
+              <a:rPr lang="en-US" sz="1200" b="1" dirty="0">
+                <a:solidFill>
+                  <a:srgbClr val="1F2A30"/>
+                </a:solidFill>
+              </a:rPr>
+              <a:t>impresa</a:t>
+            </a:r>
+            <a:endParaRPr lang="en-US" sz="1200" dirty="0"/>
+          </a:p>
+        </p:txBody>
+      </p:sp>
+      <p:sp>
+        <p:nvSpPr>
+          <p:cNvPr id="17" name="Shape 15"/>
+          <p:cNvSpPr/>
+          <p:nvPr/>
+        </p:nvSpPr>
+        <p:spPr>
+          <a:xfrm>
+            <a:off x="1920240" y="2112264"/>
+            <a:ext cx="960120" cy="420624"/>
+          </a:xfrm>
+          <a:prstGeom prst="rect">
+            <a:avLst/>
+          </a:prstGeom>
+          <a:solidFill>
+            <a:srgbClr val="FFFFFF"/>
+          </a:solidFill>
+          <a:ln w="9525">
+            <a:solidFill>
+              <a:srgbClr val="C9D2D6"/>
+            </a:solidFill>
+            <a:prstDash val="solid"/>
+          </a:ln>
+        </p:spPr>
+      </p:sp>
+      <p:sp>
+        <p:nvSpPr>
+          <p:cNvPr id="18" name="Text 16"/>
+          <p:cNvSpPr txBox="1"/>
+          <p:nvPr/>
+        </p:nvSpPr>
+        <p:spPr>
+          <a:xfrm>
+            <a:off x="1920240" y="2112264"/>
+            <a:ext cx="960120" cy="420624"/>
+          </a:xfrm>
+          <a:prstGeom prst="rect">
+            <a:avLst/>
+          </a:prstGeom>
+          <a:noFill/>
+          <a:ln/>
+        </p:spPr>
+        <p:txBody>
+          <a:bodyPr wrap="square" lIns="0" tIns="0" rIns="0" bIns="0" rtlCol="0" anchor="ctr"/>
+          <a:lstStyle/>
+          <a:p>
+            <a:pPr algn="ctr" indent="0" marL="0">
+              <a:buNone/>
+            </a:pPr>
+            <a:r>
+              <a:rPr lang="en-US" sz="1200" b="1" dirty="0">
+                <a:solidFill>
+                  <a:srgbClr val="1F2A30"/>
+                </a:solidFill>
+              </a:rPr>
+              <a:t>anno</a:t>
+            </a:r>
+            <a:endParaRPr lang="en-US" sz="1200" dirty="0"/>
+          </a:p>
+        </p:txBody>
+      </p:sp>
+      <p:sp>
+        <p:nvSpPr>
+          <p:cNvPr id="19" name="Shape 17"/>
+          <p:cNvSpPr/>
+          <p:nvPr/>
+        </p:nvSpPr>
+        <p:spPr>
+          <a:xfrm>
+            <a:off x="2880360" y="2112264"/>
+            <a:ext cx="960120" cy="420624"/>
+          </a:xfrm>
+          <a:prstGeom prst="rect">
+            <a:avLst/>
+          </a:prstGeom>
+          <a:solidFill>
+            <a:srgbClr val="FFFFFF"/>
+          </a:solidFill>
+          <a:ln w="9525">
+            <a:solidFill>
+              <a:srgbClr val="C9D2D6"/>
+            </a:solidFill>
+            <a:prstDash val="solid"/>
+          </a:ln>
+        </p:spPr>
+      </p:sp>
+      <p:sp>
+        <p:nvSpPr>
+          <p:cNvPr id="20" name="Text 18"/>
+          <p:cNvSpPr txBox="1"/>
+          <p:nvPr/>
+        </p:nvSpPr>
+        <p:spPr>
+          <a:xfrm>
+            <a:off x="2880360" y="2112264"/>
+            <a:ext cx="960120" cy="420624"/>
+          </a:xfrm>
+          <a:prstGeom prst="rect">
+            <a:avLst/>
+          </a:prstGeom>
+          <a:noFill/>
+          <a:ln/>
+        </p:spPr>
+        <p:txBody>
+          <a:bodyPr wrap="square" lIns="0" tIns="0" rIns="0" bIns="0" rtlCol="0" anchor="ctr"/>
+          <a:lstStyle/>
+          <a:p>
+            <a:pPr algn="ctr" indent="0" marL="0">
+              <a:buNone/>
+            </a:pPr>
+            <a:r>
+              <a:rPr lang="en-US" sz="1200" b="1" dirty="0">
+                <a:solidFill>
+                  <a:srgbClr val="1F2A30"/>
+                </a:solidFill>
+              </a:rPr>
+              <a:t>addetti</a:t>
+            </a:r>
+            <a:endParaRPr lang="en-US" sz="1200" dirty="0"/>
+          </a:p>
+        </p:txBody>
+      </p:sp>
+      <p:sp>
+        <p:nvSpPr>
+          <p:cNvPr id="21" name="Shape 19"/>
+          <p:cNvSpPr/>
+          <p:nvPr/>
+        </p:nvSpPr>
+        <p:spPr>
+          <a:xfrm>
+            <a:off x="3840480" y="2112264"/>
+            <a:ext cx="960120" cy="420624"/>
+          </a:xfrm>
+          <a:prstGeom prst="rect">
+            <a:avLst/>
+          </a:prstGeom>
+          <a:solidFill>
+            <a:srgbClr val="FFFFFF"/>
+          </a:solidFill>
+          <a:ln w="9525">
+            <a:solidFill>
+              <a:srgbClr val="C9D2D6"/>
+            </a:solidFill>
+            <a:prstDash val="solid"/>
+          </a:ln>
+        </p:spPr>
+      </p:sp>
+      <p:sp>
+        <p:nvSpPr>
+          <p:cNvPr id="22" name="Text 20"/>
+          <p:cNvSpPr txBox="1"/>
+          <p:nvPr/>
+        </p:nvSpPr>
+        <p:spPr>
+          <a:xfrm>
+            <a:off x="3840480" y="2112264"/>
+            <a:ext cx="960120" cy="420624"/>
+          </a:xfrm>
+          <a:prstGeom prst="rect">
+            <a:avLst/>
+          </a:prstGeom>
+          <a:noFill/>
+          <a:ln/>
+        </p:spPr>
+        <p:txBody>
+          <a:bodyPr wrap="square" lIns="0" tIns="0" rIns="0" bIns="0" rtlCol="0" anchor="ctr"/>
+          <a:lstStyle/>
+          <a:p>
+            <a:pPr algn="ctr" indent="0" marL="0">
+              <a:buNone/>
+            </a:pPr>
+            <a:r>
+              <a:rPr lang="en-US" sz="1200" b="1" dirty="0">
+                <a:solidFill>
+                  <a:srgbClr val="1F2A30"/>
+                </a:solidFill>
+              </a:rPr>
+              <a:t>regione</a:t>
+            </a:r>
+            <a:endParaRPr lang="en-US" sz="1200" dirty="0"/>
+          </a:p>
+        </p:txBody>
+      </p:sp>
+      <p:sp>
+        <p:nvSpPr>
+          <p:cNvPr id="23" name="Shape 21"/>
+          <p:cNvSpPr/>
+          <p:nvPr/>
+        </p:nvSpPr>
+        <p:spPr>
+          <a:xfrm>
+            <a:off x="548640" y="2532888"/>
+            <a:ext cx="411480" cy="420624"/>
+          </a:xfrm>
+          <a:prstGeom prst="rect">
+            <a:avLst/>
+          </a:prstGeom>
+          <a:solidFill>
+            <a:srgbClr val="DDE3E6"/>
+          </a:solidFill>
+          <a:ln w="9525">
+            <a:solidFill>
+              <a:srgbClr val="C9D2D6"/>
+            </a:solidFill>
+            <a:prstDash val="solid"/>
+          </a:ln>
+        </p:spPr>
+      </p:sp>
+      <p:sp>
+        <p:nvSpPr>
+          <p:cNvPr id="24" name="Text 22"/>
+          <p:cNvSpPr txBox="1"/>
+          <p:nvPr/>
+        </p:nvSpPr>
+        <p:spPr>
+          <a:xfrm>
+            <a:off x="548640" y="2532888"/>
+            <a:ext cx="411480" cy="420624"/>
+          </a:xfrm>
+          <a:prstGeom prst="rect">
+            <a:avLst/>
+          </a:prstGeom>
+          <a:noFill/>
+          <a:ln/>
+        </p:spPr>
+        <p:txBody>
+          <a:bodyPr wrap="square" lIns="0" tIns="0" rIns="0" bIns="0" rtlCol="0" anchor="ctr"/>
+          <a:lstStyle/>
+          <a:p>
+            <a:pPr algn="ctr" indent="0" marL="0">
+              <a:buNone/>
+            </a:pPr>
+            <a:r>
+              <a:rPr lang="en-US" sz="1200" b="1" dirty="0">
+                <a:solidFill>
+                  <a:srgbClr val="1F2A30"/>
+                </a:solidFill>
+              </a:rPr>
+              <a:t>2</a:t>
+            </a:r>
+            <a:endParaRPr lang="en-US" sz="1200" dirty="0"/>
+          </a:p>
+        </p:txBody>
+      </p:sp>
+      <p:sp>
+        <p:nvSpPr>
+          <p:cNvPr id="25" name="Shape 23"/>
+          <p:cNvSpPr/>
+          <p:nvPr/>
+        </p:nvSpPr>
+        <p:spPr>
+          <a:xfrm>
+            <a:off x="960120" y="2532888"/>
+            <a:ext cx="960120" cy="420624"/>
+          </a:xfrm>
+          <a:prstGeom prst="rect">
+            <a:avLst/>
+          </a:prstGeom>
+          <a:solidFill>
+            <a:srgbClr val="FBE3B8"/>
+          </a:solidFill>
+          <a:ln w="9525">
+            <a:solidFill>
+              <a:srgbClr val="C9D2D6"/>
+            </a:solidFill>
+            <a:prstDash val="solid"/>
+          </a:ln>
+        </p:spPr>
+      </p:sp>
+      <p:sp>
+        <p:nvSpPr>
+          <p:cNvPr id="26" name="Text 24"/>
+          <p:cNvSpPr txBox="1"/>
+          <p:nvPr/>
+        </p:nvSpPr>
+        <p:spPr>
+          <a:xfrm>
+            <a:off x="960120" y="2532888"/>
+            <a:ext cx="960120" cy="420624"/>
+          </a:xfrm>
+          <a:prstGeom prst="rect">
+            <a:avLst/>
+          </a:prstGeom>
+          <a:noFill/>
+          <a:ln/>
+        </p:spPr>
+        <p:txBody>
+          <a:bodyPr wrap="square" lIns="0" tIns="0" rIns="0" bIns="0" rtlCol="0" anchor="ctr"/>
+          <a:lstStyle/>
+          <a:p>
+            <a:pPr algn="ctr" indent="0" marL="0">
+              <a:buNone/>
+            </a:pPr>
+            <a:r>
+              <a:rPr lang="en-US" sz="1100" dirty="0">
+                <a:solidFill>
+                  <a:srgbClr val="1F2A30"/>
+                </a:solidFill>
+                <a:latin typeface="Courier New" pitchFamily="34" charset="0"/>
+                <a:ea typeface="Courier New" pitchFamily="34" charset="-122"/>
+                <a:cs typeface="Courier New" pitchFamily="34" charset="-120"/>
+              </a:rPr>
+              <a:t>IMP0001</a:t>
+            </a:r>
+            <a:endParaRPr lang="en-US" sz="1100" dirty="0"/>
+          </a:p>
+        </p:txBody>
+      </p:sp>
+      <p:sp>
+        <p:nvSpPr>
+          <p:cNvPr id="27" name="Shape 25"/>
+          <p:cNvSpPr/>
+          <p:nvPr/>
+        </p:nvSpPr>
+        <p:spPr>
+          <a:xfrm>
+            <a:off x="1920240" y="2532888"/>
+            <a:ext cx="960120" cy="420624"/>
+          </a:xfrm>
+          <a:prstGeom prst="rect">
+            <a:avLst/>
+          </a:prstGeom>
+          <a:solidFill>
+            <a:srgbClr val="FBE3B8"/>
+          </a:solidFill>
+          <a:ln w="9525">
+            <a:solidFill>
+              <a:srgbClr val="C9D2D6"/>
+            </a:solidFill>
+            <a:prstDash val="solid"/>
+          </a:ln>
+        </p:spPr>
+      </p:sp>
+      <p:sp>
+        <p:nvSpPr>
+          <p:cNvPr id="28" name="Text 26"/>
+          <p:cNvSpPr txBox="1"/>
+          <p:nvPr/>
+        </p:nvSpPr>
+        <p:spPr>
+          <a:xfrm>
+            <a:off x="1920240" y="2532888"/>
+            <a:ext cx="960120" cy="420624"/>
+          </a:xfrm>
+          <a:prstGeom prst="rect">
+            <a:avLst/>
+          </a:prstGeom>
+          <a:noFill/>
+          <a:ln/>
+        </p:spPr>
+        <p:txBody>
+          <a:bodyPr wrap="square" lIns="0" tIns="0" rIns="0" bIns="0" rtlCol="0" anchor="ctr"/>
+          <a:lstStyle/>
+          <a:p>
+            <a:pPr algn="ctr" indent="0" marL="0">
+              <a:buNone/>
+            </a:pPr>
+            <a:r>
+              <a:rPr lang="en-US" sz="1100" dirty="0">
+                <a:solidFill>
+                  <a:srgbClr val="1F2A30"/>
+                </a:solidFill>
+                <a:latin typeface="Courier New" pitchFamily="34" charset="0"/>
+                <a:ea typeface="Courier New" pitchFamily="34" charset="-122"/>
+                <a:cs typeface="Courier New" pitchFamily="34" charset="-120"/>
+              </a:rPr>
+              <a:t>2019</a:t>
+            </a:r>
+            <a:endParaRPr lang="en-US" sz="1100" dirty="0"/>
+          </a:p>
+        </p:txBody>
+      </p:sp>
+      <p:sp>
+        <p:nvSpPr>
+          <p:cNvPr id="29" name="Shape 27"/>
+          <p:cNvSpPr/>
+          <p:nvPr/>
+        </p:nvSpPr>
+        <p:spPr>
+          <a:xfrm>
+            <a:off x="2880360" y="2532888"/>
+            <a:ext cx="960120" cy="420624"/>
+          </a:xfrm>
+          <a:prstGeom prst="rect">
+            <a:avLst/>
+          </a:prstGeom>
+          <a:solidFill>
+            <a:srgbClr val="FBE3B8"/>
+          </a:solidFill>
+          <a:ln w="9525">
+            <a:solidFill>
+              <a:srgbClr val="C9D2D6"/>
+            </a:solidFill>
+            <a:prstDash val="solid"/>
+          </a:ln>
+        </p:spPr>
+      </p:sp>
+      <p:sp>
+        <p:nvSpPr>
+          <p:cNvPr id="30" name="Text 28"/>
+          <p:cNvSpPr txBox="1"/>
+          <p:nvPr/>
+        </p:nvSpPr>
+        <p:spPr>
+          <a:xfrm>
+            <a:off x="2880360" y="2532888"/>
+            <a:ext cx="960120" cy="420624"/>
+          </a:xfrm>
+          <a:prstGeom prst="rect">
+            <a:avLst/>
+          </a:prstGeom>
+          <a:noFill/>
+          <a:ln/>
+        </p:spPr>
+        <p:txBody>
+          <a:bodyPr wrap="square" lIns="0" tIns="0" rIns="0" bIns="0" rtlCol="0" anchor="ctr"/>
+          <a:lstStyle/>
+          <a:p>
+            <a:pPr algn="ctr" indent="0" marL="0">
+              <a:buNone/>
+            </a:pPr>
+            <a:r>
+              <a:rPr lang="en-US" sz="1100" dirty="0">
+                <a:solidFill>
+                  <a:srgbClr val="1F2A30"/>
+                </a:solidFill>
+                <a:latin typeface="Courier New" pitchFamily="34" charset="0"/>
+                <a:ea typeface="Courier New" pitchFamily="34" charset="-122"/>
+                <a:cs typeface="Courier New" pitchFamily="34" charset="-120"/>
+              </a:rPr>
+              <a:t>10</a:t>
+            </a:r>
+            <a:endParaRPr lang="en-US" sz="1100" dirty="0"/>
+          </a:p>
+        </p:txBody>
+      </p:sp>
+      <p:sp>
+        <p:nvSpPr>
+          <p:cNvPr id="31" name="Shape 29"/>
+          <p:cNvSpPr/>
+          <p:nvPr/>
+        </p:nvSpPr>
+        <p:spPr>
+          <a:xfrm>
+            <a:off x="3840480" y="2532888"/>
+            <a:ext cx="960120" cy="420624"/>
+          </a:xfrm>
+          <a:prstGeom prst="rect">
+            <a:avLst/>
+          </a:prstGeom>
+          <a:solidFill>
+            <a:srgbClr val="FFFFFF"/>
+          </a:solidFill>
+          <a:ln w="9525">
+            <a:solidFill>
+              <a:srgbClr val="C9D2D6"/>
+            </a:solidFill>
+            <a:prstDash val="solid"/>
+          </a:ln>
+        </p:spPr>
+      </p:sp>
+      <p:sp>
+        <p:nvSpPr>
+          <p:cNvPr id="32" name="Text 30"/>
+          <p:cNvSpPr txBox="1"/>
+          <p:nvPr/>
+        </p:nvSpPr>
+        <p:spPr>
+          <a:xfrm>
+            <a:off x="3840480" y="2532888"/>
+            <a:ext cx="960120" cy="420624"/>
+          </a:xfrm>
+          <a:prstGeom prst="rect">
+            <a:avLst/>
+          </a:prstGeom>
+          <a:noFill/>
+          <a:ln/>
+        </p:spPr>
+        <p:txBody>
+          <a:bodyPr wrap="square" lIns="0" tIns="0" rIns="0" bIns="0" rtlCol="0" anchor="ctr"/>
+          <a:lstStyle/>
+          <a:p>
+            <a:pPr algn="ctr" indent="0" marL="0">
+              <a:buNone/>
+            </a:pPr>
+            <a:r>
+              <a:rPr lang="en-US" sz="1100" dirty="0">
+                <a:solidFill>
+                  <a:srgbClr val="1F2A30"/>
+                </a:solidFill>
+                <a:latin typeface="Courier New" pitchFamily="34" charset="0"/>
+                <a:ea typeface="Courier New" pitchFamily="34" charset="-122"/>
+                <a:cs typeface="Courier New" pitchFamily="34" charset="-120"/>
+              </a:rPr>
+              <a:t>Emilia-R.</a:t>
+            </a:r>
+            <a:endParaRPr lang="en-US" sz="1100" dirty="0"/>
+          </a:p>
+        </p:txBody>
+      </p:sp>
+      <p:sp>
+        <p:nvSpPr>
+          <p:cNvPr id="33" name="Shape 31"/>
+          <p:cNvSpPr/>
+          <p:nvPr/>
+        </p:nvSpPr>
+        <p:spPr>
+          <a:xfrm>
+            <a:off x="548640" y="2953512"/>
+            <a:ext cx="411480" cy="420624"/>
+          </a:xfrm>
+          <a:prstGeom prst="rect">
+            <a:avLst/>
+          </a:prstGeom>
+          <a:solidFill>
+            <a:srgbClr val="DDE3E6"/>
+          </a:solidFill>
+          <a:ln w="9525">
+            <a:solidFill>
+              <a:srgbClr val="C9D2D6"/>
+            </a:solidFill>
+            <a:prstDash val="solid"/>
+          </a:ln>
+        </p:spPr>
+      </p:sp>
+      <p:sp>
+        <p:nvSpPr>
+          <p:cNvPr id="34" name="Text 32"/>
+          <p:cNvSpPr txBox="1"/>
+          <p:nvPr/>
+        </p:nvSpPr>
+        <p:spPr>
+          <a:xfrm>
+            <a:off x="548640" y="2953512"/>
+            <a:ext cx="411480" cy="420624"/>
+          </a:xfrm>
+          <a:prstGeom prst="rect">
+            <a:avLst/>
+          </a:prstGeom>
+          <a:noFill/>
+          <a:ln/>
+        </p:spPr>
+        <p:txBody>
+          <a:bodyPr wrap="square" lIns="0" tIns="0" rIns="0" bIns="0" rtlCol="0" anchor="ctr"/>
+          <a:lstStyle/>
+          <a:p>
+            <a:pPr algn="ctr" indent="0" marL="0">
+              <a:buNone/>
+            </a:pPr>
+            <a:r>
+              <a:rPr lang="en-US" sz="1200" b="1" dirty="0">
+                <a:solidFill>
+                  <a:srgbClr val="1F2A30"/>
+                </a:solidFill>
+              </a:rPr>
+              <a:t>3</a:t>
+            </a:r>
+            <a:endParaRPr lang="en-US" sz="1200" dirty="0"/>
+          </a:p>
+        </p:txBody>
+      </p:sp>
+      <p:sp>
+        <p:nvSpPr>
+          <p:cNvPr id="35" name="Shape 33"/>
+          <p:cNvSpPr/>
+          <p:nvPr/>
+        </p:nvSpPr>
+        <p:spPr>
+          <a:xfrm>
+            <a:off x="960120" y="2953512"/>
+            <a:ext cx="960120" cy="420624"/>
+          </a:xfrm>
+          <a:prstGeom prst="rect">
+            <a:avLst/>
+          </a:prstGeom>
+          <a:solidFill>
+            <a:srgbClr val="FBE3B8"/>
+          </a:solidFill>
+          <a:ln w="9525">
+            <a:solidFill>
+              <a:srgbClr val="C9D2D6"/>
+            </a:solidFill>
+            <a:prstDash val="solid"/>
+          </a:ln>
+        </p:spPr>
+      </p:sp>
+      <p:sp>
+        <p:nvSpPr>
+          <p:cNvPr id="36" name="Text 34"/>
+          <p:cNvSpPr txBox="1"/>
+          <p:nvPr/>
+        </p:nvSpPr>
+        <p:spPr>
+          <a:xfrm>
+            <a:off x="960120" y="2953512"/>
+            <a:ext cx="960120" cy="420624"/>
+          </a:xfrm>
+          <a:prstGeom prst="rect">
+            <a:avLst/>
+          </a:prstGeom>
+          <a:noFill/>
+          <a:ln/>
+        </p:spPr>
+        <p:txBody>
+          <a:bodyPr wrap="square" lIns="0" tIns="0" rIns="0" bIns="0" rtlCol="0" anchor="ctr"/>
+          <a:lstStyle/>
+          <a:p>
+            <a:pPr algn="ctr" indent="0" marL="0">
+              <a:buNone/>
+            </a:pPr>
+            <a:r>
+              <a:rPr lang="en-US" sz="1100" dirty="0">
+                <a:solidFill>
+                  <a:srgbClr val="1F2A30"/>
+                </a:solidFill>
+                <a:latin typeface="Courier New" pitchFamily="34" charset="0"/>
+                <a:ea typeface="Courier New" pitchFamily="34" charset="-122"/>
+                <a:cs typeface="Courier New" pitchFamily="34" charset="-120"/>
+              </a:rPr>
+              <a:t>IMP0001</a:t>
+            </a:r>
+            <a:endParaRPr lang="en-US" sz="1100" dirty="0"/>
+          </a:p>
+        </p:txBody>
+      </p:sp>
+      <p:sp>
+        <p:nvSpPr>
+          <p:cNvPr id="37" name="Shape 35"/>
+          <p:cNvSpPr/>
+          <p:nvPr/>
+        </p:nvSpPr>
+        <p:spPr>
+          <a:xfrm>
+            <a:off x="1920240" y="2953512"/>
+            <a:ext cx="960120" cy="420624"/>
+          </a:xfrm>
+          <a:prstGeom prst="rect">
+            <a:avLst/>
+          </a:prstGeom>
+          <a:solidFill>
+            <a:srgbClr val="FBE3B8"/>
+          </a:solidFill>
+          <a:ln w="9525">
+            <a:solidFill>
+              <a:srgbClr val="C9D2D6"/>
+            </a:solidFill>
+            <a:prstDash val="solid"/>
+          </a:ln>
+        </p:spPr>
+      </p:sp>
+      <p:sp>
+        <p:nvSpPr>
+          <p:cNvPr id="38" name="Text 36"/>
+          <p:cNvSpPr txBox="1"/>
+          <p:nvPr/>
+        </p:nvSpPr>
+        <p:spPr>
+          <a:xfrm>
+            <a:off x="1920240" y="2953512"/>
+            <a:ext cx="960120" cy="420624"/>
+          </a:xfrm>
+          <a:prstGeom prst="rect">
+            <a:avLst/>
+          </a:prstGeom>
+          <a:noFill/>
+          <a:ln/>
+        </p:spPr>
+        <p:txBody>
+          <a:bodyPr wrap="square" lIns="0" tIns="0" rIns="0" bIns="0" rtlCol="0" anchor="ctr"/>
+          <a:lstStyle/>
+          <a:p>
+            <a:pPr algn="ctr" indent="0" marL="0">
+              <a:buNone/>
+            </a:pPr>
+            <a:r>
+              <a:rPr lang="en-US" sz="1100" dirty="0">
+                <a:solidFill>
+                  <a:srgbClr val="1F2A30"/>
+                </a:solidFill>
+                <a:latin typeface="Courier New" pitchFamily="34" charset="0"/>
+                <a:ea typeface="Courier New" pitchFamily="34" charset="-122"/>
+                <a:cs typeface="Courier New" pitchFamily="34" charset="-120"/>
+              </a:rPr>
+              <a:t>2020</a:t>
+            </a:r>
+            <a:endParaRPr lang="en-US" sz="1100" dirty="0"/>
+          </a:p>
+        </p:txBody>
+      </p:sp>
+      <p:sp>
+        <p:nvSpPr>
+          <p:cNvPr id="39" name="Shape 37"/>
+          <p:cNvSpPr/>
+          <p:nvPr/>
+        </p:nvSpPr>
+        <p:spPr>
+          <a:xfrm>
+            <a:off x="2880360" y="2953512"/>
+            <a:ext cx="960120" cy="420624"/>
+          </a:xfrm>
+          <a:prstGeom prst="rect">
+            <a:avLst/>
+          </a:prstGeom>
+          <a:solidFill>
+            <a:srgbClr val="FBE3B8"/>
+          </a:solidFill>
+          <a:ln w="9525">
+            <a:solidFill>
+              <a:srgbClr val="C9D2D6"/>
+            </a:solidFill>
+            <a:prstDash val="solid"/>
+          </a:ln>
+        </p:spPr>
+      </p:sp>
+      <p:sp>
+        <p:nvSpPr>
+          <p:cNvPr id="40" name="Text 38"/>
+          <p:cNvSpPr txBox="1"/>
+          <p:nvPr/>
+        </p:nvSpPr>
+        <p:spPr>
+          <a:xfrm>
+            <a:off x="2880360" y="2953512"/>
+            <a:ext cx="960120" cy="420624"/>
+          </a:xfrm>
+          <a:prstGeom prst="rect">
+            <a:avLst/>
+          </a:prstGeom>
+          <a:noFill/>
+          <a:ln/>
+        </p:spPr>
+        <p:txBody>
+          <a:bodyPr wrap="square" lIns="0" tIns="0" rIns="0" bIns="0" rtlCol="0" anchor="ctr"/>
+          <a:lstStyle/>
+          <a:p>
+            <a:pPr algn="ctr" indent="0" marL="0">
+              <a:buNone/>
+            </a:pPr>
+            <a:r>
+              <a:rPr lang="en-US" sz="1100" dirty="0">
+                <a:solidFill>
+                  <a:srgbClr val="1F2A30"/>
+                </a:solidFill>
+                <a:latin typeface="Courier New" pitchFamily="34" charset="0"/>
+                <a:ea typeface="Courier New" pitchFamily="34" charset="-122"/>
+                <a:cs typeface="Courier New" pitchFamily="34" charset="-120"/>
+              </a:rPr>
+              <a:t>10</a:t>
+            </a:r>
+            <a:endParaRPr lang="en-US" sz="1100" dirty="0"/>
+          </a:p>
+        </p:txBody>
+      </p:sp>
+      <p:sp>
+        <p:nvSpPr>
+          <p:cNvPr id="41" name="Shape 39"/>
+          <p:cNvSpPr/>
+          <p:nvPr/>
+        </p:nvSpPr>
+        <p:spPr>
+          <a:xfrm>
+            <a:off x="3840480" y="2953512"/>
+            <a:ext cx="960120" cy="420624"/>
+          </a:xfrm>
+          <a:prstGeom prst="rect">
+            <a:avLst/>
+          </a:prstGeom>
+          <a:solidFill>
+            <a:srgbClr val="FFFFFF"/>
+          </a:solidFill>
+          <a:ln w="9525">
+            <a:solidFill>
+              <a:srgbClr val="C9D2D6"/>
+            </a:solidFill>
+            <a:prstDash val="solid"/>
+          </a:ln>
+        </p:spPr>
+      </p:sp>
+      <p:sp>
+        <p:nvSpPr>
+          <p:cNvPr id="42" name="Text 40"/>
+          <p:cNvSpPr txBox="1"/>
+          <p:nvPr/>
+        </p:nvSpPr>
+        <p:spPr>
+          <a:xfrm>
+            <a:off x="3840480" y="2953512"/>
+            <a:ext cx="960120" cy="420624"/>
+          </a:xfrm>
+          <a:prstGeom prst="rect">
+            <a:avLst/>
+          </a:prstGeom>
+          <a:noFill/>
+          <a:ln/>
+        </p:spPr>
+        <p:txBody>
+          <a:bodyPr wrap="square" lIns="0" tIns="0" rIns="0" bIns="0" rtlCol="0" anchor="ctr"/>
+          <a:lstStyle/>
+          <a:p>
+            <a:pPr algn="ctr" indent="0" marL="0">
+              <a:buNone/>
+            </a:pPr>
+            <a:r>
+              <a:rPr lang="en-US" sz="1100" dirty="0">
+                <a:solidFill>
+                  <a:srgbClr val="1F2A30"/>
+                </a:solidFill>
+                <a:latin typeface="Courier New" pitchFamily="34" charset="0"/>
+                <a:ea typeface="Courier New" pitchFamily="34" charset="-122"/>
+                <a:cs typeface="Courier New" pitchFamily="34" charset="-120"/>
+              </a:rPr>
+              <a:t>Emilia-R.</a:t>
+            </a:r>
+            <a:endParaRPr lang="en-US" sz="1100" dirty="0"/>
+          </a:p>
+        </p:txBody>
+      </p:sp>
+      <p:sp>
+        <p:nvSpPr>
+          <p:cNvPr id="43" name="Shape 41"/>
+          <p:cNvSpPr/>
+          <p:nvPr/>
+        </p:nvSpPr>
+        <p:spPr>
+          <a:xfrm>
+            <a:off x="548640" y="3374136"/>
+            <a:ext cx="411480" cy="420624"/>
+          </a:xfrm>
+          <a:prstGeom prst="rect">
+            <a:avLst/>
+          </a:prstGeom>
+          <a:solidFill>
+            <a:srgbClr val="DDE3E6"/>
+          </a:solidFill>
+          <a:ln w="9525">
+            <a:solidFill>
+              <a:srgbClr val="C9D2D6"/>
+            </a:solidFill>
+            <a:prstDash val="solid"/>
+          </a:ln>
+        </p:spPr>
+      </p:sp>
+      <p:sp>
+        <p:nvSpPr>
+          <p:cNvPr id="44" name="Text 42"/>
+          <p:cNvSpPr txBox="1"/>
+          <p:nvPr/>
+        </p:nvSpPr>
+        <p:spPr>
+          <a:xfrm>
+            <a:off x="548640" y="3374136"/>
+            <a:ext cx="411480" cy="420624"/>
+          </a:xfrm>
+          <a:prstGeom prst="rect">
+            <a:avLst/>
+          </a:prstGeom>
+          <a:noFill/>
+          <a:ln/>
+        </p:spPr>
+        <p:txBody>
+          <a:bodyPr wrap="square" lIns="0" tIns="0" rIns="0" bIns="0" rtlCol="0" anchor="ctr"/>
+          <a:lstStyle/>
+          <a:p>
+            <a:pPr algn="ctr" indent="0" marL="0">
+              <a:buNone/>
+            </a:pPr>
+            <a:r>
+              <a:rPr lang="en-US" sz="1200" b="1" dirty="0">
+                <a:solidFill>
+                  <a:srgbClr val="1F2A30"/>
+                </a:solidFill>
+              </a:rPr>
+              <a:t>4</a:t>
+            </a:r>
+            <a:endParaRPr lang="en-US" sz="1200" dirty="0"/>
+          </a:p>
+        </p:txBody>
+      </p:sp>
+      <p:sp>
+        <p:nvSpPr>
+          <p:cNvPr id="45" name="Shape 43"/>
+          <p:cNvSpPr/>
+          <p:nvPr/>
+        </p:nvSpPr>
+        <p:spPr>
+          <a:xfrm>
+            <a:off x="960120" y="3374136"/>
+            <a:ext cx="960120" cy="420624"/>
+          </a:xfrm>
+          <a:prstGeom prst="rect">
+            <a:avLst/>
+          </a:prstGeom>
+          <a:solidFill>
+            <a:srgbClr val="FBE3B8"/>
+          </a:solidFill>
+          <a:ln w="9525">
+            <a:solidFill>
+              <a:srgbClr val="C9D2D6"/>
+            </a:solidFill>
+            <a:prstDash val="solid"/>
+          </a:ln>
+        </p:spPr>
+      </p:sp>
+      <p:sp>
+        <p:nvSpPr>
+          <p:cNvPr id="46" name="Text 44"/>
+          <p:cNvSpPr txBox="1"/>
+          <p:nvPr/>
+        </p:nvSpPr>
+        <p:spPr>
+          <a:xfrm>
+            <a:off x="960120" y="3374136"/>
+            <a:ext cx="960120" cy="420624"/>
+          </a:xfrm>
+          <a:prstGeom prst="rect">
+            <a:avLst/>
+          </a:prstGeom>
+          <a:noFill/>
+          <a:ln/>
+        </p:spPr>
+        <p:txBody>
+          <a:bodyPr wrap="square" lIns="0" tIns="0" rIns="0" bIns="0" rtlCol="0" anchor="ctr"/>
+          <a:lstStyle/>
+          <a:p>
+            <a:pPr algn="ctr" indent="0" marL="0">
+              <a:buNone/>
+            </a:pPr>
+            <a:r>
+              <a:rPr lang="en-US" sz="1100" dirty="0">
+                <a:solidFill>
+                  <a:srgbClr val="1F2A30"/>
+                </a:solidFill>
+                <a:latin typeface="Courier New" pitchFamily="34" charset="0"/>
+                <a:ea typeface="Courier New" pitchFamily="34" charset="-122"/>
+                <a:cs typeface="Courier New" pitchFamily="34" charset="-120"/>
+              </a:rPr>
+              <a:t>IMP0001</a:t>
+            </a:r>
+            <a:endParaRPr lang="en-US" sz="1100" dirty="0"/>
+          </a:p>
+        </p:txBody>
+      </p:sp>
+      <p:sp>
+        <p:nvSpPr>
+          <p:cNvPr id="47" name="Shape 45"/>
+          <p:cNvSpPr/>
+          <p:nvPr/>
+        </p:nvSpPr>
+        <p:spPr>
+          <a:xfrm>
+            <a:off x="1920240" y="3374136"/>
+            <a:ext cx="960120" cy="420624"/>
+          </a:xfrm>
+          <a:prstGeom prst="rect">
+            <a:avLst/>
+          </a:prstGeom>
+          <a:solidFill>
+            <a:srgbClr val="FBE3B8"/>
+          </a:solidFill>
+          <a:ln w="9525">
+            <a:solidFill>
+              <a:srgbClr val="C9D2D6"/>
+            </a:solidFill>
+            <a:prstDash val="solid"/>
+          </a:ln>
+        </p:spPr>
+      </p:sp>
+      <p:sp>
+        <p:nvSpPr>
+          <p:cNvPr id="48" name="Text 46"/>
+          <p:cNvSpPr txBox="1"/>
+          <p:nvPr/>
+        </p:nvSpPr>
+        <p:spPr>
+          <a:xfrm>
+            <a:off x="1920240" y="3374136"/>
+            <a:ext cx="960120" cy="420624"/>
+          </a:xfrm>
+          <a:prstGeom prst="rect">
+            <a:avLst/>
+          </a:prstGeom>
+          <a:noFill/>
+          <a:ln/>
+        </p:spPr>
+        <p:txBody>
+          <a:bodyPr wrap="square" lIns="0" tIns="0" rIns="0" bIns="0" rtlCol="0" anchor="ctr"/>
+          <a:lstStyle/>
+          <a:p>
+            <a:pPr algn="ctr" indent="0" marL="0">
+              <a:buNone/>
+            </a:pPr>
+            <a:r>
+              <a:rPr lang="en-US" sz="1100" dirty="0">
+                <a:solidFill>
+                  <a:srgbClr val="1F2A30"/>
+                </a:solidFill>
+                <a:latin typeface="Courier New" pitchFamily="34" charset="0"/>
+                <a:ea typeface="Courier New" pitchFamily="34" charset="-122"/>
+                <a:cs typeface="Courier New" pitchFamily="34" charset="-120"/>
+              </a:rPr>
+              <a:t>2021</a:t>
+            </a:r>
+            <a:endParaRPr lang="en-US" sz="1100" dirty="0"/>
+          </a:p>
+        </p:txBody>
+      </p:sp>
+      <p:sp>
+        <p:nvSpPr>
+          <p:cNvPr id="49" name="Shape 47"/>
+          <p:cNvSpPr/>
+          <p:nvPr/>
+        </p:nvSpPr>
+        <p:spPr>
+          <a:xfrm>
+            <a:off x="2880360" y="3374136"/>
+            <a:ext cx="960120" cy="420624"/>
+          </a:xfrm>
+          <a:prstGeom prst="rect">
+            <a:avLst/>
+          </a:prstGeom>
+          <a:solidFill>
+            <a:srgbClr val="FBE3B8"/>
+          </a:solidFill>
+          <a:ln w="9525">
+            <a:solidFill>
+              <a:srgbClr val="C9D2D6"/>
+            </a:solidFill>
+            <a:prstDash val="solid"/>
+          </a:ln>
+        </p:spPr>
+      </p:sp>
+      <p:sp>
+        <p:nvSpPr>
+          <p:cNvPr id="50" name="Text 48"/>
+          <p:cNvSpPr txBox="1"/>
+          <p:nvPr/>
+        </p:nvSpPr>
+        <p:spPr>
+          <a:xfrm>
+            <a:off x="2880360" y="3374136"/>
+            <a:ext cx="960120" cy="420624"/>
+          </a:xfrm>
+          <a:prstGeom prst="rect">
+            <a:avLst/>
+          </a:prstGeom>
+          <a:noFill/>
+          <a:ln/>
+        </p:spPr>
+        <p:txBody>
+          <a:bodyPr wrap="square" lIns="0" tIns="0" rIns="0" bIns="0" rtlCol="0" anchor="ctr"/>
+          <a:lstStyle/>
+          <a:p>
+            <a:pPr algn="ctr" indent="0" marL="0">
+              <a:buNone/>
+            </a:pPr>
+            <a:r>
+              <a:rPr lang="en-US" sz="1100" dirty="0">
+                <a:solidFill>
+                  <a:srgbClr val="1F2A30"/>
+                </a:solidFill>
+                <a:latin typeface="Courier New" pitchFamily="34" charset="0"/>
+                <a:ea typeface="Courier New" pitchFamily="34" charset="-122"/>
+                <a:cs typeface="Courier New" pitchFamily="34" charset="-120"/>
+              </a:rPr>
+              <a:t>11</a:t>
+            </a:r>
+            <a:endParaRPr lang="en-US" sz="1100" dirty="0"/>
+          </a:p>
+        </p:txBody>
+      </p:sp>
+      <p:sp>
+        <p:nvSpPr>
+          <p:cNvPr id="51" name="Shape 49"/>
+          <p:cNvSpPr/>
+          <p:nvPr/>
+        </p:nvSpPr>
+        <p:spPr>
+          <a:xfrm>
+            <a:off x="3840480" y="3374136"/>
+            <a:ext cx="960120" cy="420624"/>
+          </a:xfrm>
+          <a:prstGeom prst="rect">
+            <a:avLst/>
+          </a:prstGeom>
+          <a:solidFill>
+            <a:srgbClr val="FFFFFF"/>
+          </a:solidFill>
+          <a:ln w="9525">
+            <a:solidFill>
+              <a:srgbClr val="C9D2D6"/>
+            </a:solidFill>
+            <a:prstDash val="solid"/>
+          </a:ln>
+        </p:spPr>
+      </p:sp>
+      <p:sp>
+        <p:nvSpPr>
+          <p:cNvPr id="52" name="Text 50"/>
+          <p:cNvSpPr txBox="1"/>
+          <p:nvPr/>
+        </p:nvSpPr>
+        <p:spPr>
+          <a:xfrm>
+            <a:off x="3840480" y="3374136"/>
+            <a:ext cx="960120" cy="420624"/>
+          </a:xfrm>
+          <a:prstGeom prst="rect">
+            <a:avLst/>
+          </a:prstGeom>
+          <a:noFill/>
+          <a:ln/>
+        </p:spPr>
+        <p:txBody>
+          <a:bodyPr wrap="square" lIns="0" tIns="0" rIns="0" bIns="0" rtlCol="0" anchor="ctr"/>
+          <a:lstStyle/>
+          <a:p>
+            <a:pPr algn="ctr" indent="0" marL="0">
+              <a:buNone/>
+            </a:pPr>
+            <a:r>
+              <a:rPr lang="en-US" sz="1100" dirty="0">
+                <a:solidFill>
+                  <a:srgbClr val="1F2A30"/>
+                </a:solidFill>
+                <a:latin typeface="Courier New" pitchFamily="34" charset="0"/>
+                <a:ea typeface="Courier New" pitchFamily="34" charset="-122"/>
+                <a:cs typeface="Courier New" pitchFamily="34" charset="-120"/>
+              </a:rPr>
+              <a:t>Emilia-R.</a:t>
+            </a:r>
+            <a:endParaRPr lang="en-US" sz="1100" dirty="0"/>
+          </a:p>
+        </p:txBody>
+      </p:sp>
+      <p:sp>
+        <p:nvSpPr>
+          <p:cNvPr id="53" name="Shape 51"/>
+          <p:cNvSpPr/>
+          <p:nvPr/>
+        </p:nvSpPr>
+        <p:spPr>
+          <a:xfrm>
+            <a:off x="548640" y="3794760"/>
+            <a:ext cx="411480" cy="420624"/>
+          </a:xfrm>
+          <a:prstGeom prst="rect">
+            <a:avLst/>
+          </a:prstGeom>
+          <a:solidFill>
+            <a:srgbClr val="DDE3E6"/>
+          </a:solidFill>
+          <a:ln w="9525">
+            <a:solidFill>
+              <a:srgbClr val="C9D2D6"/>
+            </a:solidFill>
+            <a:prstDash val="solid"/>
+          </a:ln>
+        </p:spPr>
+      </p:sp>
+      <p:sp>
+        <p:nvSpPr>
+          <p:cNvPr id="54" name="Text 52"/>
+          <p:cNvSpPr txBox="1"/>
+          <p:nvPr/>
+        </p:nvSpPr>
+        <p:spPr>
+          <a:xfrm>
+            <a:off x="548640" y="3794760"/>
+            <a:ext cx="411480" cy="420624"/>
+          </a:xfrm>
+          <a:prstGeom prst="rect">
+            <a:avLst/>
+          </a:prstGeom>
+          <a:noFill/>
+          <a:ln/>
+        </p:spPr>
+        <p:txBody>
+          <a:bodyPr wrap="square" lIns="0" tIns="0" rIns="0" bIns="0" rtlCol="0" anchor="ctr"/>
+          <a:lstStyle/>
+          <a:p>
+            <a:pPr algn="ctr" indent="0" marL="0">
+              <a:buNone/>
+            </a:pPr>
+            <a:r>
+              <a:rPr lang="en-US" sz="1200" b="1" dirty="0">
+                <a:solidFill>
+                  <a:srgbClr val="1F2A30"/>
+                </a:solidFill>
+              </a:rPr>
+              <a:t>5</a:t>
+            </a:r>
+            <a:endParaRPr lang="en-US" sz="1200" dirty="0"/>
+          </a:p>
+        </p:txBody>
+      </p:sp>
+      <p:sp>
+        <p:nvSpPr>
+          <p:cNvPr id="55" name="Shape 53"/>
+          <p:cNvSpPr/>
+          <p:nvPr/>
+        </p:nvSpPr>
+        <p:spPr>
+          <a:xfrm>
+            <a:off x="960120" y="3794760"/>
+            <a:ext cx="960120" cy="420624"/>
+          </a:xfrm>
+          <a:prstGeom prst="rect">
+            <a:avLst/>
+          </a:prstGeom>
+          <a:solidFill>
+            <a:srgbClr val="FBE3B8"/>
+          </a:solidFill>
+          <a:ln w="9525">
+            <a:solidFill>
+              <a:srgbClr val="C9D2D6"/>
+            </a:solidFill>
+            <a:prstDash val="solid"/>
+          </a:ln>
+        </p:spPr>
+      </p:sp>
+      <p:sp>
+        <p:nvSpPr>
+          <p:cNvPr id="56" name="Text 54"/>
+          <p:cNvSpPr txBox="1"/>
+          <p:nvPr/>
+        </p:nvSpPr>
+        <p:spPr>
+          <a:xfrm>
+            <a:off x="960120" y="3794760"/>
+            <a:ext cx="960120" cy="420624"/>
+          </a:xfrm>
+          <a:prstGeom prst="rect">
+            <a:avLst/>
+          </a:prstGeom>
+          <a:noFill/>
+          <a:ln/>
+        </p:spPr>
+        <p:txBody>
+          <a:bodyPr wrap="square" lIns="0" tIns="0" rIns="0" bIns="0" rtlCol="0" anchor="ctr"/>
+          <a:lstStyle/>
+          <a:p>
+            <a:pPr algn="ctr" indent="0" marL="0">
+              <a:buNone/>
+            </a:pPr>
+            <a:r>
+              <a:rPr lang="en-US" sz="1100" dirty="0">
+                <a:solidFill>
+                  <a:srgbClr val="1F2A30"/>
+                </a:solidFill>
+                <a:latin typeface="Courier New" pitchFamily="34" charset="0"/>
+                <a:ea typeface="Courier New" pitchFamily="34" charset="-122"/>
+                <a:cs typeface="Courier New" pitchFamily="34" charset="-120"/>
+              </a:rPr>
+              <a:t>IMP0001</a:t>
+            </a:r>
+            <a:endParaRPr lang="en-US" sz="1100" dirty="0"/>
+          </a:p>
+        </p:txBody>
+      </p:sp>
+      <p:sp>
+        <p:nvSpPr>
+          <p:cNvPr id="57" name="Shape 55"/>
+          <p:cNvSpPr/>
+          <p:nvPr/>
+        </p:nvSpPr>
+        <p:spPr>
+          <a:xfrm>
+            <a:off x="1920240" y="3794760"/>
+            <a:ext cx="960120" cy="420624"/>
+          </a:xfrm>
+          <a:prstGeom prst="rect">
+            <a:avLst/>
+          </a:prstGeom>
+          <a:solidFill>
+            <a:srgbClr val="FBE3B8"/>
+          </a:solidFill>
+          <a:ln w="9525">
+            <a:solidFill>
+              <a:srgbClr val="C9D2D6"/>
+            </a:solidFill>
+            <a:prstDash val="solid"/>
+          </a:ln>
+        </p:spPr>
+      </p:sp>
+      <p:sp>
+        <p:nvSpPr>
+          <p:cNvPr id="58" name="Text 56"/>
+          <p:cNvSpPr txBox="1"/>
+          <p:nvPr/>
+        </p:nvSpPr>
+        <p:spPr>
+          <a:xfrm>
+            <a:off x="1920240" y="3794760"/>
+            <a:ext cx="960120" cy="420624"/>
+          </a:xfrm>
+          <a:prstGeom prst="rect">
+            <a:avLst/>
+          </a:prstGeom>
+          <a:noFill/>
+          <a:ln/>
+        </p:spPr>
+        <p:txBody>
+          <a:bodyPr wrap="square" lIns="0" tIns="0" rIns="0" bIns="0" rtlCol="0" anchor="ctr"/>
+          <a:lstStyle/>
+          <a:p>
+            <a:pPr algn="ctr" indent="0" marL="0">
+              <a:buNone/>
+            </a:pPr>
+            <a:r>
+              <a:rPr lang="en-US" sz="1100" dirty="0">
+                <a:solidFill>
+                  <a:srgbClr val="1F2A30"/>
+                </a:solidFill>
+                <a:latin typeface="Courier New" pitchFamily="34" charset="0"/>
+                <a:ea typeface="Courier New" pitchFamily="34" charset="-122"/>
+                <a:cs typeface="Courier New" pitchFamily="34" charset="-120"/>
+              </a:rPr>
+              <a:t>2022</a:t>
+            </a:r>
+            <a:endParaRPr lang="en-US" sz="1100" dirty="0"/>
+          </a:p>
+        </p:txBody>
+      </p:sp>
+      <p:sp>
+        <p:nvSpPr>
+          <p:cNvPr id="59" name="Shape 57"/>
+          <p:cNvSpPr/>
+          <p:nvPr/>
+        </p:nvSpPr>
+        <p:spPr>
+          <a:xfrm>
+            <a:off x="2880360" y="3794760"/>
+            <a:ext cx="960120" cy="420624"/>
+          </a:xfrm>
+          <a:prstGeom prst="rect">
+            <a:avLst/>
+          </a:prstGeom>
+          <a:solidFill>
+            <a:srgbClr val="FBE3B8"/>
+          </a:solidFill>
+          <a:ln w="9525">
+            <a:solidFill>
+              <a:srgbClr val="C9D2D6"/>
+            </a:solidFill>
+            <a:prstDash val="solid"/>
+          </a:ln>
+        </p:spPr>
+      </p:sp>
+      <p:sp>
+        <p:nvSpPr>
+          <p:cNvPr id="60" name="Text 58"/>
+          <p:cNvSpPr txBox="1"/>
+          <p:nvPr/>
+        </p:nvSpPr>
+        <p:spPr>
+          <a:xfrm>
+            <a:off x="2880360" y="3794760"/>
+            <a:ext cx="960120" cy="420624"/>
+          </a:xfrm>
+          <a:prstGeom prst="rect">
+            <a:avLst/>
+          </a:prstGeom>
+          <a:noFill/>
+          <a:ln/>
+        </p:spPr>
+        <p:txBody>
+          <a:bodyPr wrap="square" lIns="0" tIns="0" rIns="0" bIns="0" rtlCol="0" anchor="ctr"/>
+          <a:lstStyle/>
+          <a:p>
+            <a:pPr algn="ctr" indent="0" marL="0">
+              <a:buNone/>
+            </a:pPr>
+            <a:r>
+              <a:rPr lang="en-US" sz="1100" dirty="0">
+                <a:solidFill>
+                  <a:srgbClr val="1F2A30"/>
+                </a:solidFill>
+                <a:latin typeface="Courier New" pitchFamily="34" charset="0"/>
+                <a:ea typeface="Courier New" pitchFamily="34" charset="-122"/>
+                <a:cs typeface="Courier New" pitchFamily="34" charset="-120"/>
+              </a:rPr>
+              <a:t>12</a:t>
+            </a:r>
+            <a:endParaRPr lang="en-US" sz="1100" dirty="0"/>
+          </a:p>
+        </p:txBody>
+      </p:sp>
+      <p:sp>
+        <p:nvSpPr>
+          <p:cNvPr id="61" name="Shape 59"/>
+          <p:cNvSpPr/>
+          <p:nvPr/>
+        </p:nvSpPr>
+        <p:spPr>
+          <a:xfrm>
+            <a:off x="3840480" y="3794760"/>
+            <a:ext cx="960120" cy="420624"/>
+          </a:xfrm>
+          <a:prstGeom prst="rect">
+            <a:avLst/>
+          </a:prstGeom>
+          <a:solidFill>
+            <a:srgbClr val="FFFFFF"/>
+          </a:solidFill>
+          <a:ln w="9525">
+            <a:solidFill>
+              <a:srgbClr val="C9D2D6"/>
+            </a:solidFill>
+            <a:prstDash val="solid"/>
+          </a:ln>
+        </p:spPr>
+      </p:sp>
+      <p:sp>
+        <p:nvSpPr>
+          <p:cNvPr id="62" name="Text 60"/>
+          <p:cNvSpPr txBox="1"/>
+          <p:nvPr/>
+        </p:nvSpPr>
+        <p:spPr>
+          <a:xfrm>
+            <a:off x="3840480" y="3794760"/>
+            <a:ext cx="960120" cy="420624"/>
+          </a:xfrm>
+          <a:prstGeom prst="rect">
+            <a:avLst/>
+          </a:prstGeom>
+          <a:noFill/>
+          <a:ln/>
+        </p:spPr>
+        <p:txBody>
+          <a:bodyPr wrap="square" lIns="0" tIns="0" rIns="0" bIns="0" rtlCol="0" anchor="ctr"/>
+          <a:lstStyle/>
+          <a:p>
+            <a:pPr algn="ctr" indent="0" marL="0">
+              <a:buNone/>
+            </a:pPr>
+            <a:r>
+              <a:rPr lang="en-US" sz="1100" dirty="0">
+                <a:solidFill>
+                  <a:srgbClr val="1F2A30"/>
+                </a:solidFill>
+                <a:latin typeface="Courier New" pitchFamily="34" charset="0"/>
+                <a:ea typeface="Courier New" pitchFamily="34" charset="-122"/>
+                <a:cs typeface="Courier New" pitchFamily="34" charset="-120"/>
+              </a:rPr>
+              <a:t>Emilia-R.</a:t>
+            </a:r>
+            <a:endParaRPr lang="en-US" sz="1100" dirty="0"/>
+          </a:p>
+        </p:txBody>
+      </p:sp>
+      <p:sp>
+        <p:nvSpPr>
+          <p:cNvPr id="63" name="Shape 61"/>
+          <p:cNvSpPr/>
+          <p:nvPr/>
+        </p:nvSpPr>
+        <p:spPr>
+          <a:xfrm>
+            <a:off x="548640" y="4215384"/>
+            <a:ext cx="411480" cy="420624"/>
+          </a:xfrm>
+          <a:prstGeom prst="rect">
+            <a:avLst/>
+          </a:prstGeom>
+          <a:solidFill>
+            <a:srgbClr val="DDE3E6"/>
+          </a:solidFill>
+          <a:ln w="9525">
+            <a:solidFill>
+              <a:srgbClr val="C9D2D6"/>
+            </a:solidFill>
+            <a:prstDash val="solid"/>
+          </a:ln>
+        </p:spPr>
+      </p:sp>
+      <p:sp>
+        <p:nvSpPr>
+          <p:cNvPr id="64" name="Text 62"/>
+          <p:cNvSpPr txBox="1"/>
+          <p:nvPr/>
+        </p:nvSpPr>
+        <p:spPr>
+          <a:xfrm>
+            <a:off x="548640" y="4215384"/>
+            <a:ext cx="411480" cy="420624"/>
+          </a:xfrm>
+          <a:prstGeom prst="rect">
+            <a:avLst/>
+          </a:prstGeom>
+          <a:noFill/>
+          <a:ln/>
+        </p:spPr>
+        <p:txBody>
+          <a:bodyPr wrap="square" lIns="0" tIns="0" rIns="0" bIns="0" rtlCol="0" anchor="ctr"/>
+          <a:lstStyle/>
+          <a:p>
+            <a:pPr algn="ctr" indent="0" marL="0">
+              <a:buNone/>
+            </a:pPr>
+            <a:r>
+              <a:rPr lang="en-US" sz="1200" b="1" dirty="0">
+                <a:solidFill>
+                  <a:srgbClr val="1F2A30"/>
+                </a:solidFill>
+              </a:rPr>
+              <a:t>6</a:t>
+            </a:r>
+            <a:endParaRPr lang="en-US" sz="1200" dirty="0"/>
+          </a:p>
+        </p:txBody>
+      </p:sp>
+      <p:sp>
+        <p:nvSpPr>
+          <p:cNvPr id="65" name="Shape 63"/>
+          <p:cNvSpPr/>
+          <p:nvPr/>
+        </p:nvSpPr>
+        <p:spPr>
+          <a:xfrm>
+            <a:off x="960120" y="4215384"/>
+            <a:ext cx="960120" cy="420624"/>
+          </a:xfrm>
+          <a:prstGeom prst="rect">
+            <a:avLst/>
+          </a:prstGeom>
+          <a:solidFill>
+            <a:srgbClr val="FBE3B8"/>
+          </a:solidFill>
+          <a:ln w="9525">
+            <a:solidFill>
+              <a:srgbClr val="C9D2D6"/>
+            </a:solidFill>
+            <a:prstDash val="solid"/>
+          </a:ln>
+        </p:spPr>
+      </p:sp>
+      <p:sp>
+        <p:nvSpPr>
+          <p:cNvPr id="66" name="Text 64"/>
+          <p:cNvSpPr txBox="1"/>
+          <p:nvPr/>
+        </p:nvSpPr>
+        <p:spPr>
+          <a:xfrm>
+            <a:off x="960120" y="4215384"/>
+            <a:ext cx="960120" cy="420624"/>
+          </a:xfrm>
+          <a:prstGeom prst="rect">
+            <a:avLst/>
+          </a:prstGeom>
+          <a:noFill/>
+          <a:ln/>
+        </p:spPr>
+        <p:txBody>
+          <a:bodyPr wrap="square" lIns="0" tIns="0" rIns="0" bIns="0" rtlCol="0" anchor="ctr"/>
+          <a:lstStyle/>
+          <a:p>
+            <a:pPr algn="ctr" indent="0" marL="0">
+              <a:buNone/>
+            </a:pPr>
+            <a:r>
+              <a:rPr lang="en-US" sz="1100" dirty="0">
+                <a:solidFill>
+                  <a:srgbClr val="1F2A30"/>
+                </a:solidFill>
+                <a:latin typeface="Courier New" pitchFamily="34" charset="0"/>
+                <a:ea typeface="Courier New" pitchFamily="34" charset="-122"/>
+                <a:cs typeface="Courier New" pitchFamily="34" charset="-120"/>
+              </a:rPr>
+              <a:t>IMP0001</a:t>
+            </a:r>
+            <a:endParaRPr lang="en-US" sz="1100" dirty="0"/>
+          </a:p>
+        </p:txBody>
+      </p:sp>
+      <p:sp>
+        <p:nvSpPr>
+          <p:cNvPr id="67" name="Shape 65"/>
+          <p:cNvSpPr/>
+          <p:nvPr/>
+        </p:nvSpPr>
+        <p:spPr>
+          <a:xfrm>
+            <a:off x="1920240" y="4215384"/>
+            <a:ext cx="960120" cy="420624"/>
+          </a:xfrm>
+          <a:prstGeom prst="rect">
+            <a:avLst/>
+          </a:prstGeom>
+          <a:solidFill>
+            <a:srgbClr val="FBE3B8"/>
+          </a:solidFill>
+          <a:ln w="9525">
+            <a:solidFill>
+              <a:srgbClr val="C9D2D6"/>
+            </a:solidFill>
+            <a:prstDash val="solid"/>
+          </a:ln>
+        </p:spPr>
+      </p:sp>
+      <p:sp>
+        <p:nvSpPr>
+          <p:cNvPr id="68" name="Text 66"/>
+          <p:cNvSpPr txBox="1"/>
+          <p:nvPr/>
+        </p:nvSpPr>
+        <p:spPr>
+          <a:xfrm>
+            <a:off x="1920240" y="4215384"/>
+            <a:ext cx="960120" cy="420624"/>
+          </a:xfrm>
+          <a:prstGeom prst="rect">
+            <a:avLst/>
+          </a:prstGeom>
+          <a:noFill/>
+          <a:ln/>
+        </p:spPr>
+        <p:txBody>
+          <a:bodyPr wrap="square" lIns="0" tIns="0" rIns="0" bIns="0" rtlCol="0" anchor="ctr"/>
+          <a:lstStyle/>
+          <a:p>
+            <a:pPr algn="ctr" indent="0" marL="0">
+              <a:buNone/>
+            </a:pPr>
+            <a:r>
+              <a:rPr lang="en-US" sz="1100" dirty="0">
+                <a:solidFill>
+                  <a:srgbClr val="1F2A30"/>
+                </a:solidFill>
+                <a:latin typeface="Courier New" pitchFamily="34" charset="0"/>
+                <a:ea typeface="Courier New" pitchFamily="34" charset="-122"/>
+                <a:cs typeface="Courier New" pitchFamily="34" charset="-120"/>
+              </a:rPr>
+              <a:t>2023</a:t>
+            </a:r>
+            <a:endParaRPr lang="en-US" sz="1100" dirty="0"/>
+          </a:p>
+        </p:txBody>
+      </p:sp>
+      <p:sp>
+        <p:nvSpPr>
+          <p:cNvPr id="69" name="Shape 67"/>
+          <p:cNvSpPr/>
+          <p:nvPr/>
+        </p:nvSpPr>
+        <p:spPr>
+          <a:xfrm>
+            <a:off x="2880360" y="4215384"/>
+            <a:ext cx="960120" cy="420624"/>
+          </a:xfrm>
+          <a:prstGeom prst="rect">
+            <a:avLst/>
+          </a:prstGeom>
+          <a:solidFill>
+            <a:srgbClr val="FBE3B8"/>
+          </a:solidFill>
+          <a:ln w="9525">
+            <a:solidFill>
+              <a:srgbClr val="C9D2D6"/>
+            </a:solidFill>
+            <a:prstDash val="solid"/>
+          </a:ln>
+        </p:spPr>
+      </p:sp>
+      <p:sp>
+        <p:nvSpPr>
+          <p:cNvPr id="70" name="Text 68"/>
+          <p:cNvSpPr txBox="1"/>
+          <p:nvPr/>
+        </p:nvSpPr>
+        <p:spPr>
+          <a:xfrm>
+            <a:off x="2880360" y="4215384"/>
+            <a:ext cx="960120" cy="420624"/>
+          </a:xfrm>
+          <a:prstGeom prst="rect">
+            <a:avLst/>
+          </a:prstGeom>
+          <a:noFill/>
+          <a:ln/>
+        </p:spPr>
+        <p:txBody>
+          <a:bodyPr wrap="square" lIns="0" tIns="0" rIns="0" bIns="0" rtlCol="0" anchor="ctr"/>
+          <a:lstStyle/>
+          <a:p>
+            <a:pPr algn="ctr" indent="0" marL="0">
+              <a:buNone/>
+            </a:pPr>
+            <a:r>
+              <a:rPr lang="en-US" sz="1100" dirty="0">
+                <a:solidFill>
+                  <a:srgbClr val="1F2A30"/>
+                </a:solidFill>
+                <a:latin typeface="Courier New" pitchFamily="34" charset="0"/>
+                <a:ea typeface="Courier New" pitchFamily="34" charset="-122"/>
+                <a:cs typeface="Courier New" pitchFamily="34" charset="-120"/>
+              </a:rPr>
+              <a:t>11</a:t>
+            </a:r>
+            <a:endParaRPr lang="en-US" sz="1100" dirty="0"/>
+          </a:p>
+        </p:txBody>
+      </p:sp>
+      <p:sp>
+        <p:nvSpPr>
+          <p:cNvPr id="71" name="Shape 69"/>
+          <p:cNvSpPr/>
+          <p:nvPr/>
+        </p:nvSpPr>
+        <p:spPr>
+          <a:xfrm>
+            <a:off x="3840480" y="4215384"/>
+            <a:ext cx="960120" cy="420624"/>
+          </a:xfrm>
+          <a:prstGeom prst="rect">
+            <a:avLst/>
+          </a:prstGeom>
+          <a:solidFill>
+            <a:srgbClr val="FFFFFF"/>
+          </a:solidFill>
+          <a:ln w="9525">
+            <a:solidFill>
+              <a:srgbClr val="C9D2D6"/>
+            </a:solidFill>
+            <a:prstDash val="solid"/>
+          </a:ln>
+        </p:spPr>
+      </p:sp>
+      <p:sp>
+        <p:nvSpPr>
+          <p:cNvPr id="72" name="Text 70"/>
+          <p:cNvSpPr txBox="1"/>
+          <p:nvPr/>
+        </p:nvSpPr>
+        <p:spPr>
+          <a:xfrm>
+            <a:off x="3840480" y="4215384"/>
+            <a:ext cx="960120" cy="420624"/>
+          </a:xfrm>
+          <a:prstGeom prst="rect">
+            <a:avLst/>
+          </a:prstGeom>
+          <a:noFill/>
+          <a:ln/>
+        </p:spPr>
+        <p:txBody>
+          <a:bodyPr wrap="square" lIns="0" tIns="0" rIns="0" bIns="0" rtlCol="0" anchor="ctr"/>
+          <a:lstStyle/>
+          <a:p>
+            <a:pPr algn="ctr" indent="0" marL="0">
+              <a:buNone/>
+            </a:pPr>
+            <a:r>
+              <a:rPr lang="en-US" sz="1100" dirty="0">
+                <a:solidFill>
+                  <a:srgbClr val="1F2A30"/>
+                </a:solidFill>
+                <a:latin typeface="Courier New" pitchFamily="34" charset="0"/>
+                <a:ea typeface="Courier New" pitchFamily="34" charset="-122"/>
+                <a:cs typeface="Courier New" pitchFamily="34" charset="-120"/>
+              </a:rPr>
+              <a:t>Emilia-R.</a:t>
+            </a:r>
+            <a:endParaRPr lang="en-US" sz="1100" dirty="0"/>
+          </a:p>
+        </p:txBody>
+      </p:sp>
+      <p:sp>
+        <p:nvSpPr>
+          <p:cNvPr id="73" name="Shape 71"/>
+          <p:cNvSpPr/>
+          <p:nvPr/>
+        </p:nvSpPr>
+        <p:spPr>
+          <a:xfrm>
+            <a:off x="548640" y="4636008"/>
+            <a:ext cx="411480" cy="420624"/>
+          </a:xfrm>
+          <a:prstGeom prst="rect">
+            <a:avLst/>
+          </a:prstGeom>
+          <a:solidFill>
+            <a:srgbClr val="DDE3E6"/>
+          </a:solidFill>
+          <a:ln w="9525">
+            <a:solidFill>
+              <a:srgbClr val="C9D2D6"/>
+            </a:solidFill>
+            <a:prstDash val="solid"/>
+          </a:ln>
+        </p:spPr>
+      </p:sp>
+      <p:sp>
+        <p:nvSpPr>
+          <p:cNvPr id="74" name="Text 72"/>
+          <p:cNvSpPr txBox="1"/>
+          <p:nvPr/>
+        </p:nvSpPr>
+        <p:spPr>
+          <a:xfrm>
+            <a:off x="548640" y="4636008"/>
+            <a:ext cx="411480" cy="420624"/>
+          </a:xfrm>
+          <a:prstGeom prst="rect">
+            <a:avLst/>
+          </a:prstGeom>
+          <a:noFill/>
+          <a:ln/>
+        </p:spPr>
+        <p:txBody>
+          <a:bodyPr wrap="square" lIns="0" tIns="0" rIns="0" bIns="0" rtlCol="0" anchor="ctr"/>
+          <a:lstStyle/>
+          <a:p>
+            <a:pPr algn="ctr" indent="0" marL="0">
+              <a:buNone/>
+            </a:pPr>
+            <a:r>
+              <a:rPr lang="en-US" sz="1200" b="1" dirty="0">
+                <a:solidFill>
+                  <a:srgbClr val="1F2A30"/>
+                </a:solidFill>
+              </a:rPr>
+              <a:t>7</a:t>
+            </a:r>
+            <a:endParaRPr lang="en-US" sz="1200" dirty="0"/>
+          </a:p>
+        </p:txBody>
+      </p:sp>
+      <p:sp>
+        <p:nvSpPr>
+          <p:cNvPr id="75" name="Shape 73"/>
+          <p:cNvSpPr/>
+          <p:nvPr/>
+        </p:nvSpPr>
+        <p:spPr>
+          <a:xfrm>
+            <a:off x="960120" y="4636008"/>
+            <a:ext cx="960120" cy="420624"/>
+          </a:xfrm>
+          <a:prstGeom prst="rect">
+            <a:avLst/>
+          </a:prstGeom>
+          <a:solidFill>
+            <a:srgbClr val="FFFFFF"/>
+          </a:solidFill>
+          <a:ln w="9525">
+            <a:solidFill>
+              <a:srgbClr val="C9D2D6"/>
+            </a:solidFill>
+            <a:prstDash val="solid"/>
+          </a:ln>
+        </p:spPr>
+      </p:sp>
+      <p:sp>
+        <p:nvSpPr>
+          <p:cNvPr id="76" name="Text 74"/>
+          <p:cNvSpPr txBox="1"/>
+          <p:nvPr/>
+        </p:nvSpPr>
+        <p:spPr>
+          <a:xfrm>
+            <a:off x="960120" y="4636008"/>
+            <a:ext cx="960120" cy="420624"/>
+          </a:xfrm>
+          <a:prstGeom prst="rect">
+            <a:avLst/>
+          </a:prstGeom>
+          <a:noFill/>
+          <a:ln/>
+        </p:spPr>
+        <p:txBody>
+          <a:bodyPr wrap="square" lIns="0" tIns="0" rIns="0" bIns="0" rtlCol="0" anchor="ctr"/>
+          <a:lstStyle/>
+          <a:p>
+            <a:pPr algn="ctr" indent="0" marL="0">
+              <a:buNone/>
+            </a:pPr>
+            <a:r>
+              <a:rPr lang="en-US" sz="1100" dirty="0">
+                <a:solidFill>
+                  <a:srgbClr val="1F2A30"/>
+                </a:solidFill>
+                <a:latin typeface="Courier New" pitchFamily="34" charset="0"/>
+                <a:ea typeface="Courier New" pitchFamily="34" charset="-122"/>
+                <a:cs typeface="Courier New" pitchFamily="34" charset="-120"/>
+              </a:rPr>
+              <a:t>IMP0002</a:t>
+            </a:r>
+            <a:endParaRPr lang="en-US" sz="1100" dirty="0"/>
+          </a:p>
+        </p:txBody>
+      </p:sp>
+      <p:sp>
+        <p:nvSpPr>
+          <p:cNvPr id="77" name="Shape 75"/>
+          <p:cNvSpPr/>
+          <p:nvPr/>
+        </p:nvSpPr>
+        <p:spPr>
+          <a:xfrm>
+            <a:off x="1920240" y="4636008"/>
+            <a:ext cx="960120" cy="420624"/>
+          </a:xfrm>
+          <a:prstGeom prst="rect">
+            <a:avLst/>
+          </a:prstGeom>
+          <a:solidFill>
+            <a:srgbClr val="FFFFFF"/>
+          </a:solidFill>
+          <a:ln w="9525">
+            <a:solidFill>
+              <a:srgbClr val="C9D2D6"/>
+            </a:solidFill>
+            <a:prstDash val="solid"/>
+          </a:ln>
+        </p:spPr>
+      </p:sp>
+      <p:sp>
+        <p:nvSpPr>
+          <p:cNvPr id="78" name="Text 76"/>
+          <p:cNvSpPr txBox="1"/>
+          <p:nvPr/>
+        </p:nvSpPr>
+        <p:spPr>
+          <a:xfrm>
+            <a:off x="1920240" y="4636008"/>
+            <a:ext cx="960120" cy="420624"/>
+          </a:xfrm>
+          <a:prstGeom prst="rect">
+            <a:avLst/>
+          </a:prstGeom>
+          <a:noFill/>
+          <a:ln/>
+        </p:spPr>
+        <p:txBody>
+          <a:bodyPr wrap="square" lIns="0" tIns="0" rIns="0" bIns="0" rtlCol="0" anchor="ctr"/>
+          <a:lstStyle/>
+          <a:p>
+            <a:pPr algn="ctr" indent="0" marL="0">
+              <a:buNone/>
+            </a:pPr>
+            <a:r>
+              <a:rPr lang="en-US" sz="1100" dirty="0">
+                <a:solidFill>
+                  <a:srgbClr val="1F2A30"/>
+                </a:solidFill>
+                <a:latin typeface="Courier New" pitchFamily="34" charset="0"/>
+                <a:ea typeface="Courier New" pitchFamily="34" charset="-122"/>
+                <a:cs typeface="Courier New" pitchFamily="34" charset="-120"/>
+              </a:rPr>
+              <a:t>2019</a:t>
+            </a:r>
+            <a:endParaRPr lang="en-US" sz="1100" dirty="0"/>
+          </a:p>
+        </p:txBody>
+      </p:sp>
+      <p:sp>
+        <p:nvSpPr>
+          <p:cNvPr id="79" name="Shape 77"/>
+          <p:cNvSpPr/>
+          <p:nvPr/>
+        </p:nvSpPr>
+        <p:spPr>
+          <a:xfrm>
+            <a:off x="2880360" y="4636008"/>
+            <a:ext cx="960120" cy="420624"/>
+          </a:xfrm>
+          <a:prstGeom prst="rect">
+            <a:avLst/>
+          </a:prstGeom>
+          <a:solidFill>
+            <a:srgbClr val="FFFFFF"/>
+          </a:solidFill>
+          <a:ln w="9525">
+            <a:solidFill>
+              <a:srgbClr val="C9D2D6"/>
+            </a:solidFill>
+            <a:prstDash val="solid"/>
+          </a:ln>
+        </p:spPr>
+      </p:sp>
+      <p:sp>
+        <p:nvSpPr>
+          <p:cNvPr id="80" name="Text 78"/>
+          <p:cNvSpPr txBox="1"/>
+          <p:nvPr/>
+        </p:nvSpPr>
+        <p:spPr>
+          <a:xfrm>
+            <a:off x="2880360" y="4636008"/>
+            <a:ext cx="960120" cy="420624"/>
+          </a:xfrm>
+          <a:prstGeom prst="rect">
+            <a:avLst/>
+          </a:prstGeom>
+          <a:noFill/>
+          <a:ln/>
+        </p:spPr>
+        <p:txBody>
+          <a:bodyPr wrap="square" lIns="0" tIns="0" rIns="0" bIns="0" rtlCol="0" anchor="ctr"/>
+          <a:lstStyle/>
+          <a:p>
+            <a:pPr algn="ctr" indent="0" marL="0">
+              <a:buNone/>
+            </a:pPr>
+            <a:r>
+              <a:rPr lang="en-US" sz="1100" dirty="0">
+                <a:solidFill>
+                  <a:srgbClr val="1F2A30"/>
+                </a:solidFill>
+                <a:latin typeface="Courier New" pitchFamily="34" charset="0"/>
+                <a:ea typeface="Courier New" pitchFamily="34" charset="-122"/>
+                <a:cs typeface="Courier New" pitchFamily="34" charset="-120"/>
+              </a:rPr>
+              <a:t>7</a:t>
+            </a:r>
+            <a:endParaRPr lang="en-US" sz="1100" dirty="0"/>
+          </a:p>
+        </p:txBody>
+      </p:sp>
+      <p:sp>
+        <p:nvSpPr>
+          <p:cNvPr id="81" name="Shape 79"/>
+          <p:cNvSpPr/>
+          <p:nvPr/>
+        </p:nvSpPr>
+        <p:spPr>
+          <a:xfrm>
+            <a:off x="3840480" y="4636008"/>
+            <a:ext cx="960120" cy="420624"/>
+          </a:xfrm>
+          <a:prstGeom prst="rect">
+            <a:avLst/>
+          </a:prstGeom>
+          <a:solidFill>
+            <a:srgbClr val="FFFFFF"/>
+          </a:solidFill>
+          <a:ln w="9525">
+            <a:solidFill>
+              <a:srgbClr val="C9D2D6"/>
+            </a:solidFill>
+            <a:prstDash val="solid"/>
+          </a:ln>
+        </p:spPr>
+      </p:sp>
+      <p:sp>
+        <p:nvSpPr>
+          <p:cNvPr id="82" name="Text 80"/>
+          <p:cNvSpPr txBox="1"/>
+          <p:nvPr/>
+        </p:nvSpPr>
+        <p:spPr>
+          <a:xfrm>
+            <a:off x="3840480" y="4636008"/>
+            <a:ext cx="960120" cy="420624"/>
+          </a:xfrm>
+          <a:prstGeom prst="rect">
+            <a:avLst/>
+          </a:prstGeom>
+          <a:noFill/>
+          <a:ln/>
+        </p:spPr>
+        <p:txBody>
+          <a:bodyPr wrap="square" lIns="0" tIns="0" rIns="0" bIns="0" rtlCol="0" anchor="ctr"/>
+          <a:lstStyle/>
+          <a:p>
+            <a:pPr algn="ctr" indent="0" marL="0">
+              <a:buNone/>
+            </a:pPr>
+            <a:r>
+              <a:rPr lang="en-US" sz="1100" dirty="0">
+                <a:solidFill>
+                  <a:srgbClr val="1F2A30"/>
+                </a:solidFill>
+                <a:latin typeface="Courier New" pitchFamily="34" charset="0"/>
+                <a:ea typeface="Courier New" pitchFamily="34" charset="-122"/>
+                <a:cs typeface="Courier New" pitchFamily="34" charset="-120"/>
+              </a:rPr>
+              <a:t>Lazio</a:t>
+            </a:r>
+            <a:endParaRPr lang="en-US" sz="1100" dirty="0"/>
+          </a:p>
+        </p:txBody>
+      </p:sp>
+      <p:sp>
+        <p:nvSpPr>
+          <p:cNvPr id="83" name="Text 81"/>
+          <p:cNvSpPr txBox="1"/>
+          <p:nvPr/>
+        </p:nvSpPr>
+        <p:spPr>
+          <a:xfrm>
+            <a:off x="548640" y="5193792"/>
+            <a:ext cx="4389120" cy="411480"/>
+          </a:xfrm>
+          <a:prstGeom prst="rect">
+            <a:avLst/>
+          </a:prstGeom>
+          <a:noFill/>
+          <a:ln/>
+        </p:spPr>
+        <p:txBody>
+          <a:bodyPr wrap="square" lIns="0" tIns="0" rIns="0" bIns="0" rtlCol="0" anchor="ctr"/>
+          <a:lstStyle/>
+          <a:p>
+            <a:pPr indent="0" marL="0">
+              <a:buNone/>
+            </a:pPr>
+            <a:r>
+              <a:rPr lang="en-US" sz="1800" b="1" dirty="0">
+                <a:solidFill>
+                  <a:srgbClr val="1F2A30"/>
+                </a:solidFill>
+              </a:rPr>
+              <a:t>Excel  </a:t>
+            </a:r>
+            <a:pPr indent="0" marL="0">
+              <a:buNone/>
+            </a:pPr>
+            <a:r>
+              <a:rPr lang="en-US" sz="1800" b="1" dirty="0">
+                <a:solidFill>
+                  <a:srgbClr val="8F5308"/>
+                </a:solidFill>
+                <a:latin typeface="Courier New" pitchFamily="34" charset="0"/>
+                <a:ea typeface="Courier New" pitchFamily="34" charset="-122"/>
+                <a:cs typeface="Courier New" pitchFamily="34" charset="-120"/>
+              </a:rPr>
+              <a:t>A2:C6</a:t>
+            </a:r>
+            <a:endParaRPr lang="en-US" sz="1800" dirty="0"/>
+          </a:p>
+        </p:txBody>
+      </p:sp>
+      <p:sp>
+        <p:nvSpPr>
+          <p:cNvPr id="84" name="card-code"/>
+          <p:cNvSpPr/>
+          <p:nvPr/>
+        </p:nvSpPr>
+        <p:spPr>
+          <a:xfrm>
+            <a:off x="5577840" y="1691640"/>
+            <a:ext cx="6035040" cy="1188720"/>
+          </a:xfrm>
+          <a:prstGeom prst="roundRect">
+            <a:avLst>
+              <a:gd name="adj" fmla="val 9231"/>
+            </a:avLst>
+          </a:prstGeom>
+          <a:solidFill>
+            <a:srgbClr val="1F2A30"/>
+          </a:solidFill>
+          <a:ln/>
+        </p:spPr>
+      </p:sp>
+      <p:sp>
+        <p:nvSpPr>
+          <p:cNvPr id="85" name="Text 83"/>
+          <p:cNvSpPr txBox="1"/>
+          <p:nvPr/>
+        </p:nvSpPr>
+        <p:spPr>
+          <a:xfrm>
+            <a:off x="5806440" y="1828800"/>
+            <a:ext cx="1828800" cy="274320"/>
+          </a:xfrm>
+          <a:prstGeom prst="rect">
+            <a:avLst/>
+          </a:prstGeom>
+          <a:noFill/>
+          <a:ln/>
+        </p:spPr>
+        <p:txBody>
+          <a:bodyPr wrap="square" lIns="0" tIns="0" rIns="0" bIns="0" rtlCol="0" anchor="ctr"/>
+          <a:lstStyle/>
+          <a:p>
+            <a:pPr indent="0" marL="0">
+              <a:buNone/>
+            </a:pPr>
+            <a:r>
+              <a:rPr lang="en-US" sz="1100" b="1" spc="200" kern="0" dirty="0">
+                <a:solidFill>
+                  <a:srgbClr val="E09F3E"/>
+                </a:solidFill>
+              </a:rPr>
+              <a:t>PYTHON</a:t>
+            </a:r>
+            <a:endParaRPr lang="en-US" sz="1100" dirty="0"/>
+          </a:p>
+        </p:txBody>
+      </p:sp>
+      <p:sp>
+        <p:nvSpPr>
+          <p:cNvPr id="86" name="Text 84"/>
+          <p:cNvSpPr txBox="1"/>
+          <p:nvPr/>
+        </p:nvSpPr>
+        <p:spPr>
+          <a:xfrm>
+            <a:off x="5806440" y="2148840"/>
+            <a:ext cx="5577840" cy="594360"/>
+          </a:xfrm>
+          <a:prstGeom prst="rect">
+            <a:avLst/>
+          </a:prstGeom>
+          <a:noFill/>
+          <a:ln/>
+        </p:spPr>
+        <p:txBody>
+          <a:bodyPr wrap="square" lIns="0" tIns="0" rIns="0" bIns="0" rtlCol="0" anchor="t"/>
+          <a:lstStyle/>
+          <a:p>
+            <a:pPr indent="0" marL="0">
+              <a:buNone/>
+            </a:pPr>
+            <a:r>
+              <a:rPr lang="en-US" sz="2200" dirty="0">
                 <a:solidFill>
                   <a:srgbClr val="FFFFFF"/>
                 </a:solidFill>
-              </a:rPr>
-              <a:t>Task: conosci il tuo dataset</a:t>
-            </a:r>
-            <a:endParaRPr lang="en-US" sz="5400" dirty="0"/>
-          </a:p>
-        </p:txBody>
-      </p:sp>
-      <p:sp>
-        <p:nvSpPr>
-          <p:cNvPr id="3" name="Text 0"/>
-          <p:cNvSpPr/>
+                <a:latin typeface="Courier New" pitchFamily="34" charset="0"/>
+                <a:ea typeface="Courier New" pitchFamily="34" charset="-122"/>
+                <a:cs typeface="Courier New" pitchFamily="34" charset="-120"/>
+              </a:rPr>
+              <a:t>df.iloc[0:5, 0:3]</a:t>
+            </a:r>
+            <a:endParaRPr lang="en-US" sz="2200" dirty="0"/>
+          </a:p>
+        </p:txBody>
+      </p:sp>
+      <p:graphicFrame>
+        <p:nvGraphicFramePr>
+          <p:cNvPr id="9" name="Table 0"/>
+          <p:cNvGraphicFramePr>
+            <a:graphicFrameLocks noGrp="1"/>
+          </p:cNvGraphicFramePr>
           <p:nvPr>
-            <p:ph idx="101" type="body" hasCustomPrompt="1"/>
+            <p:extLst>
+              <p:ext uri="{D42A27DB-BD31-4B8C-83A1-F6EECF244321}">
+                <p14:modId xmlns:p14="http://schemas.microsoft.com/office/powerpoint/2010/main" val="1579011935"/>
+              </p:ext>
+            </p:extLst>
           </p:nvPr>
-        </p:nvSpPr>
-        <p:spPr>
-          <a:xfrm>
-            <a:off x="731520" y="3657600"/>
-            <a:ext cx="10698480" cy="1463040"/>
-          </a:xfrm>
-          <a:prstGeom prst="rect">
-            <a:avLst/>
-          </a:prstGeom>
-          <a:noFill/>
-          <a:ln/>
-        </p:spPr>
-        <p:txBody>
-          <a:bodyPr wrap="square" lIns="0" tIns="0" rIns="0" bIns="0" rtlCol="0" anchor="t"/>
+        </p:nvGraphicFramePr>
+        <p:xfrm>
+          <a:off x="5577840" y="3063240"/>
+          <a:ext cx="6035040" cy="914400"/>
+        </p:xfrm>
+        <a:graphic>
+          <a:graphicData uri="http://schemas.openxmlformats.org/drawingml/2006/table">
+            <a:tbl>
+              <a:tblPr/>
+              <a:tblGrid>
+                <a:gridCol w="2103120"/>
+                <a:gridCol w="2194560"/>
+                <a:gridCol w="1737360"/>
+              </a:tblGrid>
+              <a:tr h="457200">
+                <a:tc>
+                  <a:txBody>
+                    <a:bodyPr/>
+                    <a:lstStyle/>
+                    <a:p>
+                      <a:pPr indent="0" marL="0">
+                        <a:buNone/>
+                      </a:pPr>
+                      <a:endParaRPr lang="en-US" sz="1500" dirty="0"/>
+                    </a:p>
+                  </a:txBody>
+                  <a:tcPr marL="73152" marR="73152" marT="73152" marB="73152">
+                    <a:lnL w="0" cap="flat" cmpd="sng" algn="ctr">
+                      <a:noFill/>
+                    </a:lnL>
+                    <a:lnR w="0" cap="flat" cmpd="sng" algn="ctr">
+                      <a:noFill/>
+                    </a:lnR>
+                    <a:lnT w="0" cap="flat" cmpd="sng" algn="ctr">
+                      <a:noFill/>
+                    </a:lnT>
+                    <a:lnB w="0" cap="flat" cmpd="sng" algn="ctr">
+                      <a:noFill/>
+                    </a:lnB>
+                    <a:solidFill>
+                      <a:srgbClr val="0F4C5C"/>
+                    </a:solidFill>
+                  </a:tcPr>
+                </a:tc>
+                <a:tc>
+                  <a:txBody>
+                    <a:bodyPr/>
+                    <a:lstStyle/>
+                    <a:p>
+                      <a:pPr indent="0" marL="0">
+                        <a:buNone/>
+                      </a:pPr>
+                      <a:r>
+                        <a:rPr lang="en-US" sz="1500" b="1" dirty="0">
+                          <a:solidFill>
+                            <a:srgbClr val="FFFFFF"/>
+                          </a:solidFill>
+                        </a:rPr>
+                        <a:t>Excel</a:t>
+                      </a:r>
+                      <a:endParaRPr lang="en-US" sz="1500" dirty="0"/>
+                    </a:p>
+                  </a:txBody>
+                  <a:tcPr marL="73152" marR="73152" marT="73152" marB="73152">
+                    <a:lnL w="0" cap="flat" cmpd="sng" algn="ctr">
+                      <a:noFill/>
+                    </a:lnL>
+                    <a:lnR w="0" cap="flat" cmpd="sng" algn="ctr">
+                      <a:noFill/>
+                    </a:lnR>
+                    <a:lnT w="0" cap="flat" cmpd="sng" algn="ctr">
+                      <a:noFill/>
+                    </a:lnT>
+                    <a:lnB w="0" cap="flat" cmpd="sng" algn="ctr">
+                      <a:noFill/>
+                    </a:lnB>
+                    <a:solidFill>
+                      <a:srgbClr val="0F4C5C"/>
+                    </a:solidFill>
+                  </a:tcPr>
+                </a:tc>
+                <a:tc>
+                  <a:txBody>
+                    <a:bodyPr/>
+                    <a:lstStyle/>
+                    <a:p>
+                      <a:pPr indent="0" marL="0">
+                        <a:buNone/>
+                      </a:pPr>
+                      <a:r>
+                        <a:rPr lang="en-US" sz="1500" b="1" dirty="0">
+                          <a:solidFill>
+                            <a:srgbClr val="FFFFFF"/>
+                          </a:solidFill>
+                        </a:rPr>
+                        <a:t>iloc</a:t>
+                      </a:r>
+                      <a:endParaRPr lang="en-US" sz="1500" dirty="0"/>
+                    </a:p>
+                  </a:txBody>
+                  <a:tcPr marL="73152" marR="73152" marT="73152" marB="73152">
+                    <a:lnL w="0" cap="flat" cmpd="sng" algn="ctr">
+                      <a:noFill/>
+                    </a:lnL>
+                    <a:lnR w="0" cap="flat" cmpd="sng" algn="ctr">
+                      <a:noFill/>
+                    </a:lnR>
+                    <a:lnT w="0" cap="flat" cmpd="sng" algn="ctr">
+                      <a:noFill/>
+                    </a:lnT>
+                    <a:lnB w="0" cap="flat" cmpd="sng" algn="ctr">
+                      <a:noFill/>
+                    </a:lnB>
+                    <a:solidFill>
+                      <a:srgbClr val="0F4C5C"/>
+                    </a:solidFill>
+                  </a:tcPr>
+                </a:tc>
+              </a:tr>
+              <a:tr h="457200">
+                <a:tc>
+                  <a:txBody>
+                    <a:bodyPr/>
+                    <a:lstStyle/>
+                    <a:p>
+                      <a:pPr indent="0" marL="0">
+                        <a:buNone/>
+                      </a:pPr>
+                      <a:r>
+                        <a:rPr lang="en-US" sz="1400" b="1" dirty="0">
+                          <a:solidFill>
+                            <a:srgbClr val="1F2A30"/>
+                          </a:solidFill>
+                        </a:rPr>
+                        <a:t>Prima riga di dati</a:t>
+                      </a:r>
+                      <a:endParaRPr lang="en-US" sz="1400" dirty="0"/>
+                    </a:p>
+                  </a:txBody>
+                  <a:tcPr marL="73152" marR="73152" marT="73152" marB="73152">
+                    <a:lnL w="0" cap="flat" cmpd="sng" algn="ctr">
+                      <a:noFill/>
+                    </a:lnL>
+                    <a:lnR w="0" cap="flat" cmpd="sng" algn="ctr">
+                      <a:noFill/>
+                    </a:lnR>
+                    <a:lnT w="0" cap="flat" cmpd="sng" algn="ctr">
+                      <a:noFill/>
+                    </a:lnT>
+                    <a:lnB w="0" cap="flat" cmpd="sng" algn="ctr">
+                      <a:noFill/>
+                    </a:lnB>
+                    <a:solidFill>
+                      <a:srgbClr val="FFFFFF"/>
+                    </a:solidFill>
+                  </a:tcPr>
+                </a:tc>
+                <a:tc>
+                  <a:txBody>
+                    <a:bodyPr/>
+                    <a:lstStyle/>
+                    <a:p>
+                      <a:pPr indent="0" marL="0">
+                        <a:buNone/>
+                      </a:pPr>
+                      <a:r>
+                        <a:rPr lang="en-US" sz="1400" dirty="0">
+                          <a:solidFill>
+                            <a:srgbClr val="1F2A30"/>
+                          </a:solidFill>
+                        </a:rPr>
+                        <a:t>2 (la 1 è l'intestazione)</a:t>
+                      </a:r>
+                      <a:endParaRPr lang="en-US" sz="1400" dirty="0"/>
+                    </a:p>
+                  </a:txBody>
+                  <a:tcPr marL="73152" marR="73152" marT="73152" marB="73152">
+                    <a:lnL w="0" cap="flat" cmpd="sng" algn="ctr">
+                      <a:noFill/>
+                    </a:lnL>
+                    <a:lnR w="0" cap="flat" cmpd="sng" algn="ctr">
+                      <a:noFill/>
+                    </a:lnR>
+                    <a:lnT w="0" cap="flat" cmpd="sng" algn="ctr">
+                      <a:noFill/>
+                    </a:lnT>
+                    <a:lnB w="0" cap="flat" cmpd="sng" algn="ctr">
+                      <a:noFill/>
+                    </a:lnB>
+                    <a:solidFill>
+                      <a:srgbClr val="FFFFFF"/>
+                    </a:solidFill>
+                  </a:tcPr>
+                </a:tc>
+                <a:tc>
+                  <a:txBody>
+                    <a:bodyPr/>
+                    <a:lstStyle/>
+                    <a:p>
+                      <a:pPr indent="0" marL="0">
+                        <a:buNone/>
+                      </a:pPr>
+                      <a:r>
+                        <a:rPr lang="en-US" sz="1400" dirty="0">
+                          <a:solidFill>
+                            <a:srgbClr val="1F2A30"/>
+                          </a:solidFill>
+                        </a:rPr>
+                        <a:t>0</a:t>
+                      </a:r>
+                      <a:endParaRPr lang="en-US" sz="1400" dirty="0"/>
+                    </a:p>
+                  </a:txBody>
+                  <a:tcPr marL="73152" marR="73152" marT="73152" marB="73152">
+                    <a:lnL w="0" cap="flat" cmpd="sng" algn="ctr">
+                      <a:noFill/>
+                    </a:lnL>
+                    <a:lnR w="0" cap="flat" cmpd="sng" algn="ctr">
+                      <a:noFill/>
+                    </a:lnR>
+                    <a:lnT w="0" cap="flat" cmpd="sng" algn="ctr">
+                      <a:noFill/>
+                    </a:lnT>
+                    <a:lnB w="0" cap="flat" cmpd="sng" algn="ctr">
+                      <a:noFill/>
+                    </a:lnB>
+                    <a:solidFill>
+                      <a:srgbClr val="FFFFFF"/>
+                    </a:solidFill>
+                  </a:tcPr>
+                </a:tc>
+              </a:tr>
+              <a:tr h="457200">
+                <a:tc>
+                  <a:txBody>
+                    <a:bodyPr/>
+                    <a:lstStyle/>
+                    <a:p>
+                      <a:pPr indent="0" marL="0">
+                        <a:buNone/>
+                      </a:pPr>
+                      <a:r>
+                        <a:rPr lang="en-US" sz="1400" b="1" dirty="0">
+                          <a:solidFill>
+                            <a:srgbClr val="1F2A30"/>
+                          </a:solidFill>
+                        </a:rPr>
+                        <a:t>Fine dell'intervallo</a:t>
+                      </a:r>
+                      <a:endParaRPr lang="en-US" sz="1400" dirty="0"/>
+                    </a:p>
+                  </a:txBody>
+                  <a:tcPr marL="73152" marR="73152" marT="73152" marB="73152">
+                    <a:lnL w="0" cap="flat" cmpd="sng" algn="ctr">
+                      <a:noFill/>
+                    </a:lnL>
+                    <a:lnR w="0" cap="flat" cmpd="sng" algn="ctr">
+                      <a:noFill/>
+                    </a:lnR>
+                    <a:lnT w="0" cap="flat" cmpd="sng" algn="ctr">
+                      <a:noFill/>
+                    </a:lnT>
+                    <a:lnB w="0" cap="flat" cmpd="sng" algn="ctr">
+                      <a:noFill/>
+                    </a:lnB>
+                    <a:solidFill>
+                      <a:srgbClr val="EEF3F4"/>
+                    </a:solidFill>
+                  </a:tcPr>
+                </a:tc>
+                <a:tc>
+                  <a:txBody>
+                    <a:bodyPr/>
+                    <a:lstStyle/>
+                    <a:p>
+                      <a:pPr indent="0" marL="0">
+                        <a:buNone/>
+                      </a:pPr>
+                      <a:r>
+                        <a:rPr lang="en-US" sz="1400" dirty="0">
+                          <a:solidFill>
+                            <a:srgbClr val="1F2A30"/>
+                          </a:solidFill>
+                        </a:rPr>
+                        <a:t>inclusa (C6 c'è)</a:t>
+                      </a:r>
+                      <a:endParaRPr lang="en-US" sz="1400" dirty="0"/>
+                    </a:p>
+                  </a:txBody>
+                  <a:tcPr marL="73152" marR="73152" marT="73152" marB="73152">
+                    <a:lnL w="0" cap="flat" cmpd="sng" algn="ctr">
+                      <a:noFill/>
+                    </a:lnL>
+                    <a:lnR w="0" cap="flat" cmpd="sng" algn="ctr">
+                      <a:noFill/>
+                    </a:lnR>
+                    <a:lnT w="0" cap="flat" cmpd="sng" algn="ctr">
+                      <a:noFill/>
+                    </a:lnT>
+                    <a:lnB w="0" cap="flat" cmpd="sng" algn="ctr">
+                      <a:noFill/>
+                    </a:lnB>
+                    <a:solidFill>
+                      <a:srgbClr val="EEF3F4"/>
+                    </a:solidFill>
+                  </a:tcPr>
+                </a:tc>
+                <a:tc>
+                  <a:txBody>
+                    <a:bodyPr/>
+                    <a:lstStyle/>
+                    <a:p>
+                      <a:pPr indent="0" marL="0">
+                        <a:buNone/>
+                      </a:pPr>
+                      <a:r>
+                        <a:rPr lang="en-US" sz="1400" dirty="0">
+                          <a:solidFill>
+                            <a:srgbClr val="1F2A30"/>
+                          </a:solidFill>
+                        </a:rPr>
+                        <a:t>esclusa (5 non c'è)</a:t>
+                      </a:r>
+                      <a:endParaRPr lang="en-US" sz="1400" dirty="0"/>
+                    </a:p>
+                  </a:txBody>
+                  <a:tcPr marL="73152" marR="73152" marT="73152" marB="73152">
+                    <a:lnL w="0" cap="flat" cmpd="sng" algn="ctr">
+                      <a:noFill/>
+                    </a:lnL>
+                    <a:lnR w="0" cap="flat" cmpd="sng" algn="ctr">
+                      <a:noFill/>
+                    </a:lnR>
+                    <a:lnT w="0" cap="flat" cmpd="sng" algn="ctr">
+                      <a:noFill/>
+                    </a:lnT>
+                    <a:lnB w="0" cap="flat" cmpd="sng" algn="ctr">
+                      <a:noFill/>
+                    </a:lnB>
+                    <a:solidFill>
+                      <a:srgbClr val="EEF3F4"/>
+                    </a:solidFill>
+                  </a:tcPr>
+                </a:tc>
+              </a:tr>
+              <a:tr h="457200">
+                <a:tc>
+                  <a:txBody>
+                    <a:bodyPr/>
+                    <a:lstStyle/>
+                    <a:p>
+                      <a:pPr indent="0" marL="0">
+                        <a:buNone/>
+                      </a:pPr>
+                      <a:r>
+                        <a:rPr lang="en-US" sz="1400" b="1" dirty="0">
+                          <a:solidFill>
+                            <a:srgbClr val="1F2A30"/>
+                          </a:solidFill>
+                        </a:rPr>
+                        <a:t>Colonne</a:t>
+                      </a:r>
+                      <a:endParaRPr lang="en-US" sz="1400" dirty="0"/>
+                    </a:p>
+                  </a:txBody>
+                  <a:tcPr marL="73152" marR="73152" marT="73152" marB="73152">
+                    <a:lnL w="0" cap="flat" cmpd="sng" algn="ctr">
+                      <a:noFill/>
+                    </a:lnL>
+                    <a:lnR w="0" cap="flat" cmpd="sng" algn="ctr">
+                      <a:noFill/>
+                    </a:lnR>
+                    <a:lnT w="0" cap="flat" cmpd="sng" algn="ctr">
+                      <a:noFill/>
+                    </a:lnT>
+                    <a:lnB w="0" cap="flat" cmpd="sng" algn="ctr">
+                      <a:noFill/>
+                    </a:lnB>
+                    <a:solidFill>
+                      <a:srgbClr val="FFFFFF"/>
+                    </a:solidFill>
+                  </a:tcPr>
+                </a:tc>
+                <a:tc>
+                  <a:txBody>
+                    <a:bodyPr/>
+                    <a:lstStyle/>
+                    <a:p>
+                      <a:pPr indent="0" marL="0">
+                        <a:buNone/>
+                      </a:pPr>
+                      <a:r>
+                        <a:rPr lang="en-US" sz="1400" dirty="0">
+                          <a:solidFill>
+                            <a:srgbClr val="1F2A30"/>
+                          </a:solidFill>
+                        </a:rPr>
+                        <a:t>lettere: A, B, C</a:t>
+                      </a:r>
+                      <a:endParaRPr lang="en-US" sz="1400" dirty="0"/>
+                    </a:p>
+                  </a:txBody>
+                  <a:tcPr marL="73152" marR="73152" marT="73152" marB="73152">
+                    <a:lnL w="0" cap="flat" cmpd="sng" algn="ctr">
+                      <a:noFill/>
+                    </a:lnL>
+                    <a:lnR w="0" cap="flat" cmpd="sng" algn="ctr">
+                      <a:noFill/>
+                    </a:lnR>
+                    <a:lnT w="0" cap="flat" cmpd="sng" algn="ctr">
+                      <a:noFill/>
+                    </a:lnT>
+                    <a:lnB w="0" cap="flat" cmpd="sng" algn="ctr">
+                      <a:noFill/>
+                    </a:lnB>
+                    <a:solidFill>
+                      <a:srgbClr val="FFFFFF"/>
+                    </a:solidFill>
+                  </a:tcPr>
+                </a:tc>
+                <a:tc>
+                  <a:txBody>
+                    <a:bodyPr/>
+                    <a:lstStyle/>
+                    <a:p>
+                      <a:pPr indent="0" marL="0">
+                        <a:buNone/>
+                      </a:pPr>
+                      <a:r>
+                        <a:rPr lang="en-US" sz="1400" dirty="0">
+                          <a:solidFill>
+                            <a:srgbClr val="1F2A30"/>
+                          </a:solidFill>
+                        </a:rPr>
+                        <a:t>numeri: 0, 1, 2</a:t>
+                      </a:r>
+                      <a:endParaRPr lang="en-US" sz="1400" dirty="0"/>
+                    </a:p>
+                  </a:txBody>
+                  <a:tcPr marL="73152" marR="73152" marT="73152" marB="73152">
+                    <a:lnL w="0" cap="flat" cmpd="sng" algn="ctr">
+                      <a:noFill/>
+                    </a:lnL>
+                    <a:lnR w="0" cap="flat" cmpd="sng" algn="ctr">
+                      <a:noFill/>
+                    </a:lnR>
+                    <a:lnT w="0" cap="flat" cmpd="sng" algn="ctr">
+                      <a:noFill/>
+                    </a:lnT>
+                    <a:lnB w="0" cap="flat" cmpd="sng" algn="ctr">
+                      <a:noFill/>
+                    </a:lnB>
+                    <a:solidFill>
+                      <a:srgbClr val="FFFFFF"/>
+                    </a:solidFill>
+                  </a:tcPr>
+                </a:tc>
+              </a:tr>
+              <a:tr h="457200">
+                <a:tc>
+                  <a:txBody>
+                    <a:bodyPr/>
+                    <a:lstStyle/>
+                    <a:p>
+                      <a:pPr indent="0" marL="0">
+                        <a:buNone/>
+                      </a:pPr>
+                      <a:r>
+                        <a:rPr lang="en-US" sz="1400" b="1" dirty="0">
+                          <a:solidFill>
+                            <a:srgbClr val="1F2A30"/>
+                          </a:solidFill>
+                        </a:rPr>
+                        <a:t>Prima righe, poi colonne?</a:t>
+                      </a:r>
+                      <a:endParaRPr lang="en-US" sz="1400" dirty="0"/>
+                    </a:p>
+                  </a:txBody>
+                  <a:tcPr marL="73152" marR="73152" marT="73152" marB="73152">
+                    <a:lnL w="0" cap="flat" cmpd="sng" algn="ctr">
+                      <a:noFill/>
+                    </a:lnL>
+                    <a:lnR w="0" cap="flat" cmpd="sng" algn="ctr">
+                      <a:noFill/>
+                    </a:lnR>
+                    <a:lnT w="0" cap="flat" cmpd="sng" algn="ctr">
+                      <a:noFill/>
+                    </a:lnT>
+                    <a:lnB w="0" cap="flat" cmpd="sng" algn="ctr">
+                      <a:noFill/>
+                    </a:lnB>
+                    <a:solidFill>
+                      <a:srgbClr val="EEF3F4"/>
+                    </a:solidFill>
+                  </a:tcPr>
+                </a:tc>
+                <a:tc>
+                  <a:txBody>
+                    <a:bodyPr/>
+                    <a:lstStyle/>
+                    <a:p>
+                      <a:pPr indent="0" marL="0">
+                        <a:buNone/>
+                      </a:pPr>
+                      <a:r>
+                        <a:rPr lang="en-US" sz="1400" dirty="0">
+                          <a:solidFill>
+                            <a:srgbClr val="1F2A30"/>
+                          </a:solidFill>
+                        </a:rPr>
+                        <a:t>no: A2 = colonna, riga</a:t>
+                      </a:r>
+                      <a:endParaRPr lang="en-US" sz="1400" dirty="0"/>
+                    </a:p>
+                  </a:txBody>
+                  <a:tcPr marL="73152" marR="73152" marT="73152" marB="73152">
+                    <a:lnL w="0" cap="flat" cmpd="sng" algn="ctr">
+                      <a:noFill/>
+                    </a:lnL>
+                    <a:lnR w="0" cap="flat" cmpd="sng" algn="ctr">
+                      <a:noFill/>
+                    </a:lnR>
+                    <a:lnT w="0" cap="flat" cmpd="sng" algn="ctr">
+                      <a:noFill/>
+                    </a:lnT>
+                    <a:lnB w="0" cap="flat" cmpd="sng" algn="ctr">
+                      <a:noFill/>
+                    </a:lnB>
+                    <a:solidFill>
+                      <a:srgbClr val="EEF3F4"/>
+                    </a:solidFill>
+                  </a:tcPr>
+                </a:tc>
+                <a:tc>
+                  <a:txBody>
+                    <a:bodyPr/>
+                    <a:lstStyle/>
+                    <a:p>
+                      <a:pPr indent="0" marL="0">
+                        <a:buNone/>
+                      </a:pPr>
+                      <a:r>
+                        <a:rPr lang="en-US" sz="1400" dirty="0">
+                          <a:solidFill>
+                            <a:srgbClr val="1F2A30"/>
+                          </a:solidFill>
+                        </a:rPr>
+                        <a:t>sì: [righe, colonne]</a:t>
+                      </a:r>
+                      <a:endParaRPr lang="en-US" sz="1400" dirty="0"/>
+                    </a:p>
+                  </a:txBody>
+                  <a:tcPr marL="73152" marR="73152" marT="73152" marB="73152">
+                    <a:lnL w="0" cap="flat" cmpd="sng" algn="ctr">
+                      <a:noFill/>
+                    </a:lnL>
+                    <a:lnR w="0" cap="flat" cmpd="sng" algn="ctr">
+                      <a:noFill/>
+                    </a:lnR>
+                    <a:lnT w="0" cap="flat" cmpd="sng" algn="ctr">
+                      <a:noFill/>
+                    </a:lnT>
+                    <a:lnB w="0" cap="flat" cmpd="sng" algn="ctr">
+                      <a:noFill/>
+                    </a:lnB>
+                    <a:solidFill>
+                      <a:srgbClr val="EEF3F4"/>
+                    </a:solidFill>
+                  </a:tcPr>
+                </a:tc>
+              </a:tr>
+            </a:tbl>
+          </a:graphicData>
+        </a:graphic>
+      </p:graphicFrame>
+      <p:sp>
+        <p:nvSpPr>
+          <p:cNvPr id="88" name="Text 85"/>
+          <p:cNvSpPr txBox="1"/>
+          <p:nvPr/>
+        </p:nvSpPr>
+        <p:spPr>
+          <a:xfrm>
+            <a:off x="5577840" y="5577840"/>
+            <a:ext cx="6035040" cy="457200"/>
+          </a:xfrm>
+          <a:prstGeom prst="rect">
+            <a:avLst/>
+          </a:prstGeom>
+          <a:noFill/>
+          <a:ln/>
+        </p:spPr>
+        <p:txBody>
+          <a:bodyPr wrap="square" lIns="0" tIns="0" rIns="0" bIns="0" rtlCol="0" anchor="ctr"/>
           <a:lstStyle/>
           <a:p>
             <a:pPr indent="0" marL="0">
               <a:buNone/>
             </a:pPr>
             <a:r>
-              <a:rPr lang="en-US" sz="2200" dirty="0">
-                <a:solidFill>
-                  <a:srgbClr val="B8C4CB"/>
-                </a:solidFill>
-              </a:rPr>
-              <a:t>Un collega ti manda imprese.xlsx. Ti puoi fidare?</a:t>
-            </a:r>
-            <a:endParaRPr lang="en-US" sz="2200" dirty="0"/>
-          </a:p>
-          <a:p>
-            <a:pPr indent="0" marL="0">
-              <a:buNone/>
-            </a:pPr>
-            <a:r>
-              <a:rPr lang="en-US" sz="2200" dirty="0">
-                <a:solidFill>
-                  <a:srgbClr val="B8C4CB"/>
-                </a:solidFill>
-              </a:rPr>
-              <a:t>60 minuti · apri il notebook dal README</a:t>
-            </a:r>
-            <a:endParaRPr lang="en-US" sz="2200" dirty="0"/>
+              <a:rPr lang="en-US" sz="1700" i="1" dirty="0">
+                <a:solidFill>
+                  <a:srgbClr val="0F4C5C"/>
+                </a:solidFill>
+              </a:rPr>
+              <a:t>Stesse celle: cambiano solo i numeri.</a:t>
+            </a:r>
+            <a:endParaRPr lang="en-US" sz="1700" dirty="0"/>
+          </a:p>
+        </p:txBody>
+      </p:sp>
+      <p:sp>
+        <p:nvSpPr>
+          <p:cNvPr id="25" name="Slide Number Placeholder 0"/>
+          <p:cNvSpPr>
+            <a:spLocks noGrp="1"/>
+          </p:cNvSpPr>
+          <p:nvPr>
+            <p:ph type="sldNum" sz="quarter" idx="4294967295"/>
+          </p:nvPr>
+        </p:nvSpPr>
+        <p:spPr>
+          <a:xfrm>
+            <a:off x="11155680" y="6400800"/>
+            <a:ext cx="457200" cy="274320"/>
+          </a:xfrm>
+          <a:prstGeom prst="rect">
+            <a:avLst/>
+          </a:prstGeom>
+          <a:extLst>
+            <a:ext uri="{C572A759-6A51-4108-AA02-DFA0A04FC94B}">
+              <ma14:wrappingTextBoxFlag xmlns:ma14="http://schemas.microsoft.com/office/mac/drawingml/2011/main" val="0"/>
+            </a:ext>
+          </a:extLst>
+        </p:spPr>
+        <p:txBody>
+          <a:bodyPr/>
+          <a:lstStyle>
+            <a:lvl1pPr>
+              <a:defRPr sz="1000">
+                <a:solidFill>
+                  <a:srgbClr val="5C6F7B"/>
+                </a:solidFill>
+              </a:defRPr>
+            </a:lvl1pPr>
+          </a:lstStyle>
+          <a:p>
+            <a:pPr algn="r"/>
+            <a:fld id="{F7021451-1387-4CA6-816F-3879F97B5CBC}" type="slidenum">
+              <a:rPr b="0" lang="en-US"/>
+              <a:t>8</a:t>
+            </a:fld>
+            <a:endParaRPr lang="en-US"/>
           </a:p>
         </p:txBody>
       </p:sp>
@@ -6841,69 +13195,644 @@
         </p:nvSpPr>
         <p:spPr>
           <a:xfrm>
-            <a:off x="731520" y="2103120"/>
-            <a:ext cx="10698480" cy="1463040"/>
-          </a:xfrm>
-          <a:prstGeom prst="rect">
-            <a:avLst/>
-          </a:prstGeom>
-          <a:noFill/>
-          <a:ln/>
-        </p:spPr>
-        <p:txBody>
-          <a:bodyPr wrap="square" lIns="0" tIns="0" rIns="0" bIns="0" rtlCol="0" anchor="b"/>
+            <a:off x="548640" y="365760"/>
+            <a:ext cx="11064240" cy="822960"/>
+          </a:xfrm>
+          <a:prstGeom prst="rect">
+            <a:avLst/>
+          </a:prstGeom>
+          <a:noFill/>
+          <a:ln/>
+        </p:spPr>
+        <p:txBody>
+          <a:bodyPr wrap="square" lIns="0" tIns="0" rIns="0" bIns="0" rtlCol="0" anchor="ctr"/>
           <a:lstStyle/>
           <a:p>
             <a:pPr algn="l" indent="0" marL="0">
               <a:buNone/>
             </a:pPr>
             <a:r>
-              <a:rPr lang="en-US" sz="4800" b="1" dirty="0">
+              <a:rPr lang="en-US" sz="3600" b="1" dirty="0">
+                <a:solidFill>
+                  <a:srgbClr val="0F4C5C"/>
+                </a:solidFill>
+              </a:rPr>
+              <a:t>Fare domande a un oggetto</a:t>
+            </a:r>
+            <a:endParaRPr lang="en-US" sz="3600" dirty="0"/>
+          </a:p>
+        </p:txBody>
+      </p:sp>
+      <p:sp>
+        <p:nvSpPr>
+          <p:cNvPr id="3" name="Text 1"/>
+          <p:cNvSpPr txBox="1"/>
+          <p:nvPr/>
+        </p:nvSpPr>
+        <p:spPr>
+          <a:xfrm>
+            <a:off x="548640" y="1645920"/>
+            <a:ext cx="5349240" cy="457200"/>
+          </a:xfrm>
+          <a:prstGeom prst="rect">
+            <a:avLst/>
+          </a:prstGeom>
+          <a:noFill/>
+          <a:ln/>
+        </p:spPr>
+        <p:txBody>
+          <a:bodyPr wrap="square" lIns="0" tIns="0" rIns="0" bIns="0" rtlCol="0" anchor="ctr"/>
+          <a:lstStyle/>
+          <a:p>
+            <a:pPr indent="0" marL="0">
+              <a:buNone/>
+            </a:pPr>
+            <a:r>
+              <a:rPr lang="en-US" sz="2600" b="1" dirty="0">
+                <a:solidFill>
+                  <a:srgbClr val="0F4C5C"/>
+                </a:solidFill>
+              </a:rPr>
+              <a:t>Metodo</a:t>
+            </a:r>
+            <a:endParaRPr lang="en-US" sz="2600" dirty="0"/>
+          </a:p>
+        </p:txBody>
+      </p:sp>
+      <p:sp>
+        <p:nvSpPr>
+          <p:cNvPr id="4" name="Text 2"/>
+          <p:cNvSpPr txBox="1"/>
+          <p:nvPr/>
+        </p:nvSpPr>
+        <p:spPr>
+          <a:xfrm>
+            <a:off x="548640" y="2103120"/>
+            <a:ext cx="5349240" cy="411480"/>
+          </a:xfrm>
+          <a:prstGeom prst="rect">
+            <a:avLst/>
+          </a:prstGeom>
+          <a:noFill/>
+          <a:ln/>
+        </p:spPr>
+        <p:txBody>
+          <a:bodyPr wrap="square" lIns="0" tIns="0" rIns="0" bIns="0" rtlCol="0" anchor="ctr"/>
+          <a:lstStyle/>
+          <a:p>
+            <a:pPr indent="0" marL="0">
+              <a:buNone/>
+            </a:pPr>
+            <a:r>
+              <a:rPr lang="en-US" sz="1800" dirty="0">
+                <a:solidFill>
+                  <a:srgbClr val="5C6F7B"/>
+                </a:solidFill>
+              </a:rPr>
+              <a:t>un'azione: ha le parentesi</a:t>
+            </a:r>
+            <a:endParaRPr lang="en-US" sz="1800" dirty="0"/>
+          </a:p>
+        </p:txBody>
+      </p:sp>
+      <p:sp>
+        <p:nvSpPr>
+          <p:cNvPr id="5" name="card-code"/>
+          <p:cNvSpPr/>
+          <p:nvPr/>
+        </p:nvSpPr>
+        <p:spPr>
+          <a:xfrm>
+            <a:off x="548640" y="2697480"/>
+            <a:ext cx="5349240" cy="1188720"/>
+          </a:xfrm>
+          <a:prstGeom prst="roundRect">
+            <a:avLst>
+              <a:gd name="adj" fmla="val 9231"/>
+            </a:avLst>
+          </a:prstGeom>
+          <a:solidFill>
+            <a:srgbClr val="1F2A30"/>
+          </a:solidFill>
+          <a:ln/>
+        </p:spPr>
+      </p:sp>
+      <p:sp>
+        <p:nvSpPr>
+          <p:cNvPr id="6" name="Text 4"/>
+          <p:cNvSpPr txBox="1"/>
+          <p:nvPr/>
+        </p:nvSpPr>
+        <p:spPr>
+          <a:xfrm>
+            <a:off x="777240" y="2834640"/>
+            <a:ext cx="1828800" cy="274320"/>
+          </a:xfrm>
+          <a:prstGeom prst="rect">
+            <a:avLst/>
+          </a:prstGeom>
+          <a:noFill/>
+          <a:ln/>
+        </p:spPr>
+        <p:txBody>
+          <a:bodyPr wrap="square" lIns="0" tIns="0" rIns="0" bIns="0" rtlCol="0" anchor="ctr"/>
+          <a:lstStyle/>
+          <a:p>
+            <a:pPr indent="0" marL="0">
+              <a:buNone/>
+            </a:pPr>
+            <a:r>
+              <a:rPr lang="en-US" sz="1100" b="1" spc="200" kern="0" dirty="0">
+                <a:solidFill>
+                  <a:srgbClr val="E09F3E"/>
+                </a:solidFill>
+              </a:rPr>
+              <a:t>PYTHON</a:t>
+            </a:r>
+            <a:endParaRPr lang="en-US" sz="1100" dirty="0"/>
+          </a:p>
+        </p:txBody>
+      </p:sp>
+      <p:sp>
+        <p:nvSpPr>
+          <p:cNvPr id="7" name="Text 5"/>
+          <p:cNvSpPr txBox="1"/>
+          <p:nvPr/>
+        </p:nvSpPr>
+        <p:spPr>
+          <a:xfrm>
+            <a:off x="777240" y="3154680"/>
+            <a:ext cx="4892040" cy="594360"/>
+          </a:xfrm>
+          <a:prstGeom prst="rect">
+            <a:avLst/>
+          </a:prstGeom>
+          <a:noFill/>
+          <a:ln/>
+        </p:spPr>
+        <p:txBody>
+          <a:bodyPr wrap="square" lIns="0" tIns="0" rIns="0" bIns="0" rtlCol="0" anchor="t"/>
+          <a:lstStyle/>
+          <a:p>
+            <a:pPr indent="0" marL="0">
+              <a:buNone/>
+            </a:pPr>
+            <a:r>
+              <a:rPr lang="en-US" sz="2200" dirty="0">
                 <a:solidFill>
                   <a:srgbClr val="FFFFFF"/>
                 </a:solidFill>
-              </a:rPr>
-              <a:t>Prossima volta: pulire i dati</a:t>
-            </a:r>
-            <a:endParaRPr lang="en-US" sz="4800" dirty="0"/>
-          </a:p>
-        </p:txBody>
-      </p:sp>
-      <p:sp>
-        <p:nvSpPr>
-          <p:cNvPr id="3" name="Text 0"/>
+                <a:latin typeface="Courier New" pitchFamily="34" charset="0"/>
+                <a:ea typeface="Courier New" pitchFamily="34" charset="-122"/>
+                <a:cs typeface="Courier New" pitchFamily="34" charset="-120"/>
+              </a:rPr>
+              <a:t>df.head(3)</a:t>
+            </a:r>
+            <a:endParaRPr lang="en-US" sz="2200" dirty="0"/>
+          </a:p>
+        </p:txBody>
+      </p:sp>
+      <p:sp>
+        <p:nvSpPr>
+          <p:cNvPr id="8" name="card-out"/>
           <p:cNvSpPr/>
+          <p:nvPr/>
+        </p:nvSpPr>
+        <p:spPr>
+          <a:xfrm>
+            <a:off x="548640" y="4069080"/>
+            <a:ext cx="5349240" cy="1188720"/>
+          </a:xfrm>
+          <a:prstGeom prst="roundRect">
+            <a:avLst>
+              <a:gd name="adj" fmla="val 9231"/>
+            </a:avLst>
+          </a:prstGeom>
+          <a:solidFill>
+            <a:srgbClr val="EEF3F4"/>
+          </a:solidFill>
+          <a:ln/>
+        </p:spPr>
+      </p:sp>
+      <p:sp>
+        <p:nvSpPr>
+          <p:cNvPr id="9" name="Text 7"/>
+          <p:cNvSpPr txBox="1"/>
+          <p:nvPr/>
+        </p:nvSpPr>
+        <p:spPr>
+          <a:xfrm>
+            <a:off x="777240" y="4206240"/>
+            <a:ext cx="1828800" cy="274320"/>
+          </a:xfrm>
+          <a:prstGeom prst="rect">
+            <a:avLst/>
+          </a:prstGeom>
+          <a:noFill/>
+          <a:ln/>
+        </p:spPr>
+        <p:txBody>
+          <a:bodyPr wrap="square" lIns="0" tIns="0" rIns="0" bIns="0" rtlCol="0" anchor="ctr"/>
+          <a:lstStyle/>
+          <a:p>
+            <a:pPr indent="0" marL="0">
+              <a:buNone/>
+            </a:pPr>
+            <a:r>
+              <a:rPr lang="en-US" sz="1100" b="1" spc="200" kern="0" dirty="0">
+                <a:solidFill>
+                  <a:srgbClr val="5C6F7B"/>
+                </a:solidFill>
+              </a:rPr>
+              <a:t>OUTPUT</a:t>
+            </a:r>
+            <a:endParaRPr lang="en-US" sz="1100" dirty="0"/>
+          </a:p>
+        </p:txBody>
+      </p:sp>
+      <p:sp>
+        <p:nvSpPr>
+          <p:cNvPr id="10" name="Text 8"/>
+          <p:cNvSpPr txBox="1"/>
+          <p:nvPr/>
+        </p:nvSpPr>
+        <p:spPr>
+          <a:xfrm>
+            <a:off x="777240" y="4526280"/>
+            <a:ext cx="4892040" cy="594360"/>
+          </a:xfrm>
+          <a:prstGeom prst="rect">
+            <a:avLst/>
+          </a:prstGeom>
+          <a:noFill/>
+          <a:ln/>
+        </p:spPr>
+        <p:txBody>
+          <a:bodyPr wrap="square" lIns="0" tIns="0" rIns="0" bIns="0" rtlCol="0" anchor="t"/>
+          <a:lstStyle/>
+          <a:p>
+            <a:pPr indent="0" marL="0">
+              <a:buNone/>
+            </a:pPr>
+            <a:r>
+              <a:rPr lang="en-US" sz="2000" dirty="0">
+                <a:solidFill>
+                  <a:srgbClr val="1F2A30"/>
+                </a:solidFill>
+                <a:latin typeface="Courier New" pitchFamily="34" charset="0"/>
+                <a:ea typeface="Courier New" pitchFamily="34" charset="-122"/>
+                <a:cs typeface="Courier New" pitchFamily="34" charset="-120"/>
+              </a:rPr>
+              <a:t>le prime 3 righe</a:t>
+            </a:r>
+            <a:endParaRPr lang="en-US" sz="2000" dirty="0"/>
+          </a:p>
+        </p:txBody>
+      </p:sp>
+      <p:sp>
+        <p:nvSpPr>
+          <p:cNvPr id="11" name="Text 9"/>
+          <p:cNvSpPr txBox="1"/>
+          <p:nvPr/>
+        </p:nvSpPr>
+        <p:spPr>
+          <a:xfrm>
+            <a:off x="6263640" y="1645920"/>
+            <a:ext cx="5349240" cy="457200"/>
+          </a:xfrm>
+          <a:prstGeom prst="rect">
+            <a:avLst/>
+          </a:prstGeom>
+          <a:noFill/>
+          <a:ln/>
+        </p:spPr>
+        <p:txBody>
+          <a:bodyPr wrap="square" lIns="0" tIns="0" rIns="0" bIns="0" rtlCol="0" anchor="ctr"/>
+          <a:lstStyle/>
+          <a:p>
+            <a:pPr indent="0" marL="0">
+              <a:buNone/>
+            </a:pPr>
+            <a:r>
+              <a:rPr lang="en-US" sz="2600" b="1" dirty="0">
+                <a:solidFill>
+                  <a:srgbClr val="0F4C5C"/>
+                </a:solidFill>
+              </a:rPr>
+              <a:t>Attributo</a:t>
+            </a:r>
+            <a:endParaRPr lang="en-US" sz="2600" dirty="0"/>
+          </a:p>
+        </p:txBody>
+      </p:sp>
+      <p:sp>
+        <p:nvSpPr>
+          <p:cNvPr id="12" name="Text 10"/>
+          <p:cNvSpPr txBox="1"/>
+          <p:nvPr/>
+        </p:nvSpPr>
+        <p:spPr>
+          <a:xfrm>
+            <a:off x="6263640" y="2103120"/>
+            <a:ext cx="5349240" cy="411480"/>
+          </a:xfrm>
+          <a:prstGeom prst="rect">
+            <a:avLst/>
+          </a:prstGeom>
+          <a:noFill/>
+          <a:ln/>
+        </p:spPr>
+        <p:txBody>
+          <a:bodyPr wrap="square" lIns="0" tIns="0" rIns="0" bIns="0" rtlCol="0" anchor="ctr"/>
+          <a:lstStyle/>
+          <a:p>
+            <a:pPr indent="0" marL="0">
+              <a:buNone/>
+            </a:pPr>
+            <a:r>
+              <a:rPr lang="en-US" sz="1800" dirty="0">
+                <a:solidFill>
+                  <a:srgbClr val="5C6F7B"/>
+                </a:solidFill>
+              </a:rPr>
+              <a:t>un'informazione: niente parentesi</a:t>
+            </a:r>
+            <a:endParaRPr lang="en-US" sz="1800" dirty="0"/>
+          </a:p>
+        </p:txBody>
+      </p:sp>
+      <p:sp>
+        <p:nvSpPr>
+          <p:cNvPr id="13" name="card-code"/>
+          <p:cNvSpPr/>
+          <p:nvPr/>
+        </p:nvSpPr>
+        <p:spPr>
+          <a:xfrm>
+            <a:off x="6263640" y="2697480"/>
+            <a:ext cx="5349240" cy="1188720"/>
+          </a:xfrm>
+          <a:prstGeom prst="roundRect">
+            <a:avLst>
+              <a:gd name="adj" fmla="val 9231"/>
+            </a:avLst>
+          </a:prstGeom>
+          <a:solidFill>
+            <a:srgbClr val="1F2A30"/>
+          </a:solidFill>
+          <a:ln/>
+        </p:spPr>
+      </p:sp>
+      <p:sp>
+        <p:nvSpPr>
+          <p:cNvPr id="14" name="Text 12"/>
+          <p:cNvSpPr txBox="1"/>
+          <p:nvPr/>
+        </p:nvSpPr>
+        <p:spPr>
+          <a:xfrm>
+            <a:off x="6492240" y="2834640"/>
+            <a:ext cx="1828800" cy="274320"/>
+          </a:xfrm>
+          <a:prstGeom prst="rect">
+            <a:avLst/>
+          </a:prstGeom>
+          <a:noFill/>
+          <a:ln/>
+        </p:spPr>
+        <p:txBody>
+          <a:bodyPr wrap="square" lIns="0" tIns="0" rIns="0" bIns="0" rtlCol="0" anchor="ctr"/>
+          <a:lstStyle/>
+          <a:p>
+            <a:pPr indent="0" marL="0">
+              <a:buNone/>
+            </a:pPr>
+            <a:r>
+              <a:rPr lang="en-US" sz="1100" b="1" spc="200" kern="0" dirty="0">
+                <a:solidFill>
+                  <a:srgbClr val="E09F3E"/>
+                </a:solidFill>
+              </a:rPr>
+              <a:t>PYTHON</a:t>
+            </a:r>
+            <a:endParaRPr lang="en-US" sz="1100" dirty="0"/>
+          </a:p>
+        </p:txBody>
+      </p:sp>
+      <p:sp>
+        <p:nvSpPr>
+          <p:cNvPr id="15" name="Text 13"/>
+          <p:cNvSpPr txBox="1"/>
+          <p:nvPr/>
+        </p:nvSpPr>
+        <p:spPr>
+          <a:xfrm>
+            <a:off x="6492240" y="3154680"/>
+            <a:ext cx="4892040" cy="594360"/>
+          </a:xfrm>
+          <a:prstGeom prst="rect">
+            <a:avLst/>
+          </a:prstGeom>
+          <a:noFill/>
+          <a:ln/>
+        </p:spPr>
+        <p:txBody>
+          <a:bodyPr wrap="square" lIns="0" tIns="0" rIns="0" bIns="0" rtlCol="0" anchor="t"/>
+          <a:lstStyle/>
+          <a:p>
+            <a:pPr indent="0" marL="0">
+              <a:buNone/>
+            </a:pPr>
+            <a:r>
+              <a:rPr lang="en-US" sz="2200" dirty="0">
+                <a:solidFill>
+                  <a:srgbClr val="FFFFFF"/>
+                </a:solidFill>
+                <a:latin typeface="Courier New" pitchFamily="34" charset="0"/>
+                <a:ea typeface="Courier New" pitchFamily="34" charset="-122"/>
+                <a:cs typeface="Courier New" pitchFamily="34" charset="-120"/>
+              </a:rPr>
+              <a:t>df.shape</a:t>
+            </a:r>
+            <a:endParaRPr lang="en-US" sz="2200" dirty="0"/>
+          </a:p>
+        </p:txBody>
+      </p:sp>
+      <p:sp>
+        <p:nvSpPr>
+          <p:cNvPr id="16" name="card-out"/>
+          <p:cNvSpPr/>
+          <p:nvPr/>
+        </p:nvSpPr>
+        <p:spPr>
+          <a:xfrm>
+            <a:off x="6263640" y="4069080"/>
+            <a:ext cx="5349240" cy="1188720"/>
+          </a:xfrm>
+          <a:prstGeom prst="roundRect">
+            <a:avLst>
+              <a:gd name="adj" fmla="val 9231"/>
+            </a:avLst>
+          </a:prstGeom>
+          <a:solidFill>
+            <a:srgbClr val="EEF3F4"/>
+          </a:solidFill>
+          <a:ln/>
+        </p:spPr>
+      </p:sp>
+      <p:sp>
+        <p:nvSpPr>
+          <p:cNvPr id="17" name="Text 15"/>
+          <p:cNvSpPr txBox="1"/>
+          <p:nvPr/>
+        </p:nvSpPr>
+        <p:spPr>
+          <a:xfrm>
+            <a:off x="6492240" y="4206240"/>
+            <a:ext cx="1828800" cy="274320"/>
+          </a:xfrm>
+          <a:prstGeom prst="rect">
+            <a:avLst/>
+          </a:prstGeom>
+          <a:noFill/>
+          <a:ln/>
+        </p:spPr>
+        <p:txBody>
+          <a:bodyPr wrap="square" lIns="0" tIns="0" rIns="0" bIns="0" rtlCol="0" anchor="ctr"/>
+          <a:lstStyle/>
+          <a:p>
+            <a:pPr indent="0" marL="0">
+              <a:buNone/>
+            </a:pPr>
+            <a:r>
+              <a:rPr lang="en-US" sz="1100" b="1" spc="200" kern="0" dirty="0">
+                <a:solidFill>
+                  <a:srgbClr val="5C6F7B"/>
+                </a:solidFill>
+              </a:rPr>
+              <a:t>OUTPUT</a:t>
+            </a:r>
+            <a:endParaRPr lang="en-US" sz="1100" dirty="0"/>
+          </a:p>
+        </p:txBody>
+      </p:sp>
+      <p:sp>
+        <p:nvSpPr>
+          <p:cNvPr id="18" name="Text 16"/>
+          <p:cNvSpPr txBox="1"/>
+          <p:nvPr/>
+        </p:nvSpPr>
+        <p:spPr>
+          <a:xfrm>
+            <a:off x="6492240" y="4526280"/>
+            <a:ext cx="4892040" cy="594360"/>
+          </a:xfrm>
+          <a:prstGeom prst="rect">
+            <a:avLst/>
+          </a:prstGeom>
+          <a:noFill/>
+          <a:ln/>
+        </p:spPr>
+        <p:txBody>
+          <a:bodyPr wrap="square" lIns="0" tIns="0" rIns="0" bIns="0" rtlCol="0" anchor="t"/>
+          <a:lstStyle/>
+          <a:p>
+            <a:pPr indent="0" marL="0">
+              <a:buNone/>
+            </a:pPr>
+            <a:r>
+              <a:rPr lang="en-US" sz="2000" dirty="0">
+                <a:solidFill>
+                  <a:srgbClr val="1F2A30"/>
+                </a:solidFill>
+                <a:latin typeface="Courier New" pitchFamily="34" charset="0"/>
+                <a:ea typeface="Courier New" pitchFamily="34" charset="-122"/>
+                <a:cs typeface="Courier New" pitchFamily="34" charset="-120"/>
+              </a:rPr>
+              <a:t>(2515, 9)</a:t>
+            </a:r>
+            <a:endParaRPr lang="en-US" sz="2000" dirty="0"/>
+          </a:p>
+        </p:txBody>
+      </p:sp>
+      <p:sp>
+        <p:nvSpPr>
+          <p:cNvPr id="19" name="Text 17"/>
+          <p:cNvSpPr txBox="1"/>
+          <p:nvPr/>
+        </p:nvSpPr>
+        <p:spPr>
+          <a:xfrm>
+            <a:off x="548640" y="5532120"/>
+            <a:ext cx="11064240" cy="457200"/>
+          </a:xfrm>
+          <a:prstGeom prst="rect">
+            <a:avLst/>
+          </a:prstGeom>
+          <a:noFill/>
+          <a:ln/>
+        </p:spPr>
+        <p:txBody>
+          <a:bodyPr wrap="square" lIns="0" tIns="0" rIns="0" bIns="0" rtlCol="0" anchor="ctr"/>
+          <a:lstStyle/>
+          <a:p>
+            <a:pPr indent="0" marL="0">
+              <a:buNone/>
+            </a:pPr>
+            <a:r>
+              <a:rPr lang="en-US" sz="1800" i="1" dirty="0">
+                <a:solidFill>
+                  <a:srgbClr val="0F4C5C"/>
+                </a:solidFill>
+              </a:rPr>
+              <a:t>df è un oggetto: dati, più tutte le cose che puoi chiedergli. Il punto le collega.</a:t>
+            </a:r>
+            <a:endParaRPr lang="en-US" sz="1800" dirty="0"/>
+          </a:p>
+        </p:txBody>
+      </p:sp>
+      <p:sp>
+        <p:nvSpPr>
+          <p:cNvPr id="25" name="Slide Number Placeholder 0"/>
+          <p:cNvSpPr>
+            <a:spLocks noGrp="1"/>
+          </p:cNvSpPr>
           <p:nvPr>
-            <p:ph idx="101" type="body" hasCustomPrompt="1"/>
+            <p:ph type="sldNum" sz="quarter" idx="4294967295"/>
           </p:nvPr>
         </p:nvSpPr>
         <p:spPr>
           <a:xfrm>
-            <a:off x="731520" y="3749040"/>
-            <a:ext cx="10698480" cy="914400"/>
-          </a:xfrm>
-          <a:prstGeom prst="rect">
-            <a:avLst/>
-          </a:prstGeom>
-          <a:noFill/>
-          <a:ln/>
-        </p:spPr>
-        <p:txBody>
-          <a:bodyPr wrap="square" lIns="0" tIns="0" rIns="0" bIns="0" rtlCol="0" anchor="t"/>
-          <a:lstStyle/>
-          <a:p>
-            <a:pPr indent="0" marL="0">
-              <a:buNone/>
-            </a:pPr>
-            <a:r>
-              <a:rPr lang="en-US" sz="2200" dirty="0">
-                <a:solidFill>
-                  <a:srgbClr val="F4C06E"/>
-                </a:solidFill>
-              </a:rPr>
-              <a:t>Compito: Kaggle Learn – Pandas, prime due lezioni (~40 min)</a:t>
-            </a:r>
-            <a:endParaRPr lang="en-US" sz="2200" dirty="0"/>
+            <a:off x="11155680" y="6400800"/>
+            <a:ext cx="457200" cy="274320"/>
+          </a:xfrm>
+          <a:prstGeom prst="rect">
+            <a:avLst/>
+          </a:prstGeom>
+          <a:extLst>
+            <a:ext uri="{C572A759-6A51-4108-AA02-DFA0A04FC94B}">
+              <ma14:wrappingTextBoxFlag xmlns:ma14="http://schemas.microsoft.com/office/mac/drawingml/2011/main" val="0"/>
+            </a:ext>
+          </a:extLst>
+        </p:spPr>
+        <p:txBody>
+          <a:bodyPr/>
+          <a:lstStyle>
+            <a:lvl1pPr>
+              <a:defRPr sz="1000">
+                <a:solidFill>
+                  <a:srgbClr val="5C6F7B"/>
+                </a:solidFill>
+              </a:defRPr>
+            </a:lvl1pPr>
+          </a:lstStyle>
+          <a:p>
+            <a:pPr algn="r"/>
+            <a:fld id="{F7021451-1387-4CA6-816F-3879F97B5CBC}" type="slidenum">
+              <a:rPr b="0" lang="en-US"/>
+              <a:t>9</a:t>
+            </a:fld>
+            <a:endParaRPr lang="en-US"/>
           </a:p>
         </p:txBody>
       </p:sp>

--- a/lezioni/L02_conosci_il_dataset/slide.pptx
+++ b/lezioni/L02_conosci_il_dataset/slide.pptx
@@ -18,9 +18,10 @@
     <p:sldId id="266" r:id="rId12"/>
     <p:sldId id="267" r:id="rId13"/>
     <p:sldId id="268" r:id="rId14"/>
+    <p:sldId id="269" r:id="rId15"/>
   </p:sldIdLst>
   <p:notesMasterIdLst>
-    <p:notesMasterId r:id="rId15"/>
+    <p:notesMasterId r:id="rId16"/>
   </p:notesMasterIdLst>
   <p:sldSz cx="12192000" cy="6858000"/>
   <p:notesSz cx="6858000" cy="12192000"/>
@@ -119,13 +120,13 @@
   <p:extLst>
     <p:ext uri="{521415D9-36F7-43E2-AB2F-B90AF26B5E84}">
       <p14:sectionLst xmlns:p14="http://schemas.microsoft.com/office/powerpoint/2010/main">
-        <p14:section name="Apertura" id="{60ed819d-5cf3-f0d9-7389-49f22bd2869e}">
+        <p14:section name="Apertura" id="{3a38cc86-cf05-e9fb-a4ef-23a512308108}">
           <p14:sldIdLst>
             <p14:sldId id="256"/>
             <p14:sldId id="257"/>
           </p14:sldIdLst>
         </p14:section>
-        <p14:section name="Spiegazione" id="{1225102d-2042-a945-dae1-9da7f6fc8097}">
+        <p14:section name="Spiegazione" id="{cf0d9cdd-4781-96b3-e551-4e4b7564b4e5}">
           <p14:sldIdLst>
             <p14:sldId id="258"/>
             <p14:sldId id="259"/>
@@ -136,16 +137,17 @@
             <p14:sldId id="264"/>
             <p14:sldId id="265"/>
             <p14:sldId id="266"/>
-          </p14:sldIdLst>
-        </p14:section>
-        <p14:section name="Task" id="{8a6eb5d2-4bdf-c282-8f07-de1057aceae3}">
-          <p14:sldIdLst>
             <p14:sldId id="267"/>
           </p14:sldIdLst>
         </p14:section>
-        <p14:section name="Chiusura" id="{d1ad9fb2-fd71-6fd7-777f-da0b673fe5a5}">
+        <p14:section name="Task" id="{31601de4-f41f-7268-df87-cf496545d941}">
           <p14:sldIdLst>
             <p14:sldId id="268"/>
+          </p14:sldIdLst>
+        </p14:section>
+        <p14:section name="Chiusura" id="{9a63ecdf-81fd-f530-63cc-7044e8a69550}">
+          <p14:sldIdLst>
+            <p14:sldId id="269"/>
           </p14:sldIdLst>
         </p14:section>
       </p14:sectionLst>
@@ -640,7 +642,7 @@
           <a:p>
             <a:r>
               <a:rPr lang="en-US" dirty="0"/>
-              <a:t>DEMO: aprire la pagina della documentazione dei DataFrame, mostrare l'elenco dei metodi, cliccarne uno (head) e far vedere la struttura: parametri, cosa restituisce, esempi in fondo. Gli esempi in fondo sono la parte più utile.</a:t>
+              <a:t>Concetto astratto, tenerlo leggero. In Colab: scrivere df. e premere Tab per vedere tutto quello che si può chiedere.</a:t>
             </a:r>
             <a:endParaRPr lang="en-US" dirty="0"/>
           </a:p>
@@ -728,7 +730,7 @@
           <a:p>
             <a:r>
               <a:rPr lang="en-US" dirty="0"/>
-              <a:t>Non serve memorizzare i comandi: serve ricordarsi le domande. I comandi si cercano.</a:t>
+              <a:t>DEMO: aprire la pagina della documentazione dei DataFrame, mostrare l'elenco dei metodi, cliccarne uno (head) e far vedere la struttura: parametri, cosa restituisce, esempi in fondo. Gli esempi in fondo sono la parte più utile.</a:t>
             </a:r>
             <a:endParaRPr lang="en-US" dirty="0"/>
           </a:p>
@@ -816,7 +818,7 @@
           <a:p>
             <a:r>
               <a:rPr lang="en-US" dirty="0"/>
-              <a:t>Durante il task: segnarsi chi trova i problemi e come. Molti al passo 7 vedranno 'n.d.' come massimo e non si faranno domande: è il punto del debrief.</a:t>
+              <a:t>Non serve memorizzare i comandi: serve ricordarsi le domande. I comandi si cercano.</a:t>
             </a:r>
             <a:endParaRPr lang="en-US" dirty="0"/>
           </a:p>
@@ -904,7 +906,7 @@
           <a:p>
             <a:r>
               <a:rPr lang="en-US" dirty="0"/>
-              <a:t>Le lezioni Kaggle: Creating, Reading and Writing; Indexing, Selecting &amp; Assigning.</a:t>
+              <a:t>Durante il task: segnarsi chi trova i problemi e come. Molti al passo 7 vedranno 'n.d.' come massimo e non si faranno domande: è il punto del debrief.</a:t>
             </a:r>
             <a:endParaRPr lang="en-US" dirty="0"/>
           </a:p>
@@ -928,6 +930,94 @@
             <a:fld id="{F7021451-1387-4CA6-816F-3879F97B5CBC}" type="slidenum">
               <a:rPr lang="en-US"/>
               <a:t>13</a:t>
+            </a:fld>
+            <a:endParaRPr lang="en-US"/>
+          </a:p>
+        </p:txBody>
+      </p:sp>
+    </p:spTree>
+    <p:extLst>
+      <p:ext uri="{BB962C8B-B14F-4D97-AF65-F5344CB8AC3E}">
+        <p14:creationId xmlns:p14="http://schemas.microsoft.com/office/powerpoint/2010/main" val="1024086991"/>
+      </p:ext>
+    </p:extLst>
+  </p:cSld>
+  <p:clrMapOvr>
+    <a:masterClrMapping/>
+  </p:clrMapOvr>
+</p:notes>
+</file>
+
+<file path=ppt/notesSlides/notesSlide14.xml><?xml version="1.0" encoding="utf-8"?>
+<p:notes xmlns:a="http://schemas.openxmlformats.org/drawingml/2006/main" xmlns:r="http://schemas.openxmlformats.org/officeDocument/2006/relationships" xmlns:p="http://schemas.openxmlformats.org/presentationml/2006/main">
+  <p:cSld>
+    <p:spTree>
+      <p:nvGrpSpPr>
+        <p:cNvPr id="1" name=""/>
+        <p:cNvGrpSpPr/>
+        <p:nvPr/>
+      </p:nvGrpSpPr>
+      <p:grpSpPr>
+        <a:xfrm>
+          <a:off x="0" y="0"/>
+          <a:ext cx="0" cy="0"/>
+          <a:chOff x="0" y="0"/>
+          <a:chExt cx="0" cy="0"/>
+        </a:xfrm>
+      </p:grpSpPr>
+      <p:sp>
+        <p:nvSpPr>
+          <p:cNvPr id="2" name="Slide Image Placeholder 1"/>
+          <p:cNvSpPr>
+            <a:spLocks noGrp="1" noRot="1" noChangeAspect="1"/>
+          </p:cNvSpPr>
+          <p:nvPr>
+            <p:ph type="sldImg"/>
+          </p:nvPr>
+        </p:nvSpPr>
+        <p:spPr/>
+      </p:sp>
+      <p:sp>
+        <p:nvSpPr>
+          <p:cNvPr id="3" name="Notes Placeholder 2"/>
+          <p:cNvSpPr>
+            <a:spLocks noGrp="1"/>
+          </p:cNvSpPr>
+          <p:nvPr>
+            <p:ph type="body" idx="1"/>
+          </p:nvPr>
+        </p:nvSpPr>
+        <p:spPr/>
+        <p:txBody>
+          <a:bodyPr/>
+          <a:lstStyle/>
+          <a:p>
+            <a:r>
+              <a:rPr lang="en-US" dirty="0"/>
+              <a:t>Le lezioni Kaggle: Creating, Reading and Writing; Indexing, Selecting &amp; Assigning.</a:t>
+            </a:r>
+            <a:endParaRPr lang="en-US" dirty="0"/>
+          </a:p>
+        </p:txBody>
+      </p:sp>
+      <p:sp>
+        <p:nvSpPr>
+          <p:cNvPr id="4" name="Slide Number Placeholder 3"/>
+          <p:cNvSpPr>
+            <a:spLocks noGrp="1"/>
+          </p:cNvSpPr>
+          <p:nvPr>
+            <p:ph type="sldNum" sz="quarter" idx="10"/>
+          </p:nvPr>
+        </p:nvSpPr>
+        <p:spPr/>
+        <p:txBody>
+          <a:bodyPr/>
+          <a:lstStyle/>
+          <a:p>
+            <a:fld id="{F7021451-1387-4CA6-816F-3879F97B5CBC}" type="slidenum">
+              <a:rPr lang="en-US"/>
+              <a:t>14</a:t>
             </a:fld>
             <a:endParaRPr lang="en-US"/>
           </a:p>
@@ -1520,7 +1610,7 @@
           <a:p>
             <a:r>
               <a:rPr lang="en-US" dirty="0"/>
-              <a:t>La tabella nella slide è semplificata (colonne scelte per chiarezza). Dal vivo: aprire imprese.xlsx in Excel o Google Sheets accanto a Colab, selezionare A2:C6, poi eseguire df.iloc[0:5, 0:3]: sono le stesse celle. Con i tagli della slide precedente: il taglio 0 sta sotto l'intestazione, il taglio 5 dopo la quinta riga di dati.</a:t>
+              <a:t>Il passo serve raramente con i DataFrame (df.iloc[::100] per vedere una riga ogni 100 è il caso tipico), ma [::-1] per invertire è un classico che troveranno ovunque.</a:t>
             </a:r>
             <a:endParaRPr lang="en-US" dirty="0"/>
           </a:p>
@@ -1608,7 +1698,7 @@
           <a:p>
             <a:r>
               <a:rPr lang="en-US" dirty="0"/>
-              <a:t>Concetto astratto, tenerlo leggero. In Colab: scrivere df. e premere Tab per vedere tutto quello che si può chiedere.</a:t>
+              <a:t>La tabella nella slide è semplificata (colonne scelte per chiarezza). Dal vivo: aprire imprese.xlsx in Excel o Google Sheets accanto a Colab, selezionare A2:C6, poi eseguire df.iloc[0:5, 0:3]: sono le stesse celle. Con i tagli della slide precedente: il taglio 0 sta sotto l'intestazione, il taglio 5 dopo la quinta riga di dati.</a:t>
             </a:r>
             <a:endParaRPr lang="en-US" dirty="0"/>
           </a:p>
@@ -2527,7 +2617,7 @@
                   <a:srgbClr val="0F4C5C"/>
                 </a:solidFill>
               </a:rPr>
-              <a:t>Come scoprire cosa sa fare un oggetto</a:t>
+              <a:t>Fare domande a un oggetto</a:t>
             </a:r>
             <a:endParaRPr lang="en-US" sz="3600" dirty="0"/>
           </a:p>
@@ -2535,18 +2625,187 @@
       </p:sp>
       <p:sp>
         <p:nvSpPr>
-          <p:cNvPr id="3" name="Shape 1"/>
+          <p:cNvPr id="3" name="Text 1"/>
+          <p:cNvSpPr txBox="1"/>
+          <p:nvPr/>
+        </p:nvSpPr>
+        <p:spPr>
+          <a:xfrm>
+            <a:off x="548640" y="1645920"/>
+            <a:ext cx="5349240" cy="457200"/>
+          </a:xfrm>
+          <a:prstGeom prst="rect">
+            <a:avLst/>
+          </a:prstGeom>
+          <a:noFill/>
+          <a:ln/>
+        </p:spPr>
+        <p:txBody>
+          <a:bodyPr wrap="square" lIns="0" tIns="0" rIns="0" bIns="0" rtlCol="0" anchor="ctr"/>
+          <a:lstStyle/>
+          <a:p>
+            <a:pPr indent="0" marL="0">
+              <a:buNone/>
+            </a:pPr>
+            <a:r>
+              <a:rPr lang="en-US" sz="2600" b="1" dirty="0">
+                <a:solidFill>
+                  <a:srgbClr val="0F4C5C"/>
+                </a:solidFill>
+              </a:rPr>
+              <a:t>Metodo</a:t>
+            </a:r>
+            <a:endParaRPr lang="en-US" sz="2600" dirty="0"/>
+          </a:p>
+        </p:txBody>
+      </p:sp>
+      <p:sp>
+        <p:nvSpPr>
+          <p:cNvPr id="4" name="Text 2"/>
+          <p:cNvSpPr txBox="1"/>
+          <p:nvPr/>
+        </p:nvSpPr>
+        <p:spPr>
+          <a:xfrm>
+            <a:off x="548640" y="2103120"/>
+            <a:ext cx="5349240" cy="411480"/>
+          </a:xfrm>
+          <a:prstGeom prst="rect">
+            <a:avLst/>
+          </a:prstGeom>
+          <a:noFill/>
+          <a:ln/>
+        </p:spPr>
+        <p:txBody>
+          <a:bodyPr wrap="square" lIns="0" tIns="0" rIns="0" bIns="0" rtlCol="0" anchor="ctr"/>
+          <a:lstStyle/>
+          <a:p>
+            <a:pPr indent="0" marL="0">
+              <a:buNone/>
+            </a:pPr>
+            <a:r>
+              <a:rPr lang="en-US" sz="1800" dirty="0">
+                <a:solidFill>
+                  <a:srgbClr val="5C6F7B"/>
+                </a:solidFill>
+              </a:rPr>
+              <a:t>un'azione: ha le parentesi</a:t>
+            </a:r>
+            <a:endParaRPr lang="en-US" sz="1800" dirty="0"/>
+          </a:p>
+        </p:txBody>
+      </p:sp>
+      <p:sp>
+        <p:nvSpPr>
+          <p:cNvPr id="5" name="card-code"/>
           <p:cNvSpPr/>
           <p:nvPr/>
         </p:nvSpPr>
         <p:spPr>
           <a:xfrm>
-            <a:off x="548640" y="1737360"/>
-            <a:ext cx="3474720" cy="3108960"/>
+            <a:off x="548640" y="2697480"/>
+            <a:ext cx="5349240" cy="1188720"/>
           </a:xfrm>
           <a:prstGeom prst="roundRect">
             <a:avLst>
-              <a:gd name="adj" fmla="val 3529"/>
+              <a:gd name="adj" fmla="val 9231"/>
+            </a:avLst>
+          </a:prstGeom>
+          <a:solidFill>
+            <a:srgbClr val="1F2A30"/>
+          </a:solidFill>
+          <a:ln/>
+        </p:spPr>
+      </p:sp>
+      <p:sp>
+        <p:nvSpPr>
+          <p:cNvPr id="6" name="Text 4"/>
+          <p:cNvSpPr txBox="1"/>
+          <p:nvPr/>
+        </p:nvSpPr>
+        <p:spPr>
+          <a:xfrm>
+            <a:off x="777240" y="2834640"/>
+            <a:ext cx="1828800" cy="274320"/>
+          </a:xfrm>
+          <a:prstGeom prst="rect">
+            <a:avLst/>
+          </a:prstGeom>
+          <a:noFill/>
+          <a:ln/>
+        </p:spPr>
+        <p:txBody>
+          <a:bodyPr wrap="square" lIns="0" tIns="0" rIns="0" bIns="0" rtlCol="0" anchor="ctr"/>
+          <a:lstStyle/>
+          <a:p>
+            <a:pPr indent="0" marL="0">
+              <a:buNone/>
+            </a:pPr>
+            <a:r>
+              <a:rPr lang="en-US" sz="1100" b="1" spc="200" kern="0" dirty="0">
+                <a:solidFill>
+                  <a:srgbClr val="E09F3E"/>
+                </a:solidFill>
+              </a:rPr>
+              <a:t>PYTHON</a:t>
+            </a:r>
+            <a:endParaRPr lang="en-US" sz="1100" dirty="0"/>
+          </a:p>
+        </p:txBody>
+      </p:sp>
+      <p:sp>
+        <p:nvSpPr>
+          <p:cNvPr id="7" name="Text 5"/>
+          <p:cNvSpPr txBox="1"/>
+          <p:nvPr/>
+        </p:nvSpPr>
+        <p:spPr>
+          <a:xfrm>
+            <a:off x="777240" y="3154680"/>
+            <a:ext cx="4892040" cy="594360"/>
+          </a:xfrm>
+          <a:prstGeom prst="rect">
+            <a:avLst/>
+          </a:prstGeom>
+          <a:noFill/>
+          <a:ln/>
+        </p:spPr>
+        <p:txBody>
+          <a:bodyPr wrap="square" lIns="0" tIns="0" rIns="0" bIns="0" rtlCol="0" anchor="t"/>
+          <a:lstStyle/>
+          <a:p>
+            <a:pPr indent="0" marL="0">
+              <a:buNone/>
+            </a:pPr>
+            <a:r>
+              <a:rPr lang="en-US" sz="2200" dirty="0">
+                <a:solidFill>
+                  <a:srgbClr val="FFFFFF"/>
+                </a:solidFill>
+                <a:latin typeface="Courier New" pitchFamily="34" charset="0"/>
+                <a:ea typeface="Courier New" pitchFamily="34" charset="-122"/>
+                <a:cs typeface="Courier New" pitchFamily="34" charset="-120"/>
+              </a:rPr>
+              <a:t>df.head(3)</a:t>
+            </a:r>
+            <a:endParaRPr lang="en-US" sz="2200" dirty="0"/>
+          </a:p>
+        </p:txBody>
+      </p:sp>
+      <p:sp>
+        <p:nvSpPr>
+          <p:cNvPr id="8" name="card-out"/>
+          <p:cNvSpPr/>
+          <p:nvPr/>
+        </p:nvSpPr>
+        <p:spPr>
+          <a:xfrm>
+            <a:off x="548640" y="4069080"/>
+            <a:ext cx="5349240" cy="1188720"/>
+          </a:xfrm>
+          <a:prstGeom prst="roundRect">
+            <a:avLst>
+              <a:gd name="adj" fmla="val 9231"/>
             </a:avLst>
           </a:prstGeom>
           <a:solidFill>
@@ -2557,58 +2816,14 @@
       </p:sp>
       <p:sp>
         <p:nvSpPr>
-          <p:cNvPr id="4" name="Shape 2"/>
-          <p:cNvSpPr/>
-          <p:nvPr/>
-        </p:nvSpPr>
-        <p:spPr>
-          <a:xfrm>
-            <a:off x="868680" y="2057400"/>
-            <a:ext cx="914400" cy="914400"/>
-          </a:xfrm>
-          <a:prstGeom prst="ellipse">
-            <a:avLst/>
-          </a:prstGeom>
-          <a:solidFill>
-            <a:srgbClr val="FFFFFF"/>
-          </a:solidFill>
-          <a:ln/>
-        </p:spPr>
-      </p:sp>
-      <p:pic>
-        <p:nvPicPr>
-          <p:cNvPr id="5" name="Image 0" descr="preencoded.png">    </p:cNvPr>
-          <p:cNvPicPr>
-            <a:picLocks noChangeAspect="1"/>
-          </p:cNvPicPr>
-          <p:nvPr/>
-        </p:nvPicPr>
-        <p:blipFill>
-          <a:blip r:embed="rId1"/>
-          <a:stretch>
-            <a:fillRect/>
-          </a:stretch>
-        </p:blipFill>
-        <p:spPr>
-          <a:xfrm>
-            <a:off x="1115568" y="2304288"/>
-            <a:ext cx="420624" cy="420624"/>
-          </a:xfrm>
-          <a:prstGeom prst="rect">
-            <a:avLst/>
-          </a:prstGeom>
-        </p:spPr>
-      </p:pic>
-      <p:sp>
-        <p:nvSpPr>
-          <p:cNvPr id="6" name="Text 3"/>
-          <p:cNvSpPr txBox="1"/>
-          <p:nvPr/>
-        </p:nvSpPr>
-        <p:spPr>
-          <a:xfrm>
-            <a:off x="868680" y="3200400"/>
-            <a:ext cx="2834640" cy="502920"/>
+          <p:cNvPr id="9" name="Text 7"/>
+          <p:cNvSpPr txBox="1"/>
+          <p:nvPr/>
+        </p:nvSpPr>
+        <p:spPr>
+          <a:xfrm>
+            <a:off x="777240" y="4206240"/>
+            <a:ext cx="1828800" cy="274320"/>
           </a:xfrm>
           <a:prstGeom prst="rect">
             <a:avLst/>
@@ -2624,7 +2839,43 @@
               <a:buNone/>
             </a:pPr>
             <a:r>
-              <a:rPr lang="en-US" sz="2200" b="1" dirty="0">
+              <a:rPr lang="en-US" sz="1100" b="1" spc="200" kern="0" dirty="0">
+                <a:solidFill>
+                  <a:srgbClr val="5C6F7B"/>
+                </a:solidFill>
+              </a:rPr>
+              <a:t>OUTPUT</a:t>
+            </a:r>
+            <a:endParaRPr lang="en-US" sz="1100" dirty="0"/>
+          </a:p>
+        </p:txBody>
+      </p:sp>
+      <p:sp>
+        <p:nvSpPr>
+          <p:cNvPr id="10" name="Text 8"/>
+          <p:cNvSpPr txBox="1"/>
+          <p:nvPr/>
+        </p:nvSpPr>
+        <p:spPr>
+          <a:xfrm>
+            <a:off x="777240" y="4526280"/>
+            <a:ext cx="4892040" cy="594360"/>
+          </a:xfrm>
+          <a:prstGeom prst="rect">
+            <a:avLst/>
+          </a:prstGeom>
+          <a:noFill/>
+          <a:ln/>
+        </p:spPr>
+        <p:txBody>
+          <a:bodyPr wrap="square" lIns="0" tIns="0" rIns="0" bIns="0" rtlCol="0" anchor="t"/>
+          <a:lstStyle/>
+          <a:p>
+            <a:pPr indent="0" marL="0">
+              <a:buNone/>
+            </a:pPr>
+            <a:r>
+              <a:rPr lang="en-US" sz="2000" dirty="0">
                 <a:solidFill>
                   <a:srgbClr val="1F2A30"/>
                 </a:solidFill>
@@ -2632,62 +2883,195 @@
                 <a:ea typeface="Courier New" pitchFamily="34" charset="-122"/>
                 <a:cs typeface="Courier New" pitchFamily="34" charset="-120"/>
               </a:rPr>
-              <a:t>df. + Tab</a:t>
-            </a:r>
-            <a:endParaRPr lang="en-US" sz="2200" dirty="0"/>
-          </a:p>
-        </p:txBody>
-      </p:sp>
-      <p:sp>
-        <p:nvSpPr>
-          <p:cNvPr id="7" name="Text 4"/>
-          <p:cNvSpPr txBox="1"/>
-          <p:nvPr/>
-        </p:nvSpPr>
-        <p:spPr>
-          <a:xfrm>
-            <a:off x="868680" y="3749040"/>
-            <a:ext cx="2834640" cy="914400"/>
-          </a:xfrm>
-          <a:prstGeom prst="rect">
-            <a:avLst/>
-          </a:prstGeom>
-          <a:noFill/>
-          <a:ln/>
-        </p:spPr>
-        <p:txBody>
-          <a:bodyPr wrap="square" lIns="0" tIns="0" rIns="0" bIns="0" rtlCol="0" anchor="t"/>
+              <a:t>le prime 3 righe</a:t>
+            </a:r>
+            <a:endParaRPr lang="en-US" sz="2000" dirty="0"/>
+          </a:p>
+        </p:txBody>
+      </p:sp>
+      <p:sp>
+        <p:nvSpPr>
+          <p:cNvPr id="11" name="Text 9"/>
+          <p:cNvSpPr txBox="1"/>
+          <p:nvPr/>
+        </p:nvSpPr>
+        <p:spPr>
+          <a:xfrm>
+            <a:off x="6263640" y="1645920"/>
+            <a:ext cx="5349240" cy="457200"/>
+          </a:xfrm>
+          <a:prstGeom prst="rect">
+            <a:avLst/>
+          </a:prstGeom>
+          <a:noFill/>
+          <a:ln/>
+        </p:spPr>
+        <p:txBody>
+          <a:bodyPr wrap="square" lIns="0" tIns="0" rIns="0" bIns="0" rtlCol="0" anchor="ctr"/>
           <a:lstStyle/>
           <a:p>
             <a:pPr indent="0" marL="0">
               <a:buNone/>
             </a:pPr>
             <a:r>
-              <a:rPr lang="en-US" sz="1600" dirty="0">
+              <a:rPr lang="en-US" sz="2600" b="1" dirty="0">
+                <a:solidFill>
+                  <a:srgbClr val="0F4C5C"/>
+                </a:solidFill>
+              </a:rPr>
+              <a:t>Attributo</a:t>
+            </a:r>
+            <a:endParaRPr lang="en-US" sz="2600" dirty="0"/>
+          </a:p>
+        </p:txBody>
+      </p:sp>
+      <p:sp>
+        <p:nvSpPr>
+          <p:cNvPr id="12" name="Text 10"/>
+          <p:cNvSpPr txBox="1"/>
+          <p:nvPr/>
+        </p:nvSpPr>
+        <p:spPr>
+          <a:xfrm>
+            <a:off x="6263640" y="2103120"/>
+            <a:ext cx="5349240" cy="411480"/>
+          </a:xfrm>
+          <a:prstGeom prst="rect">
+            <a:avLst/>
+          </a:prstGeom>
+          <a:noFill/>
+          <a:ln/>
+        </p:spPr>
+        <p:txBody>
+          <a:bodyPr wrap="square" lIns="0" tIns="0" rIns="0" bIns="0" rtlCol="0" anchor="ctr"/>
+          <a:lstStyle/>
+          <a:p>
+            <a:pPr indent="0" marL="0">
+              <a:buNone/>
+            </a:pPr>
+            <a:r>
+              <a:rPr lang="en-US" sz="1800" dirty="0">
                 <a:solidFill>
                   <a:srgbClr val="5C6F7B"/>
                 </a:solidFill>
               </a:rPr>
-              <a:t>In Colab: l'elenco di tutto quello che puoi chiedere</a:t>
-            </a:r>
-            <a:endParaRPr lang="en-US" sz="1600" dirty="0"/>
-          </a:p>
-        </p:txBody>
-      </p:sp>
-      <p:sp>
-        <p:nvSpPr>
-          <p:cNvPr id="8" name="Shape 5"/>
+              <a:t>un'informazione: niente parentesi</a:t>
+            </a:r>
+            <a:endParaRPr lang="en-US" sz="1800" dirty="0"/>
+          </a:p>
+        </p:txBody>
+      </p:sp>
+      <p:sp>
+        <p:nvSpPr>
+          <p:cNvPr id="13" name="card-code"/>
           <p:cNvSpPr/>
           <p:nvPr/>
         </p:nvSpPr>
         <p:spPr>
           <a:xfrm>
-            <a:off x="4343400" y="1737360"/>
-            <a:ext cx="3474720" cy="3108960"/>
+            <a:off x="6263640" y="2697480"/>
+            <a:ext cx="5349240" cy="1188720"/>
           </a:xfrm>
           <a:prstGeom prst="roundRect">
             <a:avLst>
-              <a:gd name="adj" fmla="val 3529"/>
+              <a:gd name="adj" fmla="val 9231"/>
+            </a:avLst>
+          </a:prstGeom>
+          <a:solidFill>
+            <a:srgbClr val="1F2A30"/>
+          </a:solidFill>
+          <a:ln/>
+        </p:spPr>
+      </p:sp>
+      <p:sp>
+        <p:nvSpPr>
+          <p:cNvPr id="14" name="Text 12"/>
+          <p:cNvSpPr txBox="1"/>
+          <p:nvPr/>
+        </p:nvSpPr>
+        <p:spPr>
+          <a:xfrm>
+            <a:off x="6492240" y="2834640"/>
+            <a:ext cx="1828800" cy="274320"/>
+          </a:xfrm>
+          <a:prstGeom prst="rect">
+            <a:avLst/>
+          </a:prstGeom>
+          <a:noFill/>
+          <a:ln/>
+        </p:spPr>
+        <p:txBody>
+          <a:bodyPr wrap="square" lIns="0" tIns="0" rIns="0" bIns="0" rtlCol="0" anchor="ctr"/>
+          <a:lstStyle/>
+          <a:p>
+            <a:pPr indent="0" marL="0">
+              <a:buNone/>
+            </a:pPr>
+            <a:r>
+              <a:rPr lang="en-US" sz="1100" b="1" spc="200" kern="0" dirty="0">
+                <a:solidFill>
+                  <a:srgbClr val="E09F3E"/>
+                </a:solidFill>
+              </a:rPr>
+              <a:t>PYTHON</a:t>
+            </a:r>
+            <a:endParaRPr lang="en-US" sz="1100" dirty="0"/>
+          </a:p>
+        </p:txBody>
+      </p:sp>
+      <p:sp>
+        <p:nvSpPr>
+          <p:cNvPr id="15" name="Text 13"/>
+          <p:cNvSpPr txBox="1"/>
+          <p:nvPr/>
+        </p:nvSpPr>
+        <p:spPr>
+          <a:xfrm>
+            <a:off x="6492240" y="3154680"/>
+            <a:ext cx="4892040" cy="594360"/>
+          </a:xfrm>
+          <a:prstGeom prst="rect">
+            <a:avLst/>
+          </a:prstGeom>
+          <a:noFill/>
+          <a:ln/>
+        </p:spPr>
+        <p:txBody>
+          <a:bodyPr wrap="square" lIns="0" tIns="0" rIns="0" bIns="0" rtlCol="0" anchor="t"/>
+          <a:lstStyle/>
+          <a:p>
+            <a:pPr indent="0" marL="0">
+              <a:buNone/>
+            </a:pPr>
+            <a:r>
+              <a:rPr lang="en-US" sz="2200" dirty="0">
+                <a:solidFill>
+                  <a:srgbClr val="FFFFFF"/>
+                </a:solidFill>
+                <a:latin typeface="Courier New" pitchFamily="34" charset="0"/>
+                <a:ea typeface="Courier New" pitchFamily="34" charset="-122"/>
+                <a:cs typeface="Courier New" pitchFamily="34" charset="-120"/>
+              </a:rPr>
+              <a:t>df.shape</a:t>
+            </a:r>
+            <a:endParaRPr lang="en-US" sz="2200" dirty="0"/>
+          </a:p>
+        </p:txBody>
+      </p:sp>
+      <p:sp>
+        <p:nvSpPr>
+          <p:cNvPr id="16" name="card-out"/>
+          <p:cNvSpPr/>
+          <p:nvPr/>
+        </p:nvSpPr>
+        <p:spPr>
+          <a:xfrm>
+            <a:off x="6263640" y="4069080"/>
+            <a:ext cx="5349240" cy="1188720"/>
+          </a:xfrm>
+          <a:prstGeom prst="roundRect">
+            <a:avLst>
+              <a:gd name="adj" fmla="val 9231"/>
             </a:avLst>
           </a:prstGeom>
           <a:solidFill>
@@ -2698,58 +3082,14 @@
       </p:sp>
       <p:sp>
         <p:nvSpPr>
-          <p:cNvPr id="9" name="Shape 6"/>
-          <p:cNvSpPr/>
-          <p:nvPr/>
-        </p:nvSpPr>
-        <p:spPr>
-          <a:xfrm>
-            <a:off x="4663440" y="2057400"/>
-            <a:ext cx="914400" cy="914400"/>
-          </a:xfrm>
-          <a:prstGeom prst="ellipse">
-            <a:avLst/>
-          </a:prstGeom>
-          <a:solidFill>
-            <a:srgbClr val="FFFFFF"/>
-          </a:solidFill>
-          <a:ln/>
-        </p:spPr>
-      </p:sp>
-      <p:pic>
-        <p:nvPicPr>
-          <p:cNvPr id="10" name="Image 1" descr="preencoded.png">    </p:cNvPr>
-          <p:cNvPicPr>
-            <a:picLocks noChangeAspect="1"/>
-          </p:cNvPicPr>
-          <p:nvPr/>
-        </p:nvPicPr>
-        <p:blipFill>
-          <a:blip r:embed="rId2"/>
-          <a:stretch>
-            <a:fillRect/>
-          </a:stretch>
-        </p:blipFill>
-        <p:spPr>
-          <a:xfrm>
-            <a:off x="4910328" y="2304288"/>
-            <a:ext cx="420624" cy="420624"/>
-          </a:xfrm>
-          <a:prstGeom prst="rect">
-            <a:avLst/>
-          </a:prstGeom>
-        </p:spPr>
-      </p:pic>
-      <p:sp>
-        <p:nvSpPr>
-          <p:cNvPr id="11" name="Text 7"/>
-          <p:cNvSpPr txBox="1"/>
-          <p:nvPr/>
-        </p:nvSpPr>
-        <p:spPr>
-          <a:xfrm>
-            <a:off x="4663440" y="3200400"/>
-            <a:ext cx="2834640" cy="502920"/>
+          <p:cNvPr id="17" name="Text 15"/>
+          <p:cNvSpPr txBox="1"/>
+          <p:nvPr/>
+        </p:nvSpPr>
+        <p:spPr>
+          <a:xfrm>
+            <a:off x="6492240" y="4206240"/>
+            <a:ext cx="1828800" cy="274320"/>
           </a:xfrm>
           <a:prstGeom prst="rect">
             <a:avLst/>
@@ -2765,7 +3105,43 @@
               <a:buNone/>
             </a:pPr>
             <a:r>
-              <a:rPr lang="en-US" sz="2200" b="1" dirty="0">
+              <a:rPr lang="en-US" sz="1100" b="1" spc="200" kern="0" dirty="0">
+                <a:solidFill>
+                  <a:srgbClr val="5C6F7B"/>
+                </a:solidFill>
+              </a:rPr>
+              <a:t>OUTPUT</a:t>
+            </a:r>
+            <a:endParaRPr lang="en-US" sz="1100" dirty="0"/>
+          </a:p>
+        </p:txBody>
+      </p:sp>
+      <p:sp>
+        <p:nvSpPr>
+          <p:cNvPr id="18" name="Text 16"/>
+          <p:cNvSpPr txBox="1"/>
+          <p:nvPr/>
+        </p:nvSpPr>
+        <p:spPr>
+          <a:xfrm>
+            <a:off x="6492240" y="4526280"/>
+            <a:ext cx="4892040" cy="594360"/>
+          </a:xfrm>
+          <a:prstGeom prst="rect">
+            <a:avLst/>
+          </a:prstGeom>
+          <a:noFill/>
+          <a:ln/>
+        </p:spPr>
+        <p:txBody>
+          <a:bodyPr wrap="square" lIns="0" tIns="0" rIns="0" bIns="0" rtlCol="0" anchor="t"/>
+          <a:lstStyle/>
+          <a:p>
+            <a:pPr indent="0" marL="0">
+              <a:buNone/>
+            </a:pPr>
+            <a:r>
+              <a:rPr lang="en-US" sz="2000" dirty="0">
                 <a:solidFill>
                   <a:srgbClr val="1F2A30"/>
                 </a:solidFill>
@@ -2773,217 +3149,43 @@
                 <a:ea typeface="Courier New" pitchFamily="34" charset="-122"/>
                 <a:cs typeface="Courier New" pitchFamily="34" charset="-120"/>
               </a:rPr>
-              <a:t>help(df.head)</a:t>
-            </a:r>
-            <a:endParaRPr lang="en-US" sz="2200" dirty="0"/>
-          </a:p>
-        </p:txBody>
-      </p:sp>
-      <p:sp>
-        <p:nvSpPr>
-          <p:cNvPr id="12" name="Text 8"/>
-          <p:cNvSpPr txBox="1"/>
-          <p:nvPr/>
-        </p:nvSpPr>
-        <p:spPr>
-          <a:xfrm>
-            <a:off x="4663440" y="3749040"/>
-            <a:ext cx="2834640" cy="914400"/>
-          </a:xfrm>
-          <a:prstGeom prst="rect">
-            <a:avLst/>
-          </a:prstGeom>
-          <a:noFill/>
-          <a:ln/>
-        </p:spPr>
-        <p:txBody>
-          <a:bodyPr wrap="square" lIns="0" tIns="0" rIns="0" bIns="0" rtlCol="0" anchor="t"/>
+              <a:t>(2515, 9)</a:t>
+            </a:r>
+            <a:endParaRPr lang="en-US" sz="2000" dirty="0"/>
+          </a:p>
+        </p:txBody>
+      </p:sp>
+      <p:sp>
+        <p:nvSpPr>
+          <p:cNvPr id="19" name="Text 17"/>
+          <p:cNvSpPr txBox="1"/>
+          <p:nvPr/>
+        </p:nvSpPr>
+        <p:spPr>
+          <a:xfrm>
+            <a:off x="548640" y="5532120"/>
+            <a:ext cx="11064240" cy="457200"/>
+          </a:xfrm>
+          <a:prstGeom prst="rect">
+            <a:avLst/>
+          </a:prstGeom>
+          <a:noFill/>
+          <a:ln/>
+        </p:spPr>
+        <p:txBody>
+          <a:bodyPr wrap="square" lIns="0" tIns="0" rIns="0" bIns="0" rtlCol="0" anchor="ctr"/>
           <a:lstStyle/>
           <a:p>
             <a:pPr indent="0" marL="0">
               <a:buNone/>
             </a:pPr>
             <a:r>
-              <a:rPr lang="en-US" sz="1600" dirty="0">
-                <a:solidFill>
-                  <a:srgbClr val="5C6F7B"/>
-                </a:solidFill>
-              </a:rPr>
-              <a:t>La spiegazione di un metodo, con esempi</a:t>
-            </a:r>
-            <a:endParaRPr lang="en-US" sz="1600" dirty="0"/>
-          </a:p>
-        </p:txBody>
-      </p:sp>
-      <p:sp>
-        <p:nvSpPr>
-          <p:cNvPr id="13" name="Shape 9"/>
-          <p:cNvSpPr/>
-          <p:nvPr/>
-        </p:nvSpPr>
-        <p:spPr>
-          <a:xfrm>
-            <a:off x="8138160" y="1737360"/>
-            <a:ext cx="3474720" cy="3108960"/>
-          </a:xfrm>
-          <a:prstGeom prst="roundRect">
-            <a:avLst>
-              <a:gd name="adj" fmla="val 3529"/>
-            </a:avLst>
-          </a:prstGeom>
-          <a:solidFill>
-            <a:srgbClr val="EEF3F4"/>
-          </a:solidFill>
-          <a:ln/>
-        </p:spPr>
-      </p:sp>
-      <p:sp>
-        <p:nvSpPr>
-          <p:cNvPr id="14" name="Shape 10"/>
-          <p:cNvSpPr/>
-          <p:nvPr/>
-        </p:nvSpPr>
-        <p:spPr>
-          <a:xfrm>
-            <a:off x="8458200" y="2057400"/>
-            <a:ext cx="914400" cy="914400"/>
-          </a:xfrm>
-          <a:prstGeom prst="ellipse">
-            <a:avLst/>
-          </a:prstGeom>
-          <a:solidFill>
-            <a:srgbClr val="FFFFFF"/>
-          </a:solidFill>
-          <a:ln/>
-        </p:spPr>
-      </p:sp>
-      <p:pic>
-        <p:nvPicPr>
-          <p:cNvPr id="15" name="Image 2" descr="preencoded.png">    </p:cNvPr>
-          <p:cNvPicPr>
-            <a:picLocks noChangeAspect="1"/>
-          </p:cNvPicPr>
-          <p:nvPr/>
-        </p:nvPicPr>
-        <p:blipFill>
-          <a:blip r:embed="rId3"/>
-          <a:stretch>
-            <a:fillRect/>
-          </a:stretch>
-        </p:blipFill>
-        <p:spPr>
-          <a:xfrm>
-            <a:off x="8705088" y="2304288"/>
-            <a:ext cx="420624" cy="420624"/>
-          </a:xfrm>
-          <a:prstGeom prst="rect">
-            <a:avLst/>
-          </a:prstGeom>
-        </p:spPr>
-      </p:pic>
-      <p:sp>
-        <p:nvSpPr>
-          <p:cNvPr id="16" name="Text 11"/>
-          <p:cNvSpPr txBox="1"/>
-          <p:nvPr/>
-        </p:nvSpPr>
-        <p:spPr>
-          <a:xfrm>
-            <a:off x="8458200" y="3200400"/>
-            <a:ext cx="2834640" cy="502920"/>
-          </a:xfrm>
-          <a:prstGeom prst="rect">
-            <a:avLst/>
-          </a:prstGeom>
-          <a:noFill/>
-          <a:ln/>
-        </p:spPr>
-        <p:txBody>
-          <a:bodyPr wrap="square" lIns="0" tIns="0" rIns="0" bIns="0" rtlCol="0" anchor="ctr"/>
-          <a:lstStyle/>
-          <a:p>
-            <a:pPr indent="0" marL="0">
-              <a:buNone/>
-            </a:pPr>
-            <a:r>
-              <a:rPr lang="en-US" sz="2200" b="1" dirty="0">
-                <a:solidFill>
-                  <a:srgbClr val="1F2A30"/>
-                </a:solidFill>
-              </a:rPr>
-              <a:t>La documentazione</a:t>
-            </a:r>
-            <a:endParaRPr lang="en-US" sz="2200" dirty="0"/>
-          </a:p>
-        </p:txBody>
-      </p:sp>
-      <p:sp>
-        <p:nvSpPr>
-          <p:cNvPr id="17" name="Text 12"/>
-          <p:cNvSpPr txBox="1"/>
-          <p:nvPr/>
-        </p:nvSpPr>
-        <p:spPr>
-          <a:xfrm>
-            <a:off x="8458200" y="3749040"/>
-            <a:ext cx="2834640" cy="914400"/>
-          </a:xfrm>
-          <a:prstGeom prst="rect">
-            <a:avLst/>
-          </a:prstGeom>
-          <a:noFill/>
-          <a:ln/>
-        </p:spPr>
-        <p:txBody>
-          <a:bodyPr wrap="square" lIns="0" tIns="0" rIns="0" bIns="0" rtlCol="0" anchor="t"/>
-          <a:lstStyle/>
-          <a:p>
-            <a:pPr indent="0" marL="0">
-              <a:buNone/>
-            </a:pPr>
-            <a:r>
-              <a:rPr lang="en-US" sz="1600" dirty="0">
-                <a:solidFill>
-                  <a:srgbClr val="5C6F7B"/>
-                </a:solidFill>
-              </a:rPr>
-              <a:t>pandas.pydata.org → API reference → DataFrame</a:t>
-            </a:r>
-            <a:endParaRPr lang="en-US" sz="1600" dirty="0"/>
-          </a:p>
-        </p:txBody>
-      </p:sp>
-      <p:sp>
-        <p:nvSpPr>
-          <p:cNvPr id="18" name="Text 13"/>
-          <p:cNvSpPr txBox="1"/>
-          <p:nvPr/>
-        </p:nvSpPr>
-        <p:spPr>
-          <a:xfrm>
-            <a:off x="548640" y="5257800"/>
-            <a:ext cx="11064240" cy="457200"/>
-          </a:xfrm>
-          <a:prstGeom prst="rect">
-            <a:avLst/>
-          </a:prstGeom>
-          <a:noFill/>
-          <a:ln/>
-        </p:spPr>
-        <p:txBody>
-          <a:bodyPr wrap="square" lIns="0" tIns="0" rIns="0" bIns="0" rtlCol="0" anchor="ctr"/>
-          <a:lstStyle/>
-          <a:p>
-            <a:pPr indent="0" marL="0">
-              <a:buNone/>
-            </a:pPr>
-            <a:r>
               <a:rPr lang="en-US" sz="1800" i="1" dirty="0">
                 <a:solidFill>
                   <a:srgbClr val="0F4C5C"/>
                 </a:solidFill>
               </a:rPr>
-              <a:t>Nessuno conosce tutti i metodi. Si cercano, ogni giorno, anche dopo anni.</a:t>
+              <a:t>df è un oggetto: dati, più tutte le cose che puoi chiedergli. Il punto le collega.</a:t>
             </a:r>
             <a:endParaRPr lang="en-US" sz="1800" dirty="0"/>
           </a:p>
@@ -3091,7 +3293,7 @@
                   <a:srgbClr val="0F4C5C"/>
                 </a:solidFill>
               </a:rPr>
-              <a:t>Le domande da fare sempre a un dataset</a:t>
+              <a:t>Come scoprire cosa sa fare un oggetto</a:t>
             </a:r>
             <a:endParaRPr lang="en-US" sz="3600" dirty="0"/>
           </a:p>
@@ -3106,11 +3308,11 @@
         <p:spPr>
           <a:xfrm>
             <a:off x="548640" y="1737360"/>
-            <a:ext cx="5440680" cy="1645920"/>
+            <a:ext cx="3474720" cy="3108960"/>
           </a:xfrm>
           <a:prstGeom prst="roundRect">
             <a:avLst>
-              <a:gd name="adj" fmla="val 6667"/>
+              <a:gd name="adj" fmla="val 3529"/>
             </a:avLst>
           </a:prstGeom>
           <a:solidFill>
@@ -3127,8 +3329,8 @@
         </p:nvSpPr>
         <p:spPr>
           <a:xfrm>
-            <a:off x="822960" y="2194560"/>
-            <a:ext cx="731520" cy="731520"/>
+            <a:off x="868680" y="2057400"/>
+            <a:ext cx="914400" cy="914400"/>
           </a:xfrm>
           <a:prstGeom prst="ellipse">
             <a:avLst/>
@@ -3139,52 +3341,40 @@
           <a:ln/>
         </p:spPr>
       </p:sp>
-      <p:sp>
-        <p:nvSpPr>
-          <p:cNvPr id="5" name="Text 3"/>
-          <p:cNvSpPr txBox="1"/>
-          <p:nvPr/>
-        </p:nvSpPr>
-        <p:spPr>
-          <a:xfrm>
-            <a:off x="822960" y="2194560"/>
-            <a:ext cx="731520" cy="731520"/>
-          </a:xfrm>
-          <a:prstGeom prst="rect">
-            <a:avLst/>
-          </a:prstGeom>
-          <a:noFill/>
-          <a:ln/>
-        </p:spPr>
-        <p:txBody>
-          <a:bodyPr wrap="square" lIns="0" tIns="0" rIns="0" bIns="0" rtlCol="0" anchor="ctr"/>
-          <a:lstStyle/>
-          <a:p>
-            <a:pPr algn="ctr" indent="0" marL="0">
-              <a:buNone/>
-            </a:pPr>
-            <a:r>
-              <a:rPr lang="en-US" sz="2080" b="1" dirty="0">
-                <a:solidFill>
-                  <a:srgbClr val="0F4C5C"/>
-                </a:solidFill>
-              </a:rPr>
-              <a:t>1</a:t>
-            </a:r>
-            <a:endParaRPr lang="en-US" sz="2080" dirty="0"/>
-          </a:p>
-        </p:txBody>
-      </p:sp>
-      <p:sp>
-        <p:nvSpPr>
-          <p:cNvPr id="6" name="Text 4"/>
-          <p:cNvSpPr txBox="1"/>
-          <p:nvPr/>
-        </p:nvSpPr>
-        <p:spPr>
-          <a:xfrm>
-            <a:off x="1828800" y="2057400"/>
-            <a:ext cx="3931920" cy="502920"/>
+      <p:pic>
+        <p:nvPicPr>
+          <p:cNvPr id="5" name="Image 0" descr="preencoded.png">    </p:cNvPr>
+          <p:cNvPicPr>
+            <a:picLocks noChangeAspect="1"/>
+          </p:cNvPicPr>
+          <p:nvPr/>
+        </p:nvPicPr>
+        <p:blipFill>
+          <a:blip r:embed="rId1"/>
+          <a:stretch>
+            <a:fillRect/>
+          </a:stretch>
+        </p:blipFill>
+        <p:spPr>
+          <a:xfrm>
+            <a:off x="1115568" y="2304288"/>
+            <a:ext cx="420624" cy="420624"/>
+          </a:xfrm>
+          <a:prstGeom prst="rect">
+            <a:avLst/>
+          </a:prstGeom>
+        </p:spPr>
+      </p:pic>
+      <p:sp>
+        <p:nvSpPr>
+          <p:cNvPr id="6" name="Text 3"/>
+          <p:cNvSpPr txBox="1"/>
+          <p:nvPr/>
+        </p:nvSpPr>
+        <p:spPr>
+          <a:xfrm>
+            <a:off x="868680" y="3200400"/>
+            <a:ext cx="2834640" cy="502920"/>
           </a:xfrm>
           <a:prstGeom prst="rect">
             <a:avLst/>
@@ -3200,70 +3390,70 @@
               <a:buNone/>
             </a:pPr>
             <a:r>
-              <a:rPr lang="en-US" sz="2100" b="1" dirty="0">
+              <a:rPr lang="en-US" sz="2200" b="1" dirty="0">
                 <a:solidFill>
                   <a:srgbClr val="1F2A30"/>
-                </a:solidFill>
-              </a:rPr>
-              <a:t>Quanto è grande?</a:t>
-            </a:r>
-            <a:endParaRPr lang="en-US" sz="2100" dirty="0"/>
-          </a:p>
-        </p:txBody>
-      </p:sp>
-      <p:sp>
-        <p:nvSpPr>
-          <p:cNvPr id="7" name="Text 5"/>
-          <p:cNvSpPr txBox="1"/>
-          <p:nvPr/>
-        </p:nvSpPr>
-        <p:spPr>
-          <a:xfrm>
-            <a:off x="1828800" y="2606040"/>
-            <a:ext cx="3931920" cy="457200"/>
-          </a:xfrm>
-          <a:prstGeom prst="rect">
-            <a:avLst/>
-          </a:prstGeom>
-          <a:noFill/>
-          <a:ln/>
-        </p:spPr>
-        <p:txBody>
-          <a:bodyPr wrap="square" lIns="0" tIns="0" rIns="0" bIns="0" rtlCol="0" anchor="ctr"/>
-          <a:lstStyle/>
-          <a:p>
-            <a:pPr indent="0" marL="0">
-              <a:buNone/>
-            </a:pPr>
-            <a:r>
-              <a:rPr lang="en-US" sz="1700" dirty="0">
-                <a:solidFill>
-                  <a:srgbClr val="0F4C5C"/>
                 </a:solidFill>
                 <a:latin typeface="Courier New" pitchFamily="34" charset="0"/>
                 <a:ea typeface="Courier New" pitchFamily="34" charset="-122"/>
                 <a:cs typeface="Courier New" pitchFamily="34" charset="-120"/>
               </a:rPr>
-              <a:t>df.shape</a:t>
-            </a:r>
-            <a:endParaRPr lang="en-US" sz="1700" dirty="0"/>
-          </a:p>
-        </p:txBody>
-      </p:sp>
-      <p:sp>
-        <p:nvSpPr>
-          <p:cNvPr id="8" name="Shape 6"/>
+              <a:t>df. + Tab</a:t>
+            </a:r>
+            <a:endParaRPr lang="en-US" sz="2200" dirty="0"/>
+          </a:p>
+        </p:txBody>
+      </p:sp>
+      <p:sp>
+        <p:nvSpPr>
+          <p:cNvPr id="7" name="Text 4"/>
+          <p:cNvSpPr txBox="1"/>
+          <p:nvPr/>
+        </p:nvSpPr>
+        <p:spPr>
+          <a:xfrm>
+            <a:off x="868680" y="3749040"/>
+            <a:ext cx="2834640" cy="914400"/>
+          </a:xfrm>
+          <a:prstGeom prst="rect">
+            <a:avLst/>
+          </a:prstGeom>
+          <a:noFill/>
+          <a:ln/>
+        </p:spPr>
+        <p:txBody>
+          <a:bodyPr wrap="square" lIns="0" tIns="0" rIns="0" bIns="0" rtlCol="0" anchor="t"/>
+          <a:lstStyle/>
+          <a:p>
+            <a:pPr indent="0" marL="0">
+              <a:buNone/>
+            </a:pPr>
+            <a:r>
+              <a:rPr lang="en-US" sz="1600" dirty="0">
+                <a:solidFill>
+                  <a:srgbClr val="5C6F7B"/>
+                </a:solidFill>
+              </a:rPr>
+              <a:t>In Colab: l'elenco di tutto quello che puoi chiedere</a:t>
+            </a:r>
+            <a:endParaRPr lang="en-US" sz="1600" dirty="0"/>
+          </a:p>
+        </p:txBody>
+      </p:sp>
+      <p:sp>
+        <p:nvSpPr>
+          <p:cNvPr id="8" name="Shape 5"/>
           <p:cNvSpPr/>
           <p:nvPr/>
         </p:nvSpPr>
         <p:spPr>
           <a:xfrm>
-            <a:off x="6172200" y="1737360"/>
-            <a:ext cx="5440680" cy="1645920"/>
+            <a:off x="4343400" y="1737360"/>
+            <a:ext cx="3474720" cy="3108960"/>
           </a:xfrm>
           <a:prstGeom prst="roundRect">
             <a:avLst>
-              <a:gd name="adj" fmla="val 6667"/>
+              <a:gd name="adj" fmla="val 3529"/>
             </a:avLst>
           </a:prstGeom>
           <a:solidFill>
@@ -3274,14 +3464,14 @@
       </p:sp>
       <p:sp>
         <p:nvSpPr>
-          <p:cNvPr id="9" name="Shape 7"/>
+          <p:cNvPr id="9" name="Shape 6"/>
           <p:cNvSpPr/>
           <p:nvPr/>
         </p:nvSpPr>
         <p:spPr>
           <a:xfrm>
-            <a:off x="6446520" y="2194560"/>
-            <a:ext cx="731520" cy="731520"/>
+            <a:off x="4663440" y="2057400"/>
+            <a:ext cx="914400" cy="914400"/>
           </a:xfrm>
           <a:prstGeom prst="ellipse">
             <a:avLst/>
@@ -3292,52 +3482,40 @@
           <a:ln/>
         </p:spPr>
       </p:sp>
-      <p:sp>
-        <p:nvSpPr>
-          <p:cNvPr id="10" name="Text 8"/>
-          <p:cNvSpPr txBox="1"/>
-          <p:nvPr/>
-        </p:nvSpPr>
-        <p:spPr>
-          <a:xfrm>
-            <a:off x="6446520" y="2194560"/>
-            <a:ext cx="731520" cy="731520"/>
-          </a:xfrm>
-          <a:prstGeom prst="rect">
-            <a:avLst/>
-          </a:prstGeom>
-          <a:noFill/>
-          <a:ln/>
-        </p:spPr>
-        <p:txBody>
-          <a:bodyPr wrap="square" lIns="0" tIns="0" rIns="0" bIns="0" rtlCol="0" anchor="ctr"/>
-          <a:lstStyle/>
-          <a:p>
-            <a:pPr algn="ctr" indent="0" marL="0">
-              <a:buNone/>
-            </a:pPr>
-            <a:r>
-              <a:rPr lang="en-US" sz="2080" b="1" dirty="0">
-                <a:solidFill>
-                  <a:srgbClr val="0F4C5C"/>
-                </a:solidFill>
-              </a:rPr>
-              <a:t>2</a:t>
-            </a:r>
-            <a:endParaRPr lang="en-US" sz="2080" dirty="0"/>
-          </a:p>
-        </p:txBody>
-      </p:sp>
-      <p:sp>
-        <p:nvSpPr>
-          <p:cNvPr id="11" name="Text 9"/>
-          <p:cNvSpPr txBox="1"/>
-          <p:nvPr/>
-        </p:nvSpPr>
-        <p:spPr>
-          <a:xfrm>
-            <a:off x="7452360" y="2057400"/>
-            <a:ext cx="3931920" cy="502920"/>
+      <p:pic>
+        <p:nvPicPr>
+          <p:cNvPr id="10" name="Image 1" descr="preencoded.png">    </p:cNvPr>
+          <p:cNvPicPr>
+            <a:picLocks noChangeAspect="1"/>
+          </p:cNvPicPr>
+          <p:nvPr/>
+        </p:nvPicPr>
+        <p:blipFill>
+          <a:blip r:embed="rId2"/>
+          <a:stretch>
+            <a:fillRect/>
+          </a:stretch>
+        </p:blipFill>
+        <p:spPr>
+          <a:xfrm>
+            <a:off x="4910328" y="2304288"/>
+            <a:ext cx="420624" cy="420624"/>
+          </a:xfrm>
+          <a:prstGeom prst="rect">
+            <a:avLst/>
+          </a:prstGeom>
+        </p:spPr>
+      </p:pic>
+      <p:sp>
+        <p:nvSpPr>
+          <p:cNvPr id="11" name="Text 7"/>
+          <p:cNvSpPr txBox="1"/>
+          <p:nvPr/>
+        </p:nvSpPr>
+        <p:spPr>
+          <a:xfrm>
+            <a:off x="4663440" y="3200400"/>
+            <a:ext cx="2834640" cy="502920"/>
           </a:xfrm>
           <a:prstGeom prst="rect">
             <a:avLst/>
@@ -3353,70 +3531,70 @@
               <a:buNone/>
             </a:pPr>
             <a:r>
-              <a:rPr lang="en-US" sz="2100" b="1" dirty="0">
+              <a:rPr lang="en-US" sz="2200" b="1" dirty="0">
                 <a:solidFill>
                   <a:srgbClr val="1F2A30"/>
-                </a:solidFill>
-              </a:rPr>
-              <a:t>Di che tipo sono le colonne?</a:t>
-            </a:r>
-            <a:endParaRPr lang="en-US" sz="2100" dirty="0"/>
-          </a:p>
-        </p:txBody>
-      </p:sp>
-      <p:sp>
-        <p:nvSpPr>
-          <p:cNvPr id="12" name="Text 10"/>
-          <p:cNvSpPr txBox="1"/>
-          <p:nvPr/>
-        </p:nvSpPr>
-        <p:spPr>
-          <a:xfrm>
-            <a:off x="7452360" y="2606040"/>
-            <a:ext cx="3931920" cy="457200"/>
-          </a:xfrm>
-          <a:prstGeom prst="rect">
-            <a:avLst/>
-          </a:prstGeom>
-          <a:noFill/>
-          <a:ln/>
-        </p:spPr>
-        <p:txBody>
-          <a:bodyPr wrap="square" lIns="0" tIns="0" rIns="0" bIns="0" rtlCol="0" anchor="ctr"/>
-          <a:lstStyle/>
-          <a:p>
-            <a:pPr indent="0" marL="0">
-              <a:buNone/>
-            </a:pPr>
-            <a:r>
-              <a:rPr lang="en-US" sz="1700" dirty="0">
-                <a:solidFill>
-                  <a:srgbClr val="0F4C5C"/>
                 </a:solidFill>
                 <a:latin typeface="Courier New" pitchFamily="34" charset="0"/>
                 <a:ea typeface="Courier New" pitchFamily="34" charset="-122"/>
                 <a:cs typeface="Courier New" pitchFamily="34" charset="-120"/>
               </a:rPr>
-              <a:t>df.dtypes</a:t>
-            </a:r>
-            <a:endParaRPr lang="en-US" sz="1700" dirty="0"/>
-          </a:p>
-        </p:txBody>
-      </p:sp>
-      <p:sp>
-        <p:nvSpPr>
-          <p:cNvPr id="13" name="Shape 11"/>
+              <a:t>help(df.head)</a:t>
+            </a:r>
+            <a:endParaRPr lang="en-US" sz="2200" dirty="0"/>
+          </a:p>
+        </p:txBody>
+      </p:sp>
+      <p:sp>
+        <p:nvSpPr>
+          <p:cNvPr id="12" name="Text 8"/>
+          <p:cNvSpPr txBox="1"/>
+          <p:nvPr/>
+        </p:nvSpPr>
+        <p:spPr>
+          <a:xfrm>
+            <a:off x="4663440" y="3749040"/>
+            <a:ext cx="2834640" cy="914400"/>
+          </a:xfrm>
+          <a:prstGeom prst="rect">
+            <a:avLst/>
+          </a:prstGeom>
+          <a:noFill/>
+          <a:ln/>
+        </p:spPr>
+        <p:txBody>
+          <a:bodyPr wrap="square" lIns="0" tIns="0" rIns="0" bIns="0" rtlCol="0" anchor="t"/>
+          <a:lstStyle/>
+          <a:p>
+            <a:pPr indent="0" marL="0">
+              <a:buNone/>
+            </a:pPr>
+            <a:r>
+              <a:rPr lang="en-US" sz="1600" dirty="0">
+                <a:solidFill>
+                  <a:srgbClr val="5C6F7B"/>
+                </a:solidFill>
+              </a:rPr>
+              <a:t>La spiegazione di un metodo, con esempi</a:t>
+            </a:r>
+            <a:endParaRPr lang="en-US" sz="1600" dirty="0"/>
+          </a:p>
+        </p:txBody>
+      </p:sp>
+      <p:sp>
+        <p:nvSpPr>
+          <p:cNvPr id="13" name="Shape 9"/>
           <p:cNvSpPr/>
           <p:nvPr/>
         </p:nvSpPr>
         <p:spPr>
           <a:xfrm>
-            <a:off x="548640" y="3657600"/>
-            <a:ext cx="5440680" cy="1645920"/>
+            <a:off x="8138160" y="1737360"/>
+            <a:ext cx="3474720" cy="3108960"/>
           </a:xfrm>
           <a:prstGeom prst="roundRect">
             <a:avLst>
-              <a:gd name="adj" fmla="val 6667"/>
+              <a:gd name="adj" fmla="val 3529"/>
             </a:avLst>
           </a:prstGeom>
           <a:solidFill>
@@ -3427,14 +3605,14 @@
       </p:sp>
       <p:sp>
         <p:nvSpPr>
-          <p:cNvPr id="14" name="Shape 12"/>
+          <p:cNvPr id="14" name="Shape 10"/>
           <p:cNvSpPr/>
           <p:nvPr/>
         </p:nvSpPr>
         <p:spPr>
           <a:xfrm>
-            <a:off x="822960" y="4114800"/>
-            <a:ext cx="731520" cy="731520"/>
+            <a:off x="8458200" y="2057400"/>
+            <a:ext cx="914400" cy="914400"/>
           </a:xfrm>
           <a:prstGeom prst="ellipse">
             <a:avLst/>
@@ -3445,301 +3623,133 @@
           <a:ln/>
         </p:spPr>
       </p:sp>
-      <p:sp>
-        <p:nvSpPr>
-          <p:cNvPr id="15" name="Text 13"/>
-          <p:cNvSpPr txBox="1"/>
-          <p:nvPr/>
-        </p:nvSpPr>
-        <p:spPr>
-          <a:xfrm>
-            <a:off x="822960" y="4114800"/>
-            <a:ext cx="731520" cy="731520"/>
-          </a:xfrm>
-          <a:prstGeom prst="rect">
-            <a:avLst/>
-          </a:prstGeom>
-          <a:noFill/>
-          <a:ln/>
-        </p:spPr>
-        <p:txBody>
-          <a:bodyPr wrap="square" lIns="0" tIns="0" rIns="0" bIns="0" rtlCol="0" anchor="ctr"/>
-          <a:lstStyle/>
-          <a:p>
-            <a:pPr algn="ctr" indent="0" marL="0">
-              <a:buNone/>
-            </a:pPr>
-            <a:r>
-              <a:rPr lang="en-US" sz="2080" b="1" dirty="0">
+      <p:pic>
+        <p:nvPicPr>
+          <p:cNvPr id="15" name="Image 2" descr="preencoded.png">    </p:cNvPr>
+          <p:cNvPicPr>
+            <a:picLocks noChangeAspect="1"/>
+          </p:cNvPicPr>
+          <p:nvPr/>
+        </p:nvPicPr>
+        <p:blipFill>
+          <a:blip r:embed="rId3"/>
+          <a:stretch>
+            <a:fillRect/>
+          </a:stretch>
+        </p:blipFill>
+        <p:spPr>
+          <a:xfrm>
+            <a:off x="8705088" y="2304288"/>
+            <a:ext cx="420624" cy="420624"/>
+          </a:xfrm>
+          <a:prstGeom prst="rect">
+            <a:avLst/>
+          </a:prstGeom>
+        </p:spPr>
+      </p:pic>
+      <p:sp>
+        <p:nvSpPr>
+          <p:cNvPr id="16" name="Text 11"/>
+          <p:cNvSpPr txBox="1"/>
+          <p:nvPr/>
+        </p:nvSpPr>
+        <p:spPr>
+          <a:xfrm>
+            <a:off x="8458200" y="3200400"/>
+            <a:ext cx="2834640" cy="502920"/>
+          </a:xfrm>
+          <a:prstGeom prst="rect">
+            <a:avLst/>
+          </a:prstGeom>
+          <a:noFill/>
+          <a:ln/>
+        </p:spPr>
+        <p:txBody>
+          <a:bodyPr wrap="square" lIns="0" tIns="0" rIns="0" bIns="0" rtlCol="0" anchor="ctr"/>
+          <a:lstStyle/>
+          <a:p>
+            <a:pPr indent="0" marL="0">
+              <a:buNone/>
+            </a:pPr>
+            <a:r>
+              <a:rPr lang="en-US" sz="2200" b="1" dirty="0">
+                <a:solidFill>
+                  <a:srgbClr val="1F2A30"/>
+                </a:solidFill>
+              </a:rPr>
+              <a:t>La documentazione</a:t>
+            </a:r>
+            <a:endParaRPr lang="en-US" sz="2200" dirty="0"/>
+          </a:p>
+        </p:txBody>
+      </p:sp>
+      <p:sp>
+        <p:nvSpPr>
+          <p:cNvPr id="17" name="Text 12"/>
+          <p:cNvSpPr txBox="1"/>
+          <p:nvPr/>
+        </p:nvSpPr>
+        <p:spPr>
+          <a:xfrm>
+            <a:off x="8458200" y="3749040"/>
+            <a:ext cx="2834640" cy="914400"/>
+          </a:xfrm>
+          <a:prstGeom prst="rect">
+            <a:avLst/>
+          </a:prstGeom>
+          <a:noFill/>
+          <a:ln/>
+        </p:spPr>
+        <p:txBody>
+          <a:bodyPr wrap="square" lIns="0" tIns="0" rIns="0" bIns="0" rtlCol="0" anchor="t"/>
+          <a:lstStyle/>
+          <a:p>
+            <a:pPr indent="0" marL="0">
+              <a:buNone/>
+            </a:pPr>
+            <a:r>
+              <a:rPr lang="en-US" sz="1600" dirty="0">
+                <a:solidFill>
+                  <a:srgbClr val="5C6F7B"/>
+                </a:solidFill>
+              </a:rPr>
+              <a:t>pandas.pydata.org → API reference → DataFrame</a:t>
+            </a:r>
+            <a:endParaRPr lang="en-US" sz="1600" dirty="0"/>
+          </a:p>
+        </p:txBody>
+      </p:sp>
+      <p:sp>
+        <p:nvSpPr>
+          <p:cNvPr id="18" name="Text 13"/>
+          <p:cNvSpPr txBox="1"/>
+          <p:nvPr/>
+        </p:nvSpPr>
+        <p:spPr>
+          <a:xfrm>
+            <a:off x="548640" y="5257800"/>
+            <a:ext cx="11064240" cy="457200"/>
+          </a:xfrm>
+          <a:prstGeom prst="rect">
+            <a:avLst/>
+          </a:prstGeom>
+          <a:noFill/>
+          <a:ln/>
+        </p:spPr>
+        <p:txBody>
+          <a:bodyPr wrap="square" lIns="0" tIns="0" rIns="0" bIns="0" rtlCol="0" anchor="ctr"/>
+          <a:lstStyle/>
+          <a:p>
+            <a:pPr indent="0" marL="0">
+              <a:buNone/>
+            </a:pPr>
+            <a:r>
+              <a:rPr lang="en-US" sz="1800" i="1" dirty="0">
                 <a:solidFill>
                   <a:srgbClr val="0F4C5C"/>
                 </a:solidFill>
               </a:rPr>
-              <a:t>3</a:t>
-            </a:r>
-            <a:endParaRPr lang="en-US" sz="2080" dirty="0"/>
-          </a:p>
-        </p:txBody>
-      </p:sp>
-      <p:sp>
-        <p:nvSpPr>
-          <p:cNvPr id="16" name="Text 14"/>
-          <p:cNvSpPr txBox="1"/>
-          <p:nvPr/>
-        </p:nvSpPr>
-        <p:spPr>
-          <a:xfrm>
-            <a:off x="1828800" y="3977640"/>
-            <a:ext cx="3931920" cy="502920"/>
-          </a:xfrm>
-          <a:prstGeom prst="rect">
-            <a:avLst/>
-          </a:prstGeom>
-          <a:noFill/>
-          <a:ln/>
-        </p:spPr>
-        <p:txBody>
-          <a:bodyPr wrap="square" lIns="0" tIns="0" rIns="0" bIns="0" rtlCol="0" anchor="ctr"/>
-          <a:lstStyle/>
-          <a:p>
-            <a:pPr indent="0" marL="0">
-              <a:buNone/>
-            </a:pPr>
-            <a:r>
-              <a:rPr lang="en-US" sz="2100" b="1" dirty="0">
-                <a:solidFill>
-                  <a:srgbClr val="1F2A30"/>
-                </a:solidFill>
-              </a:rPr>
-              <a:t>Quanti valori diversi?</a:t>
-            </a:r>
-            <a:endParaRPr lang="en-US" sz="2100" dirty="0"/>
-          </a:p>
-        </p:txBody>
-      </p:sp>
-      <p:sp>
-        <p:nvSpPr>
-          <p:cNvPr id="17" name="Text 15"/>
-          <p:cNvSpPr txBox="1"/>
-          <p:nvPr/>
-        </p:nvSpPr>
-        <p:spPr>
-          <a:xfrm>
-            <a:off x="1828800" y="4526280"/>
-            <a:ext cx="3931920" cy="457200"/>
-          </a:xfrm>
-          <a:prstGeom prst="rect">
-            <a:avLst/>
-          </a:prstGeom>
-          <a:noFill/>
-          <a:ln/>
-        </p:spPr>
-        <p:txBody>
-          <a:bodyPr wrap="square" lIns="0" tIns="0" rIns="0" bIns="0" rtlCol="0" anchor="ctr"/>
-          <a:lstStyle/>
-          <a:p>
-            <a:pPr indent="0" marL="0">
-              <a:buNone/>
-            </a:pPr>
-            <a:r>
-              <a:rPr lang="en-US" sz="1700" dirty="0">
-                <a:solidFill>
-                  <a:srgbClr val="0F4C5C"/>
-                </a:solidFill>
-                <a:latin typeface="Courier New" pitchFamily="34" charset="0"/>
-                <a:ea typeface="Courier New" pitchFamily="34" charset="-122"/>
-                <a:cs typeface="Courier New" pitchFamily="34" charset="-120"/>
-              </a:rPr>
-              <a:t>df["col"].nunique()</a:t>
-            </a:r>
-            <a:endParaRPr lang="en-US" sz="1700" dirty="0"/>
-          </a:p>
-        </p:txBody>
-      </p:sp>
-      <p:sp>
-        <p:nvSpPr>
-          <p:cNvPr id="18" name="Shape 16"/>
-          <p:cNvSpPr/>
-          <p:nvPr/>
-        </p:nvSpPr>
-        <p:spPr>
-          <a:xfrm>
-            <a:off x="6172200" y="3657600"/>
-            <a:ext cx="5440680" cy="1645920"/>
-          </a:xfrm>
-          <a:prstGeom prst="roundRect">
-            <a:avLst>
-              <a:gd name="adj" fmla="val 6667"/>
-            </a:avLst>
-          </a:prstGeom>
-          <a:solidFill>
-            <a:srgbClr val="EEF3F4"/>
-          </a:solidFill>
-          <a:ln/>
-        </p:spPr>
-      </p:sp>
-      <p:sp>
-        <p:nvSpPr>
-          <p:cNvPr id="19" name="Shape 17"/>
-          <p:cNvSpPr/>
-          <p:nvPr/>
-        </p:nvSpPr>
-        <p:spPr>
-          <a:xfrm>
-            <a:off x="6446520" y="4114800"/>
-            <a:ext cx="731520" cy="731520"/>
-          </a:xfrm>
-          <a:prstGeom prst="ellipse">
-            <a:avLst/>
-          </a:prstGeom>
-          <a:solidFill>
-            <a:srgbClr val="FFFFFF"/>
-          </a:solidFill>
-          <a:ln/>
-        </p:spPr>
-      </p:sp>
-      <p:sp>
-        <p:nvSpPr>
-          <p:cNvPr id="20" name="Text 18"/>
-          <p:cNvSpPr txBox="1"/>
-          <p:nvPr/>
-        </p:nvSpPr>
-        <p:spPr>
-          <a:xfrm>
-            <a:off x="6446520" y="4114800"/>
-            <a:ext cx="731520" cy="731520"/>
-          </a:xfrm>
-          <a:prstGeom prst="rect">
-            <a:avLst/>
-          </a:prstGeom>
-          <a:noFill/>
-          <a:ln/>
-        </p:spPr>
-        <p:txBody>
-          <a:bodyPr wrap="square" lIns="0" tIns="0" rIns="0" bIns="0" rtlCol="0" anchor="ctr"/>
-          <a:lstStyle/>
-          <a:p>
-            <a:pPr algn="ctr" indent="0" marL="0">
-              <a:buNone/>
-            </a:pPr>
-            <a:r>
-              <a:rPr lang="en-US" sz="2080" b="1" dirty="0">
-                <a:solidFill>
-                  <a:srgbClr val="0F4C5C"/>
-                </a:solidFill>
-              </a:rPr>
-              <a:t>4</a:t>
-            </a:r>
-            <a:endParaRPr lang="en-US" sz="2080" dirty="0"/>
-          </a:p>
-        </p:txBody>
-      </p:sp>
-      <p:sp>
-        <p:nvSpPr>
-          <p:cNvPr id="21" name="Text 19"/>
-          <p:cNvSpPr txBox="1"/>
-          <p:nvPr/>
-        </p:nvSpPr>
-        <p:spPr>
-          <a:xfrm>
-            <a:off x="7452360" y="3977640"/>
-            <a:ext cx="3931920" cy="502920"/>
-          </a:xfrm>
-          <a:prstGeom prst="rect">
-            <a:avLst/>
-          </a:prstGeom>
-          <a:noFill/>
-          <a:ln/>
-        </p:spPr>
-        <p:txBody>
-          <a:bodyPr wrap="square" lIns="0" tIns="0" rIns="0" bIns="0" rtlCol="0" anchor="ctr"/>
-          <a:lstStyle/>
-          <a:p>
-            <a:pPr indent="0" marL="0">
-              <a:buNone/>
-            </a:pPr>
-            <a:r>
-              <a:rPr lang="en-US" sz="2100" b="1" dirty="0">
-                <a:solidFill>
-                  <a:srgbClr val="1F2A30"/>
-                </a:solidFill>
-              </a:rPr>
-              <a:t>Quali valori, e quante volte?</a:t>
-            </a:r>
-            <a:endParaRPr lang="en-US" sz="2100" dirty="0"/>
-          </a:p>
-        </p:txBody>
-      </p:sp>
-      <p:sp>
-        <p:nvSpPr>
-          <p:cNvPr id="22" name="Text 20"/>
-          <p:cNvSpPr txBox="1"/>
-          <p:nvPr/>
-        </p:nvSpPr>
-        <p:spPr>
-          <a:xfrm>
-            <a:off x="7452360" y="4526280"/>
-            <a:ext cx="3931920" cy="457200"/>
-          </a:xfrm>
-          <a:prstGeom prst="rect">
-            <a:avLst/>
-          </a:prstGeom>
-          <a:noFill/>
-          <a:ln/>
-        </p:spPr>
-        <p:txBody>
-          <a:bodyPr wrap="square" lIns="0" tIns="0" rIns="0" bIns="0" rtlCol="0" anchor="ctr"/>
-          <a:lstStyle/>
-          <a:p>
-            <a:pPr indent="0" marL="0">
-              <a:buNone/>
-            </a:pPr>
-            <a:r>
-              <a:rPr lang="en-US" sz="1700" dirty="0">
-                <a:solidFill>
-                  <a:srgbClr val="0F4C5C"/>
-                </a:solidFill>
-                <a:latin typeface="Courier New" pitchFamily="34" charset="0"/>
-                <a:ea typeface="Courier New" pitchFamily="34" charset="-122"/>
-                <a:cs typeface="Courier New" pitchFamily="34" charset="-120"/>
-              </a:rPr>
-              <a:t>df["col"].value_counts()</a:t>
-            </a:r>
-            <a:endParaRPr lang="en-US" sz="1700" dirty="0"/>
-          </a:p>
-        </p:txBody>
-      </p:sp>
-      <p:sp>
-        <p:nvSpPr>
-          <p:cNvPr id="23" name="Text 21"/>
-          <p:cNvSpPr txBox="1"/>
-          <p:nvPr/>
-        </p:nvSpPr>
-        <p:spPr>
-          <a:xfrm>
-            <a:off x="548640" y="5623560"/>
-            <a:ext cx="11064240" cy="457200"/>
-          </a:xfrm>
-          <a:prstGeom prst="rect">
-            <a:avLst/>
-          </a:prstGeom>
-          <a:noFill/>
-          <a:ln/>
-        </p:spPr>
-        <p:txBody>
-          <a:bodyPr wrap="square" lIns="0" tIns="0" rIns="0" bIns="0" rtlCol="0" anchor="ctr"/>
-          <a:lstStyle/>
-          <a:p>
-            <a:pPr indent="0" marL="0">
-              <a:buNone/>
-            </a:pPr>
-            <a:r>
-              <a:rPr lang="en-US" sz="1800" i="1" dirty="0">
-                <a:solidFill>
-                  <a:srgbClr val="0F4C5C"/>
-                </a:solidFill>
-              </a:rPr>
-              <a:t>Prima di qualunque analisi. Sempre.</a:t>
+              <a:t>Nessuno conosce tutti i metodi. Si cercano, ogni giorno, anche dopo anni.</a:t>
             </a:r>
             <a:endParaRPr lang="en-US" sz="1800" dirty="0"/>
           </a:p>
@@ -3825,83 +3835,724 @@
         </p:nvSpPr>
         <p:spPr>
           <a:xfrm>
-            <a:off x="731520" y="2194560"/>
-            <a:ext cx="10698480" cy="1280160"/>
-          </a:xfrm>
-          <a:prstGeom prst="rect">
-            <a:avLst/>
-          </a:prstGeom>
-          <a:noFill/>
-          <a:ln/>
-        </p:spPr>
-        <p:txBody>
-          <a:bodyPr wrap="square" lIns="0" tIns="0" rIns="0" bIns="0" rtlCol="0" anchor="b"/>
+            <a:off x="548640" y="365760"/>
+            <a:ext cx="11064240" cy="822960"/>
+          </a:xfrm>
+          <a:prstGeom prst="rect">
+            <a:avLst/>
+          </a:prstGeom>
+          <a:noFill/>
+          <a:ln/>
+        </p:spPr>
+        <p:txBody>
+          <a:bodyPr wrap="square" lIns="0" tIns="0" rIns="0" bIns="0" rtlCol="0" anchor="ctr"/>
           <a:lstStyle/>
           <a:p>
             <a:pPr algn="l" indent="0" marL="0">
               <a:buNone/>
             </a:pPr>
             <a:r>
-              <a:rPr lang="en-US" sz="5400" b="1" dirty="0">
-                <a:solidFill>
-                  <a:srgbClr val="FFFFFF"/>
-                </a:solidFill>
-              </a:rPr>
-              <a:t>Task: conosci il tuo dataset</a:t>
-            </a:r>
-            <a:endParaRPr lang="en-US" sz="5400" dirty="0"/>
-          </a:p>
-        </p:txBody>
-      </p:sp>
-      <p:sp>
-        <p:nvSpPr>
-          <p:cNvPr id="3" name="Text 0"/>
+              <a:rPr lang="en-US" sz="3600" b="1" dirty="0">
+                <a:solidFill>
+                  <a:srgbClr val="0F4C5C"/>
+                </a:solidFill>
+              </a:rPr>
+              <a:t>Le domande da fare sempre a un dataset</a:t>
+            </a:r>
+            <a:endParaRPr lang="en-US" sz="3600" dirty="0"/>
+          </a:p>
+        </p:txBody>
+      </p:sp>
+      <p:sp>
+        <p:nvSpPr>
+          <p:cNvPr id="3" name="Shape 1"/>
           <p:cNvSpPr/>
+          <p:nvPr/>
+        </p:nvSpPr>
+        <p:spPr>
+          <a:xfrm>
+            <a:off x="548640" y="1737360"/>
+            <a:ext cx="5440680" cy="1645920"/>
+          </a:xfrm>
+          <a:prstGeom prst="roundRect">
+            <a:avLst>
+              <a:gd name="adj" fmla="val 6667"/>
+            </a:avLst>
+          </a:prstGeom>
+          <a:solidFill>
+            <a:srgbClr val="EEF3F4"/>
+          </a:solidFill>
+          <a:ln/>
+        </p:spPr>
+      </p:sp>
+      <p:sp>
+        <p:nvSpPr>
+          <p:cNvPr id="4" name="Shape 2"/>
+          <p:cNvSpPr/>
+          <p:nvPr/>
+        </p:nvSpPr>
+        <p:spPr>
+          <a:xfrm>
+            <a:off x="822960" y="2194560"/>
+            <a:ext cx="731520" cy="731520"/>
+          </a:xfrm>
+          <a:prstGeom prst="ellipse">
+            <a:avLst/>
+          </a:prstGeom>
+          <a:solidFill>
+            <a:srgbClr val="FFFFFF"/>
+          </a:solidFill>
+          <a:ln/>
+        </p:spPr>
+      </p:sp>
+      <p:sp>
+        <p:nvSpPr>
+          <p:cNvPr id="5" name="Text 3"/>
+          <p:cNvSpPr txBox="1"/>
+          <p:nvPr/>
+        </p:nvSpPr>
+        <p:spPr>
+          <a:xfrm>
+            <a:off x="822960" y="2194560"/>
+            <a:ext cx="731520" cy="731520"/>
+          </a:xfrm>
+          <a:prstGeom prst="rect">
+            <a:avLst/>
+          </a:prstGeom>
+          <a:noFill/>
+          <a:ln/>
+        </p:spPr>
+        <p:txBody>
+          <a:bodyPr wrap="square" lIns="0" tIns="0" rIns="0" bIns="0" rtlCol="0" anchor="ctr"/>
+          <a:lstStyle/>
+          <a:p>
+            <a:pPr algn="ctr" indent="0" marL="0">
+              <a:buNone/>
+            </a:pPr>
+            <a:r>
+              <a:rPr lang="en-US" sz="2080" b="1" dirty="0">
+                <a:solidFill>
+                  <a:srgbClr val="0F4C5C"/>
+                </a:solidFill>
+              </a:rPr>
+              <a:t>1</a:t>
+            </a:r>
+            <a:endParaRPr lang="en-US" sz="2080" dirty="0"/>
+          </a:p>
+        </p:txBody>
+      </p:sp>
+      <p:sp>
+        <p:nvSpPr>
+          <p:cNvPr id="6" name="Text 4"/>
+          <p:cNvSpPr txBox="1"/>
+          <p:nvPr/>
+        </p:nvSpPr>
+        <p:spPr>
+          <a:xfrm>
+            <a:off x="1828800" y="2057400"/>
+            <a:ext cx="3931920" cy="502920"/>
+          </a:xfrm>
+          <a:prstGeom prst="rect">
+            <a:avLst/>
+          </a:prstGeom>
+          <a:noFill/>
+          <a:ln/>
+        </p:spPr>
+        <p:txBody>
+          <a:bodyPr wrap="square" lIns="0" tIns="0" rIns="0" bIns="0" rtlCol="0" anchor="ctr"/>
+          <a:lstStyle/>
+          <a:p>
+            <a:pPr indent="0" marL="0">
+              <a:buNone/>
+            </a:pPr>
+            <a:r>
+              <a:rPr lang="en-US" sz="2100" b="1" dirty="0">
+                <a:solidFill>
+                  <a:srgbClr val="1F2A30"/>
+                </a:solidFill>
+              </a:rPr>
+              <a:t>Quanto è grande?</a:t>
+            </a:r>
+            <a:endParaRPr lang="en-US" sz="2100" dirty="0"/>
+          </a:p>
+        </p:txBody>
+      </p:sp>
+      <p:sp>
+        <p:nvSpPr>
+          <p:cNvPr id="7" name="Text 5"/>
+          <p:cNvSpPr txBox="1"/>
+          <p:nvPr/>
+        </p:nvSpPr>
+        <p:spPr>
+          <a:xfrm>
+            <a:off x="1828800" y="2606040"/>
+            <a:ext cx="3931920" cy="457200"/>
+          </a:xfrm>
+          <a:prstGeom prst="rect">
+            <a:avLst/>
+          </a:prstGeom>
+          <a:noFill/>
+          <a:ln/>
+        </p:spPr>
+        <p:txBody>
+          <a:bodyPr wrap="square" lIns="0" tIns="0" rIns="0" bIns="0" rtlCol="0" anchor="ctr"/>
+          <a:lstStyle/>
+          <a:p>
+            <a:pPr indent="0" marL="0">
+              <a:buNone/>
+            </a:pPr>
+            <a:r>
+              <a:rPr lang="en-US" sz="1700" dirty="0">
+                <a:solidFill>
+                  <a:srgbClr val="0F4C5C"/>
+                </a:solidFill>
+                <a:latin typeface="Courier New" pitchFamily="34" charset="0"/>
+                <a:ea typeface="Courier New" pitchFamily="34" charset="-122"/>
+                <a:cs typeface="Courier New" pitchFamily="34" charset="-120"/>
+              </a:rPr>
+              <a:t>df.shape</a:t>
+            </a:r>
+            <a:endParaRPr lang="en-US" sz="1700" dirty="0"/>
+          </a:p>
+        </p:txBody>
+      </p:sp>
+      <p:sp>
+        <p:nvSpPr>
+          <p:cNvPr id="8" name="Shape 6"/>
+          <p:cNvSpPr/>
+          <p:nvPr/>
+        </p:nvSpPr>
+        <p:spPr>
+          <a:xfrm>
+            <a:off x="6172200" y="1737360"/>
+            <a:ext cx="5440680" cy="1645920"/>
+          </a:xfrm>
+          <a:prstGeom prst="roundRect">
+            <a:avLst>
+              <a:gd name="adj" fmla="val 6667"/>
+            </a:avLst>
+          </a:prstGeom>
+          <a:solidFill>
+            <a:srgbClr val="EEF3F4"/>
+          </a:solidFill>
+          <a:ln/>
+        </p:spPr>
+      </p:sp>
+      <p:sp>
+        <p:nvSpPr>
+          <p:cNvPr id="9" name="Shape 7"/>
+          <p:cNvSpPr/>
+          <p:nvPr/>
+        </p:nvSpPr>
+        <p:spPr>
+          <a:xfrm>
+            <a:off x="6446520" y="2194560"/>
+            <a:ext cx="731520" cy="731520"/>
+          </a:xfrm>
+          <a:prstGeom prst="ellipse">
+            <a:avLst/>
+          </a:prstGeom>
+          <a:solidFill>
+            <a:srgbClr val="FFFFFF"/>
+          </a:solidFill>
+          <a:ln/>
+        </p:spPr>
+      </p:sp>
+      <p:sp>
+        <p:nvSpPr>
+          <p:cNvPr id="10" name="Text 8"/>
+          <p:cNvSpPr txBox="1"/>
+          <p:nvPr/>
+        </p:nvSpPr>
+        <p:spPr>
+          <a:xfrm>
+            <a:off x="6446520" y="2194560"/>
+            <a:ext cx="731520" cy="731520"/>
+          </a:xfrm>
+          <a:prstGeom prst="rect">
+            <a:avLst/>
+          </a:prstGeom>
+          <a:noFill/>
+          <a:ln/>
+        </p:spPr>
+        <p:txBody>
+          <a:bodyPr wrap="square" lIns="0" tIns="0" rIns="0" bIns="0" rtlCol="0" anchor="ctr"/>
+          <a:lstStyle/>
+          <a:p>
+            <a:pPr algn="ctr" indent="0" marL="0">
+              <a:buNone/>
+            </a:pPr>
+            <a:r>
+              <a:rPr lang="en-US" sz="2080" b="1" dirty="0">
+                <a:solidFill>
+                  <a:srgbClr val="0F4C5C"/>
+                </a:solidFill>
+              </a:rPr>
+              <a:t>2</a:t>
+            </a:r>
+            <a:endParaRPr lang="en-US" sz="2080" dirty="0"/>
+          </a:p>
+        </p:txBody>
+      </p:sp>
+      <p:sp>
+        <p:nvSpPr>
+          <p:cNvPr id="11" name="Text 9"/>
+          <p:cNvSpPr txBox="1"/>
+          <p:nvPr/>
+        </p:nvSpPr>
+        <p:spPr>
+          <a:xfrm>
+            <a:off x="7452360" y="2057400"/>
+            <a:ext cx="3931920" cy="502920"/>
+          </a:xfrm>
+          <a:prstGeom prst="rect">
+            <a:avLst/>
+          </a:prstGeom>
+          <a:noFill/>
+          <a:ln/>
+        </p:spPr>
+        <p:txBody>
+          <a:bodyPr wrap="square" lIns="0" tIns="0" rIns="0" bIns="0" rtlCol="0" anchor="ctr"/>
+          <a:lstStyle/>
+          <a:p>
+            <a:pPr indent="0" marL="0">
+              <a:buNone/>
+            </a:pPr>
+            <a:r>
+              <a:rPr lang="en-US" sz="2100" b="1" dirty="0">
+                <a:solidFill>
+                  <a:srgbClr val="1F2A30"/>
+                </a:solidFill>
+              </a:rPr>
+              <a:t>Di che tipo sono le colonne?</a:t>
+            </a:r>
+            <a:endParaRPr lang="en-US" sz="2100" dirty="0"/>
+          </a:p>
+        </p:txBody>
+      </p:sp>
+      <p:sp>
+        <p:nvSpPr>
+          <p:cNvPr id="12" name="Text 10"/>
+          <p:cNvSpPr txBox="1"/>
+          <p:nvPr/>
+        </p:nvSpPr>
+        <p:spPr>
+          <a:xfrm>
+            <a:off x="7452360" y="2606040"/>
+            <a:ext cx="3931920" cy="457200"/>
+          </a:xfrm>
+          <a:prstGeom prst="rect">
+            <a:avLst/>
+          </a:prstGeom>
+          <a:noFill/>
+          <a:ln/>
+        </p:spPr>
+        <p:txBody>
+          <a:bodyPr wrap="square" lIns="0" tIns="0" rIns="0" bIns="0" rtlCol="0" anchor="ctr"/>
+          <a:lstStyle/>
+          <a:p>
+            <a:pPr indent="0" marL="0">
+              <a:buNone/>
+            </a:pPr>
+            <a:r>
+              <a:rPr lang="en-US" sz="1700" dirty="0">
+                <a:solidFill>
+                  <a:srgbClr val="0F4C5C"/>
+                </a:solidFill>
+                <a:latin typeface="Courier New" pitchFamily="34" charset="0"/>
+                <a:ea typeface="Courier New" pitchFamily="34" charset="-122"/>
+                <a:cs typeface="Courier New" pitchFamily="34" charset="-120"/>
+              </a:rPr>
+              <a:t>df.dtypes</a:t>
+            </a:r>
+            <a:endParaRPr lang="en-US" sz="1700" dirty="0"/>
+          </a:p>
+        </p:txBody>
+      </p:sp>
+      <p:sp>
+        <p:nvSpPr>
+          <p:cNvPr id="13" name="Shape 11"/>
+          <p:cNvSpPr/>
+          <p:nvPr/>
+        </p:nvSpPr>
+        <p:spPr>
+          <a:xfrm>
+            <a:off x="548640" y="3657600"/>
+            <a:ext cx="5440680" cy="1645920"/>
+          </a:xfrm>
+          <a:prstGeom prst="roundRect">
+            <a:avLst>
+              <a:gd name="adj" fmla="val 6667"/>
+            </a:avLst>
+          </a:prstGeom>
+          <a:solidFill>
+            <a:srgbClr val="EEF3F4"/>
+          </a:solidFill>
+          <a:ln/>
+        </p:spPr>
+      </p:sp>
+      <p:sp>
+        <p:nvSpPr>
+          <p:cNvPr id="14" name="Shape 12"/>
+          <p:cNvSpPr/>
+          <p:nvPr/>
+        </p:nvSpPr>
+        <p:spPr>
+          <a:xfrm>
+            <a:off x="822960" y="4114800"/>
+            <a:ext cx="731520" cy="731520"/>
+          </a:xfrm>
+          <a:prstGeom prst="ellipse">
+            <a:avLst/>
+          </a:prstGeom>
+          <a:solidFill>
+            <a:srgbClr val="FFFFFF"/>
+          </a:solidFill>
+          <a:ln/>
+        </p:spPr>
+      </p:sp>
+      <p:sp>
+        <p:nvSpPr>
+          <p:cNvPr id="15" name="Text 13"/>
+          <p:cNvSpPr txBox="1"/>
+          <p:nvPr/>
+        </p:nvSpPr>
+        <p:spPr>
+          <a:xfrm>
+            <a:off x="822960" y="4114800"/>
+            <a:ext cx="731520" cy="731520"/>
+          </a:xfrm>
+          <a:prstGeom prst="rect">
+            <a:avLst/>
+          </a:prstGeom>
+          <a:noFill/>
+          <a:ln/>
+        </p:spPr>
+        <p:txBody>
+          <a:bodyPr wrap="square" lIns="0" tIns="0" rIns="0" bIns="0" rtlCol="0" anchor="ctr"/>
+          <a:lstStyle/>
+          <a:p>
+            <a:pPr algn="ctr" indent="0" marL="0">
+              <a:buNone/>
+            </a:pPr>
+            <a:r>
+              <a:rPr lang="en-US" sz="2080" b="1" dirty="0">
+                <a:solidFill>
+                  <a:srgbClr val="0F4C5C"/>
+                </a:solidFill>
+              </a:rPr>
+              <a:t>3</a:t>
+            </a:r>
+            <a:endParaRPr lang="en-US" sz="2080" dirty="0"/>
+          </a:p>
+        </p:txBody>
+      </p:sp>
+      <p:sp>
+        <p:nvSpPr>
+          <p:cNvPr id="16" name="Text 14"/>
+          <p:cNvSpPr txBox="1"/>
+          <p:nvPr/>
+        </p:nvSpPr>
+        <p:spPr>
+          <a:xfrm>
+            <a:off x="1828800" y="3977640"/>
+            <a:ext cx="3931920" cy="502920"/>
+          </a:xfrm>
+          <a:prstGeom prst="rect">
+            <a:avLst/>
+          </a:prstGeom>
+          <a:noFill/>
+          <a:ln/>
+        </p:spPr>
+        <p:txBody>
+          <a:bodyPr wrap="square" lIns="0" tIns="0" rIns="0" bIns="0" rtlCol="0" anchor="ctr"/>
+          <a:lstStyle/>
+          <a:p>
+            <a:pPr indent="0" marL="0">
+              <a:buNone/>
+            </a:pPr>
+            <a:r>
+              <a:rPr lang="en-US" sz="2100" b="1" dirty="0">
+                <a:solidFill>
+                  <a:srgbClr val="1F2A30"/>
+                </a:solidFill>
+              </a:rPr>
+              <a:t>Quanti valori diversi?</a:t>
+            </a:r>
+            <a:endParaRPr lang="en-US" sz="2100" dirty="0"/>
+          </a:p>
+        </p:txBody>
+      </p:sp>
+      <p:sp>
+        <p:nvSpPr>
+          <p:cNvPr id="17" name="Text 15"/>
+          <p:cNvSpPr txBox="1"/>
+          <p:nvPr/>
+        </p:nvSpPr>
+        <p:spPr>
+          <a:xfrm>
+            <a:off x="1828800" y="4526280"/>
+            <a:ext cx="3931920" cy="457200"/>
+          </a:xfrm>
+          <a:prstGeom prst="rect">
+            <a:avLst/>
+          </a:prstGeom>
+          <a:noFill/>
+          <a:ln/>
+        </p:spPr>
+        <p:txBody>
+          <a:bodyPr wrap="square" lIns="0" tIns="0" rIns="0" bIns="0" rtlCol="0" anchor="ctr"/>
+          <a:lstStyle/>
+          <a:p>
+            <a:pPr indent="0" marL="0">
+              <a:buNone/>
+            </a:pPr>
+            <a:r>
+              <a:rPr lang="en-US" sz="1700" dirty="0">
+                <a:solidFill>
+                  <a:srgbClr val="0F4C5C"/>
+                </a:solidFill>
+                <a:latin typeface="Courier New" pitchFamily="34" charset="0"/>
+                <a:ea typeface="Courier New" pitchFamily="34" charset="-122"/>
+                <a:cs typeface="Courier New" pitchFamily="34" charset="-120"/>
+              </a:rPr>
+              <a:t>df["col"].nunique()</a:t>
+            </a:r>
+            <a:endParaRPr lang="en-US" sz="1700" dirty="0"/>
+          </a:p>
+        </p:txBody>
+      </p:sp>
+      <p:sp>
+        <p:nvSpPr>
+          <p:cNvPr id="18" name="Shape 16"/>
+          <p:cNvSpPr/>
+          <p:nvPr/>
+        </p:nvSpPr>
+        <p:spPr>
+          <a:xfrm>
+            <a:off x="6172200" y="3657600"/>
+            <a:ext cx="5440680" cy="1645920"/>
+          </a:xfrm>
+          <a:prstGeom prst="roundRect">
+            <a:avLst>
+              <a:gd name="adj" fmla="val 6667"/>
+            </a:avLst>
+          </a:prstGeom>
+          <a:solidFill>
+            <a:srgbClr val="EEF3F4"/>
+          </a:solidFill>
+          <a:ln/>
+        </p:spPr>
+      </p:sp>
+      <p:sp>
+        <p:nvSpPr>
+          <p:cNvPr id="19" name="Shape 17"/>
+          <p:cNvSpPr/>
+          <p:nvPr/>
+        </p:nvSpPr>
+        <p:spPr>
+          <a:xfrm>
+            <a:off x="6446520" y="4114800"/>
+            <a:ext cx="731520" cy="731520"/>
+          </a:xfrm>
+          <a:prstGeom prst="ellipse">
+            <a:avLst/>
+          </a:prstGeom>
+          <a:solidFill>
+            <a:srgbClr val="FFFFFF"/>
+          </a:solidFill>
+          <a:ln/>
+        </p:spPr>
+      </p:sp>
+      <p:sp>
+        <p:nvSpPr>
+          <p:cNvPr id="20" name="Text 18"/>
+          <p:cNvSpPr txBox="1"/>
+          <p:nvPr/>
+        </p:nvSpPr>
+        <p:spPr>
+          <a:xfrm>
+            <a:off x="6446520" y="4114800"/>
+            <a:ext cx="731520" cy="731520"/>
+          </a:xfrm>
+          <a:prstGeom prst="rect">
+            <a:avLst/>
+          </a:prstGeom>
+          <a:noFill/>
+          <a:ln/>
+        </p:spPr>
+        <p:txBody>
+          <a:bodyPr wrap="square" lIns="0" tIns="0" rIns="0" bIns="0" rtlCol="0" anchor="ctr"/>
+          <a:lstStyle/>
+          <a:p>
+            <a:pPr algn="ctr" indent="0" marL="0">
+              <a:buNone/>
+            </a:pPr>
+            <a:r>
+              <a:rPr lang="en-US" sz="2080" b="1" dirty="0">
+                <a:solidFill>
+                  <a:srgbClr val="0F4C5C"/>
+                </a:solidFill>
+              </a:rPr>
+              <a:t>4</a:t>
+            </a:r>
+            <a:endParaRPr lang="en-US" sz="2080" dirty="0"/>
+          </a:p>
+        </p:txBody>
+      </p:sp>
+      <p:sp>
+        <p:nvSpPr>
+          <p:cNvPr id="21" name="Text 19"/>
+          <p:cNvSpPr txBox="1"/>
+          <p:nvPr/>
+        </p:nvSpPr>
+        <p:spPr>
+          <a:xfrm>
+            <a:off x="7452360" y="3977640"/>
+            <a:ext cx="3931920" cy="502920"/>
+          </a:xfrm>
+          <a:prstGeom prst="rect">
+            <a:avLst/>
+          </a:prstGeom>
+          <a:noFill/>
+          <a:ln/>
+        </p:spPr>
+        <p:txBody>
+          <a:bodyPr wrap="square" lIns="0" tIns="0" rIns="0" bIns="0" rtlCol="0" anchor="ctr"/>
+          <a:lstStyle/>
+          <a:p>
+            <a:pPr indent="0" marL="0">
+              <a:buNone/>
+            </a:pPr>
+            <a:r>
+              <a:rPr lang="en-US" sz="2100" b="1" dirty="0">
+                <a:solidFill>
+                  <a:srgbClr val="1F2A30"/>
+                </a:solidFill>
+              </a:rPr>
+              <a:t>Quali valori, e quante volte?</a:t>
+            </a:r>
+            <a:endParaRPr lang="en-US" sz="2100" dirty="0"/>
+          </a:p>
+        </p:txBody>
+      </p:sp>
+      <p:sp>
+        <p:nvSpPr>
+          <p:cNvPr id="22" name="Text 20"/>
+          <p:cNvSpPr txBox="1"/>
+          <p:nvPr/>
+        </p:nvSpPr>
+        <p:spPr>
+          <a:xfrm>
+            <a:off x="7452360" y="4526280"/>
+            <a:ext cx="3931920" cy="457200"/>
+          </a:xfrm>
+          <a:prstGeom prst="rect">
+            <a:avLst/>
+          </a:prstGeom>
+          <a:noFill/>
+          <a:ln/>
+        </p:spPr>
+        <p:txBody>
+          <a:bodyPr wrap="square" lIns="0" tIns="0" rIns="0" bIns="0" rtlCol="0" anchor="ctr"/>
+          <a:lstStyle/>
+          <a:p>
+            <a:pPr indent="0" marL="0">
+              <a:buNone/>
+            </a:pPr>
+            <a:r>
+              <a:rPr lang="en-US" sz="1700" dirty="0">
+                <a:solidFill>
+                  <a:srgbClr val="0F4C5C"/>
+                </a:solidFill>
+                <a:latin typeface="Courier New" pitchFamily="34" charset="0"/>
+                <a:ea typeface="Courier New" pitchFamily="34" charset="-122"/>
+                <a:cs typeface="Courier New" pitchFamily="34" charset="-120"/>
+              </a:rPr>
+              <a:t>df["col"].value_counts()</a:t>
+            </a:r>
+            <a:endParaRPr lang="en-US" sz="1700" dirty="0"/>
+          </a:p>
+        </p:txBody>
+      </p:sp>
+      <p:sp>
+        <p:nvSpPr>
+          <p:cNvPr id="23" name="Text 21"/>
+          <p:cNvSpPr txBox="1"/>
+          <p:nvPr/>
+        </p:nvSpPr>
+        <p:spPr>
+          <a:xfrm>
+            <a:off x="548640" y="5623560"/>
+            <a:ext cx="11064240" cy="457200"/>
+          </a:xfrm>
+          <a:prstGeom prst="rect">
+            <a:avLst/>
+          </a:prstGeom>
+          <a:noFill/>
+          <a:ln/>
+        </p:spPr>
+        <p:txBody>
+          <a:bodyPr wrap="square" lIns="0" tIns="0" rIns="0" bIns="0" rtlCol="0" anchor="ctr"/>
+          <a:lstStyle/>
+          <a:p>
+            <a:pPr indent="0" marL="0">
+              <a:buNone/>
+            </a:pPr>
+            <a:r>
+              <a:rPr lang="en-US" sz="1800" i="1" dirty="0">
+                <a:solidFill>
+                  <a:srgbClr val="0F4C5C"/>
+                </a:solidFill>
+              </a:rPr>
+              <a:t>Prima di qualunque analisi. Sempre.</a:t>
+            </a:r>
+            <a:endParaRPr lang="en-US" sz="1800" dirty="0"/>
+          </a:p>
+        </p:txBody>
+      </p:sp>
+      <p:sp>
+        <p:nvSpPr>
+          <p:cNvPr id="25" name="Slide Number Placeholder 0"/>
+          <p:cNvSpPr>
+            <a:spLocks noGrp="1"/>
+          </p:cNvSpPr>
           <p:nvPr>
-            <p:ph idx="101" type="body" hasCustomPrompt="1"/>
+            <p:ph type="sldNum" sz="quarter" idx="4294967295"/>
           </p:nvPr>
         </p:nvSpPr>
         <p:spPr>
           <a:xfrm>
-            <a:off x="731520" y="3657600"/>
-            <a:ext cx="10698480" cy="1463040"/>
-          </a:xfrm>
-          <a:prstGeom prst="rect">
-            <a:avLst/>
-          </a:prstGeom>
-          <a:noFill/>
-          <a:ln/>
-        </p:spPr>
-        <p:txBody>
-          <a:bodyPr wrap="square" lIns="0" tIns="0" rIns="0" bIns="0" rtlCol="0" anchor="t"/>
-          <a:lstStyle/>
-          <a:p>
-            <a:pPr indent="0" marL="0">
-              <a:buNone/>
-            </a:pPr>
-            <a:r>
-              <a:rPr lang="en-US" sz="2200" dirty="0">
-                <a:solidFill>
-                  <a:srgbClr val="B8C4CB"/>
-                </a:solidFill>
-              </a:rPr>
-              <a:t>Un collega ti manda imprese.xlsx. Ti puoi fidare?</a:t>
-            </a:r>
-            <a:endParaRPr lang="en-US" sz="2200" dirty="0"/>
-          </a:p>
-          <a:p>
-            <a:pPr indent="0" marL="0">
-              <a:buNone/>
-            </a:pPr>
-            <a:r>
-              <a:rPr lang="en-US" sz="2200" dirty="0">
-                <a:solidFill>
-                  <a:srgbClr val="B8C4CB"/>
-                </a:solidFill>
-              </a:rPr>
-              <a:t>60 minuti · apri il notebook dal README</a:t>
-            </a:r>
-            <a:endParaRPr lang="en-US" sz="2200" dirty="0"/>
+            <a:off x="11155680" y="6400800"/>
+            <a:ext cx="457200" cy="274320"/>
+          </a:xfrm>
+          <a:prstGeom prst="rect">
+            <a:avLst/>
+          </a:prstGeom>
+          <a:extLst>
+            <a:ext uri="{C572A759-6A51-4108-AA02-DFA0A04FC94B}">
+              <ma14:wrappingTextBoxFlag xmlns:ma14="http://schemas.microsoft.com/office/mac/drawingml/2011/main" val="0"/>
+            </a:ext>
+          </a:extLst>
+        </p:spPr>
+        <p:txBody>
+          <a:bodyPr/>
+          <a:lstStyle>
+            <a:lvl1pPr>
+              <a:defRPr sz="1000">
+                <a:solidFill>
+                  <a:srgbClr val="5C6F7B"/>
+                </a:solidFill>
+              </a:defRPr>
+            </a:lvl1pPr>
+          </a:lstStyle>
+          <a:p>
+            <a:pPr algn="r"/>
+            <a:fld id="{F7021451-1387-4CA6-816F-3879F97B5CBC}" type="slidenum">
+              <a:rPr b="0" lang="en-US"/>
+              <a:t>12</a:t>
+            </a:fld>
+            <a:endParaRPr lang="en-US"/>
           </a:p>
         </p:txBody>
       </p:sp>
@@ -3916,6 +4567,121 @@
 <file path=ppt/slides/slide13.xml><?xml version="1.0" encoding="utf-8"?>
 <p:sld xmlns:a="http://schemas.openxmlformats.org/drawingml/2006/main" xmlns:r="http://schemas.openxmlformats.org/officeDocument/2006/relationships" xmlns:p="http://schemas.openxmlformats.org/presentationml/2006/main">
   <p:cSld name="Slide 13">
+    <p:spTree>
+      <p:nvGrpSpPr>
+        <p:cNvPr id="1" name=""/>
+        <p:cNvGrpSpPr/>
+        <p:nvPr/>
+      </p:nvGrpSpPr>
+      <p:grpSpPr>
+        <a:xfrm>
+          <a:off x="0" y="0"/>
+          <a:ext cx="0" cy="0"/>
+          <a:chOff x="0" y="0"/>
+          <a:chExt cx="0" cy="0"/>
+        </a:xfrm>
+      </p:grpSpPr>
+      <p:sp>
+        <p:nvSpPr>
+          <p:cNvPr id="2" name="Text 0"/>
+          <p:cNvSpPr/>
+          <p:nvPr>
+            <p:ph idx="100" type="title" hasCustomPrompt="1"/>
+          </p:nvPr>
+        </p:nvSpPr>
+        <p:spPr>
+          <a:xfrm>
+            <a:off x="731520" y="2194560"/>
+            <a:ext cx="10698480" cy="1280160"/>
+          </a:xfrm>
+          <a:prstGeom prst="rect">
+            <a:avLst/>
+          </a:prstGeom>
+          <a:noFill/>
+          <a:ln/>
+        </p:spPr>
+        <p:txBody>
+          <a:bodyPr wrap="square" lIns="0" tIns="0" rIns="0" bIns="0" rtlCol="0" anchor="b"/>
+          <a:lstStyle/>
+          <a:p>
+            <a:pPr algn="l" indent="0" marL="0">
+              <a:buNone/>
+            </a:pPr>
+            <a:r>
+              <a:rPr lang="en-US" sz="5400" b="1" dirty="0">
+                <a:solidFill>
+                  <a:srgbClr val="FFFFFF"/>
+                </a:solidFill>
+              </a:rPr>
+              <a:t>Task: conosci il tuo dataset</a:t>
+            </a:r>
+            <a:endParaRPr lang="en-US" sz="5400" dirty="0"/>
+          </a:p>
+        </p:txBody>
+      </p:sp>
+      <p:sp>
+        <p:nvSpPr>
+          <p:cNvPr id="3" name="Text 0"/>
+          <p:cNvSpPr/>
+          <p:nvPr>
+            <p:ph idx="101" type="body" hasCustomPrompt="1"/>
+          </p:nvPr>
+        </p:nvSpPr>
+        <p:spPr>
+          <a:xfrm>
+            <a:off x="731520" y="3657600"/>
+            <a:ext cx="10698480" cy="1463040"/>
+          </a:xfrm>
+          <a:prstGeom prst="rect">
+            <a:avLst/>
+          </a:prstGeom>
+          <a:noFill/>
+          <a:ln/>
+        </p:spPr>
+        <p:txBody>
+          <a:bodyPr wrap="square" lIns="0" tIns="0" rIns="0" bIns="0" rtlCol="0" anchor="t"/>
+          <a:lstStyle/>
+          <a:p>
+            <a:pPr indent="0" marL="0">
+              <a:buNone/>
+            </a:pPr>
+            <a:r>
+              <a:rPr lang="en-US" sz="2200" dirty="0">
+                <a:solidFill>
+                  <a:srgbClr val="B8C4CB"/>
+                </a:solidFill>
+              </a:rPr>
+              <a:t>Un collega ti manda imprese.xlsx. Ti puoi fidare?</a:t>
+            </a:r>
+            <a:endParaRPr lang="en-US" sz="2200" dirty="0"/>
+          </a:p>
+          <a:p>
+            <a:pPr indent="0" marL="0">
+              <a:buNone/>
+            </a:pPr>
+            <a:r>
+              <a:rPr lang="en-US" sz="2200" dirty="0">
+                <a:solidFill>
+                  <a:srgbClr val="B8C4CB"/>
+                </a:solidFill>
+              </a:rPr>
+              <a:t>60 minuti · apri il notebook dal README</a:t>
+            </a:r>
+            <a:endParaRPr lang="en-US" sz="2200" dirty="0"/>
+          </a:p>
+        </p:txBody>
+      </p:sp>
+    </p:spTree>
+  </p:cSld>
+  <p:clrMapOvr>
+    <a:masterClrMapping/>
+  </p:clrMapOvr>
+</p:sld>
+</file>
+
+<file path=ppt/slides/slide14.xml><?xml version="1.0" encoding="utf-8"?>
+<p:sld xmlns:a="http://schemas.openxmlformats.org/drawingml/2006/main" xmlns:r="http://schemas.openxmlformats.org/officeDocument/2006/relationships" xmlns:p="http://schemas.openxmlformats.org/presentationml/2006/main">
+  <p:cSld name="Slide 14">
     <p:spTree>
       <p:nvGrpSpPr>
         <p:cNvPr id="1" name=""/>
@@ -9834,6 +10600,998 @@
                   <a:srgbClr val="0F4C5C"/>
                 </a:solidFill>
               </a:rPr>
+              <a:t>Omissioni e passo</a:t>
+            </a:r>
+            <a:endParaRPr lang="en-US" sz="3600" dirty="0"/>
+          </a:p>
+        </p:txBody>
+      </p:sp>
+      <p:sp>
+        <p:nvSpPr>
+          <p:cNvPr id="3" name="Text 1"/>
+          <p:cNvSpPr txBox="1"/>
+          <p:nvPr/>
+        </p:nvSpPr>
+        <p:spPr>
+          <a:xfrm>
+            <a:off x="548640" y="1600200"/>
+            <a:ext cx="5394960" cy="457200"/>
+          </a:xfrm>
+          <a:prstGeom prst="rect">
+            <a:avLst/>
+          </a:prstGeom>
+          <a:noFill/>
+          <a:ln/>
+        </p:spPr>
+        <p:txBody>
+          <a:bodyPr wrap="square" lIns="0" tIns="0" rIns="0" bIns="0" rtlCol="0" anchor="ctr"/>
+          <a:lstStyle/>
+          <a:p>
+            <a:pPr indent="0" marL="0">
+              <a:buNone/>
+            </a:pPr>
+            <a:r>
+              <a:rPr lang="en-US" sz="2400" b="1" dirty="0">
+                <a:solidFill>
+                  <a:srgbClr val="0F4C5C"/>
+                </a:solidFill>
+              </a:rPr>
+              <a:t>Omettere inizio o fine</a:t>
+            </a:r>
+            <a:endParaRPr lang="en-US" sz="2400" dirty="0"/>
+          </a:p>
+        </p:txBody>
+      </p:sp>
+      <p:sp>
+        <p:nvSpPr>
+          <p:cNvPr id="4" name="Text 2"/>
+          <p:cNvSpPr txBox="1"/>
+          <p:nvPr/>
+        </p:nvSpPr>
+        <p:spPr>
+          <a:xfrm>
+            <a:off x="6217920" y="1600200"/>
+            <a:ext cx="5394960" cy="457200"/>
+          </a:xfrm>
+          <a:prstGeom prst="rect">
+            <a:avLst/>
+          </a:prstGeom>
+          <a:noFill/>
+          <a:ln/>
+        </p:spPr>
+        <p:txBody>
+          <a:bodyPr wrap="square" lIns="0" tIns="0" rIns="0" bIns="0" rtlCol="0" anchor="ctr"/>
+          <a:lstStyle/>
+          <a:p>
+            <a:pPr indent="0" marL="0">
+              <a:buNone/>
+            </a:pPr>
+            <a:r>
+              <a:rPr lang="en-US" sz="2400" b="1" dirty="0">
+                <a:solidFill>
+                  <a:srgbClr val="0F4C5C"/>
+                </a:solidFill>
+              </a:rPr>
+              <a:t>Il terzo numero: il passo</a:t>
+            </a:r>
+            <a:endParaRPr lang="en-US" sz="2400" dirty="0"/>
+          </a:p>
+        </p:txBody>
+      </p:sp>
+      <p:sp>
+        <p:nvSpPr>
+          <p:cNvPr id="5" name="Text 3"/>
+          <p:cNvSpPr txBox="1"/>
+          <p:nvPr/>
+        </p:nvSpPr>
+        <p:spPr>
+          <a:xfrm>
+            <a:off x="548640" y="2057400"/>
+            <a:ext cx="5394960" cy="548640"/>
+          </a:xfrm>
+          <a:prstGeom prst="rect">
+            <a:avLst/>
+          </a:prstGeom>
+          <a:noFill/>
+          <a:ln/>
+        </p:spPr>
+        <p:txBody>
+          <a:bodyPr wrap="square" lIns="0" tIns="0" rIns="0" bIns="0" rtlCol="0" anchor="ctr"/>
+          <a:lstStyle/>
+          <a:p>
+            <a:pPr indent="0" marL="0">
+              <a:buNone/>
+            </a:pPr>
+            <a:r>
+              <a:rPr lang="en-US" sz="1500" dirty="0">
+                <a:solidFill>
+                  <a:srgbClr val="5C6F7B"/>
+                </a:solidFill>
+              </a:rPr>
+              <a:t>Se manca l'inizio si parte da 0; se manca la fine si arriva in fondo.</a:t>
+            </a:r>
+            <a:endParaRPr lang="en-US" sz="1500" dirty="0"/>
+          </a:p>
+        </p:txBody>
+      </p:sp>
+      <p:sp>
+        <p:nvSpPr>
+          <p:cNvPr id="6" name="Text 4"/>
+          <p:cNvSpPr txBox="1"/>
+          <p:nvPr/>
+        </p:nvSpPr>
+        <p:spPr>
+          <a:xfrm>
+            <a:off x="6217920" y="2057400"/>
+            <a:ext cx="5394960" cy="548640"/>
+          </a:xfrm>
+          <a:prstGeom prst="rect">
+            <a:avLst/>
+          </a:prstGeom>
+          <a:noFill/>
+          <a:ln/>
+        </p:spPr>
+        <p:txBody>
+          <a:bodyPr wrap="square" lIns="0" tIns="0" rIns="0" bIns="0" rtlCol="0" anchor="ctr"/>
+          <a:lstStyle/>
+          <a:p>
+            <a:pPr indent="0" marL="0">
+              <a:buNone/>
+            </a:pPr>
+            <a:r>
+              <a:rPr lang="en-US" sz="1500" dirty="0">
+                <a:solidFill>
+                  <a:srgbClr val="5C6F7B"/>
+                </a:solidFill>
+              </a:rPr>
+              <a:t>[inizio:fine:passo]  —  ogni quante caselle prenderne una</a:t>
+            </a:r>
+            <a:endParaRPr lang="en-US" sz="1500" dirty="0"/>
+          </a:p>
+        </p:txBody>
+      </p:sp>
+      <p:sp>
+        <p:nvSpPr>
+          <p:cNvPr id="7" name="Shape 5"/>
+          <p:cNvSpPr/>
+          <p:nvPr/>
+        </p:nvSpPr>
+        <p:spPr>
+          <a:xfrm>
+            <a:off x="548640" y="2743200"/>
+            <a:ext cx="5394960" cy="713232"/>
+          </a:xfrm>
+          <a:prstGeom prst="roundRect">
+            <a:avLst>
+              <a:gd name="adj" fmla="val 12821"/>
+            </a:avLst>
+          </a:prstGeom>
+          <a:solidFill>
+            <a:srgbClr val="EEF3F4"/>
+          </a:solidFill>
+          <a:ln/>
+        </p:spPr>
+      </p:sp>
+      <p:sp>
+        <p:nvSpPr>
+          <p:cNvPr id="8" name="Text 6"/>
+          <p:cNvSpPr txBox="1"/>
+          <p:nvPr/>
+        </p:nvSpPr>
+        <p:spPr>
+          <a:xfrm>
+            <a:off x="777240" y="2743200"/>
+            <a:ext cx="3291840" cy="713232"/>
+          </a:xfrm>
+          <a:prstGeom prst="rect">
+            <a:avLst/>
+          </a:prstGeom>
+          <a:noFill/>
+          <a:ln/>
+        </p:spPr>
+        <p:txBody>
+          <a:bodyPr wrap="square" lIns="0" tIns="0" rIns="0" bIns="0" rtlCol="0" anchor="ctr"/>
+          <a:lstStyle/>
+          <a:p>
+            <a:pPr indent="0" marL="0">
+              <a:buNone/>
+            </a:pPr>
+            <a:r>
+              <a:rPr lang="en-US" sz="1800" b="1" dirty="0">
+                <a:solidFill>
+                  <a:srgbClr val="0F4C5C"/>
+                </a:solidFill>
+                <a:latin typeface="Courier New" pitchFamily="34" charset="0"/>
+                <a:ea typeface="Courier New" pitchFamily="34" charset="-122"/>
+                <a:cs typeface="Courier New" pitchFamily="34" charset="-120"/>
+              </a:rPr>
+              <a:t>x[:3] </a:t>
+            </a:r>
+            <a:pPr indent="0" marL="0">
+              <a:buNone/>
+            </a:pPr>
+            <a:r>
+              <a:rPr lang="en-US" sz="1800" dirty="0">
+                <a:solidFill>
+                  <a:srgbClr val="5C6F7B"/>
+                </a:solidFill>
+                <a:latin typeface="Courier New" pitchFamily="34" charset="0"/>
+                <a:ea typeface="Courier New" pitchFamily="34" charset="-122"/>
+                <a:cs typeface="Courier New" pitchFamily="34" charset="-120"/>
+              </a:rPr>
+              <a:t>  = x[0:3]</a:t>
+            </a:r>
+            <a:endParaRPr lang="en-US" sz="1800" dirty="0"/>
+          </a:p>
+        </p:txBody>
+      </p:sp>
+      <p:sp>
+        <p:nvSpPr>
+          <p:cNvPr id="9" name="Text 7"/>
+          <p:cNvSpPr txBox="1"/>
+          <p:nvPr/>
+        </p:nvSpPr>
+        <p:spPr>
+          <a:xfrm>
+            <a:off x="4114800" y="2743200"/>
+            <a:ext cx="1691640" cy="713232"/>
+          </a:xfrm>
+          <a:prstGeom prst="rect">
+            <a:avLst/>
+          </a:prstGeom>
+          <a:noFill/>
+          <a:ln/>
+        </p:spPr>
+        <p:txBody>
+          <a:bodyPr wrap="square" lIns="0" tIns="0" rIns="0" bIns="0" rtlCol="0" anchor="ctr"/>
+          <a:lstStyle/>
+          <a:p>
+            <a:pPr indent="0" marL="0">
+              <a:buNone/>
+            </a:pPr>
+            <a:r>
+              <a:rPr lang="en-US" sz="1800" dirty="0">
+                <a:solidFill>
+                  <a:srgbClr val="1F2A30"/>
+                </a:solidFill>
+                <a:latin typeface="Courier New" pitchFamily="34" charset="0"/>
+                <a:ea typeface="Courier New" pitchFamily="34" charset="-122"/>
+                <a:cs typeface="Courier New" pitchFamily="34" charset="-120"/>
+              </a:rPr>
+              <a:t>A B C</a:t>
+            </a:r>
+            <a:endParaRPr lang="en-US" sz="1800" dirty="0"/>
+          </a:p>
+        </p:txBody>
+      </p:sp>
+      <p:sp>
+        <p:nvSpPr>
+          <p:cNvPr id="10" name="Shape 8"/>
+          <p:cNvSpPr/>
+          <p:nvPr/>
+        </p:nvSpPr>
+        <p:spPr>
+          <a:xfrm>
+            <a:off x="548640" y="3611880"/>
+            <a:ext cx="5394960" cy="713232"/>
+          </a:xfrm>
+          <a:prstGeom prst="roundRect">
+            <a:avLst>
+              <a:gd name="adj" fmla="val 12821"/>
+            </a:avLst>
+          </a:prstGeom>
+          <a:solidFill>
+            <a:srgbClr val="EEF3F4"/>
+          </a:solidFill>
+          <a:ln/>
+        </p:spPr>
+      </p:sp>
+      <p:sp>
+        <p:nvSpPr>
+          <p:cNvPr id="11" name="Text 9"/>
+          <p:cNvSpPr txBox="1"/>
+          <p:nvPr/>
+        </p:nvSpPr>
+        <p:spPr>
+          <a:xfrm>
+            <a:off x="777240" y="3611880"/>
+            <a:ext cx="3291840" cy="713232"/>
+          </a:xfrm>
+          <a:prstGeom prst="rect">
+            <a:avLst/>
+          </a:prstGeom>
+          <a:noFill/>
+          <a:ln/>
+        </p:spPr>
+        <p:txBody>
+          <a:bodyPr wrap="square" lIns="0" tIns="0" rIns="0" bIns="0" rtlCol="0" anchor="ctr"/>
+          <a:lstStyle/>
+          <a:p>
+            <a:pPr indent="0" marL="0">
+              <a:buNone/>
+            </a:pPr>
+            <a:r>
+              <a:rPr lang="en-US" sz="1800" b="1" dirty="0">
+                <a:solidFill>
+                  <a:srgbClr val="0F4C5C"/>
+                </a:solidFill>
+                <a:latin typeface="Courier New" pitchFamily="34" charset="0"/>
+                <a:ea typeface="Courier New" pitchFamily="34" charset="-122"/>
+                <a:cs typeface="Courier New" pitchFamily="34" charset="-120"/>
+              </a:rPr>
+              <a:t>x[3:] </a:t>
+            </a:r>
+            <a:pPr indent="0" marL="0">
+              <a:buNone/>
+            </a:pPr>
+            <a:r>
+              <a:rPr lang="en-US" sz="1800" dirty="0">
+                <a:solidFill>
+                  <a:srgbClr val="5C6F7B"/>
+                </a:solidFill>
+                <a:latin typeface="Courier New" pitchFamily="34" charset="0"/>
+                <a:ea typeface="Courier New" pitchFamily="34" charset="-122"/>
+                <a:cs typeface="Courier New" pitchFamily="34" charset="-120"/>
+              </a:rPr>
+              <a:t>  = x[3:6]</a:t>
+            </a:r>
+            <a:endParaRPr lang="en-US" sz="1800" dirty="0"/>
+          </a:p>
+        </p:txBody>
+      </p:sp>
+      <p:sp>
+        <p:nvSpPr>
+          <p:cNvPr id="12" name="Text 10"/>
+          <p:cNvSpPr txBox="1"/>
+          <p:nvPr/>
+        </p:nvSpPr>
+        <p:spPr>
+          <a:xfrm>
+            <a:off x="4114800" y="3611880"/>
+            <a:ext cx="1691640" cy="713232"/>
+          </a:xfrm>
+          <a:prstGeom prst="rect">
+            <a:avLst/>
+          </a:prstGeom>
+          <a:noFill/>
+          <a:ln/>
+        </p:spPr>
+        <p:txBody>
+          <a:bodyPr wrap="square" lIns="0" tIns="0" rIns="0" bIns="0" rtlCol="0" anchor="ctr"/>
+          <a:lstStyle/>
+          <a:p>
+            <a:pPr indent="0" marL="0">
+              <a:buNone/>
+            </a:pPr>
+            <a:r>
+              <a:rPr lang="en-US" sz="1800" dirty="0">
+                <a:solidFill>
+                  <a:srgbClr val="1F2A30"/>
+                </a:solidFill>
+                <a:latin typeface="Courier New" pitchFamily="34" charset="0"/>
+                <a:ea typeface="Courier New" pitchFamily="34" charset="-122"/>
+                <a:cs typeface="Courier New" pitchFamily="34" charset="-120"/>
+              </a:rPr>
+              <a:t>D E F</a:t>
+            </a:r>
+            <a:endParaRPr lang="en-US" sz="1800" dirty="0"/>
+          </a:p>
+        </p:txBody>
+      </p:sp>
+      <p:sp>
+        <p:nvSpPr>
+          <p:cNvPr id="13" name="Shape 11"/>
+          <p:cNvSpPr/>
+          <p:nvPr/>
+        </p:nvSpPr>
+        <p:spPr>
+          <a:xfrm>
+            <a:off x="548640" y="4480560"/>
+            <a:ext cx="5394960" cy="713232"/>
+          </a:xfrm>
+          <a:prstGeom prst="roundRect">
+            <a:avLst>
+              <a:gd name="adj" fmla="val 12821"/>
+            </a:avLst>
+          </a:prstGeom>
+          <a:solidFill>
+            <a:srgbClr val="EEF3F4"/>
+          </a:solidFill>
+          <a:ln/>
+        </p:spPr>
+      </p:sp>
+      <p:sp>
+        <p:nvSpPr>
+          <p:cNvPr id="14" name="Text 12"/>
+          <p:cNvSpPr txBox="1"/>
+          <p:nvPr/>
+        </p:nvSpPr>
+        <p:spPr>
+          <a:xfrm>
+            <a:off x="777240" y="4480560"/>
+            <a:ext cx="3291840" cy="713232"/>
+          </a:xfrm>
+          <a:prstGeom prst="rect">
+            <a:avLst/>
+          </a:prstGeom>
+          <a:noFill/>
+          <a:ln/>
+        </p:spPr>
+        <p:txBody>
+          <a:bodyPr wrap="square" lIns="0" tIns="0" rIns="0" bIns="0" rtlCol="0" anchor="ctr"/>
+          <a:lstStyle/>
+          <a:p>
+            <a:pPr indent="0" marL="0">
+              <a:buNone/>
+            </a:pPr>
+            <a:r>
+              <a:rPr lang="en-US" sz="1800" b="1" dirty="0">
+                <a:solidFill>
+                  <a:srgbClr val="0F4C5C"/>
+                </a:solidFill>
+                <a:latin typeface="Courier New" pitchFamily="34" charset="0"/>
+                <a:ea typeface="Courier New" pitchFamily="34" charset="-122"/>
+                <a:cs typeface="Courier New" pitchFamily="34" charset="-120"/>
+              </a:rPr>
+              <a:t>x[:]  </a:t>
+            </a:r>
+            <a:pPr indent="0" marL="0">
+              <a:buNone/>
+            </a:pPr>
+            <a:r>
+              <a:rPr lang="en-US" sz="1800" dirty="0">
+                <a:solidFill>
+                  <a:srgbClr val="5C6F7B"/>
+                </a:solidFill>
+                <a:latin typeface="Courier New" pitchFamily="34" charset="0"/>
+                <a:ea typeface="Courier New" pitchFamily="34" charset="-122"/>
+                <a:cs typeface="Courier New" pitchFamily="34" charset="-120"/>
+              </a:rPr>
+              <a:t>  = x[0:6]</a:t>
+            </a:r>
+            <a:endParaRPr lang="en-US" sz="1800" dirty="0"/>
+          </a:p>
+        </p:txBody>
+      </p:sp>
+      <p:sp>
+        <p:nvSpPr>
+          <p:cNvPr id="15" name="Text 13"/>
+          <p:cNvSpPr txBox="1"/>
+          <p:nvPr/>
+        </p:nvSpPr>
+        <p:spPr>
+          <a:xfrm>
+            <a:off x="4114800" y="4480560"/>
+            <a:ext cx="1691640" cy="713232"/>
+          </a:xfrm>
+          <a:prstGeom prst="rect">
+            <a:avLst/>
+          </a:prstGeom>
+          <a:noFill/>
+          <a:ln/>
+        </p:spPr>
+        <p:txBody>
+          <a:bodyPr wrap="square" lIns="0" tIns="0" rIns="0" bIns="0" rtlCol="0" anchor="ctr"/>
+          <a:lstStyle/>
+          <a:p>
+            <a:pPr indent="0" marL="0">
+              <a:buNone/>
+            </a:pPr>
+            <a:r>
+              <a:rPr lang="en-US" sz="1800" dirty="0">
+                <a:solidFill>
+                  <a:srgbClr val="1F2A30"/>
+                </a:solidFill>
+                <a:latin typeface="Courier New" pitchFamily="34" charset="0"/>
+                <a:ea typeface="Courier New" pitchFamily="34" charset="-122"/>
+                <a:cs typeface="Courier New" pitchFamily="34" charset="-120"/>
+              </a:rPr>
+              <a:t>tutto</a:t>
+            </a:r>
+            <a:endParaRPr lang="en-US" sz="1800" dirty="0"/>
+          </a:p>
+        </p:txBody>
+      </p:sp>
+      <p:sp>
+        <p:nvSpPr>
+          <p:cNvPr id="16" name="Shape 14"/>
+          <p:cNvSpPr/>
+          <p:nvPr/>
+        </p:nvSpPr>
+        <p:spPr>
+          <a:xfrm>
+            <a:off x="6217920" y="2743200"/>
+            <a:ext cx="5394960" cy="713232"/>
+          </a:xfrm>
+          <a:prstGeom prst="roundRect">
+            <a:avLst>
+              <a:gd name="adj" fmla="val 12821"/>
+            </a:avLst>
+          </a:prstGeom>
+          <a:solidFill>
+            <a:srgbClr val="EEF3F4"/>
+          </a:solidFill>
+          <a:ln/>
+        </p:spPr>
+      </p:sp>
+      <p:sp>
+        <p:nvSpPr>
+          <p:cNvPr id="17" name="Text 15"/>
+          <p:cNvSpPr txBox="1"/>
+          <p:nvPr/>
+        </p:nvSpPr>
+        <p:spPr>
+          <a:xfrm>
+            <a:off x="6446520" y="2743200"/>
+            <a:ext cx="3291840" cy="713232"/>
+          </a:xfrm>
+          <a:prstGeom prst="rect">
+            <a:avLst/>
+          </a:prstGeom>
+          <a:noFill/>
+          <a:ln/>
+        </p:spPr>
+        <p:txBody>
+          <a:bodyPr wrap="square" lIns="0" tIns="0" rIns="0" bIns="0" rtlCol="0" anchor="ctr"/>
+          <a:lstStyle/>
+          <a:p>
+            <a:pPr indent="0" marL="0">
+              <a:buNone/>
+            </a:pPr>
+            <a:r>
+              <a:rPr lang="en-US" sz="1800" b="1" dirty="0">
+                <a:solidFill>
+                  <a:srgbClr val="0F4C5C"/>
+                </a:solidFill>
+                <a:latin typeface="Courier New" pitchFamily="34" charset="0"/>
+                <a:ea typeface="Courier New" pitchFamily="34" charset="-122"/>
+                <a:cs typeface="Courier New" pitchFamily="34" charset="-120"/>
+              </a:rPr>
+              <a:t>x[::2]</a:t>
+            </a:r>
+            <a:pPr indent="0" marL="0">
+              <a:buNone/>
+            </a:pPr>
+            <a:endParaRPr lang="en-US" sz="1800" dirty="0"/>
+          </a:p>
+        </p:txBody>
+      </p:sp>
+      <p:sp>
+        <p:nvSpPr>
+          <p:cNvPr id="18" name="Text 16"/>
+          <p:cNvSpPr txBox="1"/>
+          <p:nvPr/>
+        </p:nvSpPr>
+        <p:spPr>
+          <a:xfrm>
+            <a:off x="9784080" y="2743200"/>
+            <a:ext cx="1691640" cy="713232"/>
+          </a:xfrm>
+          <a:prstGeom prst="rect">
+            <a:avLst/>
+          </a:prstGeom>
+          <a:noFill/>
+          <a:ln/>
+        </p:spPr>
+        <p:txBody>
+          <a:bodyPr wrap="square" lIns="0" tIns="0" rIns="0" bIns="0" rtlCol="0" anchor="ctr"/>
+          <a:lstStyle/>
+          <a:p>
+            <a:pPr indent="0" marL="0">
+              <a:buNone/>
+            </a:pPr>
+            <a:r>
+              <a:rPr lang="en-US" sz="1800" dirty="0">
+                <a:solidFill>
+                  <a:srgbClr val="1F2A30"/>
+                </a:solidFill>
+                <a:latin typeface="Courier New" pitchFamily="34" charset="0"/>
+                <a:ea typeface="Courier New" pitchFamily="34" charset="-122"/>
+                <a:cs typeface="Courier New" pitchFamily="34" charset="-120"/>
+              </a:rPr>
+              <a:t>A C E</a:t>
+            </a:r>
+            <a:endParaRPr lang="en-US" sz="1800" dirty="0"/>
+          </a:p>
+        </p:txBody>
+      </p:sp>
+      <p:sp>
+        <p:nvSpPr>
+          <p:cNvPr id="19" name="Shape 17"/>
+          <p:cNvSpPr/>
+          <p:nvPr/>
+        </p:nvSpPr>
+        <p:spPr>
+          <a:xfrm>
+            <a:off x="6217920" y="3611880"/>
+            <a:ext cx="5394960" cy="713232"/>
+          </a:xfrm>
+          <a:prstGeom prst="roundRect">
+            <a:avLst>
+              <a:gd name="adj" fmla="val 12821"/>
+            </a:avLst>
+          </a:prstGeom>
+          <a:solidFill>
+            <a:srgbClr val="EEF3F4"/>
+          </a:solidFill>
+          <a:ln/>
+        </p:spPr>
+      </p:sp>
+      <p:sp>
+        <p:nvSpPr>
+          <p:cNvPr id="20" name="Text 18"/>
+          <p:cNvSpPr txBox="1"/>
+          <p:nvPr/>
+        </p:nvSpPr>
+        <p:spPr>
+          <a:xfrm>
+            <a:off x="6446520" y="3611880"/>
+            <a:ext cx="3291840" cy="713232"/>
+          </a:xfrm>
+          <a:prstGeom prst="rect">
+            <a:avLst/>
+          </a:prstGeom>
+          <a:noFill/>
+          <a:ln/>
+        </p:spPr>
+        <p:txBody>
+          <a:bodyPr wrap="square" lIns="0" tIns="0" rIns="0" bIns="0" rtlCol="0" anchor="ctr"/>
+          <a:lstStyle/>
+          <a:p>
+            <a:pPr indent="0" marL="0">
+              <a:buNone/>
+            </a:pPr>
+            <a:r>
+              <a:rPr lang="en-US" sz="1800" b="1" dirty="0">
+                <a:solidFill>
+                  <a:srgbClr val="0F4C5C"/>
+                </a:solidFill>
+                <a:latin typeface="Courier New" pitchFamily="34" charset="0"/>
+                <a:ea typeface="Courier New" pitchFamily="34" charset="-122"/>
+                <a:cs typeface="Courier New" pitchFamily="34" charset="-120"/>
+              </a:rPr>
+              <a:t>x[1::2]</a:t>
+            </a:r>
+            <a:pPr indent="0" marL="0">
+              <a:buNone/>
+            </a:pPr>
+            <a:endParaRPr lang="en-US" sz="1800" dirty="0"/>
+          </a:p>
+        </p:txBody>
+      </p:sp>
+      <p:sp>
+        <p:nvSpPr>
+          <p:cNvPr id="21" name="Text 19"/>
+          <p:cNvSpPr txBox="1"/>
+          <p:nvPr/>
+        </p:nvSpPr>
+        <p:spPr>
+          <a:xfrm>
+            <a:off x="9784080" y="3611880"/>
+            <a:ext cx="1691640" cy="713232"/>
+          </a:xfrm>
+          <a:prstGeom prst="rect">
+            <a:avLst/>
+          </a:prstGeom>
+          <a:noFill/>
+          <a:ln/>
+        </p:spPr>
+        <p:txBody>
+          <a:bodyPr wrap="square" lIns="0" tIns="0" rIns="0" bIns="0" rtlCol="0" anchor="ctr"/>
+          <a:lstStyle/>
+          <a:p>
+            <a:pPr indent="0" marL="0">
+              <a:buNone/>
+            </a:pPr>
+            <a:r>
+              <a:rPr lang="en-US" sz="1800" dirty="0">
+                <a:solidFill>
+                  <a:srgbClr val="1F2A30"/>
+                </a:solidFill>
+                <a:latin typeface="Courier New" pitchFamily="34" charset="0"/>
+                <a:ea typeface="Courier New" pitchFamily="34" charset="-122"/>
+                <a:cs typeface="Courier New" pitchFamily="34" charset="-120"/>
+              </a:rPr>
+              <a:t>B D F</a:t>
+            </a:r>
+            <a:endParaRPr lang="en-US" sz="1800" dirty="0"/>
+          </a:p>
+        </p:txBody>
+      </p:sp>
+      <p:sp>
+        <p:nvSpPr>
+          <p:cNvPr id="22" name="Shape 20"/>
+          <p:cNvSpPr/>
+          <p:nvPr/>
+        </p:nvSpPr>
+        <p:spPr>
+          <a:xfrm>
+            <a:off x="6217920" y="4480560"/>
+            <a:ext cx="5394960" cy="713232"/>
+          </a:xfrm>
+          <a:prstGeom prst="roundRect">
+            <a:avLst>
+              <a:gd name="adj" fmla="val 12821"/>
+            </a:avLst>
+          </a:prstGeom>
+          <a:solidFill>
+            <a:srgbClr val="EEF3F4"/>
+          </a:solidFill>
+          <a:ln/>
+        </p:spPr>
+      </p:sp>
+      <p:sp>
+        <p:nvSpPr>
+          <p:cNvPr id="23" name="Text 21"/>
+          <p:cNvSpPr txBox="1"/>
+          <p:nvPr/>
+        </p:nvSpPr>
+        <p:spPr>
+          <a:xfrm>
+            <a:off x="6446520" y="4480560"/>
+            <a:ext cx="3291840" cy="713232"/>
+          </a:xfrm>
+          <a:prstGeom prst="rect">
+            <a:avLst/>
+          </a:prstGeom>
+          <a:noFill/>
+          <a:ln/>
+        </p:spPr>
+        <p:txBody>
+          <a:bodyPr wrap="square" lIns="0" tIns="0" rIns="0" bIns="0" rtlCol="0" anchor="ctr"/>
+          <a:lstStyle/>
+          <a:p>
+            <a:pPr indent="0" marL="0">
+              <a:buNone/>
+            </a:pPr>
+            <a:r>
+              <a:rPr lang="en-US" sz="1800" b="1" dirty="0">
+                <a:solidFill>
+                  <a:srgbClr val="0F4C5C"/>
+                </a:solidFill>
+                <a:latin typeface="Courier New" pitchFamily="34" charset="0"/>
+                <a:ea typeface="Courier New" pitchFamily="34" charset="-122"/>
+                <a:cs typeface="Courier New" pitchFamily="34" charset="-120"/>
+              </a:rPr>
+              <a:t>x[::-1]</a:t>
+            </a:r>
+            <a:pPr indent="0" marL="0">
+              <a:buNone/>
+            </a:pPr>
+            <a:endParaRPr lang="en-US" sz="1800" dirty="0"/>
+          </a:p>
+        </p:txBody>
+      </p:sp>
+      <p:sp>
+        <p:nvSpPr>
+          <p:cNvPr id="24" name="Text 22"/>
+          <p:cNvSpPr txBox="1"/>
+          <p:nvPr/>
+        </p:nvSpPr>
+        <p:spPr>
+          <a:xfrm>
+            <a:off x="9784080" y="4480560"/>
+            <a:ext cx="1691640" cy="713232"/>
+          </a:xfrm>
+          <a:prstGeom prst="rect">
+            <a:avLst/>
+          </a:prstGeom>
+          <a:noFill/>
+          <a:ln/>
+        </p:spPr>
+        <p:txBody>
+          <a:bodyPr wrap="square" lIns="0" tIns="0" rIns="0" bIns="0" rtlCol="0" anchor="ctr"/>
+          <a:lstStyle/>
+          <a:p>
+            <a:pPr indent="0" marL="0">
+              <a:buNone/>
+            </a:pPr>
+            <a:r>
+              <a:rPr lang="en-US" sz="1800" dirty="0">
+                <a:solidFill>
+                  <a:srgbClr val="1F2A30"/>
+                </a:solidFill>
+                <a:latin typeface="Courier New" pitchFamily="34" charset="0"/>
+                <a:ea typeface="Courier New" pitchFamily="34" charset="-122"/>
+                <a:cs typeface="Courier New" pitchFamily="34" charset="-120"/>
+              </a:rPr>
+              <a:t>F E D C B A</a:t>
+            </a:r>
+            <a:endParaRPr lang="en-US" sz="1800" dirty="0"/>
+          </a:p>
+        </p:txBody>
+      </p:sp>
+      <p:sp>
+        <p:nvSpPr>
+          <p:cNvPr id="25" name="Text 23"/>
+          <p:cNvSpPr txBox="1"/>
+          <p:nvPr/>
+        </p:nvSpPr>
+        <p:spPr>
+          <a:xfrm>
+            <a:off x="548640" y="5486400"/>
+            <a:ext cx="11064240" cy="457200"/>
+          </a:xfrm>
+          <a:prstGeom prst="rect">
+            <a:avLst/>
+          </a:prstGeom>
+          <a:noFill/>
+          <a:ln/>
+        </p:spPr>
+        <p:txBody>
+          <a:bodyPr wrap="square" lIns="0" tIns="0" rIns="0" bIns="0" rtlCol="0" anchor="ctr"/>
+          <a:lstStyle/>
+          <a:p>
+            <a:pPr indent="0" marL="0">
+              <a:buNone/>
+            </a:pPr>
+            <a:r>
+              <a:rPr lang="en-US" sz="1700" dirty="0">
+                <a:solidFill>
+                  <a:srgbClr val="1F2A30"/>
+                </a:solidFill>
+                <a:latin typeface="Courier New" pitchFamily="34" charset="0"/>
+                <a:ea typeface="Courier New" pitchFamily="34" charset="-122"/>
+                <a:cs typeface="Courier New" pitchFamily="34" charset="-120"/>
+              </a:rPr>
+              <a:t>x = </a:t>
+            </a:r>
+            <a:pPr indent="0" marL="0">
+              <a:buNone/>
+            </a:pPr>
+            <a:r>
+              <a:rPr lang="en-US" sz="1700" b="1" dirty="0">
+                <a:solidFill>
+                  <a:srgbClr val="1F2A30"/>
+                </a:solidFill>
+                <a:latin typeface="Courier New" pitchFamily="34" charset="0"/>
+                <a:ea typeface="Courier New" pitchFamily="34" charset="-122"/>
+                <a:cs typeface="Courier New" pitchFamily="34" charset="-120"/>
+              </a:rPr>
+              <a:t>A B C D E F</a:t>
+            </a:r>
+            <a:pPr indent="0" marL="0">
+              <a:buNone/>
+            </a:pPr>
+            <a:r>
+              <a:rPr lang="en-US" sz="1700" dirty="0">
+                <a:solidFill>
+                  <a:srgbClr val="1F2A30"/>
+                </a:solidFill>
+              </a:rPr>
+              <a:t>    Con il passo negativo si va all'indietro: </a:t>
+            </a:r>
+            <a:pPr indent="0" marL="0">
+              <a:buNone/>
+            </a:pPr>
+            <a:r>
+              <a:rPr lang="en-US" sz="1700" b="1" dirty="0">
+                <a:solidFill>
+                  <a:srgbClr val="1F2A30"/>
+                </a:solidFill>
+                <a:latin typeface="Courier New" pitchFamily="34" charset="0"/>
+                <a:ea typeface="Courier New" pitchFamily="34" charset="-122"/>
+                <a:cs typeface="Courier New" pitchFamily="34" charset="-120"/>
+              </a:rPr>
+              <a:t>[::-1]</a:t>
+            </a:r>
+            <a:pPr indent="0" marL="0">
+              <a:buNone/>
+            </a:pPr>
+            <a:r>
+              <a:rPr lang="en-US" sz="1700" dirty="0">
+                <a:solidFill>
+                  <a:srgbClr val="1F2A30"/>
+                </a:solidFill>
+              </a:rPr>
+              <a:t> inverte.</a:t>
+            </a:r>
+            <a:endParaRPr lang="en-US" sz="1700" dirty="0"/>
+          </a:p>
+        </p:txBody>
+      </p:sp>
+      <p:sp>
+        <p:nvSpPr>
+          <p:cNvPr id="25" name="Slide Number Placeholder 0"/>
+          <p:cNvSpPr>
+            <a:spLocks noGrp="1"/>
+          </p:cNvSpPr>
+          <p:nvPr>
+            <p:ph type="sldNum" sz="quarter" idx="4294967295"/>
+          </p:nvPr>
+        </p:nvSpPr>
+        <p:spPr>
+          <a:xfrm>
+            <a:off x="11155680" y="6400800"/>
+            <a:ext cx="457200" cy="274320"/>
+          </a:xfrm>
+          <a:prstGeom prst="rect">
+            <a:avLst/>
+          </a:prstGeom>
+          <a:extLst>
+            <a:ext uri="{C572A759-6A51-4108-AA02-DFA0A04FC94B}">
+              <ma14:wrappingTextBoxFlag xmlns:ma14="http://schemas.microsoft.com/office/mac/drawingml/2011/main" val="0"/>
+            </a:ext>
+          </a:extLst>
+        </p:spPr>
+        <p:txBody>
+          <a:bodyPr/>
+          <a:lstStyle>
+            <a:lvl1pPr>
+              <a:defRPr sz="1000">
+                <a:solidFill>
+                  <a:srgbClr val="5C6F7B"/>
+                </a:solidFill>
+              </a:defRPr>
+            </a:lvl1pPr>
+          </a:lstStyle>
+          <a:p>
+            <a:pPr algn="r"/>
+            <a:fld id="{F7021451-1387-4CA6-816F-3879F97B5CBC}" type="slidenum">
+              <a:rPr b="0" lang="en-US"/>
+              <a:t>8</a:t>
+            </a:fld>
+            <a:endParaRPr lang="en-US"/>
+          </a:p>
+        </p:txBody>
+      </p:sp>
+    </p:spTree>
+  </p:cSld>
+  <p:clrMapOvr>
+    <a:masterClrMapping/>
+  </p:clrMapOvr>
+</p:sld>
+</file>
+
+<file path=ppt/slides/slide9.xml><?xml version="1.0" encoding="utf-8"?>
+<p:sld xmlns:a="http://schemas.openxmlformats.org/drawingml/2006/main" xmlns:r="http://schemas.openxmlformats.org/officeDocument/2006/relationships" xmlns:p="http://schemas.openxmlformats.org/presentationml/2006/main">
+  <p:cSld name="Slide 9">
+    <p:spTree>
+      <p:nvGrpSpPr>
+        <p:cNvPr id="1" name=""/>
+        <p:cNvGrpSpPr/>
+        <p:nvPr/>
+      </p:nvGrpSpPr>
+      <p:grpSpPr>
+        <a:xfrm>
+          <a:off x="0" y="0"/>
+          <a:ext cx="0" cy="0"/>
+          <a:chOff x="0" y="0"/>
+          <a:chExt cx="0" cy="0"/>
+        </a:xfrm>
+      </p:grpSpPr>
+      <p:sp>
+        <p:nvSpPr>
+          <p:cNvPr id="2" name="Text 0"/>
+          <p:cNvSpPr/>
+          <p:nvPr>
+            <p:ph idx="100" type="title" hasCustomPrompt="1"/>
+          </p:nvPr>
+        </p:nvSpPr>
+        <p:spPr>
+          <a:xfrm>
+            <a:off x="548640" y="365760"/>
+            <a:ext cx="11064240" cy="822960"/>
+          </a:xfrm>
+          <a:prstGeom prst="rect">
+            <a:avLst/>
+          </a:prstGeom>
+          <a:noFill/>
+          <a:ln/>
+        </p:spPr>
+        <p:txBody>
+          <a:bodyPr wrap="square" lIns="0" tIns="0" rIns="0" bIns="0" rtlCol="0" anchor="ctr"/>
+          <a:lstStyle/>
+          <a:p>
+            <a:pPr algn="l" indent="0" marL="0">
+              <a:buNone/>
+            </a:pPr>
+            <a:r>
+              <a:rPr lang="en-US" sz="3600" b="1" dirty="0">
+                <a:solidFill>
+                  <a:srgbClr val="0F4C5C"/>
+                </a:solidFill>
+              </a:rPr>
               <a:t>iloc è come un intervallo di Excel</a:t>
             </a:r>
             <a:endParaRPr lang="en-US" sz="3600" dirty="0"/>
@@ -12493,7 +14251,7 @@
       </p:sp>
       <p:graphicFrame>
         <p:nvGraphicFramePr>
-          <p:cNvPr id="9" name="Table 0"/>
+          <p:cNvPr id="10" name="Table 0"/>
           <p:cNvGraphicFramePr>
             <a:graphicFrameLocks noGrp="1"/>
           </p:cNvGraphicFramePr>
@@ -13112,682 +14870,6 @@
               <a:t>Stesse celle: cambiano solo i numeri.</a:t>
             </a:r>
             <a:endParaRPr lang="en-US" sz="1700" dirty="0"/>
-          </a:p>
-        </p:txBody>
-      </p:sp>
-      <p:sp>
-        <p:nvSpPr>
-          <p:cNvPr id="25" name="Slide Number Placeholder 0"/>
-          <p:cNvSpPr>
-            <a:spLocks noGrp="1"/>
-          </p:cNvSpPr>
-          <p:nvPr>
-            <p:ph type="sldNum" sz="quarter" idx="4294967295"/>
-          </p:nvPr>
-        </p:nvSpPr>
-        <p:spPr>
-          <a:xfrm>
-            <a:off x="11155680" y="6400800"/>
-            <a:ext cx="457200" cy="274320"/>
-          </a:xfrm>
-          <a:prstGeom prst="rect">
-            <a:avLst/>
-          </a:prstGeom>
-          <a:extLst>
-            <a:ext uri="{C572A759-6A51-4108-AA02-DFA0A04FC94B}">
-              <ma14:wrappingTextBoxFlag xmlns:ma14="http://schemas.microsoft.com/office/mac/drawingml/2011/main" val="0"/>
-            </a:ext>
-          </a:extLst>
-        </p:spPr>
-        <p:txBody>
-          <a:bodyPr/>
-          <a:lstStyle>
-            <a:lvl1pPr>
-              <a:defRPr sz="1000">
-                <a:solidFill>
-                  <a:srgbClr val="5C6F7B"/>
-                </a:solidFill>
-              </a:defRPr>
-            </a:lvl1pPr>
-          </a:lstStyle>
-          <a:p>
-            <a:pPr algn="r"/>
-            <a:fld id="{F7021451-1387-4CA6-816F-3879F97B5CBC}" type="slidenum">
-              <a:rPr b="0" lang="en-US"/>
-              <a:t>8</a:t>
-            </a:fld>
-            <a:endParaRPr lang="en-US"/>
-          </a:p>
-        </p:txBody>
-      </p:sp>
-    </p:spTree>
-  </p:cSld>
-  <p:clrMapOvr>
-    <a:masterClrMapping/>
-  </p:clrMapOvr>
-</p:sld>
-</file>
-
-<file path=ppt/slides/slide9.xml><?xml version="1.0" encoding="utf-8"?>
-<p:sld xmlns:a="http://schemas.openxmlformats.org/drawingml/2006/main" xmlns:r="http://schemas.openxmlformats.org/officeDocument/2006/relationships" xmlns:p="http://schemas.openxmlformats.org/presentationml/2006/main">
-  <p:cSld name="Slide 9">
-    <p:spTree>
-      <p:nvGrpSpPr>
-        <p:cNvPr id="1" name=""/>
-        <p:cNvGrpSpPr/>
-        <p:nvPr/>
-      </p:nvGrpSpPr>
-      <p:grpSpPr>
-        <a:xfrm>
-          <a:off x="0" y="0"/>
-          <a:ext cx="0" cy="0"/>
-          <a:chOff x="0" y="0"/>
-          <a:chExt cx="0" cy="0"/>
-        </a:xfrm>
-      </p:grpSpPr>
-      <p:sp>
-        <p:nvSpPr>
-          <p:cNvPr id="2" name="Text 0"/>
-          <p:cNvSpPr/>
-          <p:nvPr>
-            <p:ph idx="100" type="title" hasCustomPrompt="1"/>
-          </p:nvPr>
-        </p:nvSpPr>
-        <p:spPr>
-          <a:xfrm>
-            <a:off x="548640" y="365760"/>
-            <a:ext cx="11064240" cy="822960"/>
-          </a:xfrm>
-          <a:prstGeom prst="rect">
-            <a:avLst/>
-          </a:prstGeom>
-          <a:noFill/>
-          <a:ln/>
-        </p:spPr>
-        <p:txBody>
-          <a:bodyPr wrap="square" lIns="0" tIns="0" rIns="0" bIns="0" rtlCol="0" anchor="ctr"/>
-          <a:lstStyle/>
-          <a:p>
-            <a:pPr algn="l" indent="0" marL="0">
-              <a:buNone/>
-            </a:pPr>
-            <a:r>
-              <a:rPr lang="en-US" sz="3600" b="1" dirty="0">
-                <a:solidFill>
-                  <a:srgbClr val="0F4C5C"/>
-                </a:solidFill>
-              </a:rPr>
-              <a:t>Fare domande a un oggetto</a:t>
-            </a:r>
-            <a:endParaRPr lang="en-US" sz="3600" dirty="0"/>
-          </a:p>
-        </p:txBody>
-      </p:sp>
-      <p:sp>
-        <p:nvSpPr>
-          <p:cNvPr id="3" name="Text 1"/>
-          <p:cNvSpPr txBox="1"/>
-          <p:nvPr/>
-        </p:nvSpPr>
-        <p:spPr>
-          <a:xfrm>
-            <a:off x="548640" y="1645920"/>
-            <a:ext cx="5349240" cy="457200"/>
-          </a:xfrm>
-          <a:prstGeom prst="rect">
-            <a:avLst/>
-          </a:prstGeom>
-          <a:noFill/>
-          <a:ln/>
-        </p:spPr>
-        <p:txBody>
-          <a:bodyPr wrap="square" lIns="0" tIns="0" rIns="0" bIns="0" rtlCol="0" anchor="ctr"/>
-          <a:lstStyle/>
-          <a:p>
-            <a:pPr indent="0" marL="0">
-              <a:buNone/>
-            </a:pPr>
-            <a:r>
-              <a:rPr lang="en-US" sz="2600" b="1" dirty="0">
-                <a:solidFill>
-                  <a:srgbClr val="0F4C5C"/>
-                </a:solidFill>
-              </a:rPr>
-              <a:t>Metodo</a:t>
-            </a:r>
-            <a:endParaRPr lang="en-US" sz="2600" dirty="0"/>
-          </a:p>
-        </p:txBody>
-      </p:sp>
-      <p:sp>
-        <p:nvSpPr>
-          <p:cNvPr id="4" name="Text 2"/>
-          <p:cNvSpPr txBox="1"/>
-          <p:nvPr/>
-        </p:nvSpPr>
-        <p:spPr>
-          <a:xfrm>
-            <a:off x="548640" y="2103120"/>
-            <a:ext cx="5349240" cy="411480"/>
-          </a:xfrm>
-          <a:prstGeom prst="rect">
-            <a:avLst/>
-          </a:prstGeom>
-          <a:noFill/>
-          <a:ln/>
-        </p:spPr>
-        <p:txBody>
-          <a:bodyPr wrap="square" lIns="0" tIns="0" rIns="0" bIns="0" rtlCol="0" anchor="ctr"/>
-          <a:lstStyle/>
-          <a:p>
-            <a:pPr indent="0" marL="0">
-              <a:buNone/>
-            </a:pPr>
-            <a:r>
-              <a:rPr lang="en-US" sz="1800" dirty="0">
-                <a:solidFill>
-                  <a:srgbClr val="5C6F7B"/>
-                </a:solidFill>
-              </a:rPr>
-              <a:t>un'azione: ha le parentesi</a:t>
-            </a:r>
-            <a:endParaRPr lang="en-US" sz="1800" dirty="0"/>
-          </a:p>
-        </p:txBody>
-      </p:sp>
-      <p:sp>
-        <p:nvSpPr>
-          <p:cNvPr id="5" name="card-code"/>
-          <p:cNvSpPr/>
-          <p:nvPr/>
-        </p:nvSpPr>
-        <p:spPr>
-          <a:xfrm>
-            <a:off x="548640" y="2697480"/>
-            <a:ext cx="5349240" cy="1188720"/>
-          </a:xfrm>
-          <a:prstGeom prst="roundRect">
-            <a:avLst>
-              <a:gd name="adj" fmla="val 9231"/>
-            </a:avLst>
-          </a:prstGeom>
-          <a:solidFill>
-            <a:srgbClr val="1F2A30"/>
-          </a:solidFill>
-          <a:ln/>
-        </p:spPr>
-      </p:sp>
-      <p:sp>
-        <p:nvSpPr>
-          <p:cNvPr id="6" name="Text 4"/>
-          <p:cNvSpPr txBox="1"/>
-          <p:nvPr/>
-        </p:nvSpPr>
-        <p:spPr>
-          <a:xfrm>
-            <a:off x="777240" y="2834640"/>
-            <a:ext cx="1828800" cy="274320"/>
-          </a:xfrm>
-          <a:prstGeom prst="rect">
-            <a:avLst/>
-          </a:prstGeom>
-          <a:noFill/>
-          <a:ln/>
-        </p:spPr>
-        <p:txBody>
-          <a:bodyPr wrap="square" lIns="0" tIns="0" rIns="0" bIns="0" rtlCol="0" anchor="ctr"/>
-          <a:lstStyle/>
-          <a:p>
-            <a:pPr indent="0" marL="0">
-              <a:buNone/>
-            </a:pPr>
-            <a:r>
-              <a:rPr lang="en-US" sz="1100" b="1" spc="200" kern="0" dirty="0">
-                <a:solidFill>
-                  <a:srgbClr val="E09F3E"/>
-                </a:solidFill>
-              </a:rPr>
-              <a:t>PYTHON</a:t>
-            </a:r>
-            <a:endParaRPr lang="en-US" sz="1100" dirty="0"/>
-          </a:p>
-        </p:txBody>
-      </p:sp>
-      <p:sp>
-        <p:nvSpPr>
-          <p:cNvPr id="7" name="Text 5"/>
-          <p:cNvSpPr txBox="1"/>
-          <p:nvPr/>
-        </p:nvSpPr>
-        <p:spPr>
-          <a:xfrm>
-            <a:off x="777240" y="3154680"/>
-            <a:ext cx="4892040" cy="594360"/>
-          </a:xfrm>
-          <a:prstGeom prst="rect">
-            <a:avLst/>
-          </a:prstGeom>
-          <a:noFill/>
-          <a:ln/>
-        </p:spPr>
-        <p:txBody>
-          <a:bodyPr wrap="square" lIns="0" tIns="0" rIns="0" bIns="0" rtlCol="0" anchor="t"/>
-          <a:lstStyle/>
-          <a:p>
-            <a:pPr indent="0" marL="0">
-              <a:buNone/>
-            </a:pPr>
-            <a:r>
-              <a:rPr lang="en-US" sz="2200" dirty="0">
-                <a:solidFill>
-                  <a:srgbClr val="FFFFFF"/>
-                </a:solidFill>
-                <a:latin typeface="Courier New" pitchFamily="34" charset="0"/>
-                <a:ea typeface="Courier New" pitchFamily="34" charset="-122"/>
-                <a:cs typeface="Courier New" pitchFamily="34" charset="-120"/>
-              </a:rPr>
-              <a:t>df.head(3)</a:t>
-            </a:r>
-            <a:endParaRPr lang="en-US" sz="2200" dirty="0"/>
-          </a:p>
-        </p:txBody>
-      </p:sp>
-      <p:sp>
-        <p:nvSpPr>
-          <p:cNvPr id="8" name="card-out"/>
-          <p:cNvSpPr/>
-          <p:nvPr/>
-        </p:nvSpPr>
-        <p:spPr>
-          <a:xfrm>
-            <a:off x="548640" y="4069080"/>
-            <a:ext cx="5349240" cy="1188720"/>
-          </a:xfrm>
-          <a:prstGeom prst="roundRect">
-            <a:avLst>
-              <a:gd name="adj" fmla="val 9231"/>
-            </a:avLst>
-          </a:prstGeom>
-          <a:solidFill>
-            <a:srgbClr val="EEF3F4"/>
-          </a:solidFill>
-          <a:ln/>
-        </p:spPr>
-      </p:sp>
-      <p:sp>
-        <p:nvSpPr>
-          <p:cNvPr id="9" name="Text 7"/>
-          <p:cNvSpPr txBox="1"/>
-          <p:nvPr/>
-        </p:nvSpPr>
-        <p:spPr>
-          <a:xfrm>
-            <a:off x="777240" y="4206240"/>
-            <a:ext cx="1828800" cy="274320"/>
-          </a:xfrm>
-          <a:prstGeom prst="rect">
-            <a:avLst/>
-          </a:prstGeom>
-          <a:noFill/>
-          <a:ln/>
-        </p:spPr>
-        <p:txBody>
-          <a:bodyPr wrap="square" lIns="0" tIns="0" rIns="0" bIns="0" rtlCol="0" anchor="ctr"/>
-          <a:lstStyle/>
-          <a:p>
-            <a:pPr indent="0" marL="0">
-              <a:buNone/>
-            </a:pPr>
-            <a:r>
-              <a:rPr lang="en-US" sz="1100" b="1" spc="200" kern="0" dirty="0">
-                <a:solidFill>
-                  <a:srgbClr val="5C6F7B"/>
-                </a:solidFill>
-              </a:rPr>
-              <a:t>OUTPUT</a:t>
-            </a:r>
-            <a:endParaRPr lang="en-US" sz="1100" dirty="0"/>
-          </a:p>
-        </p:txBody>
-      </p:sp>
-      <p:sp>
-        <p:nvSpPr>
-          <p:cNvPr id="10" name="Text 8"/>
-          <p:cNvSpPr txBox="1"/>
-          <p:nvPr/>
-        </p:nvSpPr>
-        <p:spPr>
-          <a:xfrm>
-            <a:off x="777240" y="4526280"/>
-            <a:ext cx="4892040" cy="594360"/>
-          </a:xfrm>
-          <a:prstGeom prst="rect">
-            <a:avLst/>
-          </a:prstGeom>
-          <a:noFill/>
-          <a:ln/>
-        </p:spPr>
-        <p:txBody>
-          <a:bodyPr wrap="square" lIns="0" tIns="0" rIns="0" bIns="0" rtlCol="0" anchor="t"/>
-          <a:lstStyle/>
-          <a:p>
-            <a:pPr indent="0" marL="0">
-              <a:buNone/>
-            </a:pPr>
-            <a:r>
-              <a:rPr lang="en-US" sz="2000" dirty="0">
-                <a:solidFill>
-                  <a:srgbClr val="1F2A30"/>
-                </a:solidFill>
-                <a:latin typeface="Courier New" pitchFamily="34" charset="0"/>
-                <a:ea typeface="Courier New" pitchFamily="34" charset="-122"/>
-                <a:cs typeface="Courier New" pitchFamily="34" charset="-120"/>
-              </a:rPr>
-              <a:t>le prime 3 righe</a:t>
-            </a:r>
-            <a:endParaRPr lang="en-US" sz="2000" dirty="0"/>
-          </a:p>
-        </p:txBody>
-      </p:sp>
-      <p:sp>
-        <p:nvSpPr>
-          <p:cNvPr id="11" name="Text 9"/>
-          <p:cNvSpPr txBox="1"/>
-          <p:nvPr/>
-        </p:nvSpPr>
-        <p:spPr>
-          <a:xfrm>
-            <a:off x="6263640" y="1645920"/>
-            <a:ext cx="5349240" cy="457200"/>
-          </a:xfrm>
-          <a:prstGeom prst="rect">
-            <a:avLst/>
-          </a:prstGeom>
-          <a:noFill/>
-          <a:ln/>
-        </p:spPr>
-        <p:txBody>
-          <a:bodyPr wrap="square" lIns="0" tIns="0" rIns="0" bIns="0" rtlCol="0" anchor="ctr"/>
-          <a:lstStyle/>
-          <a:p>
-            <a:pPr indent="0" marL="0">
-              <a:buNone/>
-            </a:pPr>
-            <a:r>
-              <a:rPr lang="en-US" sz="2600" b="1" dirty="0">
-                <a:solidFill>
-                  <a:srgbClr val="0F4C5C"/>
-                </a:solidFill>
-              </a:rPr>
-              <a:t>Attributo</a:t>
-            </a:r>
-            <a:endParaRPr lang="en-US" sz="2600" dirty="0"/>
-          </a:p>
-        </p:txBody>
-      </p:sp>
-      <p:sp>
-        <p:nvSpPr>
-          <p:cNvPr id="12" name="Text 10"/>
-          <p:cNvSpPr txBox="1"/>
-          <p:nvPr/>
-        </p:nvSpPr>
-        <p:spPr>
-          <a:xfrm>
-            <a:off x="6263640" y="2103120"/>
-            <a:ext cx="5349240" cy="411480"/>
-          </a:xfrm>
-          <a:prstGeom prst="rect">
-            <a:avLst/>
-          </a:prstGeom>
-          <a:noFill/>
-          <a:ln/>
-        </p:spPr>
-        <p:txBody>
-          <a:bodyPr wrap="square" lIns="0" tIns="0" rIns="0" bIns="0" rtlCol="0" anchor="ctr"/>
-          <a:lstStyle/>
-          <a:p>
-            <a:pPr indent="0" marL="0">
-              <a:buNone/>
-            </a:pPr>
-            <a:r>
-              <a:rPr lang="en-US" sz="1800" dirty="0">
-                <a:solidFill>
-                  <a:srgbClr val="5C6F7B"/>
-                </a:solidFill>
-              </a:rPr>
-              <a:t>un'informazione: niente parentesi</a:t>
-            </a:r>
-            <a:endParaRPr lang="en-US" sz="1800" dirty="0"/>
-          </a:p>
-        </p:txBody>
-      </p:sp>
-      <p:sp>
-        <p:nvSpPr>
-          <p:cNvPr id="13" name="card-code"/>
-          <p:cNvSpPr/>
-          <p:nvPr/>
-        </p:nvSpPr>
-        <p:spPr>
-          <a:xfrm>
-            <a:off x="6263640" y="2697480"/>
-            <a:ext cx="5349240" cy="1188720"/>
-          </a:xfrm>
-          <a:prstGeom prst="roundRect">
-            <a:avLst>
-              <a:gd name="adj" fmla="val 9231"/>
-            </a:avLst>
-          </a:prstGeom>
-          <a:solidFill>
-            <a:srgbClr val="1F2A30"/>
-          </a:solidFill>
-          <a:ln/>
-        </p:spPr>
-      </p:sp>
-      <p:sp>
-        <p:nvSpPr>
-          <p:cNvPr id="14" name="Text 12"/>
-          <p:cNvSpPr txBox="1"/>
-          <p:nvPr/>
-        </p:nvSpPr>
-        <p:spPr>
-          <a:xfrm>
-            <a:off x="6492240" y="2834640"/>
-            <a:ext cx="1828800" cy="274320"/>
-          </a:xfrm>
-          <a:prstGeom prst="rect">
-            <a:avLst/>
-          </a:prstGeom>
-          <a:noFill/>
-          <a:ln/>
-        </p:spPr>
-        <p:txBody>
-          <a:bodyPr wrap="square" lIns="0" tIns="0" rIns="0" bIns="0" rtlCol="0" anchor="ctr"/>
-          <a:lstStyle/>
-          <a:p>
-            <a:pPr indent="0" marL="0">
-              <a:buNone/>
-            </a:pPr>
-            <a:r>
-              <a:rPr lang="en-US" sz="1100" b="1" spc="200" kern="0" dirty="0">
-                <a:solidFill>
-                  <a:srgbClr val="E09F3E"/>
-                </a:solidFill>
-              </a:rPr>
-              <a:t>PYTHON</a:t>
-            </a:r>
-            <a:endParaRPr lang="en-US" sz="1100" dirty="0"/>
-          </a:p>
-        </p:txBody>
-      </p:sp>
-      <p:sp>
-        <p:nvSpPr>
-          <p:cNvPr id="15" name="Text 13"/>
-          <p:cNvSpPr txBox="1"/>
-          <p:nvPr/>
-        </p:nvSpPr>
-        <p:spPr>
-          <a:xfrm>
-            <a:off x="6492240" y="3154680"/>
-            <a:ext cx="4892040" cy="594360"/>
-          </a:xfrm>
-          <a:prstGeom prst="rect">
-            <a:avLst/>
-          </a:prstGeom>
-          <a:noFill/>
-          <a:ln/>
-        </p:spPr>
-        <p:txBody>
-          <a:bodyPr wrap="square" lIns="0" tIns="0" rIns="0" bIns="0" rtlCol="0" anchor="t"/>
-          <a:lstStyle/>
-          <a:p>
-            <a:pPr indent="0" marL="0">
-              <a:buNone/>
-            </a:pPr>
-            <a:r>
-              <a:rPr lang="en-US" sz="2200" dirty="0">
-                <a:solidFill>
-                  <a:srgbClr val="FFFFFF"/>
-                </a:solidFill>
-                <a:latin typeface="Courier New" pitchFamily="34" charset="0"/>
-                <a:ea typeface="Courier New" pitchFamily="34" charset="-122"/>
-                <a:cs typeface="Courier New" pitchFamily="34" charset="-120"/>
-              </a:rPr>
-              <a:t>df.shape</a:t>
-            </a:r>
-            <a:endParaRPr lang="en-US" sz="2200" dirty="0"/>
-          </a:p>
-        </p:txBody>
-      </p:sp>
-      <p:sp>
-        <p:nvSpPr>
-          <p:cNvPr id="16" name="card-out"/>
-          <p:cNvSpPr/>
-          <p:nvPr/>
-        </p:nvSpPr>
-        <p:spPr>
-          <a:xfrm>
-            <a:off x="6263640" y="4069080"/>
-            <a:ext cx="5349240" cy="1188720"/>
-          </a:xfrm>
-          <a:prstGeom prst="roundRect">
-            <a:avLst>
-              <a:gd name="adj" fmla="val 9231"/>
-            </a:avLst>
-          </a:prstGeom>
-          <a:solidFill>
-            <a:srgbClr val="EEF3F4"/>
-          </a:solidFill>
-          <a:ln/>
-        </p:spPr>
-      </p:sp>
-      <p:sp>
-        <p:nvSpPr>
-          <p:cNvPr id="17" name="Text 15"/>
-          <p:cNvSpPr txBox="1"/>
-          <p:nvPr/>
-        </p:nvSpPr>
-        <p:spPr>
-          <a:xfrm>
-            <a:off x="6492240" y="4206240"/>
-            <a:ext cx="1828800" cy="274320"/>
-          </a:xfrm>
-          <a:prstGeom prst="rect">
-            <a:avLst/>
-          </a:prstGeom>
-          <a:noFill/>
-          <a:ln/>
-        </p:spPr>
-        <p:txBody>
-          <a:bodyPr wrap="square" lIns="0" tIns="0" rIns="0" bIns="0" rtlCol="0" anchor="ctr"/>
-          <a:lstStyle/>
-          <a:p>
-            <a:pPr indent="0" marL="0">
-              <a:buNone/>
-            </a:pPr>
-            <a:r>
-              <a:rPr lang="en-US" sz="1100" b="1" spc="200" kern="0" dirty="0">
-                <a:solidFill>
-                  <a:srgbClr val="5C6F7B"/>
-                </a:solidFill>
-              </a:rPr>
-              <a:t>OUTPUT</a:t>
-            </a:r>
-            <a:endParaRPr lang="en-US" sz="1100" dirty="0"/>
-          </a:p>
-        </p:txBody>
-      </p:sp>
-      <p:sp>
-        <p:nvSpPr>
-          <p:cNvPr id="18" name="Text 16"/>
-          <p:cNvSpPr txBox="1"/>
-          <p:nvPr/>
-        </p:nvSpPr>
-        <p:spPr>
-          <a:xfrm>
-            <a:off x="6492240" y="4526280"/>
-            <a:ext cx="4892040" cy="594360"/>
-          </a:xfrm>
-          <a:prstGeom prst="rect">
-            <a:avLst/>
-          </a:prstGeom>
-          <a:noFill/>
-          <a:ln/>
-        </p:spPr>
-        <p:txBody>
-          <a:bodyPr wrap="square" lIns="0" tIns="0" rIns="0" bIns="0" rtlCol="0" anchor="t"/>
-          <a:lstStyle/>
-          <a:p>
-            <a:pPr indent="0" marL="0">
-              <a:buNone/>
-            </a:pPr>
-            <a:r>
-              <a:rPr lang="en-US" sz="2000" dirty="0">
-                <a:solidFill>
-                  <a:srgbClr val="1F2A30"/>
-                </a:solidFill>
-                <a:latin typeface="Courier New" pitchFamily="34" charset="0"/>
-                <a:ea typeface="Courier New" pitchFamily="34" charset="-122"/>
-                <a:cs typeface="Courier New" pitchFamily="34" charset="-120"/>
-              </a:rPr>
-              <a:t>(2515, 9)</a:t>
-            </a:r>
-            <a:endParaRPr lang="en-US" sz="2000" dirty="0"/>
-          </a:p>
-        </p:txBody>
-      </p:sp>
-      <p:sp>
-        <p:nvSpPr>
-          <p:cNvPr id="19" name="Text 17"/>
-          <p:cNvSpPr txBox="1"/>
-          <p:nvPr/>
-        </p:nvSpPr>
-        <p:spPr>
-          <a:xfrm>
-            <a:off x="548640" y="5532120"/>
-            <a:ext cx="11064240" cy="457200"/>
-          </a:xfrm>
-          <a:prstGeom prst="rect">
-            <a:avLst/>
-          </a:prstGeom>
-          <a:noFill/>
-          <a:ln/>
-        </p:spPr>
-        <p:txBody>
-          <a:bodyPr wrap="square" lIns="0" tIns="0" rIns="0" bIns="0" rtlCol="0" anchor="ctr"/>
-          <a:lstStyle/>
-          <a:p>
-            <a:pPr indent="0" marL="0">
-              <a:buNone/>
-            </a:pPr>
-            <a:r>
-              <a:rPr lang="en-US" sz="1800" i="1" dirty="0">
-                <a:solidFill>
-                  <a:srgbClr val="0F4C5C"/>
-                </a:solidFill>
-              </a:rPr>
-              <a:t>df è un oggetto: dati, più tutte le cose che puoi chiedergli. Il punto le collega.</a:t>
-            </a:r>
-            <a:endParaRPr lang="en-US" sz="1800" dirty="0"/>
           </a:p>
         </p:txBody>
       </p:sp>

--- a/lezioni/L02_conosci_il_dataset/slide.pptx
+++ b/lezioni/L02_conosci_il_dataset/slide.pptx
@@ -120,13 +120,13 @@
   <p:extLst>
     <p:ext uri="{521415D9-36F7-43E2-AB2F-B90AF26B5E84}">
       <p14:sectionLst xmlns:p14="http://schemas.microsoft.com/office/powerpoint/2010/main">
-        <p14:section name="Apertura" id="{3a38cc86-cf05-e9fb-a4ef-23a512308108}">
+        <p14:section name="Apertura" id="{484e28ff-6c48-7e57-51c8-1a4f61c4e7d2}">
           <p14:sldIdLst>
             <p14:sldId id="256"/>
             <p14:sldId id="257"/>
           </p14:sldIdLst>
         </p14:section>
-        <p14:section name="Spiegazione" id="{cf0d9cdd-4781-96b3-e551-4e4b7564b4e5}">
+        <p14:section name="Spiegazione" id="{3af599b8-f255-fc85-dbad-456a73648190}">
           <p14:sldIdLst>
             <p14:sldId id="258"/>
             <p14:sldId id="259"/>
@@ -140,12 +140,12 @@
             <p14:sldId id="267"/>
           </p14:sldIdLst>
         </p14:section>
-        <p14:section name="Task" id="{31601de4-f41f-7268-df87-cf496545d941}">
+        <p14:section name="Task" id="{3c6b72fc-f664-806f-cf9e-ac8cb9503180}">
           <p14:sldIdLst>
             <p14:sldId id="268"/>
           </p14:sldIdLst>
         </p14:section>
-        <p14:section name="Chiusura" id="{9a63ecdf-81fd-f530-63cc-7044e8a69550}">
+        <p14:section name="Chiusura" id="{d1ed0d26-7f17-928e-1236-f588ce6a93d0}">
           <p14:sldIdLst>
             <p14:sldId id="269"/>
           </p14:sldIdLst>
@@ -8366,7 +8366,7 @@
                   <a:srgbClr val="1F2A30"/>
                 </a:solidFill>
               </a:rPr>
-              <a:t>righe che rispettano una condizione</a:t>
+              <a:t>righe che rispettano una condizione: == chiede «è uguale?»</a:t>
             </a:r>
             <a:endParaRPr lang="en-US" sz="1900" dirty="0"/>
           </a:p>

--- a/lezioni/L02_conosci_il_dataset/slide.pptx
+++ b/lezioni/L02_conosci_il_dataset/slide.pptx
@@ -120,13 +120,13 @@
   <p:extLst>
     <p:ext uri="{521415D9-36F7-43E2-AB2F-B90AF26B5E84}">
       <p14:sectionLst xmlns:p14="http://schemas.microsoft.com/office/powerpoint/2010/main">
-        <p14:section name="Apertura" id="{484e28ff-6c48-7e57-51c8-1a4f61c4e7d2}">
+        <p14:section name="Apertura" id="{5618fa29-840f-1f1d-d847-59de8dfeea60}">
           <p14:sldIdLst>
             <p14:sldId id="256"/>
             <p14:sldId id="257"/>
           </p14:sldIdLst>
         </p14:section>
-        <p14:section name="Spiegazione" id="{3af599b8-f255-fc85-dbad-456a73648190}">
+        <p14:section name="Spiegazione" id="{e4bd4884-496c-aee3-712c-7a144cb1e5ad}">
           <p14:sldIdLst>
             <p14:sldId id="258"/>
             <p14:sldId id="259"/>
@@ -140,12 +140,12 @@
             <p14:sldId id="267"/>
           </p14:sldIdLst>
         </p14:section>
-        <p14:section name="Task" id="{3c6b72fc-f664-806f-cf9e-ac8cb9503180}">
+        <p14:section name="Task" id="{553fd692-5009-6e3a-b4ff-e7df6f74d7c4}">
           <p14:sldIdLst>
             <p14:sldId id="268"/>
           </p14:sldIdLst>
         </p14:section>
-        <p14:section name="Chiusura" id="{d1ed0d26-7f17-928e-1236-f588ce6a93d0}">
+        <p14:section name="Chiusura" id="{e0af53d6-c449-6784-2d24-4b04cc109895}">
           <p14:sldIdLst>
             <p14:sldId id="269"/>
           </p14:sldIdLst>
@@ -4766,7 +4766,7 @@
                   <a:srgbClr val="F4C06E"/>
                 </a:solidFill>
               </a:rPr>
-              <a:t>Compito: Kaggle Learn – Pandas, prime due lezioni (~40 min)</a:t>
+              <a:t>Compito: Kaggle Learn – Pandas, prime due lezioni, ed esercizi C1-C2 del notebook</a:t>
             </a:r>
             <a:endParaRPr lang="en-US" sz="2200" dirty="0"/>
           </a:p>

--- a/lezioni/L02_conosci_il_dataset/slide.pptx
+++ b/lezioni/L02_conosci_il_dataset/slide.pptx
@@ -121,13 +121,13 @@
   <p:extLst>
     <p:ext uri="{521415D9-36F7-43E2-AB2F-B90AF26B5E84}">
       <p14:sectionLst xmlns:p14="http://schemas.microsoft.com/office/powerpoint/2010/main">
-        <p14:section name="Apertura" id="{535995aa-911d-2327-3747-cf1ad59ef62d}">
+        <p14:section name="Apertura" id="{e87b6070-1303-74ad-df8f-84d10c26f41b}">
           <p14:sldIdLst>
             <p14:sldId id="256"/>
             <p14:sldId id="257"/>
           </p14:sldIdLst>
         </p14:section>
-        <p14:section name="Spiegazione" id="{43325b2b-c7da-a2bb-030f-a8452ed2e22a}">
+        <p14:section name="Spiegazione" id="{a40e7ebd-3467-263c-42d8-eb4a9c0f374c}">
           <p14:sldIdLst>
             <p14:sldId id="258"/>
             <p14:sldId id="259"/>
@@ -142,12 +142,12 @@
             <p14:sldId id="268"/>
           </p14:sldIdLst>
         </p14:section>
-        <p14:section name="Task" id="{ad4536b1-94ae-491f-f346-aaa04611b985}">
+        <p14:section name="Task" id="{1e9b1b31-6c63-b89f-615d-6f2a01e98d42}">
           <p14:sldIdLst>
             <p14:sldId id="269"/>
           </p14:sldIdLst>
         </p14:section>
-        <p14:section name="Chiusura" id="{3c87369f-3bf0-48ce-1fe6-292e59ee13e7}">
+        <p14:section name="Chiusura" id="{067ab80e-53c5-1430-ccf6-eec48af5a81c}">
           <p14:sldIdLst>
             <p14:sldId id="270"/>
           </p14:sldIdLst>
@@ -1700,7 +1700,7 @@
           <a:p>
             <a:r>
               <a:rPr lang="en-US" dirty="0"/>
-              <a:t>Disegnare alla lavagna la riga di caselle con i tagli. Funziona uguale per liste, testi ("Milano"[0:3] = "Mil") e righe di un DataFrame con iloc. Il numero tra parentesi quadre senza i due punti è invece una casella: x[2] è la terza.</a:t>
+              <a:t>Disegnare la riga di caselle con la lavagna di Zoom (Condividi → Lavagna) con i tagli. Funziona uguale per liste, testi ("Milano"[0:3] = "Mil") e righe di un DataFrame con iloc. Il numero tra parentesi quadre senza i due punti è invece una casella: x[2] è la terza.</a:t>
             </a:r>
             <a:endParaRPr lang="en-US" dirty="0"/>
           </a:p>

--- a/lezioni/L02_conosci_il_dataset/slide.pptx
+++ b/lezioni/L02_conosci_il_dataset/slide.pptx
@@ -121,13 +121,13 @@
   <p:extLst>
     <p:ext uri="{521415D9-36F7-43E2-AB2F-B90AF26B5E84}">
       <p14:sectionLst xmlns:p14="http://schemas.microsoft.com/office/powerpoint/2010/main">
-        <p14:section name="Apertura" id="{e87b6070-1303-74ad-df8f-84d10c26f41b}">
+        <p14:section name="Apertura" id="{fd308f67-2742-b9f5-e3a9-a7b27cb3c1d4}">
           <p14:sldIdLst>
             <p14:sldId id="256"/>
             <p14:sldId id="257"/>
           </p14:sldIdLst>
         </p14:section>
-        <p14:section name="Spiegazione" id="{a40e7ebd-3467-263c-42d8-eb4a9c0f374c}">
+        <p14:section name="Spiegazione" id="{cd98ec2c-0f88-a325-2596-54768aca84f4}">
           <p14:sldIdLst>
             <p14:sldId id="258"/>
             <p14:sldId id="259"/>
@@ -142,12 +142,12 @@
             <p14:sldId id="268"/>
           </p14:sldIdLst>
         </p14:section>
-        <p14:section name="Task" id="{1e9b1b31-6c63-b89f-615d-6f2a01e98d42}">
+        <p14:section name="Task" id="{2cbdaef9-83e1-e2f7-5e7e-0406bee361fb}">
           <p14:sldIdLst>
             <p14:sldId id="269"/>
           </p14:sldIdLst>
         </p14:section>
-        <p14:section name="Chiusura" id="{067ab80e-53c5-1430-ccf6-eec48af5a81c}">
+        <p14:section name="Chiusura" id="{e376c9c1-df0c-3eff-57dd-8cee914882a0}">
           <p14:sldIdLst>
             <p14:sldId id="270"/>
           </p14:sldIdLst>
@@ -1524,7 +1524,7 @@
           <a:p>
             <a:r>
               <a:rPr lang="en-US" dirty="0"/>
-              <a:t>Le liste torneranno di continuo: più colonne (subito, nella prossima slide), i risultati di un ciclo e l'elenco dei file (L6). DEMO: regioni[0:2] e len dopo append.</a:t>
+              <a:t>Le liste torneranno di continuo: più colonne (subito, nella prossima slide), i risultati di un ciclo e l'elenco dei file (L8). DEMO: regioni[0:2] e len dopo append.</a:t>
             </a:r>
             <a:endParaRPr lang="en-US" dirty="0"/>
           </a:p>
